--- a/figs/thrust2.2-rtos-attestation.pptx
+++ b/figs/thrust2.2-rtos-attestation.pptx
@@ -5,9 +5,9 @@
     <p:sldMasterId id="2147483648" r:id="rId1"/>
   </p:sldMasterIdLst>
   <p:sldIdLst>
-    <p:sldId id="256" r:id="rId7"/>
+    <p:sldId id="256" r:id="rId2"/>
   </p:sldIdLst>
-  <p:sldSz cx="5486400" cy="6364224" type="screen4x3"/>
+  <p:sldSz cx="5486400" cy="6364288"/>
   <p:notesSz cx="6858000" cy="9144000"/>
   <p:defaultTextStyle>
     <a:defPPr>
@@ -104,6 +104,22 @@
       </a:defRPr>
     </a:lvl9pPr>
   </p:defaultTextStyle>
+  <p:extLst>
+    <p:ext uri="{EFAFB233-063F-42B5-8137-9DF3F51BA10A}">
+      <p15:sldGuideLst xmlns:p15="http://schemas.microsoft.com/office/powerpoint/2012/main">
+        <p15:guide id="1" orient="horz" pos="2160">
+          <p15:clr>
+            <a:srgbClr val="A4A3A4"/>
+          </p15:clr>
+        </p15:guide>
+        <p15:guide id="2" pos="2880">
+          <p15:clr>
+            <a:srgbClr val="A4A3A4"/>
+          </p15:clr>
+        </p15:guide>
+      </p15:sldGuideLst>
+    </p:ext>
+  </p:extLst>
 </p:presentation>
 </file>
 
@@ -145,10 +161,9 @@
           <a:lstStyle/>
           <a:p>
             <a:r>
-              <a:rPr lang="en-US" smtClean="0"/>
+              <a:rPr lang="en-US"/>
               <a:t>Click to edit Master title style</a:t>
             </a:r>
-            <a:endParaRPr lang="en-US"/>
           </a:p>
         </p:txBody>
       </p:sp>
@@ -264,10 +279,9 @@
           </a:lstStyle>
           <a:p>
             <a:r>
-              <a:rPr lang="en-US" smtClean="0"/>
+              <a:rPr lang="en-US"/>
               <a:t>Click to edit Master subtitle style</a:t>
             </a:r>
-            <a:endParaRPr lang="en-US"/>
           </a:p>
         </p:txBody>
       </p:sp>
@@ -288,7 +302,7 @@
           <a:p>
             <a:fld id="{5BCAD085-E8A6-8845-BD4E-CB4CCA059FC4}" type="datetimeFigureOut">
               <a:rPr lang="en-US" smtClean="0"/>
-              <a:t>1/27/13</a:t>
+              <a:t>8/30/26</a:t>
             </a:fld>
             <a:endParaRPr lang="en-US"/>
           </a:p>
@@ -382,10 +396,9 @@
           <a:lstStyle/>
           <a:p>
             <a:r>
-              <a:rPr lang="en-US" smtClean="0"/>
+              <a:rPr lang="en-US"/>
               <a:t>Click to edit Master title style</a:t>
             </a:r>
-            <a:endParaRPr lang="en-US"/>
           </a:p>
         </p:txBody>
       </p:sp>
@@ -406,38 +419,37 @@
           <a:p>
             <a:pPr lvl="0"/>
             <a:r>
-              <a:rPr lang="en-US" smtClean="0"/>
+              <a:rPr lang="en-US"/>
               <a:t>Click to edit Master text styles</a:t>
             </a:r>
           </a:p>
           <a:p>
             <a:pPr lvl="1"/>
             <a:r>
-              <a:rPr lang="en-US" smtClean="0"/>
+              <a:rPr lang="en-US"/>
               <a:t>Second level</a:t>
             </a:r>
           </a:p>
           <a:p>
             <a:pPr lvl="2"/>
             <a:r>
-              <a:rPr lang="en-US" smtClean="0"/>
+              <a:rPr lang="en-US"/>
               <a:t>Third level</a:t>
             </a:r>
           </a:p>
           <a:p>
             <a:pPr lvl="3"/>
             <a:r>
-              <a:rPr lang="en-US" smtClean="0"/>
+              <a:rPr lang="en-US"/>
               <a:t>Fourth level</a:t>
             </a:r>
           </a:p>
           <a:p>
             <a:pPr lvl="4"/>
             <a:r>
-              <a:rPr lang="en-US" smtClean="0"/>
+              <a:rPr lang="en-US"/>
               <a:t>Fifth level</a:t>
             </a:r>
-            <a:endParaRPr lang="en-US"/>
           </a:p>
         </p:txBody>
       </p:sp>
@@ -458,7 +470,7 @@
           <a:p>
             <a:fld id="{5BCAD085-E8A6-8845-BD4E-CB4CCA059FC4}" type="datetimeFigureOut">
               <a:rPr lang="en-US" smtClean="0"/>
-              <a:t>1/27/13</a:t>
+              <a:t>8/30/26</a:t>
             </a:fld>
             <a:endParaRPr lang="en-US"/>
           </a:p>
@@ -557,10 +569,9 @@
           <a:lstStyle/>
           <a:p>
             <a:r>
-              <a:rPr lang="en-US" smtClean="0"/>
+              <a:rPr lang="en-US"/>
               <a:t>Click to edit Master title style</a:t>
             </a:r>
-            <a:endParaRPr lang="en-US"/>
           </a:p>
         </p:txBody>
       </p:sp>
@@ -586,38 +597,37 @@
           <a:p>
             <a:pPr lvl="0"/>
             <a:r>
-              <a:rPr lang="en-US" smtClean="0"/>
+              <a:rPr lang="en-US"/>
               <a:t>Click to edit Master text styles</a:t>
             </a:r>
           </a:p>
           <a:p>
             <a:pPr lvl="1"/>
             <a:r>
-              <a:rPr lang="en-US" smtClean="0"/>
+              <a:rPr lang="en-US"/>
               <a:t>Second level</a:t>
             </a:r>
           </a:p>
           <a:p>
             <a:pPr lvl="2"/>
             <a:r>
-              <a:rPr lang="en-US" smtClean="0"/>
+              <a:rPr lang="en-US"/>
               <a:t>Third level</a:t>
             </a:r>
           </a:p>
           <a:p>
             <a:pPr lvl="3"/>
             <a:r>
-              <a:rPr lang="en-US" smtClean="0"/>
+              <a:rPr lang="en-US"/>
               <a:t>Fourth level</a:t>
             </a:r>
           </a:p>
           <a:p>
             <a:pPr lvl="4"/>
             <a:r>
-              <a:rPr lang="en-US" smtClean="0"/>
+              <a:rPr lang="en-US"/>
               <a:t>Fifth level</a:t>
             </a:r>
-            <a:endParaRPr lang="en-US"/>
           </a:p>
         </p:txBody>
       </p:sp>
@@ -638,7 +648,7 @@
           <a:p>
             <a:fld id="{5BCAD085-E8A6-8845-BD4E-CB4CCA059FC4}" type="datetimeFigureOut">
               <a:rPr lang="en-US" smtClean="0"/>
-              <a:t>1/27/13</a:t>
+              <a:t>8/30/26</a:t>
             </a:fld>
             <a:endParaRPr lang="en-US"/>
           </a:p>
@@ -732,10 +742,9 @@
           <a:lstStyle/>
           <a:p>
             <a:r>
-              <a:rPr lang="en-US" smtClean="0"/>
+              <a:rPr lang="en-US"/>
               <a:t>Click to edit Master title style</a:t>
             </a:r>
-            <a:endParaRPr lang="en-US"/>
           </a:p>
         </p:txBody>
       </p:sp>
@@ -756,38 +765,37 @@
           <a:p>
             <a:pPr lvl="0"/>
             <a:r>
-              <a:rPr lang="en-US" smtClean="0"/>
+              <a:rPr lang="en-US"/>
               <a:t>Click to edit Master text styles</a:t>
             </a:r>
           </a:p>
           <a:p>
             <a:pPr lvl="1"/>
             <a:r>
-              <a:rPr lang="en-US" smtClean="0"/>
+              <a:rPr lang="en-US"/>
               <a:t>Second level</a:t>
             </a:r>
           </a:p>
           <a:p>
             <a:pPr lvl="2"/>
             <a:r>
-              <a:rPr lang="en-US" smtClean="0"/>
+              <a:rPr lang="en-US"/>
               <a:t>Third level</a:t>
             </a:r>
           </a:p>
           <a:p>
             <a:pPr lvl="3"/>
             <a:r>
-              <a:rPr lang="en-US" smtClean="0"/>
+              <a:rPr lang="en-US"/>
               <a:t>Fourth level</a:t>
             </a:r>
           </a:p>
           <a:p>
             <a:pPr lvl="4"/>
             <a:r>
-              <a:rPr lang="en-US" smtClean="0"/>
+              <a:rPr lang="en-US"/>
               <a:t>Fifth level</a:t>
             </a:r>
-            <a:endParaRPr lang="en-US"/>
           </a:p>
         </p:txBody>
       </p:sp>
@@ -808,7 +816,7 @@
           <a:p>
             <a:fld id="{5BCAD085-E8A6-8845-BD4E-CB4CCA059FC4}" type="datetimeFigureOut">
               <a:rPr lang="en-US" smtClean="0"/>
-              <a:t>1/27/13</a:t>
+              <a:t>8/30/26</a:t>
             </a:fld>
             <a:endParaRPr lang="en-US"/>
           </a:p>
@@ -911,10 +919,9 @@
           </a:lstStyle>
           <a:p>
             <a:r>
-              <a:rPr lang="en-US" smtClean="0"/>
+              <a:rPr lang="en-US"/>
               <a:t>Click to edit Master title style</a:t>
             </a:r>
-            <a:endParaRPr lang="en-US"/>
           </a:p>
         </p:txBody>
       </p:sp>
@@ -1031,7 +1038,7 @@
           <a:p>
             <a:pPr lvl="0"/>
             <a:r>
-              <a:rPr lang="en-US" smtClean="0"/>
+              <a:rPr lang="en-US"/>
               <a:t>Click to edit Master text styles</a:t>
             </a:r>
           </a:p>
@@ -1054,7 +1061,7 @@
           <a:p>
             <a:fld id="{5BCAD085-E8A6-8845-BD4E-CB4CCA059FC4}" type="datetimeFigureOut">
               <a:rPr lang="en-US" smtClean="0"/>
-              <a:t>1/27/13</a:t>
+              <a:t>8/30/26</a:t>
             </a:fld>
             <a:endParaRPr lang="en-US"/>
           </a:p>
@@ -1148,10 +1155,9 @@
           <a:lstStyle/>
           <a:p>
             <a:r>
-              <a:rPr lang="en-US" smtClean="0"/>
+              <a:rPr lang="en-US"/>
               <a:t>Click to edit Master title style</a:t>
             </a:r>
-            <a:endParaRPr lang="en-US"/>
           </a:p>
         </p:txBody>
       </p:sp>
@@ -1205,38 +1211,37 @@
           <a:p>
             <a:pPr lvl="0"/>
             <a:r>
-              <a:rPr lang="en-US" smtClean="0"/>
+              <a:rPr lang="en-US"/>
               <a:t>Click to edit Master text styles</a:t>
             </a:r>
           </a:p>
           <a:p>
             <a:pPr lvl="1"/>
             <a:r>
-              <a:rPr lang="en-US" smtClean="0"/>
+              <a:rPr lang="en-US"/>
               <a:t>Second level</a:t>
             </a:r>
           </a:p>
           <a:p>
             <a:pPr lvl="2"/>
             <a:r>
-              <a:rPr lang="en-US" smtClean="0"/>
+              <a:rPr lang="en-US"/>
               <a:t>Third level</a:t>
             </a:r>
           </a:p>
           <a:p>
             <a:pPr lvl="3"/>
             <a:r>
-              <a:rPr lang="en-US" smtClean="0"/>
+              <a:rPr lang="en-US"/>
               <a:t>Fourth level</a:t>
             </a:r>
           </a:p>
           <a:p>
             <a:pPr lvl="4"/>
             <a:r>
-              <a:rPr lang="en-US" smtClean="0"/>
+              <a:rPr lang="en-US"/>
               <a:t>Fifth level</a:t>
             </a:r>
-            <a:endParaRPr lang="en-US"/>
           </a:p>
         </p:txBody>
       </p:sp>
@@ -1290,38 +1295,37 @@
           <a:p>
             <a:pPr lvl="0"/>
             <a:r>
-              <a:rPr lang="en-US" smtClean="0"/>
+              <a:rPr lang="en-US"/>
               <a:t>Click to edit Master text styles</a:t>
             </a:r>
           </a:p>
           <a:p>
             <a:pPr lvl="1"/>
             <a:r>
-              <a:rPr lang="en-US" smtClean="0"/>
+              <a:rPr lang="en-US"/>
               <a:t>Second level</a:t>
             </a:r>
           </a:p>
           <a:p>
             <a:pPr lvl="2"/>
             <a:r>
-              <a:rPr lang="en-US" smtClean="0"/>
+              <a:rPr lang="en-US"/>
               <a:t>Third level</a:t>
             </a:r>
           </a:p>
           <a:p>
             <a:pPr lvl="3"/>
             <a:r>
-              <a:rPr lang="en-US" smtClean="0"/>
+              <a:rPr lang="en-US"/>
               <a:t>Fourth level</a:t>
             </a:r>
           </a:p>
           <a:p>
             <a:pPr lvl="4"/>
             <a:r>
-              <a:rPr lang="en-US" smtClean="0"/>
+              <a:rPr lang="en-US"/>
               <a:t>Fifth level</a:t>
             </a:r>
-            <a:endParaRPr lang="en-US"/>
           </a:p>
         </p:txBody>
       </p:sp>
@@ -1342,7 +1346,7 @@
           <a:p>
             <a:fld id="{5BCAD085-E8A6-8845-BD4E-CB4CCA059FC4}" type="datetimeFigureOut">
               <a:rPr lang="en-US" smtClean="0"/>
-              <a:t>1/27/13</a:t>
+              <a:t>8/30/26</a:t>
             </a:fld>
             <a:endParaRPr lang="en-US"/>
           </a:p>
@@ -1440,10 +1444,9 @@
           </a:lstStyle>
           <a:p>
             <a:r>
-              <a:rPr lang="en-US" smtClean="0"/>
+              <a:rPr lang="en-US"/>
               <a:t>Click to edit Master title style</a:t>
             </a:r>
-            <a:endParaRPr lang="en-US"/>
           </a:p>
         </p:txBody>
       </p:sp>
@@ -1506,7 +1509,7 @@
           <a:p>
             <a:pPr lvl="0"/>
             <a:r>
-              <a:rPr lang="en-US" smtClean="0"/>
+              <a:rPr lang="en-US"/>
               <a:t>Click to edit Master text styles</a:t>
             </a:r>
           </a:p>
@@ -1562,38 +1565,37 @@
           <a:p>
             <a:pPr lvl="0"/>
             <a:r>
-              <a:rPr lang="en-US" smtClean="0"/>
+              <a:rPr lang="en-US"/>
               <a:t>Click to edit Master text styles</a:t>
             </a:r>
           </a:p>
           <a:p>
             <a:pPr lvl="1"/>
             <a:r>
-              <a:rPr lang="en-US" smtClean="0"/>
+              <a:rPr lang="en-US"/>
               <a:t>Second level</a:t>
             </a:r>
           </a:p>
           <a:p>
             <a:pPr lvl="2"/>
             <a:r>
-              <a:rPr lang="en-US" smtClean="0"/>
+              <a:rPr lang="en-US"/>
               <a:t>Third level</a:t>
             </a:r>
           </a:p>
           <a:p>
             <a:pPr lvl="3"/>
             <a:r>
-              <a:rPr lang="en-US" smtClean="0"/>
+              <a:rPr lang="en-US"/>
               <a:t>Fourth level</a:t>
             </a:r>
           </a:p>
           <a:p>
             <a:pPr lvl="4"/>
             <a:r>
-              <a:rPr lang="en-US" smtClean="0"/>
+              <a:rPr lang="en-US"/>
               <a:t>Fifth level</a:t>
             </a:r>
-            <a:endParaRPr lang="en-US"/>
           </a:p>
         </p:txBody>
       </p:sp>
@@ -1656,7 +1658,7 @@
           <a:p>
             <a:pPr lvl="0"/>
             <a:r>
-              <a:rPr lang="en-US" smtClean="0"/>
+              <a:rPr lang="en-US"/>
               <a:t>Click to edit Master text styles</a:t>
             </a:r>
           </a:p>
@@ -1712,38 +1714,37 @@
           <a:p>
             <a:pPr lvl="0"/>
             <a:r>
-              <a:rPr lang="en-US" smtClean="0"/>
+              <a:rPr lang="en-US"/>
               <a:t>Click to edit Master text styles</a:t>
             </a:r>
           </a:p>
           <a:p>
             <a:pPr lvl="1"/>
             <a:r>
-              <a:rPr lang="en-US" smtClean="0"/>
+              <a:rPr lang="en-US"/>
               <a:t>Second level</a:t>
             </a:r>
           </a:p>
           <a:p>
             <a:pPr lvl="2"/>
             <a:r>
-              <a:rPr lang="en-US" smtClean="0"/>
+              <a:rPr lang="en-US"/>
               <a:t>Third level</a:t>
             </a:r>
           </a:p>
           <a:p>
             <a:pPr lvl="3"/>
             <a:r>
-              <a:rPr lang="en-US" smtClean="0"/>
+              <a:rPr lang="en-US"/>
               <a:t>Fourth level</a:t>
             </a:r>
           </a:p>
           <a:p>
             <a:pPr lvl="4"/>
             <a:r>
-              <a:rPr lang="en-US" smtClean="0"/>
+              <a:rPr lang="en-US"/>
               <a:t>Fifth level</a:t>
             </a:r>
-            <a:endParaRPr lang="en-US"/>
           </a:p>
         </p:txBody>
       </p:sp>
@@ -1764,7 +1765,7 @@
           <a:p>
             <a:fld id="{5BCAD085-E8A6-8845-BD4E-CB4CCA059FC4}" type="datetimeFigureOut">
               <a:rPr lang="en-US" smtClean="0"/>
-              <a:t>1/27/13</a:t>
+              <a:t>8/30/26</a:t>
             </a:fld>
             <a:endParaRPr lang="en-US"/>
           </a:p>
@@ -1858,10 +1859,9 @@
           <a:lstStyle/>
           <a:p>
             <a:r>
-              <a:rPr lang="en-US" smtClean="0"/>
+              <a:rPr lang="en-US"/>
               <a:t>Click to edit Master title style</a:t>
             </a:r>
-            <a:endParaRPr lang="en-US"/>
           </a:p>
         </p:txBody>
       </p:sp>
@@ -1882,7 +1882,7 @@
           <a:p>
             <a:fld id="{5BCAD085-E8A6-8845-BD4E-CB4CCA059FC4}" type="datetimeFigureOut">
               <a:rPr lang="en-US" smtClean="0"/>
-              <a:t>1/27/13</a:t>
+              <a:t>8/30/26</a:t>
             </a:fld>
             <a:endParaRPr lang="en-US"/>
           </a:p>
@@ -1977,7 +1977,7 @@
           <a:p>
             <a:fld id="{5BCAD085-E8A6-8845-BD4E-CB4CCA059FC4}" type="datetimeFigureOut">
               <a:rPr lang="en-US" smtClean="0"/>
-              <a:t>1/27/13</a:t>
+              <a:t>8/30/26</a:t>
             </a:fld>
             <a:endParaRPr lang="en-US"/>
           </a:p>
@@ -2080,10 +2080,9 @@
           </a:lstStyle>
           <a:p>
             <a:r>
-              <a:rPr lang="en-US" smtClean="0"/>
+              <a:rPr lang="en-US"/>
               <a:t>Click to edit Master title style</a:t>
             </a:r>
-            <a:endParaRPr lang="en-US"/>
           </a:p>
         </p:txBody>
       </p:sp>
@@ -2137,38 +2136,37 @@
           <a:p>
             <a:pPr lvl="0"/>
             <a:r>
-              <a:rPr lang="en-US" smtClean="0"/>
+              <a:rPr lang="en-US"/>
               <a:t>Click to edit Master text styles</a:t>
             </a:r>
           </a:p>
           <a:p>
             <a:pPr lvl="1"/>
             <a:r>
-              <a:rPr lang="en-US" smtClean="0"/>
+              <a:rPr lang="en-US"/>
               <a:t>Second level</a:t>
             </a:r>
           </a:p>
           <a:p>
             <a:pPr lvl="2"/>
             <a:r>
-              <a:rPr lang="en-US" smtClean="0"/>
+              <a:rPr lang="en-US"/>
               <a:t>Third level</a:t>
             </a:r>
           </a:p>
           <a:p>
             <a:pPr lvl="3"/>
             <a:r>
-              <a:rPr lang="en-US" smtClean="0"/>
+              <a:rPr lang="en-US"/>
               <a:t>Fourth level</a:t>
             </a:r>
           </a:p>
           <a:p>
             <a:pPr lvl="4"/>
             <a:r>
-              <a:rPr lang="en-US" smtClean="0"/>
+              <a:rPr lang="en-US"/>
               <a:t>Fifth level</a:t>
             </a:r>
-            <a:endParaRPr lang="en-US"/>
           </a:p>
         </p:txBody>
       </p:sp>
@@ -2231,7 +2229,7 @@
           <a:p>
             <a:pPr lvl="0"/>
             <a:r>
-              <a:rPr lang="en-US" smtClean="0"/>
+              <a:rPr lang="en-US"/>
               <a:t>Click to edit Master text styles</a:t>
             </a:r>
           </a:p>
@@ -2254,7 +2252,7 @@
           <a:p>
             <a:fld id="{5BCAD085-E8A6-8845-BD4E-CB4CCA059FC4}" type="datetimeFigureOut">
               <a:rPr lang="en-US" smtClean="0"/>
-              <a:t>1/27/13</a:t>
+              <a:t>8/30/26</a:t>
             </a:fld>
             <a:endParaRPr lang="en-US"/>
           </a:p>
@@ -2357,10 +2355,9 @@
           </a:lstStyle>
           <a:p>
             <a:r>
-              <a:rPr lang="en-US" smtClean="0"/>
+              <a:rPr lang="en-US"/>
               <a:t>Click to edit Master title style</a:t>
             </a:r>
-            <a:endParaRPr lang="en-US"/>
           </a:p>
         </p:txBody>
       </p:sp>
@@ -2484,7 +2481,7 @@
           <a:p>
             <a:pPr lvl="0"/>
             <a:r>
-              <a:rPr lang="en-US" smtClean="0"/>
+              <a:rPr lang="en-US"/>
               <a:t>Click to edit Master text styles</a:t>
             </a:r>
           </a:p>
@@ -2507,7 +2504,7 @@
           <a:p>
             <a:fld id="{5BCAD085-E8A6-8845-BD4E-CB4CCA059FC4}" type="datetimeFigureOut">
               <a:rPr lang="en-US" smtClean="0"/>
-              <a:t>1/27/13</a:t>
+              <a:t>8/30/26</a:t>
             </a:fld>
             <a:endParaRPr lang="en-US"/>
           </a:p>
@@ -2616,10 +2613,9 @@
           <a:lstStyle/>
           <a:p>
             <a:r>
-              <a:rPr lang="en-US" smtClean="0"/>
+              <a:rPr lang="en-US"/>
               <a:t>Click to edit Master title style</a:t>
             </a:r>
-            <a:endParaRPr lang="en-US"/>
           </a:p>
         </p:txBody>
       </p:sp>
@@ -2650,38 +2646,37 @@
           <a:p>
             <a:pPr lvl="0"/>
             <a:r>
-              <a:rPr lang="en-US" smtClean="0"/>
+              <a:rPr lang="en-US"/>
               <a:t>Click to edit Master text styles</a:t>
             </a:r>
           </a:p>
           <a:p>
             <a:pPr lvl="1"/>
             <a:r>
-              <a:rPr lang="en-US" smtClean="0"/>
+              <a:rPr lang="en-US"/>
               <a:t>Second level</a:t>
             </a:r>
           </a:p>
           <a:p>
             <a:pPr lvl="2"/>
             <a:r>
-              <a:rPr lang="en-US" smtClean="0"/>
+              <a:rPr lang="en-US"/>
               <a:t>Third level</a:t>
             </a:r>
           </a:p>
           <a:p>
             <a:pPr lvl="3"/>
             <a:r>
-              <a:rPr lang="en-US" smtClean="0"/>
+              <a:rPr lang="en-US"/>
               <a:t>Fourth level</a:t>
             </a:r>
           </a:p>
           <a:p>
             <a:pPr lvl="4"/>
             <a:r>
-              <a:rPr lang="en-US" smtClean="0"/>
+              <a:rPr lang="en-US"/>
               <a:t>Fifth level</a:t>
             </a:r>
-            <a:endParaRPr lang="en-US"/>
           </a:p>
         </p:txBody>
       </p:sp>
@@ -2720,7 +2715,7 @@
           <a:p>
             <a:fld id="{5BCAD085-E8A6-8845-BD4E-CB4CCA059FC4}" type="datetimeFigureOut">
               <a:rPr lang="en-US" smtClean="0"/>
-              <a:t>1/27/13</a:t>
+              <a:t>8/30/26</a:t>
             </a:fld>
             <a:endParaRPr lang="en-US"/>
           </a:p>
@@ -3079,15 +3074,30 @@
 </file>
 
 <file path=ppt/slides/slide1.xml><?xml version="1.0" encoding="utf-8"?>
-<p:sld xmlns:a="http://schemas.openxmlformats.org/drawingml/2006/main" xmlns:p="http://schemas.openxmlformats.org/presentationml/2006/main" xmlns:r="http://schemas.openxmlformats.org/officeDocument/2006/relationships">
+<p:sld xmlns:a="http://schemas.openxmlformats.org/drawingml/2006/main" xmlns:r="http://schemas.openxmlformats.org/officeDocument/2006/relationships" xmlns:p="http://schemas.openxmlformats.org/presentationml/2006/main">
   <p:cSld>
+    <p:bg>
+      <p:bgPr>
+        <a:solidFill>
+          <a:srgbClr val="FAFAFA"/>
+        </a:solidFill>
+        <a:effectLst/>
+      </p:bgPr>
+    </p:bg>
     <p:spTree>
       <p:nvGrpSpPr>
         <p:cNvPr id="1" name=""/>
         <p:cNvGrpSpPr/>
         <p:nvPr/>
       </p:nvGrpSpPr>
-      <p:grpSpPr/>
+      <p:grpSpPr>
+        <a:xfrm>
+          <a:off x="0" y="0"/>
+          <a:ext cx="0" cy="0"/>
+          <a:chOff x="0" y="0"/>
+          <a:chExt cx="0" cy="0"/>
+        </a:xfrm>
+      </p:grpSpPr>
       <p:sp>
         <p:nvSpPr>
           <p:cNvPr id="2" name="TextBox 1"/>
@@ -3096,8 +3106,8 @@
         </p:nvSpPr>
         <p:spPr>
           <a:xfrm>
-            <a:off x="182880" y="36576"/>
-            <a:ext cx="3048000" cy="182880"/>
+            <a:off x="457200" y="228600"/>
+            <a:ext cx="11704320" cy="411480"/>
           </a:xfrm>
           <a:prstGeom prst="rect">
             <a:avLst/>
@@ -3105,20 +3115,20 @@
           <a:noFill/>
         </p:spPr>
         <p:txBody>
-          <a:bodyPr wrap="square" anchor="ctr" lIns="0" rIns="0" tIns="0" bIns="0">
+          <a:bodyPr wrap="none">
             <a:spAutoFit/>
           </a:bodyPr>
           <a:lstStyle/>
           <a:p>
-            <a:pPr algn="l"/>
-            <a:r>
-              <a:rPr sz="1500" b="1" i="0">
+            <a:pPr algn="l">
+              <a:defRPr sz="2400" b="1">
                 <a:solidFill>
-                  <a:srgbClr val="1A1A1A"/>
+                  <a:srgbClr val="191919"/>
                 </a:solidFill>
-                <a:latin typeface="Helvetica Neue"/>
-              </a:rPr>
-              <a:t>Application execution contexts</a:t>
+              </a:defRPr>
+            </a:pPr>
+            <a:r>
+              <a:t>Execution timeline with TrustZone boundary and RTOS privilege flow</a:t>
             </a:r>
           </a:p>
         </p:txBody>
@@ -3131,21 +3141,20 @@
         </p:nvSpPr>
         <p:spPr>
           <a:xfrm>
-            <a:off x="182880" y="316992"/>
-            <a:ext cx="1554480" cy="780288"/>
+            <a:off x="548640" y="1280160"/>
+            <a:ext cx="8138160" cy="5669280"/>
           </a:xfrm>
           <a:prstGeom prst="roundRect">
             <a:avLst/>
           </a:prstGeom>
           <a:solidFill>
-            <a:srgbClr val="CFE0F5"/>
+            <a:srgbClr val="F8F8F8"/>
           </a:solidFill>
-          <a:ln w="22225">
+          <a:ln w="22860">
             <a:solidFill>
-              <a:srgbClr val="2C5AA0"/>
+              <a:srgbClr val="505050"/>
             </a:solidFill>
           </a:ln>
-          <a:effectLst/>
         </p:spPr>
         <p:style>
           <a:lnRef idx="1">
@@ -3162,69 +3171,70 @@
           </a:fontRef>
         </p:style>
         <p:txBody>
-          <a:bodyPr rtlCol="0" anchor="ctr" wrap="square" lIns="50800" rIns="50800" tIns="25400" bIns="25400"/>
+          <a:bodyPr rtlCol="0" anchor="ctr"/>
           <a:lstStyle/>
           <a:p>
             <a:pPr algn="ctr"/>
-            <a:r>
-              <a:rPr sz="1500" b="1" i="0">
+          </a:p>
+        </p:txBody>
+      </p:sp>
+      <p:sp>
+        <p:nvSpPr>
+          <p:cNvPr id="4" name="TextBox 3"/>
+          <p:cNvSpPr txBox="1"/>
+          <p:nvPr/>
+        </p:nvSpPr>
+        <p:spPr>
+          <a:xfrm>
+            <a:off x="640080" y="1325880"/>
+            <a:ext cx="7955280" cy="320040"/>
+          </a:xfrm>
+          <a:prstGeom prst="rect">
+            <a:avLst/>
+          </a:prstGeom>
+          <a:noFill/>
+        </p:spPr>
+        <p:txBody>
+          <a:bodyPr wrap="none">
+            <a:spAutoFit/>
+          </a:bodyPr>
+          <a:lstStyle/>
+          <a:p>
+            <a:pPr algn="ctr">
+              <a:defRPr sz="1800" b="1">
                 <a:solidFill>
-                  <a:srgbClr val="0F3A6E"/>
+                  <a:srgbClr val="191919"/>
                 </a:solidFill>
-                <a:latin typeface="Helvetica Neue"/>
-              </a:rPr>
-              <a:t>Task A</a:t>
-            </a:r>
-          </a:p>
-          <a:p>
-            <a:pPr algn="ctr"/>
-            <a:r>
-              <a:rPr sz="1100" b="0" i="0">
-                <a:solidFill>
-                  <a:srgbClr val="0F3A6E"/>
-                </a:solidFill>
-                <a:latin typeface="Helvetica Neue"/>
-              </a:rPr>
-              <a:t>own CFG +</a:t>
-            </a:r>
-          </a:p>
-          <a:p>
-            <a:pPr algn="ctr"/>
-            <a:r>
-              <a:rPr sz="1100" b="0" i="0">
-                <a:solidFill>
-                  <a:srgbClr val="0F3A6E"/>
-                </a:solidFill>
-                <a:latin typeface="Helvetica Neue"/>
-              </a:rPr>
-              <a:t>measurement state</a:t>
-            </a:r>
-          </a:p>
-        </p:txBody>
-      </p:sp>
-      <p:sp>
-        <p:nvSpPr>
-          <p:cNvPr id="4" name="Rounded Rectangle 3"/>
+              </a:defRPr>
+            </a:pPr>
+            <a:r>
+              <a:t>Normal World (user + RTOS kernel)</a:t>
+            </a:r>
+          </a:p>
+        </p:txBody>
+      </p:sp>
+      <p:sp>
+        <p:nvSpPr>
+          <p:cNvPr id="5" name="Rounded Rectangle 4"/>
           <p:cNvSpPr/>
           <p:nvPr/>
         </p:nvSpPr>
         <p:spPr>
           <a:xfrm>
-            <a:off x="1932432" y="182880"/>
-            <a:ext cx="1621536" cy="914400"/>
+            <a:off x="8869680" y="1280160"/>
+            <a:ext cx="5943600" cy="5669280"/>
           </a:xfrm>
           <a:prstGeom prst="roundRect">
             <a:avLst/>
           </a:prstGeom>
           <a:solidFill>
-            <a:srgbClr val="FFE1B8"/>
+            <a:srgbClr val="E6F5FF"/>
           </a:solidFill>
-          <a:ln w="22225">
+          <a:ln w="22860">
             <a:solidFill>
-              <a:srgbClr val="A35112"/>
+              <a:srgbClr val="505050"/>
             </a:solidFill>
           </a:ln>
-          <a:effectLst/>
         </p:spPr>
         <p:style>
           <a:lnRef idx="1">
@@ -3241,81 +3251,68 @@
           </a:fontRef>
         </p:style>
         <p:txBody>
-          <a:bodyPr rtlCol="0" anchor="ctr" wrap="square" lIns="50800" rIns="50800" tIns="25400" bIns="25400"/>
+          <a:bodyPr rtlCol="0" anchor="ctr"/>
           <a:lstStyle/>
           <a:p>
             <a:pPr algn="ctr"/>
-            <a:r>
-              <a:rPr sz="1500" b="1" i="0">
+          </a:p>
+        </p:txBody>
+      </p:sp>
+      <p:sp>
+        <p:nvSpPr>
+          <p:cNvPr id="6" name="TextBox 5"/>
+          <p:cNvSpPr txBox="1"/>
+          <p:nvPr/>
+        </p:nvSpPr>
+        <p:spPr>
+          <a:xfrm>
+            <a:off x="8961119" y="1325880"/>
+            <a:ext cx="5760720" cy="320040"/>
+          </a:xfrm>
+          <a:prstGeom prst="rect">
+            <a:avLst/>
+          </a:prstGeom>
+          <a:noFill/>
+        </p:spPr>
+        <p:txBody>
+          <a:bodyPr wrap="none">
+            <a:spAutoFit/>
+          </a:bodyPr>
+          <a:lstStyle/>
+          <a:p>
+            <a:pPr algn="ctr">
+              <a:defRPr sz="1800" b="1">
                 <a:solidFill>
-                  <a:srgbClr val="7A3D0D"/>
+                  <a:srgbClr val="191919"/>
                 </a:solidFill>
-                <a:latin typeface="Helvetica Neue"/>
-              </a:rPr>
-              <a:t>ISR</a:t>
-            </a:r>
-          </a:p>
-          <a:p>
-            <a:pPr algn="ctr"/>
-            <a:r>
-              <a:rPr sz="1100" b="0" i="0">
-                <a:solidFill>
-                  <a:srgbClr val="7A3D0D"/>
-                </a:solidFill>
-                <a:latin typeface="Helvetica Neue"/>
-              </a:rPr>
-              <a:t>(nested-capable)</a:t>
-            </a:r>
-          </a:p>
-          <a:p>
-            <a:pPr algn="ctr"/>
-            <a:r>
-              <a:rPr sz="1100" b="0" i="0">
-                <a:solidFill>
-                  <a:srgbClr val="7A3D0D"/>
-                </a:solidFill>
-                <a:latin typeface="Helvetica Neue"/>
-              </a:rPr>
-              <a:t>own CFG +</a:t>
-            </a:r>
-          </a:p>
-          <a:p>
-            <a:pPr algn="ctr"/>
-            <a:r>
-              <a:rPr sz="1100" b="0" i="0">
-                <a:solidFill>
-                  <a:srgbClr val="7A3D0D"/>
-                </a:solidFill>
-                <a:latin typeface="Helvetica Neue"/>
-              </a:rPr>
-              <a:t>measurement state</a:t>
-            </a:r>
-          </a:p>
-        </p:txBody>
-      </p:sp>
-      <p:sp>
-        <p:nvSpPr>
-          <p:cNvPr id="5" name="Rounded Rectangle 4"/>
+              </a:defRPr>
+            </a:pPr>
+            <a:r>
+              <a:t>TrustZone Secure World</a:t>
+            </a:r>
+          </a:p>
+        </p:txBody>
+      </p:sp>
+      <p:sp>
+        <p:nvSpPr>
+          <p:cNvPr id="7" name="Rectangle 6"/>
           <p:cNvSpPr/>
           <p:nvPr/>
         </p:nvSpPr>
         <p:spPr>
           <a:xfrm>
-            <a:off x="3749039" y="316992"/>
-            <a:ext cx="1554480" cy="780288"/>
-          </a:xfrm>
-          <a:prstGeom prst="roundRect">
+            <a:off x="822960" y="6035040"/>
+            <a:ext cx="13807440" cy="73152"/>
+          </a:xfrm>
+          <a:prstGeom prst="rect">
             <a:avLst/>
           </a:prstGeom>
           <a:solidFill>
-            <a:srgbClr val="CFE9E6"/>
+            <a:srgbClr val="373737"/>
           </a:solidFill>
-          <a:ln w="22225">
-            <a:solidFill>
-              <a:srgbClr val="1F7A72"/>
-            </a:solidFill>
+          <a:ln>
+            <a:noFill/>
           </a:ln>
-          <a:effectLst/>
         </p:spPr>
         <p:style>
           <a:lnRef idx="1">
@@ -3332,56 +3329,1659 @@
           </a:fontRef>
         </p:style>
         <p:txBody>
-          <a:bodyPr rtlCol="0" anchor="ctr" wrap="square" lIns="50800" rIns="50800" tIns="25400" bIns="25400"/>
+          <a:bodyPr rtlCol="0" anchor="ctr"/>
           <a:lstStyle/>
           <a:p>
             <a:pPr algn="ctr"/>
-            <a:r>
-              <a:rPr sz="1500" b="1" i="0">
-                <a:solidFill>
-                  <a:srgbClr val="0F4A44"/>
-                </a:solidFill>
-                <a:latin typeface="Helvetica Neue"/>
-              </a:rPr>
+          </a:p>
+        </p:txBody>
+      </p:sp>
+      <p:sp>
+        <p:nvSpPr>
+          <p:cNvPr id="8" name="Rectangle 7"/>
+          <p:cNvSpPr/>
+          <p:nvPr/>
+        </p:nvSpPr>
+        <p:spPr>
+          <a:xfrm>
+            <a:off x="868680" y="5925312"/>
+            <a:ext cx="54864" cy="228600"/>
+          </a:xfrm>
+          <a:prstGeom prst="rect">
+            <a:avLst/>
+          </a:prstGeom>
+          <a:solidFill>
+            <a:srgbClr val="373737"/>
+          </a:solidFill>
+          <a:ln>
+            <a:noFill/>
+          </a:ln>
+        </p:spPr>
+        <p:style>
+          <a:lnRef idx="1">
+            <a:schemeClr val="accent1"/>
+          </a:lnRef>
+          <a:fillRef idx="3">
+            <a:schemeClr val="accent1"/>
+          </a:fillRef>
+          <a:effectRef idx="2">
+            <a:schemeClr val="accent1"/>
+          </a:effectRef>
+          <a:fontRef idx="minor">
+            <a:schemeClr val="lt1"/>
+          </a:fontRef>
+        </p:style>
+        <p:txBody>
+          <a:bodyPr rtlCol="0" anchor="ctr"/>
+          <a:lstStyle/>
+          <a:p>
+            <a:pPr algn="ctr"/>
+          </a:p>
+        </p:txBody>
+      </p:sp>
+      <p:sp>
+        <p:nvSpPr>
+          <p:cNvPr id="9" name="Rectangle 8"/>
+          <p:cNvSpPr/>
+          <p:nvPr/>
+        </p:nvSpPr>
+        <p:spPr>
+          <a:xfrm>
+            <a:off x="1737360" y="5925312"/>
+            <a:ext cx="54864" cy="228600"/>
+          </a:xfrm>
+          <a:prstGeom prst="rect">
+            <a:avLst/>
+          </a:prstGeom>
+          <a:solidFill>
+            <a:srgbClr val="373737"/>
+          </a:solidFill>
+          <a:ln>
+            <a:noFill/>
+          </a:ln>
+        </p:spPr>
+        <p:style>
+          <a:lnRef idx="1">
+            <a:schemeClr val="accent1"/>
+          </a:lnRef>
+          <a:fillRef idx="3">
+            <a:schemeClr val="accent1"/>
+          </a:fillRef>
+          <a:effectRef idx="2">
+            <a:schemeClr val="accent1"/>
+          </a:effectRef>
+          <a:fontRef idx="minor">
+            <a:schemeClr val="lt1"/>
+          </a:fontRef>
+        </p:style>
+        <p:txBody>
+          <a:bodyPr rtlCol="0" anchor="ctr"/>
+          <a:lstStyle/>
+          <a:p>
+            <a:pPr algn="ctr"/>
+          </a:p>
+        </p:txBody>
+      </p:sp>
+      <p:sp>
+        <p:nvSpPr>
+          <p:cNvPr id="10" name="Rectangle 9"/>
+          <p:cNvSpPr/>
+          <p:nvPr/>
+        </p:nvSpPr>
+        <p:spPr>
+          <a:xfrm>
+            <a:off x="2606039" y="5925312"/>
+            <a:ext cx="54864" cy="228600"/>
+          </a:xfrm>
+          <a:prstGeom prst="rect">
+            <a:avLst/>
+          </a:prstGeom>
+          <a:solidFill>
+            <a:srgbClr val="373737"/>
+          </a:solidFill>
+          <a:ln>
+            <a:noFill/>
+          </a:ln>
+        </p:spPr>
+        <p:style>
+          <a:lnRef idx="1">
+            <a:schemeClr val="accent1"/>
+          </a:lnRef>
+          <a:fillRef idx="3">
+            <a:schemeClr val="accent1"/>
+          </a:fillRef>
+          <a:effectRef idx="2">
+            <a:schemeClr val="accent1"/>
+          </a:effectRef>
+          <a:fontRef idx="minor">
+            <a:schemeClr val="lt1"/>
+          </a:fontRef>
+        </p:style>
+        <p:txBody>
+          <a:bodyPr rtlCol="0" anchor="ctr"/>
+          <a:lstStyle/>
+          <a:p>
+            <a:pPr algn="ctr"/>
+          </a:p>
+        </p:txBody>
+      </p:sp>
+      <p:sp>
+        <p:nvSpPr>
+          <p:cNvPr id="11" name="Rectangle 10"/>
+          <p:cNvSpPr/>
+          <p:nvPr/>
+        </p:nvSpPr>
+        <p:spPr>
+          <a:xfrm>
+            <a:off x="3474720" y="5925312"/>
+            <a:ext cx="54864" cy="228600"/>
+          </a:xfrm>
+          <a:prstGeom prst="rect">
+            <a:avLst/>
+          </a:prstGeom>
+          <a:solidFill>
+            <a:srgbClr val="373737"/>
+          </a:solidFill>
+          <a:ln>
+            <a:noFill/>
+          </a:ln>
+        </p:spPr>
+        <p:style>
+          <a:lnRef idx="1">
+            <a:schemeClr val="accent1"/>
+          </a:lnRef>
+          <a:fillRef idx="3">
+            <a:schemeClr val="accent1"/>
+          </a:fillRef>
+          <a:effectRef idx="2">
+            <a:schemeClr val="accent1"/>
+          </a:effectRef>
+          <a:fontRef idx="minor">
+            <a:schemeClr val="lt1"/>
+          </a:fontRef>
+        </p:style>
+        <p:txBody>
+          <a:bodyPr rtlCol="0" anchor="ctr"/>
+          <a:lstStyle/>
+          <a:p>
+            <a:pPr algn="ctr"/>
+          </a:p>
+        </p:txBody>
+      </p:sp>
+      <p:sp>
+        <p:nvSpPr>
+          <p:cNvPr id="12" name="Rectangle 11"/>
+          <p:cNvSpPr/>
+          <p:nvPr/>
+        </p:nvSpPr>
+        <p:spPr>
+          <a:xfrm>
+            <a:off x="4343400" y="5925312"/>
+            <a:ext cx="54864" cy="228600"/>
+          </a:xfrm>
+          <a:prstGeom prst="rect">
+            <a:avLst/>
+          </a:prstGeom>
+          <a:solidFill>
+            <a:srgbClr val="373737"/>
+          </a:solidFill>
+          <a:ln>
+            <a:noFill/>
+          </a:ln>
+        </p:spPr>
+        <p:style>
+          <a:lnRef idx="1">
+            <a:schemeClr val="accent1"/>
+          </a:lnRef>
+          <a:fillRef idx="3">
+            <a:schemeClr val="accent1"/>
+          </a:fillRef>
+          <a:effectRef idx="2">
+            <a:schemeClr val="accent1"/>
+          </a:effectRef>
+          <a:fontRef idx="minor">
+            <a:schemeClr val="lt1"/>
+          </a:fontRef>
+        </p:style>
+        <p:txBody>
+          <a:bodyPr rtlCol="0" anchor="ctr"/>
+          <a:lstStyle/>
+          <a:p>
+            <a:pPr algn="ctr"/>
+          </a:p>
+        </p:txBody>
+      </p:sp>
+      <p:sp>
+        <p:nvSpPr>
+          <p:cNvPr id="13" name="Rectangle 12"/>
+          <p:cNvSpPr/>
+          <p:nvPr/>
+        </p:nvSpPr>
+        <p:spPr>
+          <a:xfrm>
+            <a:off x="5212079" y="5925312"/>
+            <a:ext cx="54864" cy="228600"/>
+          </a:xfrm>
+          <a:prstGeom prst="rect">
+            <a:avLst/>
+          </a:prstGeom>
+          <a:solidFill>
+            <a:srgbClr val="373737"/>
+          </a:solidFill>
+          <a:ln>
+            <a:noFill/>
+          </a:ln>
+        </p:spPr>
+        <p:style>
+          <a:lnRef idx="1">
+            <a:schemeClr val="accent1"/>
+          </a:lnRef>
+          <a:fillRef idx="3">
+            <a:schemeClr val="accent1"/>
+          </a:fillRef>
+          <a:effectRef idx="2">
+            <a:schemeClr val="accent1"/>
+          </a:effectRef>
+          <a:fontRef idx="minor">
+            <a:schemeClr val="lt1"/>
+          </a:fontRef>
+        </p:style>
+        <p:txBody>
+          <a:bodyPr rtlCol="0" anchor="ctr"/>
+          <a:lstStyle/>
+          <a:p>
+            <a:pPr algn="ctr"/>
+          </a:p>
+        </p:txBody>
+      </p:sp>
+      <p:sp>
+        <p:nvSpPr>
+          <p:cNvPr id="14" name="Rectangle 13"/>
+          <p:cNvSpPr/>
+          <p:nvPr/>
+        </p:nvSpPr>
+        <p:spPr>
+          <a:xfrm>
+            <a:off x="6080759" y="5925312"/>
+            <a:ext cx="54864" cy="228600"/>
+          </a:xfrm>
+          <a:prstGeom prst="rect">
+            <a:avLst/>
+          </a:prstGeom>
+          <a:solidFill>
+            <a:srgbClr val="373737"/>
+          </a:solidFill>
+          <a:ln>
+            <a:noFill/>
+          </a:ln>
+        </p:spPr>
+        <p:style>
+          <a:lnRef idx="1">
+            <a:schemeClr val="accent1"/>
+          </a:lnRef>
+          <a:fillRef idx="3">
+            <a:schemeClr val="accent1"/>
+          </a:fillRef>
+          <a:effectRef idx="2">
+            <a:schemeClr val="accent1"/>
+          </a:effectRef>
+          <a:fontRef idx="minor">
+            <a:schemeClr val="lt1"/>
+          </a:fontRef>
+        </p:style>
+        <p:txBody>
+          <a:bodyPr rtlCol="0" anchor="ctr"/>
+          <a:lstStyle/>
+          <a:p>
+            <a:pPr algn="ctr"/>
+          </a:p>
+        </p:txBody>
+      </p:sp>
+      <p:sp>
+        <p:nvSpPr>
+          <p:cNvPr id="15" name="Rectangle 14"/>
+          <p:cNvSpPr/>
+          <p:nvPr/>
+        </p:nvSpPr>
+        <p:spPr>
+          <a:xfrm>
+            <a:off x="6949440" y="5925312"/>
+            <a:ext cx="54864" cy="228600"/>
+          </a:xfrm>
+          <a:prstGeom prst="rect">
+            <a:avLst/>
+          </a:prstGeom>
+          <a:solidFill>
+            <a:srgbClr val="373737"/>
+          </a:solidFill>
+          <a:ln>
+            <a:noFill/>
+          </a:ln>
+        </p:spPr>
+        <p:style>
+          <a:lnRef idx="1">
+            <a:schemeClr val="accent1"/>
+          </a:lnRef>
+          <a:fillRef idx="3">
+            <a:schemeClr val="accent1"/>
+          </a:fillRef>
+          <a:effectRef idx="2">
+            <a:schemeClr val="accent1"/>
+          </a:effectRef>
+          <a:fontRef idx="minor">
+            <a:schemeClr val="lt1"/>
+          </a:fontRef>
+        </p:style>
+        <p:txBody>
+          <a:bodyPr rtlCol="0" anchor="ctr"/>
+          <a:lstStyle/>
+          <a:p>
+            <a:pPr algn="ctr"/>
+          </a:p>
+        </p:txBody>
+      </p:sp>
+      <p:sp>
+        <p:nvSpPr>
+          <p:cNvPr id="16" name="Rectangle 15"/>
+          <p:cNvSpPr/>
+          <p:nvPr/>
+        </p:nvSpPr>
+        <p:spPr>
+          <a:xfrm>
+            <a:off x="7818119" y="5925312"/>
+            <a:ext cx="54864" cy="228600"/>
+          </a:xfrm>
+          <a:prstGeom prst="rect">
+            <a:avLst/>
+          </a:prstGeom>
+          <a:solidFill>
+            <a:srgbClr val="373737"/>
+          </a:solidFill>
+          <a:ln>
+            <a:noFill/>
+          </a:ln>
+        </p:spPr>
+        <p:style>
+          <a:lnRef idx="1">
+            <a:schemeClr val="accent1"/>
+          </a:lnRef>
+          <a:fillRef idx="3">
+            <a:schemeClr val="accent1"/>
+          </a:fillRef>
+          <a:effectRef idx="2">
+            <a:schemeClr val="accent1"/>
+          </a:effectRef>
+          <a:fontRef idx="minor">
+            <a:schemeClr val="lt1"/>
+          </a:fontRef>
+        </p:style>
+        <p:txBody>
+          <a:bodyPr rtlCol="0" anchor="ctr"/>
+          <a:lstStyle/>
+          <a:p>
+            <a:pPr algn="ctr"/>
+          </a:p>
+        </p:txBody>
+      </p:sp>
+      <p:sp>
+        <p:nvSpPr>
+          <p:cNvPr id="17" name="Rectangle 16"/>
+          <p:cNvSpPr/>
+          <p:nvPr/>
+        </p:nvSpPr>
+        <p:spPr>
+          <a:xfrm>
+            <a:off x="8686800" y="5925312"/>
+            <a:ext cx="54864" cy="228600"/>
+          </a:xfrm>
+          <a:prstGeom prst="rect">
+            <a:avLst/>
+          </a:prstGeom>
+          <a:solidFill>
+            <a:srgbClr val="373737"/>
+          </a:solidFill>
+          <a:ln>
+            <a:noFill/>
+          </a:ln>
+        </p:spPr>
+        <p:style>
+          <a:lnRef idx="1">
+            <a:schemeClr val="accent1"/>
+          </a:lnRef>
+          <a:fillRef idx="3">
+            <a:schemeClr val="accent1"/>
+          </a:fillRef>
+          <a:effectRef idx="2">
+            <a:schemeClr val="accent1"/>
+          </a:effectRef>
+          <a:fontRef idx="minor">
+            <a:schemeClr val="lt1"/>
+          </a:fontRef>
+        </p:style>
+        <p:txBody>
+          <a:bodyPr rtlCol="0" anchor="ctr"/>
+          <a:lstStyle/>
+          <a:p>
+            <a:pPr algn="ctr"/>
+          </a:p>
+        </p:txBody>
+      </p:sp>
+      <p:sp>
+        <p:nvSpPr>
+          <p:cNvPr id="18" name="Rectangle 17"/>
+          <p:cNvSpPr/>
+          <p:nvPr/>
+        </p:nvSpPr>
+        <p:spPr>
+          <a:xfrm>
+            <a:off x="9555480" y="5925312"/>
+            <a:ext cx="54864" cy="228600"/>
+          </a:xfrm>
+          <a:prstGeom prst="rect">
+            <a:avLst/>
+          </a:prstGeom>
+          <a:solidFill>
+            <a:srgbClr val="373737"/>
+          </a:solidFill>
+          <a:ln>
+            <a:noFill/>
+          </a:ln>
+        </p:spPr>
+        <p:style>
+          <a:lnRef idx="1">
+            <a:schemeClr val="accent1"/>
+          </a:lnRef>
+          <a:fillRef idx="3">
+            <a:schemeClr val="accent1"/>
+          </a:fillRef>
+          <a:effectRef idx="2">
+            <a:schemeClr val="accent1"/>
+          </a:effectRef>
+          <a:fontRef idx="minor">
+            <a:schemeClr val="lt1"/>
+          </a:fontRef>
+        </p:style>
+        <p:txBody>
+          <a:bodyPr rtlCol="0" anchor="ctr"/>
+          <a:lstStyle/>
+          <a:p>
+            <a:pPr algn="ctr"/>
+          </a:p>
+        </p:txBody>
+      </p:sp>
+      <p:sp>
+        <p:nvSpPr>
+          <p:cNvPr id="19" name="Rectangle 18"/>
+          <p:cNvSpPr/>
+          <p:nvPr/>
+        </p:nvSpPr>
+        <p:spPr>
+          <a:xfrm>
+            <a:off x="10424159" y="5925312"/>
+            <a:ext cx="54864" cy="228600"/>
+          </a:xfrm>
+          <a:prstGeom prst="rect">
+            <a:avLst/>
+          </a:prstGeom>
+          <a:solidFill>
+            <a:srgbClr val="373737"/>
+          </a:solidFill>
+          <a:ln>
+            <a:noFill/>
+          </a:ln>
+        </p:spPr>
+        <p:style>
+          <a:lnRef idx="1">
+            <a:schemeClr val="accent1"/>
+          </a:lnRef>
+          <a:fillRef idx="3">
+            <a:schemeClr val="accent1"/>
+          </a:fillRef>
+          <a:effectRef idx="2">
+            <a:schemeClr val="accent1"/>
+          </a:effectRef>
+          <a:fontRef idx="minor">
+            <a:schemeClr val="lt1"/>
+          </a:fontRef>
+        </p:style>
+        <p:txBody>
+          <a:bodyPr rtlCol="0" anchor="ctr"/>
+          <a:lstStyle/>
+          <a:p>
+            <a:pPr algn="ctr"/>
+          </a:p>
+        </p:txBody>
+      </p:sp>
+      <p:sp>
+        <p:nvSpPr>
+          <p:cNvPr id="20" name="Rectangle 19"/>
+          <p:cNvSpPr/>
+          <p:nvPr/>
+        </p:nvSpPr>
+        <p:spPr>
+          <a:xfrm>
+            <a:off x="11292840" y="5925312"/>
+            <a:ext cx="54864" cy="228600"/>
+          </a:xfrm>
+          <a:prstGeom prst="rect">
+            <a:avLst/>
+          </a:prstGeom>
+          <a:solidFill>
+            <a:srgbClr val="373737"/>
+          </a:solidFill>
+          <a:ln>
+            <a:noFill/>
+          </a:ln>
+        </p:spPr>
+        <p:style>
+          <a:lnRef idx="1">
+            <a:schemeClr val="accent1"/>
+          </a:lnRef>
+          <a:fillRef idx="3">
+            <a:schemeClr val="accent1"/>
+          </a:fillRef>
+          <a:effectRef idx="2">
+            <a:schemeClr val="accent1"/>
+          </a:effectRef>
+          <a:fontRef idx="minor">
+            <a:schemeClr val="lt1"/>
+          </a:fontRef>
+        </p:style>
+        <p:txBody>
+          <a:bodyPr rtlCol="0" anchor="ctr"/>
+          <a:lstStyle/>
+          <a:p>
+            <a:pPr algn="ctr"/>
+          </a:p>
+        </p:txBody>
+      </p:sp>
+      <p:sp>
+        <p:nvSpPr>
+          <p:cNvPr id="21" name="Rectangle 20"/>
+          <p:cNvSpPr/>
+          <p:nvPr/>
+        </p:nvSpPr>
+        <p:spPr>
+          <a:xfrm>
+            <a:off x="12161519" y="5925312"/>
+            <a:ext cx="54864" cy="228600"/>
+          </a:xfrm>
+          <a:prstGeom prst="rect">
+            <a:avLst/>
+          </a:prstGeom>
+          <a:solidFill>
+            <a:srgbClr val="373737"/>
+          </a:solidFill>
+          <a:ln>
+            <a:noFill/>
+          </a:ln>
+        </p:spPr>
+        <p:style>
+          <a:lnRef idx="1">
+            <a:schemeClr val="accent1"/>
+          </a:lnRef>
+          <a:fillRef idx="3">
+            <a:schemeClr val="accent1"/>
+          </a:fillRef>
+          <a:effectRef idx="2">
+            <a:schemeClr val="accent1"/>
+          </a:effectRef>
+          <a:fontRef idx="minor">
+            <a:schemeClr val="lt1"/>
+          </a:fontRef>
+        </p:style>
+        <p:txBody>
+          <a:bodyPr rtlCol="0" anchor="ctr"/>
+          <a:lstStyle/>
+          <a:p>
+            <a:pPr algn="ctr"/>
+          </a:p>
+        </p:txBody>
+      </p:sp>
+      <p:sp>
+        <p:nvSpPr>
+          <p:cNvPr id="22" name="Rectangle 21"/>
+          <p:cNvSpPr/>
+          <p:nvPr/>
+        </p:nvSpPr>
+        <p:spPr>
+          <a:xfrm>
+            <a:off x="13030200" y="5925312"/>
+            <a:ext cx="54864" cy="228600"/>
+          </a:xfrm>
+          <a:prstGeom prst="rect">
+            <a:avLst/>
+          </a:prstGeom>
+          <a:solidFill>
+            <a:srgbClr val="373737"/>
+          </a:solidFill>
+          <a:ln>
+            <a:noFill/>
+          </a:ln>
+        </p:spPr>
+        <p:style>
+          <a:lnRef idx="1">
+            <a:schemeClr val="accent1"/>
+          </a:lnRef>
+          <a:fillRef idx="3">
+            <a:schemeClr val="accent1"/>
+          </a:fillRef>
+          <a:effectRef idx="2">
+            <a:schemeClr val="accent1"/>
+          </a:effectRef>
+          <a:fontRef idx="minor">
+            <a:schemeClr val="lt1"/>
+          </a:fontRef>
+        </p:style>
+        <p:txBody>
+          <a:bodyPr rtlCol="0" anchor="ctr"/>
+          <a:lstStyle/>
+          <a:p>
+            <a:pPr algn="ctr"/>
+          </a:p>
+        </p:txBody>
+      </p:sp>
+      <p:sp>
+        <p:nvSpPr>
+          <p:cNvPr id="23" name="Rounded Rectangle 22"/>
+          <p:cNvSpPr/>
+          <p:nvPr/>
+        </p:nvSpPr>
+        <p:spPr>
+          <a:xfrm>
+            <a:off x="822960" y="4114800"/>
+            <a:ext cx="2011680" cy="1097280"/>
+          </a:xfrm>
+          <a:prstGeom prst="roundRect">
+            <a:avLst/>
+          </a:prstGeom>
+          <a:solidFill>
+            <a:srgbClr val="B4DCFF"/>
+          </a:solidFill>
+          <a:ln w="22860">
+            <a:solidFill>
+              <a:srgbClr val="373737"/>
+            </a:solidFill>
+          </a:ln>
+        </p:spPr>
+        <p:style>
+          <a:lnRef idx="1">
+            <a:schemeClr val="accent1"/>
+          </a:lnRef>
+          <a:fillRef idx="3">
+            <a:schemeClr val="accent1"/>
+          </a:fillRef>
+          <a:effectRef idx="2">
+            <a:schemeClr val="accent1"/>
+          </a:effectRef>
+          <a:fontRef idx="minor">
+            <a:schemeClr val="lt1"/>
+          </a:fontRef>
+        </p:style>
+        <p:txBody>
+          <a:bodyPr rtlCol="0" anchor="ctr" wrap="square" lIns="101600" rIns="101600" tIns="101600" bIns="101600"/>
+          <a:lstStyle/>
+          <a:p>
+            <a:pPr algn="ctr">
+              <a:defRPr b="1" sz="1900"/>
+            </a:pPr>
+            <a:r>
+              <a:t>Task A</a:t>
+            </a:r>
+          </a:p>
+          <a:p>
+            <a:pPr algn="ctr">
+              <a:defRPr sz="1200"/>
+            </a:pPr>
+            <a:r>
+              <a:t>User mode</a:t>
+            </a:r>
+            <a:br/>
+            <a:r>
+              <a:t>PA key KA</a:t>
+            </a:r>
+          </a:p>
+        </p:txBody>
+      </p:sp>
+      <p:sp>
+        <p:nvSpPr>
+          <p:cNvPr id="24" name="Rounded Rectangle 23"/>
+          <p:cNvSpPr/>
+          <p:nvPr/>
+        </p:nvSpPr>
+        <p:spPr>
+          <a:xfrm>
+            <a:off x="2926080" y="4114800"/>
+            <a:ext cx="1920240" cy="1097280"/>
+          </a:xfrm>
+          <a:prstGeom prst="roundRect">
+            <a:avLst/>
+          </a:prstGeom>
+          <a:solidFill>
+            <a:srgbClr val="FFE4B8"/>
+          </a:solidFill>
+          <a:ln w="22860">
+            <a:solidFill>
+              <a:srgbClr val="373737"/>
+            </a:solidFill>
+          </a:ln>
+        </p:spPr>
+        <p:style>
+          <a:lnRef idx="1">
+            <a:schemeClr val="accent1"/>
+          </a:lnRef>
+          <a:fillRef idx="3">
+            <a:schemeClr val="accent1"/>
+          </a:fillRef>
+          <a:effectRef idx="2">
+            <a:schemeClr val="accent1"/>
+          </a:effectRef>
+          <a:fontRef idx="minor">
+            <a:schemeClr val="lt1"/>
+          </a:fontRef>
+        </p:style>
+        <p:txBody>
+          <a:bodyPr rtlCol="0" anchor="ctr" wrap="square" lIns="101600" rIns="101600" tIns="101600" bIns="101600"/>
+          <a:lstStyle/>
+          <a:p>
+            <a:pPr algn="ctr">
+              <a:defRPr b="1" sz="1900"/>
+            </a:pPr>
+            <a:r>
+              <a:t>Kernel</a:t>
+            </a:r>
+          </a:p>
+          <a:p>
+            <a:pPr algn="ctr">
+              <a:defRPr sz="1200"/>
+            </a:pPr>
+            <a:r>
+              <a:t>dispatch / schedule</a:t>
+            </a:r>
+          </a:p>
+        </p:txBody>
+      </p:sp>
+      <p:sp>
+        <p:nvSpPr>
+          <p:cNvPr id="25" name="Rounded Rectangle 24"/>
+          <p:cNvSpPr/>
+          <p:nvPr/>
+        </p:nvSpPr>
+        <p:spPr>
+          <a:xfrm>
+            <a:off x="5303520" y="4114800"/>
+            <a:ext cx="1920240" cy="1097280"/>
+          </a:xfrm>
+          <a:prstGeom prst="roundRect">
+            <a:avLst/>
+          </a:prstGeom>
+          <a:solidFill>
+            <a:srgbClr val="C8B4FF"/>
+          </a:solidFill>
+          <a:ln w="22860">
+            <a:solidFill>
+              <a:srgbClr val="373737"/>
+            </a:solidFill>
+          </a:ln>
+        </p:spPr>
+        <p:style>
+          <a:lnRef idx="1">
+            <a:schemeClr val="accent1"/>
+          </a:lnRef>
+          <a:fillRef idx="3">
+            <a:schemeClr val="accent1"/>
+          </a:fillRef>
+          <a:effectRef idx="2">
+            <a:schemeClr val="accent1"/>
+          </a:effectRef>
+          <a:fontRef idx="minor">
+            <a:schemeClr val="lt1"/>
+          </a:fontRef>
+        </p:style>
+        <p:txBody>
+          <a:bodyPr rtlCol="0" anchor="ctr" wrap="square" lIns="101600" rIns="101600" tIns="101600" bIns="101600"/>
+          <a:lstStyle/>
+          <a:p>
+            <a:pPr algn="ctr">
+              <a:defRPr b="1" sz="1900"/>
+            </a:pPr>
+            <a:r>
+              <a:t>ISR</a:t>
+            </a:r>
+          </a:p>
+          <a:p>
+            <a:pPr algn="ctr">
+              <a:defRPr sz="1200"/>
+            </a:pPr>
+            <a:r>
+              <a:t>IRQ context</a:t>
+            </a:r>
+            <a:br/>
+            <a:r>
+              <a:t>PA key K_ISR</a:t>
+            </a:r>
+          </a:p>
+        </p:txBody>
+      </p:sp>
+      <p:sp>
+        <p:nvSpPr>
+          <p:cNvPr id="26" name="Rounded Rectangle 25"/>
+          <p:cNvSpPr/>
+          <p:nvPr/>
+        </p:nvSpPr>
+        <p:spPr>
+          <a:xfrm>
+            <a:off x="7406640" y="4114800"/>
+            <a:ext cx="2011680" cy="1097280"/>
+          </a:xfrm>
+          <a:prstGeom prst="roundRect">
+            <a:avLst/>
+          </a:prstGeom>
+          <a:solidFill>
+            <a:srgbClr val="B4DCFF"/>
+          </a:solidFill>
+          <a:ln w="22860">
+            <a:solidFill>
+              <a:srgbClr val="373737"/>
+            </a:solidFill>
+          </a:ln>
+        </p:spPr>
+        <p:style>
+          <a:lnRef idx="1">
+            <a:schemeClr val="accent1"/>
+          </a:lnRef>
+          <a:fillRef idx="3">
+            <a:schemeClr val="accent1"/>
+          </a:fillRef>
+          <a:effectRef idx="2">
+            <a:schemeClr val="accent1"/>
+          </a:effectRef>
+          <a:fontRef idx="minor">
+            <a:schemeClr val="lt1"/>
+          </a:fontRef>
+        </p:style>
+        <p:txBody>
+          <a:bodyPr rtlCol="0" anchor="ctr" wrap="square" lIns="101600" rIns="101600" tIns="101600" bIns="101600"/>
+          <a:lstStyle/>
+          <a:p>
+            <a:pPr algn="ctr">
+              <a:defRPr b="1" sz="1900"/>
+            </a:pPr>
+            <a:r>
+              <a:t>Task A</a:t>
+            </a:r>
+          </a:p>
+          <a:p>
+            <a:pPr algn="ctr">
+              <a:defRPr sz="1200"/>
+            </a:pPr>
+            <a:r>
+              <a:t>resume</a:t>
+            </a:r>
+            <a:br/>
+            <a:r>
+              <a:t>PA key KA</a:t>
+            </a:r>
+          </a:p>
+        </p:txBody>
+      </p:sp>
+      <p:sp>
+        <p:nvSpPr>
+          <p:cNvPr id="27" name="Rounded Rectangle 26"/>
+          <p:cNvSpPr/>
+          <p:nvPr/>
+        </p:nvSpPr>
+        <p:spPr>
+          <a:xfrm>
+            <a:off x="9601200" y="4114800"/>
+            <a:ext cx="1920240" cy="1097280"/>
+          </a:xfrm>
+          <a:prstGeom prst="roundRect">
+            <a:avLst/>
+          </a:prstGeom>
+          <a:solidFill>
+            <a:srgbClr val="A0D2F5"/>
+          </a:solidFill>
+          <a:ln w="22860">
+            <a:solidFill>
+              <a:srgbClr val="373737"/>
+            </a:solidFill>
+          </a:ln>
+        </p:spPr>
+        <p:style>
+          <a:lnRef idx="1">
+            <a:schemeClr val="accent1"/>
+          </a:lnRef>
+          <a:fillRef idx="3">
+            <a:schemeClr val="accent1"/>
+          </a:fillRef>
+          <a:effectRef idx="2">
+            <a:schemeClr val="accent1"/>
+          </a:effectRef>
+          <a:fontRef idx="minor">
+            <a:schemeClr val="lt1"/>
+          </a:fontRef>
+        </p:style>
+        <p:txBody>
+          <a:bodyPr rtlCol="0" anchor="ctr" wrap="square" lIns="101600" rIns="101600" tIns="101600" bIns="101600"/>
+          <a:lstStyle/>
+          <a:p>
+            <a:pPr algn="ctr">
+              <a:defRPr b="1" sz="1900"/>
+            </a:pPr>
+            <a:r>
               <a:t>Task B</a:t>
             </a:r>
           </a:p>
           <a:p>
+            <a:pPr algn="ctr">
+              <a:defRPr sz="1200"/>
+            </a:pPr>
+            <a:r>
+              <a:t>User mode</a:t>
+            </a:r>
+            <a:br/>
+            <a:r>
+              <a:t>PA key KB</a:t>
+            </a:r>
+          </a:p>
+        </p:txBody>
+      </p:sp>
+      <p:sp>
+        <p:nvSpPr>
+          <p:cNvPr id="28" name="Rounded Rectangle 27"/>
+          <p:cNvSpPr/>
+          <p:nvPr/>
+        </p:nvSpPr>
+        <p:spPr>
+          <a:xfrm>
+            <a:off x="9052560" y="2286000"/>
+            <a:ext cx="1188720" cy="1005840"/>
+          </a:xfrm>
+          <a:prstGeom prst="roundRect">
+            <a:avLst/>
+          </a:prstGeom>
+          <a:solidFill>
+            <a:srgbClr val="C8F0CD"/>
+          </a:solidFill>
+          <a:ln w="22860">
+            <a:solidFill>
+              <a:srgbClr val="373737"/>
+            </a:solidFill>
+          </a:ln>
+        </p:spPr>
+        <p:style>
+          <a:lnRef idx="1">
+            <a:schemeClr val="accent1"/>
+          </a:lnRef>
+          <a:fillRef idx="3">
+            <a:schemeClr val="accent1"/>
+          </a:fillRef>
+          <a:effectRef idx="2">
+            <a:schemeClr val="accent1"/>
+          </a:effectRef>
+          <a:fontRef idx="minor">
+            <a:schemeClr val="lt1"/>
+          </a:fontRef>
+        </p:style>
+        <p:txBody>
+          <a:bodyPr rtlCol="0" anchor="ctr" wrap="square" lIns="101600" rIns="101600" tIns="101600" bIns="101600"/>
+          <a:lstStyle/>
+          <a:p>
+            <a:pPr algn="ctr">
+              <a:defRPr b="1" sz="1900"/>
+            </a:pPr>
+            <a:r>
+              <a:t>save Task A</a:t>
+            </a:r>
+            <a:br/>
+            <a:r>
+              <a:t>state</a:t>
+            </a:r>
+          </a:p>
+          <a:p>
+            <a:pPr algn="ctr">
+              <a:defRPr sz="1200"/>
+            </a:pPr>
+          </a:p>
+        </p:txBody>
+      </p:sp>
+      <p:sp>
+        <p:nvSpPr>
+          <p:cNvPr id="29" name="Rounded Rectangle 28"/>
+          <p:cNvSpPr/>
+          <p:nvPr/>
+        </p:nvSpPr>
+        <p:spPr>
+          <a:xfrm>
+            <a:off x="10515600" y="2286000"/>
+            <a:ext cx="1280160" cy="1005840"/>
+          </a:xfrm>
+          <a:prstGeom prst="roundRect">
+            <a:avLst/>
+          </a:prstGeom>
+          <a:solidFill>
+            <a:srgbClr val="DCF5DC"/>
+          </a:solidFill>
+          <a:ln w="22860">
+            <a:solidFill>
+              <a:srgbClr val="373737"/>
+            </a:solidFill>
+          </a:ln>
+        </p:spPr>
+        <p:style>
+          <a:lnRef idx="1">
+            <a:schemeClr val="accent1"/>
+          </a:lnRef>
+          <a:fillRef idx="3">
+            <a:schemeClr val="accent1"/>
+          </a:fillRef>
+          <a:effectRef idx="2">
+            <a:schemeClr val="accent1"/>
+          </a:effectRef>
+          <a:fontRef idx="minor">
+            <a:schemeClr val="lt1"/>
+          </a:fontRef>
+        </p:style>
+        <p:txBody>
+          <a:bodyPr rtlCol="0" anchor="ctr" wrap="square" lIns="101600" rIns="101600" tIns="101600" bIns="101600"/>
+          <a:lstStyle/>
+          <a:p>
+            <a:pPr algn="ctr">
+              <a:defRPr b="1" sz="1900"/>
+            </a:pPr>
+            <a:r>
+              <a:t>route IRQ</a:t>
+            </a:r>
+            <a:br/>
+            <a:r>
+              <a:t>secure NVIC</a:t>
+            </a:r>
+          </a:p>
+          <a:p>
+            <a:pPr algn="ctr">
+              <a:defRPr sz="1200"/>
+            </a:pPr>
+          </a:p>
+        </p:txBody>
+      </p:sp>
+      <p:sp>
+        <p:nvSpPr>
+          <p:cNvPr id="30" name="Rounded Rectangle 29"/>
+          <p:cNvSpPr/>
+          <p:nvPr/>
+        </p:nvSpPr>
+        <p:spPr>
+          <a:xfrm>
+            <a:off x="12161520" y="2286000"/>
+            <a:ext cx="1188720" cy="1005840"/>
+          </a:xfrm>
+          <a:prstGeom prst="roundRect">
+            <a:avLst/>
+          </a:prstGeom>
+          <a:solidFill>
+            <a:srgbClr val="C8F0CD"/>
+          </a:solidFill>
+          <a:ln w="22860">
+            <a:solidFill>
+              <a:srgbClr val="373737"/>
+            </a:solidFill>
+          </a:ln>
+        </p:spPr>
+        <p:style>
+          <a:lnRef idx="1">
+            <a:schemeClr val="accent1"/>
+          </a:lnRef>
+          <a:fillRef idx="3">
+            <a:schemeClr val="accent1"/>
+          </a:fillRef>
+          <a:effectRef idx="2">
+            <a:schemeClr val="accent1"/>
+          </a:effectRef>
+          <a:fontRef idx="minor">
+            <a:schemeClr val="lt1"/>
+          </a:fontRef>
+        </p:style>
+        <p:txBody>
+          <a:bodyPr rtlCol="0" anchor="ctr" wrap="square" lIns="101600" rIns="101600" tIns="101600" bIns="101600"/>
+          <a:lstStyle/>
+          <a:p>
+            <a:pPr algn="ctr">
+              <a:defRPr b="1" sz="1900"/>
+            </a:pPr>
+            <a:r>
+              <a:t>verify resume</a:t>
+            </a:r>
+            <a:br/>
+            <a:r>
+              <a:t>state</a:t>
+            </a:r>
+          </a:p>
+          <a:p>
+            <a:pPr algn="ctr">
+              <a:defRPr sz="1200"/>
+            </a:pPr>
+          </a:p>
+        </p:txBody>
+      </p:sp>
+      <p:sp>
+        <p:nvSpPr>
+          <p:cNvPr id="31" name="Rectangle 30"/>
+          <p:cNvSpPr/>
+          <p:nvPr/>
+        </p:nvSpPr>
+        <p:spPr>
+          <a:xfrm>
+            <a:off x="8001000" y="1645920"/>
+            <a:ext cx="73152" cy="228600"/>
+          </a:xfrm>
+          <a:prstGeom prst="rect">
+            <a:avLst/>
+          </a:prstGeom>
+          <a:solidFill>
+            <a:srgbClr val="787878"/>
+          </a:solidFill>
+          <a:ln>
+            <a:noFill/>
+          </a:ln>
+        </p:spPr>
+        <p:style>
+          <a:lnRef idx="1">
+            <a:schemeClr val="accent1"/>
+          </a:lnRef>
+          <a:fillRef idx="3">
+            <a:schemeClr val="accent1"/>
+          </a:fillRef>
+          <a:effectRef idx="2">
+            <a:schemeClr val="accent1"/>
+          </a:effectRef>
+          <a:fontRef idx="minor">
+            <a:schemeClr val="lt1"/>
+          </a:fontRef>
+        </p:style>
+        <p:txBody>
+          <a:bodyPr rtlCol="0" anchor="ctr"/>
+          <a:lstStyle/>
+          <a:p>
             <a:pPr algn="ctr"/>
-            <a:r>
-              <a:rPr sz="1100" b="0" i="0">
-                <a:solidFill>
-                  <a:srgbClr val="0F4A44"/>
-                </a:solidFill>
-                <a:latin typeface="Helvetica Neue"/>
-              </a:rPr>
-              <a:t>own CFG +</a:t>
-            </a:r>
-          </a:p>
+          </a:p>
+        </p:txBody>
+      </p:sp>
+      <p:sp>
+        <p:nvSpPr>
+          <p:cNvPr id="32" name="Rectangle 31"/>
+          <p:cNvSpPr/>
+          <p:nvPr/>
+        </p:nvSpPr>
+        <p:spPr>
+          <a:xfrm>
+            <a:off x="8001000" y="2011680"/>
+            <a:ext cx="73152" cy="228600"/>
+          </a:xfrm>
+          <a:prstGeom prst="rect">
+            <a:avLst/>
+          </a:prstGeom>
+          <a:solidFill>
+            <a:srgbClr val="787878"/>
+          </a:solidFill>
+          <a:ln>
+            <a:noFill/>
+          </a:ln>
+        </p:spPr>
+        <p:style>
+          <a:lnRef idx="1">
+            <a:schemeClr val="accent1"/>
+          </a:lnRef>
+          <a:fillRef idx="3">
+            <a:schemeClr val="accent1"/>
+          </a:fillRef>
+          <a:effectRef idx="2">
+            <a:schemeClr val="accent1"/>
+          </a:effectRef>
+          <a:fontRef idx="minor">
+            <a:schemeClr val="lt1"/>
+          </a:fontRef>
+        </p:style>
+        <p:txBody>
+          <a:bodyPr rtlCol="0" anchor="ctr"/>
+          <a:lstStyle/>
           <a:p>
             <a:pPr algn="ctr"/>
-            <a:r>
-              <a:rPr sz="1100" b="0" i="0">
-                <a:solidFill>
-                  <a:srgbClr val="0F4A44"/>
-                </a:solidFill>
-                <a:latin typeface="Helvetica Neue"/>
-              </a:rPr>
-              <a:t>measurement state</a:t>
-            </a:r>
-          </a:p>
-        </p:txBody>
-      </p:sp>
-      <p:sp>
-        <p:nvSpPr>
-          <p:cNvPr id="6" name="TextBox 5"/>
+          </a:p>
+        </p:txBody>
+      </p:sp>
+      <p:sp>
+        <p:nvSpPr>
+          <p:cNvPr id="33" name="Rectangle 32"/>
+          <p:cNvSpPr/>
+          <p:nvPr/>
+        </p:nvSpPr>
+        <p:spPr>
+          <a:xfrm>
+            <a:off x="8001000" y="2377440"/>
+            <a:ext cx="73152" cy="228600"/>
+          </a:xfrm>
+          <a:prstGeom prst="rect">
+            <a:avLst/>
+          </a:prstGeom>
+          <a:solidFill>
+            <a:srgbClr val="787878"/>
+          </a:solidFill>
+          <a:ln>
+            <a:noFill/>
+          </a:ln>
+        </p:spPr>
+        <p:style>
+          <a:lnRef idx="1">
+            <a:schemeClr val="accent1"/>
+          </a:lnRef>
+          <a:fillRef idx="3">
+            <a:schemeClr val="accent1"/>
+          </a:fillRef>
+          <a:effectRef idx="2">
+            <a:schemeClr val="accent1"/>
+          </a:effectRef>
+          <a:fontRef idx="minor">
+            <a:schemeClr val="lt1"/>
+          </a:fontRef>
+        </p:style>
+        <p:txBody>
+          <a:bodyPr rtlCol="0" anchor="ctr"/>
+          <a:lstStyle/>
+          <a:p>
+            <a:pPr algn="ctr"/>
+          </a:p>
+        </p:txBody>
+      </p:sp>
+      <p:sp>
+        <p:nvSpPr>
+          <p:cNvPr id="34" name="Rectangle 33"/>
+          <p:cNvSpPr/>
+          <p:nvPr/>
+        </p:nvSpPr>
+        <p:spPr>
+          <a:xfrm>
+            <a:off x="8001000" y="2743200"/>
+            <a:ext cx="73152" cy="228600"/>
+          </a:xfrm>
+          <a:prstGeom prst="rect">
+            <a:avLst/>
+          </a:prstGeom>
+          <a:solidFill>
+            <a:srgbClr val="787878"/>
+          </a:solidFill>
+          <a:ln>
+            <a:noFill/>
+          </a:ln>
+        </p:spPr>
+        <p:style>
+          <a:lnRef idx="1">
+            <a:schemeClr val="accent1"/>
+          </a:lnRef>
+          <a:fillRef idx="3">
+            <a:schemeClr val="accent1"/>
+          </a:fillRef>
+          <a:effectRef idx="2">
+            <a:schemeClr val="accent1"/>
+          </a:effectRef>
+          <a:fontRef idx="minor">
+            <a:schemeClr val="lt1"/>
+          </a:fontRef>
+        </p:style>
+        <p:txBody>
+          <a:bodyPr rtlCol="0" anchor="ctr"/>
+          <a:lstStyle/>
+          <a:p>
+            <a:pPr algn="ctr"/>
+          </a:p>
+        </p:txBody>
+      </p:sp>
+      <p:sp>
+        <p:nvSpPr>
+          <p:cNvPr id="35" name="Rectangle 34"/>
+          <p:cNvSpPr/>
+          <p:nvPr/>
+        </p:nvSpPr>
+        <p:spPr>
+          <a:xfrm>
+            <a:off x="8001000" y="3108960"/>
+            <a:ext cx="73152" cy="228600"/>
+          </a:xfrm>
+          <a:prstGeom prst="rect">
+            <a:avLst/>
+          </a:prstGeom>
+          <a:solidFill>
+            <a:srgbClr val="787878"/>
+          </a:solidFill>
+          <a:ln>
+            <a:noFill/>
+          </a:ln>
+        </p:spPr>
+        <p:style>
+          <a:lnRef idx="1">
+            <a:schemeClr val="accent1"/>
+          </a:lnRef>
+          <a:fillRef idx="3">
+            <a:schemeClr val="accent1"/>
+          </a:fillRef>
+          <a:effectRef idx="2">
+            <a:schemeClr val="accent1"/>
+          </a:effectRef>
+          <a:fontRef idx="minor">
+            <a:schemeClr val="lt1"/>
+          </a:fontRef>
+        </p:style>
+        <p:txBody>
+          <a:bodyPr rtlCol="0" anchor="ctr"/>
+          <a:lstStyle/>
+          <a:p>
+            <a:pPr algn="ctr"/>
+          </a:p>
+        </p:txBody>
+      </p:sp>
+      <p:sp>
+        <p:nvSpPr>
+          <p:cNvPr id="36" name="Rectangle 35"/>
+          <p:cNvSpPr/>
+          <p:nvPr/>
+        </p:nvSpPr>
+        <p:spPr>
+          <a:xfrm>
+            <a:off x="8001000" y="3474720"/>
+            <a:ext cx="73152" cy="228600"/>
+          </a:xfrm>
+          <a:prstGeom prst="rect">
+            <a:avLst/>
+          </a:prstGeom>
+          <a:solidFill>
+            <a:srgbClr val="787878"/>
+          </a:solidFill>
+          <a:ln>
+            <a:noFill/>
+          </a:ln>
+        </p:spPr>
+        <p:style>
+          <a:lnRef idx="1">
+            <a:schemeClr val="accent1"/>
+          </a:lnRef>
+          <a:fillRef idx="3">
+            <a:schemeClr val="accent1"/>
+          </a:fillRef>
+          <a:effectRef idx="2">
+            <a:schemeClr val="accent1"/>
+          </a:effectRef>
+          <a:fontRef idx="minor">
+            <a:schemeClr val="lt1"/>
+          </a:fontRef>
+        </p:style>
+        <p:txBody>
+          <a:bodyPr rtlCol="0" anchor="ctr"/>
+          <a:lstStyle/>
+          <a:p>
+            <a:pPr algn="ctr"/>
+          </a:p>
+        </p:txBody>
+      </p:sp>
+      <p:sp>
+        <p:nvSpPr>
+          <p:cNvPr id="37" name="Rectangle 36"/>
+          <p:cNvSpPr/>
+          <p:nvPr/>
+        </p:nvSpPr>
+        <p:spPr>
+          <a:xfrm>
+            <a:off x="8001000" y="3840480"/>
+            <a:ext cx="73152" cy="228600"/>
+          </a:xfrm>
+          <a:prstGeom prst="rect">
+            <a:avLst/>
+          </a:prstGeom>
+          <a:solidFill>
+            <a:srgbClr val="787878"/>
+          </a:solidFill>
+          <a:ln>
+            <a:noFill/>
+          </a:ln>
+        </p:spPr>
+        <p:style>
+          <a:lnRef idx="1">
+            <a:schemeClr val="accent1"/>
+          </a:lnRef>
+          <a:fillRef idx="3">
+            <a:schemeClr val="accent1"/>
+          </a:fillRef>
+          <a:effectRef idx="2">
+            <a:schemeClr val="accent1"/>
+          </a:effectRef>
+          <a:fontRef idx="minor">
+            <a:schemeClr val="lt1"/>
+          </a:fontRef>
+        </p:style>
+        <p:txBody>
+          <a:bodyPr rtlCol="0" anchor="ctr"/>
+          <a:lstStyle/>
+          <a:p>
+            <a:pPr algn="ctr"/>
+          </a:p>
+        </p:txBody>
+      </p:sp>
+      <p:sp>
+        <p:nvSpPr>
+          <p:cNvPr id="38" name="Rectangle 37"/>
+          <p:cNvSpPr/>
+          <p:nvPr/>
+        </p:nvSpPr>
+        <p:spPr>
+          <a:xfrm>
+            <a:off x="8001000" y="4206240"/>
+            <a:ext cx="73152" cy="228600"/>
+          </a:xfrm>
+          <a:prstGeom prst="rect">
+            <a:avLst/>
+          </a:prstGeom>
+          <a:solidFill>
+            <a:srgbClr val="787878"/>
+          </a:solidFill>
+          <a:ln>
+            <a:noFill/>
+          </a:ln>
+        </p:spPr>
+        <p:style>
+          <a:lnRef idx="1">
+            <a:schemeClr val="accent1"/>
+          </a:lnRef>
+          <a:fillRef idx="3">
+            <a:schemeClr val="accent1"/>
+          </a:fillRef>
+          <a:effectRef idx="2">
+            <a:schemeClr val="accent1"/>
+          </a:effectRef>
+          <a:fontRef idx="minor">
+            <a:schemeClr val="lt1"/>
+          </a:fontRef>
+        </p:style>
+        <p:txBody>
+          <a:bodyPr rtlCol="0" anchor="ctr"/>
+          <a:lstStyle/>
+          <a:p>
+            <a:pPr algn="ctr"/>
+          </a:p>
+        </p:txBody>
+      </p:sp>
+      <p:sp>
+        <p:nvSpPr>
+          <p:cNvPr id="39" name="Rectangle 38"/>
+          <p:cNvSpPr/>
+          <p:nvPr/>
+        </p:nvSpPr>
+        <p:spPr>
+          <a:xfrm>
+            <a:off x="8001000" y="4572000"/>
+            <a:ext cx="73152" cy="228600"/>
+          </a:xfrm>
+          <a:prstGeom prst="rect">
+            <a:avLst/>
+          </a:prstGeom>
+          <a:solidFill>
+            <a:srgbClr val="787878"/>
+          </a:solidFill>
+          <a:ln>
+            <a:noFill/>
+          </a:ln>
+        </p:spPr>
+        <p:style>
+          <a:lnRef idx="1">
+            <a:schemeClr val="accent1"/>
+          </a:lnRef>
+          <a:fillRef idx="3">
+            <a:schemeClr val="accent1"/>
+          </a:fillRef>
+          <a:effectRef idx="2">
+            <a:schemeClr val="accent1"/>
+          </a:effectRef>
+          <a:fontRef idx="minor">
+            <a:schemeClr val="lt1"/>
+          </a:fontRef>
+        </p:style>
+        <p:txBody>
+          <a:bodyPr rtlCol="0" anchor="ctr"/>
+          <a:lstStyle/>
+          <a:p>
+            <a:pPr algn="ctr"/>
+          </a:p>
+        </p:txBody>
+      </p:sp>
+      <p:sp>
+        <p:nvSpPr>
+          <p:cNvPr id="40" name="Rectangle 39"/>
+          <p:cNvSpPr/>
+          <p:nvPr/>
+        </p:nvSpPr>
+        <p:spPr>
+          <a:xfrm>
+            <a:off x="8001000" y="4937760"/>
+            <a:ext cx="73152" cy="228600"/>
+          </a:xfrm>
+          <a:prstGeom prst="rect">
+            <a:avLst/>
+          </a:prstGeom>
+          <a:solidFill>
+            <a:srgbClr val="787878"/>
+          </a:solidFill>
+          <a:ln>
+            <a:noFill/>
+          </a:ln>
+        </p:spPr>
+        <p:style>
+          <a:lnRef idx="1">
+            <a:schemeClr val="accent1"/>
+          </a:lnRef>
+          <a:fillRef idx="3">
+            <a:schemeClr val="accent1"/>
+          </a:fillRef>
+          <a:effectRef idx="2">
+            <a:schemeClr val="accent1"/>
+          </a:effectRef>
+          <a:fontRef idx="minor">
+            <a:schemeClr val="lt1"/>
+          </a:fontRef>
+        </p:style>
+        <p:txBody>
+          <a:bodyPr rtlCol="0" anchor="ctr"/>
+          <a:lstStyle/>
+          <a:p>
+            <a:pPr algn="ctr"/>
+          </a:p>
+        </p:txBody>
+      </p:sp>
+      <p:sp>
+        <p:nvSpPr>
+          <p:cNvPr id="41" name="Rectangle 40"/>
+          <p:cNvSpPr/>
+          <p:nvPr/>
+        </p:nvSpPr>
+        <p:spPr>
+          <a:xfrm>
+            <a:off x="8001000" y="5303520"/>
+            <a:ext cx="73152" cy="228600"/>
+          </a:xfrm>
+          <a:prstGeom prst="rect">
+            <a:avLst/>
+          </a:prstGeom>
+          <a:solidFill>
+            <a:srgbClr val="787878"/>
+          </a:solidFill>
+          <a:ln>
+            <a:noFill/>
+          </a:ln>
+        </p:spPr>
+        <p:style>
+          <a:lnRef idx="1">
+            <a:schemeClr val="accent1"/>
+          </a:lnRef>
+          <a:fillRef idx="3">
+            <a:schemeClr val="accent1"/>
+          </a:fillRef>
+          <a:effectRef idx="2">
+            <a:schemeClr val="accent1"/>
+          </a:effectRef>
+          <a:fontRef idx="minor">
+            <a:schemeClr val="lt1"/>
+          </a:fontRef>
+        </p:style>
+        <p:txBody>
+          <a:bodyPr rtlCol="0" anchor="ctr"/>
+          <a:lstStyle/>
+          <a:p>
+            <a:pPr algn="ctr"/>
+          </a:p>
+        </p:txBody>
+      </p:sp>
+      <p:cxnSp>
+        <p:nvCxnSpPr>
+          <p:cNvPr id="42" name="Connector 41"/>
+          <p:cNvCxnSpPr/>
+          <p:nvPr/>
+        </p:nvCxnSpPr>
+        <p:spPr>
+          <a:xfrm>
+            <a:off x="2651760" y="5029200"/>
+            <a:ext cx="274320" cy="0"/>
+          </a:xfrm>
+          <a:prstGeom prst="line">
+            <a:avLst/>
+          </a:prstGeom>
+          <a:ln w="25400">
+            <a:solidFill>
+              <a:srgbClr val="373737"/>
+            </a:solidFill>
+          </a:ln>
+        </p:spPr>
+        <p:style>
+          <a:lnRef idx="2">
+            <a:schemeClr val="accent1"/>
+          </a:lnRef>
+          <a:fillRef idx="0">
+            <a:schemeClr val="accent1"/>
+          </a:fillRef>
+          <a:effectRef idx="1">
+            <a:schemeClr val="accent1"/>
+          </a:effectRef>
+          <a:fontRef idx="minor">
+            <a:schemeClr val="tx1"/>
+          </a:fontRef>
+        </p:style>
+      </p:cxnSp>
+      <p:sp>
+        <p:nvSpPr>
+          <p:cNvPr id="43" name="TextBox 42"/>
           <p:cNvSpPr txBox="1"/>
           <p:nvPr/>
         </p:nvSpPr>
         <p:spPr>
           <a:xfrm>
-            <a:off x="652272" y="1085088"/>
-            <a:ext cx="609600" cy="109728"/>
+            <a:off x="2560320" y="4846320"/>
+            <a:ext cx="822960" cy="256032"/>
           </a:xfrm>
           <a:prstGeom prst="rect">
             <a:avLst/>
@@ -3389,34 +4989,65 @@
           <a:noFill/>
         </p:spPr>
         <p:txBody>
-          <a:bodyPr wrap="square" anchor="ctr" lIns="0" rIns="0" tIns="0" bIns="0">
+          <a:bodyPr wrap="none">
             <a:spAutoFit/>
           </a:bodyPr>
           <a:lstStyle/>
           <a:p>
-            <a:pPr algn="ctr"/>
-            <a:r>
-              <a:rPr sz="1000" b="0" i="0">
-                <a:solidFill>
-                  <a:srgbClr val="2C5AA0"/>
-                </a:solidFill>
-                <a:latin typeface="Helvetica Neue"/>
-              </a:rPr>
+            <a:pPr algn="ctr">
+              <a:defRPr sz="1000"/>
+            </a:pPr>
+            <a:r>
               <a:t>dispatch</a:t>
             </a:r>
           </a:p>
         </p:txBody>
       </p:sp>
-      <p:sp>
-        <p:nvSpPr>
-          <p:cNvPr id="7" name="TextBox 6"/>
+      <p:cxnSp>
+        <p:nvCxnSpPr>
+          <p:cNvPr id="44" name="Connector 43"/>
+          <p:cNvCxnSpPr/>
+          <p:nvPr/>
+        </p:nvCxnSpPr>
+        <p:spPr>
+          <a:xfrm>
+            <a:off x="4846320" y="5029200"/>
+            <a:ext cx="457200" cy="0"/>
+          </a:xfrm>
+          <a:prstGeom prst="line">
+            <a:avLst/>
+          </a:prstGeom>
+          <a:ln w="25400">
+            <a:solidFill>
+              <a:srgbClr val="373737"/>
+            </a:solidFill>
+          </a:ln>
+        </p:spPr>
+        <p:style>
+          <a:lnRef idx="2">
+            <a:schemeClr val="accent1"/>
+          </a:lnRef>
+          <a:fillRef idx="0">
+            <a:schemeClr val="accent1"/>
+          </a:fillRef>
+          <a:effectRef idx="1">
+            <a:schemeClr val="accent1"/>
+          </a:effectRef>
+          <a:fontRef idx="minor">
+            <a:schemeClr val="tx1"/>
+          </a:fontRef>
+        </p:style>
+      </p:cxnSp>
+      <p:sp>
+        <p:nvSpPr>
+          <p:cNvPr id="45" name="TextBox 44"/>
           <p:cNvSpPr txBox="1"/>
           <p:nvPr/>
         </p:nvSpPr>
         <p:spPr>
           <a:xfrm>
-            <a:off x="2438400" y="1085088"/>
-            <a:ext cx="609600" cy="109728"/>
+            <a:off x="4846320" y="4846320"/>
+            <a:ext cx="822960" cy="256032"/>
           </a:xfrm>
           <a:prstGeom prst="rect">
             <a:avLst/>
@@ -3424,34 +5055,65 @@
           <a:noFill/>
         </p:spPr>
         <p:txBody>
-          <a:bodyPr wrap="square" anchor="ctr" lIns="0" rIns="0" tIns="0" bIns="0">
+          <a:bodyPr wrap="none">
             <a:spAutoFit/>
           </a:bodyPr>
           <a:lstStyle/>
           <a:p>
-            <a:pPr algn="ctr"/>
-            <a:r>
-              <a:rPr sz="1000" b="0" i="0">
-                <a:solidFill>
-                  <a:srgbClr val="A35112"/>
-                </a:solidFill>
-                <a:latin typeface="Helvetica Neue"/>
-              </a:rPr>
-              <a:t>route IRQ</a:t>
-            </a:r>
-          </a:p>
-        </p:txBody>
-      </p:sp>
-      <p:sp>
-        <p:nvSpPr>
-          <p:cNvPr id="8" name="TextBox 7"/>
+            <a:pPr algn="ctr">
+              <a:defRPr sz="1000"/>
+            </a:pPr>
+            <a:r>
+              <a:t>IRQ</a:t>
+            </a:r>
+          </a:p>
+        </p:txBody>
+      </p:sp>
+      <p:cxnSp>
+        <p:nvCxnSpPr>
+          <p:cNvPr id="46" name="Connector 45"/>
+          <p:cNvCxnSpPr/>
+          <p:nvPr/>
+        </p:nvCxnSpPr>
+        <p:spPr>
+          <a:xfrm>
+            <a:off x="7223760" y="5029200"/>
+            <a:ext cx="182880" cy="0"/>
+          </a:xfrm>
+          <a:prstGeom prst="line">
+            <a:avLst/>
+          </a:prstGeom>
+          <a:ln w="25400">
+            <a:solidFill>
+              <a:srgbClr val="373737"/>
+            </a:solidFill>
+          </a:ln>
+        </p:spPr>
+        <p:style>
+          <a:lnRef idx="2">
+            <a:schemeClr val="accent1"/>
+          </a:lnRef>
+          <a:fillRef idx="0">
+            <a:schemeClr val="accent1"/>
+          </a:fillRef>
+          <a:effectRef idx="1">
+            <a:schemeClr val="accent1"/>
+          </a:effectRef>
+          <a:fontRef idx="minor">
+            <a:schemeClr val="tx1"/>
+          </a:fontRef>
+        </p:style>
+      </p:cxnSp>
+      <p:sp>
+        <p:nvSpPr>
+          <p:cNvPr id="47" name="TextBox 46"/>
           <p:cNvSpPr txBox="1"/>
           <p:nvPr/>
         </p:nvSpPr>
         <p:spPr>
           <a:xfrm>
-            <a:off x="4218432" y="1085088"/>
-            <a:ext cx="609600" cy="109728"/>
+            <a:off x="7086600" y="4846320"/>
+            <a:ext cx="822960" cy="256032"/>
           </a:xfrm>
           <a:prstGeom prst="rect">
             <a:avLst/>
@@ -3459,43 +5121,104 @@
           <a:noFill/>
         </p:spPr>
         <p:txBody>
-          <a:bodyPr wrap="square" anchor="ctr" lIns="0" rIns="0" tIns="0" bIns="0">
+          <a:bodyPr wrap="none">
             <a:spAutoFit/>
           </a:bodyPr>
           <a:lstStyle/>
           <a:p>
-            <a:pPr algn="ctr"/>
-            <a:r>
-              <a:rPr sz="1000" b="0" i="0">
-                <a:solidFill>
-                  <a:srgbClr val="1F7A72"/>
-                </a:solidFill>
-                <a:latin typeface="Helvetica Neue"/>
-              </a:rPr>
-              <a:t>switch</a:t>
+            <a:pPr algn="ctr">
+              <a:defRPr sz="1000"/>
+            </a:pPr>
+            <a:r>
+              <a:t>resume</a:t>
             </a:r>
           </a:p>
         </p:txBody>
       </p:sp>
       <p:cxnSp>
         <p:nvCxnSpPr>
-          <p:cNvPr id="9" name="Connector 8"/>
+          <p:cNvPr id="48" name="Connector 47"/>
           <p:cNvCxnSpPr/>
           <p:nvPr/>
         </p:nvCxnSpPr>
         <p:spPr>
           <a:xfrm>
-            <a:off x="182880" y="1207008"/>
-            <a:ext cx="5120640" cy="0"/>
+            <a:off x="9418320" y="5029200"/>
+            <a:ext cx="182880" cy="0"/>
           </a:xfrm>
           <a:prstGeom prst="line">
             <a:avLst/>
           </a:prstGeom>
-          <a:ln w="13970">
+          <a:ln w="25400">
             <a:solidFill>
-              <a:srgbClr val="9AA5B1"/>
+              <a:srgbClr val="373737"/>
             </a:solidFill>
-            <a:prstDash val="sysDot"/>
+          </a:ln>
+        </p:spPr>
+        <p:style>
+          <a:lnRef idx="2">
+            <a:schemeClr val="accent1"/>
+          </a:lnRef>
+          <a:fillRef idx="0">
+            <a:schemeClr val="accent1"/>
+          </a:fillRef>
+          <a:effectRef idx="1">
+            <a:schemeClr val="accent1"/>
+          </a:effectRef>
+          <a:fontRef idx="minor">
+            <a:schemeClr val="tx1"/>
+          </a:fontRef>
+        </p:style>
+      </p:cxnSp>
+      <p:sp>
+        <p:nvSpPr>
+          <p:cNvPr id="49" name="TextBox 48"/>
+          <p:cNvSpPr txBox="1"/>
+          <p:nvPr/>
+        </p:nvSpPr>
+        <p:spPr>
+          <a:xfrm>
+            <a:off x="9281160" y="4846320"/>
+            <a:ext cx="822960" cy="256032"/>
+          </a:xfrm>
+          <a:prstGeom prst="rect">
+            <a:avLst/>
+          </a:prstGeom>
+          <a:noFill/>
+        </p:spPr>
+        <p:txBody>
+          <a:bodyPr wrap="none">
+            <a:spAutoFit/>
+          </a:bodyPr>
+          <a:lstStyle/>
+          <a:p>
+            <a:pPr algn="ctr">
+              <a:defRPr sz="1000"/>
+            </a:pPr>
+            <a:r>
+              <a:t>switch</a:t>
+            </a:r>
+          </a:p>
+        </p:txBody>
+      </p:sp>
+      <p:cxnSp>
+        <p:nvCxnSpPr>
+          <p:cNvPr id="50" name="Connector 49"/>
+          <p:cNvCxnSpPr/>
+          <p:nvPr/>
+        </p:nvCxnSpPr>
+        <p:spPr>
+          <a:xfrm>
+            <a:off x="9372600" y="3291840"/>
+            <a:ext cx="0" cy="822960"/>
+          </a:xfrm>
+          <a:prstGeom prst="line">
+            <a:avLst/>
+          </a:prstGeom>
+          <a:ln w="25400">
+            <a:solidFill>
+              <a:srgbClr val="373737"/>
+            </a:solidFill>
           </a:ln>
         </p:spPr>
         <p:style>
@@ -3515,23 +5238,22 @@
       </p:cxnSp>
       <p:cxnSp>
         <p:nvCxnSpPr>
-          <p:cNvPr id="10" name="Connector 9"/>
+          <p:cNvPr id="51" name="Connector 50"/>
           <p:cNvCxnSpPr/>
           <p:nvPr/>
         </p:nvCxnSpPr>
         <p:spPr>
           <a:xfrm>
-            <a:off x="957072" y="1219200"/>
-            <a:ext cx="0" cy="121920"/>
+            <a:off x="11064240" y="3291840"/>
+            <a:ext cx="0" cy="822960"/>
           </a:xfrm>
           <a:prstGeom prst="line">
             <a:avLst/>
           </a:prstGeom>
           <a:ln w="25400">
             <a:solidFill>
-              <a:srgbClr val="2C5AA0"/>
+              <a:srgbClr val="373737"/>
             </a:solidFill>
-            <a:tailEnd type="triangle" w="med" len="med"/>
           </a:ln>
         </p:spPr>
         <p:style>
@@ -3551,23 +5273,22 @@
       </p:cxnSp>
       <p:cxnSp>
         <p:nvCxnSpPr>
-          <p:cNvPr id="11" name="Connector 10"/>
+          <p:cNvPr id="52" name="Connector 51"/>
           <p:cNvCxnSpPr/>
           <p:nvPr/>
         </p:nvCxnSpPr>
         <p:spPr>
           <a:xfrm>
-            <a:off x="2743200" y="1219200"/>
-            <a:ext cx="0" cy="121920"/>
+            <a:off x="12710159" y="3291840"/>
+            <a:ext cx="0" cy="822960"/>
           </a:xfrm>
           <a:prstGeom prst="line">
             <a:avLst/>
           </a:prstGeom>
           <a:ln w="25400">
             <a:solidFill>
-              <a:srgbClr val="A35112"/>
+              <a:srgbClr val="373737"/>
             </a:solidFill>
-            <a:tailEnd type="triangle" w="med" len="med"/>
           </a:ln>
         </p:spPr>
         <p:style>
@@ -3585,98 +5306,16 @@
           </a:fontRef>
         </p:style>
       </p:cxnSp>
-      <p:cxnSp>
-        <p:nvCxnSpPr>
-          <p:cNvPr id="12" name="Connector 11"/>
-          <p:cNvCxnSpPr/>
-          <p:nvPr/>
-        </p:nvCxnSpPr>
-        <p:spPr>
-          <a:xfrm>
-            <a:off x="4523232" y="1219200"/>
-            <a:ext cx="0" cy="121920"/>
-          </a:xfrm>
-          <a:prstGeom prst="line">
-            <a:avLst/>
-          </a:prstGeom>
-          <a:ln w="25400">
-            <a:solidFill>
-              <a:srgbClr val="1F7A72"/>
-            </a:solidFill>
-            <a:tailEnd type="triangle" w="med" len="med"/>
-          </a:ln>
-        </p:spPr>
-        <p:style>
-          <a:lnRef idx="2">
-            <a:schemeClr val="accent1"/>
-          </a:lnRef>
-          <a:fillRef idx="0">
-            <a:schemeClr val="accent1"/>
-          </a:fillRef>
-          <a:effectRef idx="1">
-            <a:schemeClr val="accent1"/>
-          </a:effectRef>
-          <a:fontRef idx="minor">
-            <a:schemeClr val="tx1"/>
-          </a:fontRef>
-        </p:style>
-      </p:cxnSp>
-      <p:sp>
-        <p:nvSpPr>
-          <p:cNvPr id="13" name="Rounded Rectangle 12"/>
-          <p:cNvSpPr/>
-          <p:nvPr/>
-        </p:nvSpPr>
-        <p:spPr>
-          <a:xfrm>
-            <a:off x="182880" y="1353312"/>
-            <a:ext cx="5120640" cy="1402080"/>
-          </a:xfrm>
-          <a:prstGeom prst="roundRect">
-            <a:avLst/>
-          </a:prstGeom>
-          <a:solidFill>
-            <a:srgbClr val="F1EAF9"/>
-          </a:solidFill>
-          <a:ln w="22225">
-            <a:solidFill>
-              <a:srgbClr val="6A4C93"/>
-            </a:solidFill>
-          </a:ln>
-          <a:effectLst/>
-        </p:spPr>
-        <p:style>
-          <a:lnRef idx="1">
-            <a:schemeClr val="accent1"/>
-          </a:lnRef>
-          <a:fillRef idx="3">
-            <a:schemeClr val="accent1"/>
-          </a:fillRef>
-          <a:effectRef idx="2">
-            <a:schemeClr val="accent1"/>
-          </a:effectRef>
-          <a:fontRef idx="minor">
-            <a:schemeClr val="lt1"/>
-          </a:fontRef>
-        </p:style>
-        <p:txBody>
-          <a:bodyPr rtlCol="0" anchor="ctr"/>
-          <a:lstStyle/>
-          <a:p>
-            <a:pPr algn="ctr"/>
-          </a:p>
-        </p:txBody>
-      </p:sp>
-      <p:sp>
-        <p:nvSpPr>
-          <p:cNvPr id="14" name="TextBox 13"/>
+      <p:sp>
+        <p:nvSpPr>
+          <p:cNvPr id="53" name="TextBox 52"/>
           <p:cNvSpPr txBox="1"/>
           <p:nvPr/>
         </p:nvSpPr>
         <p:spPr>
           <a:xfrm>
-            <a:off x="182880" y="1438656"/>
-            <a:ext cx="5120640" cy="158496"/>
+            <a:off x="1097280" y="3794760"/>
+            <a:ext cx="1097280" cy="274320"/>
           </a:xfrm>
           <a:prstGeom prst="rect">
             <a:avLst/>
@@ -3684,34 +5323,34 @@
           <a:noFill/>
         </p:spPr>
         <p:txBody>
-          <a:bodyPr wrap="square" anchor="ctr" lIns="0" rIns="0" tIns="0" bIns="0">
+          <a:bodyPr wrap="none">
             <a:spAutoFit/>
           </a:bodyPr>
           <a:lstStyle/>
           <a:p>
-            <a:pPr algn="ctr"/>
-            <a:r>
-              <a:rPr sz="1500" b="1" i="0">
+            <a:pPr algn="ctr">
+              <a:defRPr sz="1100" b="1">
                 <a:solidFill>
-                  <a:srgbClr val="4A3568"/>
+                  <a:srgbClr val="191919"/>
                 </a:solidFill>
-                <a:latin typeface="Helvetica Neue"/>
-              </a:rPr>
-              <a:t>RTOS Kernel — Scheduler / Interrupt Dispatcher</a:t>
-            </a:r>
-          </a:p>
-        </p:txBody>
-      </p:sp>
-      <p:sp>
-        <p:nvSpPr>
-          <p:cNvPr id="15" name="TextBox 14"/>
+              </a:defRPr>
+            </a:pPr>
+            <a:r>
+              <a:t>User</a:t>
+            </a:r>
+          </a:p>
+        </p:txBody>
+      </p:sp>
+      <p:sp>
+        <p:nvSpPr>
+          <p:cNvPr id="54" name="TextBox 53"/>
           <p:cNvSpPr txBox="1"/>
           <p:nvPr/>
         </p:nvSpPr>
         <p:spPr>
           <a:xfrm>
-            <a:off x="182880" y="1609344"/>
-            <a:ext cx="5120640" cy="121920"/>
+            <a:off x="3566160" y="3794760"/>
+            <a:ext cx="1097280" cy="274320"/>
           </a:xfrm>
           <a:prstGeom prst="rect">
             <a:avLst/>
@@ -3719,124 +5358,69 @@
           <a:noFill/>
         </p:spPr>
         <p:txBody>
-          <a:bodyPr wrap="square" anchor="ctr" lIns="0" rIns="0" tIns="0" bIns="0">
+          <a:bodyPr wrap="none">
             <a:spAutoFit/>
           </a:bodyPr>
           <a:lstStyle/>
           <a:p>
-            <a:pPr algn="ctr"/>
-            <a:r>
-              <a:rPr sz="1050" b="0" i="0">
+            <a:pPr algn="ctr">
+              <a:defRPr sz="1100" b="1">
                 <a:solidFill>
-                  <a:srgbClr val="4A3568"/>
+                  <a:srgbClr val="191919"/>
                 </a:solidFill>
-                <a:latin typeface="Helvetica Neue"/>
-              </a:rPr>
-              <a:t>tasks and ISRs execute on top of the RTOS runtime</a:t>
-            </a:r>
-          </a:p>
-        </p:txBody>
-      </p:sp>
-      <p:sp>
-        <p:nvSpPr>
-          <p:cNvPr id="16" name="Oval 15"/>
-          <p:cNvSpPr/>
-          <p:nvPr/>
-        </p:nvSpPr>
-        <p:spPr>
-          <a:xfrm>
-            <a:off x="2401824" y="1761744"/>
-            <a:ext cx="682752" cy="682752"/>
-          </a:xfrm>
-          <a:prstGeom prst="ellipse">
+              </a:defRPr>
+            </a:pPr>
+            <a:r>
+              <a:t>RTOS</a:t>
+            </a:r>
+          </a:p>
+        </p:txBody>
+      </p:sp>
+      <p:sp>
+        <p:nvSpPr>
+          <p:cNvPr id="55" name="TextBox 54"/>
+          <p:cNvSpPr txBox="1"/>
+          <p:nvPr/>
+        </p:nvSpPr>
+        <p:spPr>
+          <a:xfrm>
+            <a:off x="5943600" y="3794760"/>
+            <a:ext cx="1097280" cy="274320"/>
+          </a:xfrm>
+          <a:prstGeom prst="rect">
             <a:avLst/>
           </a:prstGeom>
           <a:noFill/>
-          <a:ln w="38100">
-            <a:solidFill>
-              <a:srgbClr val="6A4C93"/>
-            </a:solidFill>
-          </a:ln>
-          <a:effectLst/>
-        </p:spPr>
-        <p:style>
-          <a:lnRef idx="1">
-            <a:schemeClr val="accent1"/>
-          </a:lnRef>
-          <a:fillRef idx="3">
-            <a:schemeClr val="accent1"/>
-          </a:fillRef>
-          <a:effectRef idx="2">
-            <a:schemeClr val="accent1"/>
-          </a:effectRef>
-          <a:fontRef idx="minor">
-            <a:schemeClr val="lt1"/>
-          </a:fontRef>
-        </p:style>
-        <p:txBody>
-          <a:bodyPr rtlCol="0" anchor="ctr" wrap="none">
-            <a:noAutofit/>
-          </a:bodyPr>
-          <a:lstStyle/>
-          <a:p>
-            <a:pPr algn="ctr"/>
-            <a:r>
-              <a:rPr sz="1000" b="1" i="0">
-                <a:solidFill>
-                  <a:srgbClr val="4A3568"/>
-                </a:solidFill>
-                <a:latin typeface="Helvetica Neue"/>
-              </a:rPr>
-              <a:t>dispatch</a:t>
-            </a:r>
-          </a:p>
-        </p:txBody>
-      </p:sp>
-      <p:sp>
-        <p:nvSpPr>
-          <p:cNvPr id="17" name="TextBox 16"/>
-          <p:cNvSpPr txBox="1"/>
-          <p:nvPr/>
-        </p:nvSpPr>
-        <p:spPr>
-          <a:xfrm>
-            <a:off x="182880" y="2011680"/>
-            <a:ext cx="792480" cy="243840"/>
-          </a:xfrm>
-          <a:prstGeom prst="rect">
-            <a:avLst/>
-          </a:prstGeom>
-          <a:noFill/>
-        </p:spPr>
-        <p:txBody>
-          <a:bodyPr wrap="square" anchor="ctr" lIns="0" rIns="0" tIns="0" bIns="0">
+        </p:spPr>
+        <p:txBody>
+          <a:bodyPr wrap="none">
             <a:spAutoFit/>
           </a:bodyPr>
           <a:lstStyle/>
           <a:p>
-            <a:pPr algn="l"/>
-            <a:r>
-              <a:rPr sz="1100" b="0" i="0">
+            <a:pPr algn="ctr">
+              <a:defRPr sz="1100" b="1">
                 <a:solidFill>
-                  <a:srgbClr val="4A3568"/>
+                  <a:srgbClr val="191919"/>
                 </a:solidFill>
-                <a:latin typeface="Helvetica Neue"/>
-              </a:rPr>
-              <a:t>preempt (1)</a:t>
-            </a:r>
-          </a:p>
-        </p:txBody>
-      </p:sp>
-      <p:sp>
-        <p:nvSpPr>
-          <p:cNvPr id="18" name="TextBox 17"/>
+              </a:defRPr>
+            </a:pPr>
+            <a:r>
+              <a:t>IRQ</a:t>
+            </a:r>
+          </a:p>
+        </p:txBody>
+      </p:sp>
+      <p:sp>
+        <p:nvSpPr>
+          <p:cNvPr id="56" name="TextBox 55"/>
           <p:cNvSpPr txBox="1"/>
           <p:nvPr/>
         </p:nvSpPr>
         <p:spPr>
           <a:xfrm>
-            <a:off x="4206240" y="2011680"/>
-            <a:ext cx="914400" cy="243840"/>
+            <a:off x="8046720" y="3794760"/>
+            <a:ext cx="1097280" cy="274320"/>
           </a:xfrm>
           <a:prstGeom prst="rect">
             <a:avLst/>
@@ -3844,34 +5428,34 @@
           <a:noFill/>
         </p:spPr>
         <p:txBody>
-          <a:bodyPr wrap="square" anchor="ctr" lIns="0" rIns="0" tIns="0" bIns="0">
+          <a:bodyPr wrap="none">
             <a:spAutoFit/>
           </a:bodyPr>
           <a:lstStyle/>
           <a:p>
-            <a:pPr algn="r"/>
-            <a:r>
-              <a:rPr sz="1100" b="0" i="0">
+            <a:pPr algn="ctr">
+              <a:defRPr sz="1100" b="1">
                 <a:solidFill>
-                  <a:srgbClr val="4A3568"/>
+                  <a:srgbClr val="191919"/>
                 </a:solidFill>
-                <a:latin typeface="Helvetica Neue"/>
-              </a:rPr>
-              <a:t>context switch (2)</a:t>
-            </a:r>
-          </a:p>
-        </p:txBody>
-      </p:sp>
-      <p:sp>
-        <p:nvSpPr>
-          <p:cNvPr id="19" name="TextBox 18"/>
+              </a:defRPr>
+            </a:pPr>
+            <a:r>
+              <a:t>Context switch</a:t>
+            </a:r>
+          </a:p>
+        </p:txBody>
+      </p:sp>
+      <p:sp>
+        <p:nvSpPr>
+          <p:cNvPr id="57" name="TextBox 56"/>
           <p:cNvSpPr txBox="1"/>
           <p:nvPr/>
         </p:nvSpPr>
         <p:spPr>
           <a:xfrm>
-            <a:off x="182880" y="2529840"/>
-            <a:ext cx="5120640" cy="121920"/>
+            <a:off x="11064240" y="3794760"/>
+            <a:ext cx="1097280" cy="274320"/>
           </a:xfrm>
           <a:prstGeom prst="rect">
             <a:avLst/>
@@ -3879,70 +5463,34 @@
           <a:noFill/>
         </p:spPr>
         <p:txBody>
-          <a:bodyPr wrap="square" anchor="ctr" lIns="0" rIns="0" tIns="0" bIns="0">
+          <a:bodyPr wrap="none">
             <a:spAutoFit/>
           </a:bodyPr>
           <a:lstStyle/>
           <a:p>
-            <a:pPr algn="ctr"/>
-            <a:r>
-              <a:rPr sz="1000" b="0" i="1">
+            <a:pPr algn="ctr">
+              <a:defRPr sz="1100" b="1">
                 <a:solidFill>
-                  <a:srgbClr val="4A3568"/>
+                  <a:srgbClr val="191919"/>
                 </a:solidFill>
-                <a:latin typeface="Helvetica Neue"/>
-              </a:rPr>
-              <a:t>each dispatch / switch / IRQ routing is authenticated</a:t>
-            </a:r>
-          </a:p>
-        </p:txBody>
-      </p:sp>
-      <p:cxnSp>
-        <p:nvCxnSpPr>
-          <p:cNvPr id="20" name="Connector 19"/>
-          <p:cNvCxnSpPr/>
-          <p:nvPr/>
-        </p:nvCxnSpPr>
-        <p:spPr>
-          <a:xfrm>
-            <a:off x="2743200" y="2755392"/>
-            <a:ext cx="0" cy="207264"/>
-          </a:xfrm>
-          <a:prstGeom prst="line">
-            <a:avLst/>
-          </a:prstGeom>
-          <a:ln w="28575">
-            <a:solidFill>
-              <a:srgbClr val="2F7D32"/>
-            </a:solidFill>
-            <a:tailEnd type="triangle" w="med" len="med"/>
-          </a:ln>
-        </p:spPr>
-        <p:style>
-          <a:lnRef idx="2">
-            <a:schemeClr val="accent1"/>
-          </a:lnRef>
-          <a:fillRef idx="0">
-            <a:schemeClr val="accent1"/>
-          </a:fillRef>
-          <a:effectRef idx="1">
-            <a:schemeClr val="accent1"/>
-          </a:effectRef>
-          <a:fontRef idx="minor">
-            <a:schemeClr val="tx1"/>
-          </a:fontRef>
-        </p:style>
-      </p:cxnSp>
-      <p:sp>
-        <p:nvSpPr>
-          <p:cNvPr id="21" name="TextBox 20"/>
+              </a:defRPr>
+            </a:pPr>
+            <a:r>
+              <a:t>Secure monitor/engine</a:t>
+            </a:r>
+          </a:p>
+        </p:txBody>
+      </p:sp>
+      <p:sp>
+        <p:nvSpPr>
+          <p:cNvPr id="58" name="TextBox 57"/>
           <p:cNvSpPr txBox="1"/>
           <p:nvPr/>
         </p:nvSpPr>
         <p:spPr>
           <a:xfrm>
-            <a:off x="2834640" y="2791968"/>
-            <a:ext cx="1584960" cy="121920"/>
+            <a:off x="731520" y="6492240"/>
+            <a:ext cx="13533120" cy="365760"/>
           </a:xfrm>
           <a:prstGeom prst="rect">
             <a:avLst/>
@@ -3950,80 +5498,34 @@
           <a:noFill/>
         </p:spPr>
         <p:txBody>
-          <a:bodyPr wrap="square" anchor="ctr" lIns="0" rIns="0" tIns="0" bIns="0">
+          <a:bodyPr wrap="none">
             <a:spAutoFit/>
           </a:bodyPr>
           <a:lstStyle/>
           <a:p>
-            <a:pPr algn="l"/>
-            <a:r>
-              <a:rPr sz="1000" b="0" i="0">
+            <a:pPr algn="ctr">
+              <a:defRPr sz="1100" b="1">
                 <a:solidFill>
-                  <a:srgbClr val="215C24"/>
+                  <a:srgbClr val="191919"/>
                 </a:solidFill>
-                <a:latin typeface="Helvetica Neue"/>
-              </a:rPr>
-              <a:t>suspend + save state</a:t>
-            </a:r>
-          </a:p>
-        </p:txBody>
-      </p:sp>
-      <p:sp>
-        <p:nvSpPr>
-          <p:cNvPr id="22" name="Rounded Rectangle 21"/>
-          <p:cNvSpPr/>
-          <p:nvPr/>
-        </p:nvSpPr>
-        <p:spPr>
-          <a:xfrm>
-            <a:off x="182880" y="2999232"/>
-            <a:ext cx="5120640" cy="2011680"/>
-          </a:xfrm>
-          <a:prstGeom prst="roundRect">
-            <a:avLst/>
-          </a:prstGeom>
-          <a:solidFill>
-            <a:srgbClr val="EAF6EA"/>
-          </a:solidFill>
-          <a:ln w="22225">
-            <a:solidFill>
-              <a:srgbClr val="2F7D32"/>
-            </a:solidFill>
-          </a:ln>
-          <a:effectLst/>
-        </p:spPr>
-        <p:style>
-          <a:lnRef idx="1">
-            <a:schemeClr val="accent1"/>
-          </a:lnRef>
-          <a:fillRef idx="3">
-            <a:schemeClr val="accent1"/>
-          </a:fillRef>
-          <a:effectRef idx="2">
-            <a:schemeClr val="accent1"/>
-          </a:effectRef>
-          <a:fontRef idx="minor">
-            <a:schemeClr val="lt1"/>
-          </a:fontRef>
-        </p:style>
-        <p:txBody>
-          <a:bodyPr rtlCol="0" anchor="ctr"/>
-          <a:lstStyle/>
-          <a:p>
-            <a:pPr algn="ctr"/>
-          </a:p>
-        </p:txBody>
-      </p:sp>
-      <p:sp>
-        <p:nvSpPr>
-          <p:cNvPr id="23" name="TextBox 22"/>
+              </a:defRPr>
+            </a:pPr>
+            <a:r>
+              <a:t>Normal-world execution includes the RTOS kernel; the TrustZone secure world authenticates each interleaving and binds the PA state to the active task/ISR context.</a:t>
+            </a:r>
+          </a:p>
+        </p:txBody>
+      </p:sp>
+      <p:sp>
+        <p:nvSpPr>
+          <p:cNvPr id="59" name="TextBox 58"/>
           <p:cNvSpPr txBox="1"/>
           <p:nvPr/>
         </p:nvSpPr>
         <p:spPr>
           <a:xfrm>
-            <a:off x="182880" y="3084576"/>
-            <a:ext cx="5120640" cy="158496"/>
+            <a:off x="822960" y="6217920"/>
+            <a:ext cx="548640" cy="228600"/>
           </a:xfrm>
           <a:prstGeom prst="rect">
             <a:avLst/>
@@ -4031,34 +5533,34 @@
           <a:noFill/>
         </p:spPr>
         <p:txBody>
-          <a:bodyPr wrap="square" anchor="ctr" lIns="0" rIns="0" tIns="0" bIns="0">
+          <a:bodyPr wrap="none">
             <a:spAutoFit/>
           </a:bodyPr>
           <a:lstStyle/>
           <a:p>
-            <a:pPr algn="ctr"/>
-            <a:r>
-              <a:rPr sz="1500" b="1" i="0">
+            <a:pPr algn="ctr">
+              <a:defRPr sz="1000" b="0">
                 <a:solidFill>
-                  <a:srgbClr val="215C24"/>
+                  <a:srgbClr val="191919"/>
                 </a:solidFill>
-                <a:latin typeface="Helvetica Neue"/>
-              </a:rPr>
-              <a:t>TrustZone Secure World</a:t>
-            </a:r>
-          </a:p>
-        </p:txBody>
-      </p:sp>
-      <p:sp>
-        <p:nvSpPr>
-          <p:cNvPr id="24" name="TextBox 23"/>
+              </a:defRPr>
+            </a:pPr>
+            <a:r>
+              <a:t>t0</a:t>
+            </a:r>
+          </a:p>
+        </p:txBody>
+      </p:sp>
+      <p:sp>
+        <p:nvSpPr>
+          <p:cNvPr id="60" name="TextBox 59"/>
           <p:cNvSpPr txBox="1"/>
           <p:nvPr/>
         </p:nvSpPr>
         <p:spPr>
           <a:xfrm>
-            <a:off x="182880" y="3255264"/>
-            <a:ext cx="5120640" cy="182880"/>
+            <a:off x="1920240" y="6217920"/>
+            <a:ext cx="548640" cy="228600"/>
           </a:xfrm>
           <a:prstGeom prst="rect">
             <a:avLst/>
@@ -4066,144 +5568,34 @@
           <a:noFill/>
         </p:spPr>
         <p:txBody>
-          <a:bodyPr wrap="square" anchor="ctr" lIns="0" rIns="0" tIns="0" bIns="0">
+          <a:bodyPr wrap="none">
             <a:spAutoFit/>
           </a:bodyPr>
           <a:lstStyle/>
           <a:p>
-            <a:pPr algn="ctr"/>
-            <a:r>
-              <a:rPr sz="1000" b="0" i="0">
+            <a:pPr algn="ctr">
+              <a:defRPr sz="1000" b="0">
                 <a:solidFill>
-                  <a:srgbClr val="215C24"/>
+                  <a:srgbClr val="191919"/>
                 </a:solidFill>
-                <a:latin typeface="Helvetica Neue"/>
-              </a:rPr>
-              <a:t>protected per-context measurement states (Secure NVIC + measurement stack)</a:t>
-            </a:r>
-          </a:p>
-        </p:txBody>
-      </p:sp>
-      <p:sp>
-        <p:nvSpPr>
-          <p:cNvPr id="25" name="Rounded Rectangle 24"/>
-          <p:cNvSpPr/>
-          <p:nvPr/>
-        </p:nvSpPr>
-        <p:spPr>
-          <a:xfrm>
-            <a:off x="426720" y="3505200"/>
-            <a:ext cx="2011680" cy="304800"/>
-          </a:xfrm>
-          <a:prstGeom prst="roundRect">
-            <a:avLst/>
-          </a:prstGeom>
-          <a:solidFill>
-            <a:srgbClr val="FFE1B8"/>
-          </a:solidFill>
-          <a:ln w="17780">
-            <a:solidFill>
-              <a:srgbClr val="A35112"/>
-            </a:solidFill>
-          </a:ln>
-          <a:effectLst/>
-        </p:spPr>
-        <p:style>
-          <a:lnRef idx="1">
-            <a:schemeClr val="accent1"/>
-          </a:lnRef>
-          <a:fillRef idx="3">
-            <a:schemeClr val="accent1"/>
-          </a:fillRef>
-          <a:effectRef idx="2">
-            <a:schemeClr val="accent1"/>
-          </a:effectRef>
-          <a:fontRef idx="minor">
-            <a:schemeClr val="lt1"/>
-          </a:fontRef>
-        </p:style>
-        <p:txBody>
-          <a:bodyPr rtlCol="0" anchor="ctr" wrap="square" lIns="50800" rIns="50800" tIns="25400" bIns="25400"/>
-          <a:lstStyle/>
-          <a:p>
-            <a:pPr algn="ctr"/>
-            <a:r>
-              <a:rPr sz="1150" b="0" i="0">
-                <a:solidFill>
-                  <a:srgbClr val="1A1A1A"/>
-                </a:solidFill>
-                <a:latin typeface="Helvetica Neue"/>
-              </a:rPr>
-              <a:t>M_ISR (active)</a:t>
-            </a:r>
-          </a:p>
-        </p:txBody>
-      </p:sp>
-      <p:sp>
-        <p:nvSpPr>
-          <p:cNvPr id="26" name="Rounded Rectangle 25"/>
-          <p:cNvSpPr/>
-          <p:nvPr/>
-        </p:nvSpPr>
-        <p:spPr>
-          <a:xfrm>
-            <a:off x="426720" y="3846576"/>
-            <a:ext cx="2011680" cy="304800"/>
-          </a:xfrm>
-          <a:prstGeom prst="roundRect">
-            <a:avLst/>
-          </a:prstGeom>
-          <a:solidFill>
-            <a:srgbClr val="CFE0F5"/>
-          </a:solidFill>
-          <a:ln w="17780">
-            <a:solidFill>
-              <a:srgbClr val="2C5AA0"/>
-            </a:solidFill>
-          </a:ln>
-          <a:effectLst/>
-        </p:spPr>
-        <p:style>
-          <a:lnRef idx="1">
-            <a:schemeClr val="accent1"/>
-          </a:lnRef>
-          <a:fillRef idx="3">
-            <a:schemeClr val="accent1"/>
-          </a:fillRef>
-          <a:effectRef idx="2">
-            <a:schemeClr val="accent1"/>
-          </a:effectRef>
-          <a:fontRef idx="minor">
-            <a:schemeClr val="lt1"/>
-          </a:fontRef>
-        </p:style>
-        <p:txBody>
-          <a:bodyPr rtlCol="0" anchor="ctr" wrap="square" lIns="50800" rIns="50800" tIns="25400" bIns="25400"/>
-          <a:lstStyle/>
-          <a:p>
-            <a:pPr algn="ctr"/>
-            <a:r>
-              <a:rPr sz="1150" b="0" i="0">
-                <a:solidFill>
-                  <a:srgbClr val="1A1A1A"/>
-                </a:solidFill>
-                <a:latin typeface="Helvetica Neue"/>
-              </a:rPr>
-              <a:t>M_TaskA (suspended)</a:t>
-            </a:r>
-          </a:p>
-        </p:txBody>
-      </p:sp>
-      <p:sp>
-        <p:nvSpPr>
-          <p:cNvPr id="27" name="TextBox 26"/>
+              </a:defRPr>
+            </a:pPr>
+            <a:r>
+              <a:t>t1</a:t>
+            </a:r>
+          </a:p>
+        </p:txBody>
+      </p:sp>
+      <p:sp>
+        <p:nvSpPr>
+          <p:cNvPr id="61" name="TextBox 60"/>
           <p:cNvSpPr txBox="1"/>
           <p:nvPr/>
         </p:nvSpPr>
         <p:spPr>
           <a:xfrm>
-            <a:off x="426720" y="4181856"/>
-            <a:ext cx="2072640" cy="121920"/>
+            <a:off x="3657600" y="6217920"/>
+            <a:ext cx="548640" cy="228600"/>
           </a:xfrm>
           <a:prstGeom prst="rect">
             <a:avLst/>
@@ -4211,174 +5603,34 @@
           <a:noFill/>
         </p:spPr>
         <p:txBody>
-          <a:bodyPr wrap="square" anchor="ctr" lIns="0" rIns="0" tIns="0" bIns="0">
+          <a:bodyPr wrap="none">
             <a:spAutoFit/>
           </a:bodyPr>
           <a:lstStyle/>
           <a:p>
-            <a:pPr algn="l"/>
-            <a:r>
-              <a:rPr sz="1000" b="0" i="0">
+            <a:pPr algn="ctr">
+              <a:defRPr sz="1000" b="0">
                 <a:solidFill>
-                  <a:srgbClr val="215C24"/>
+                  <a:srgbClr val="191919"/>
                 </a:solidFill>
-                <a:latin typeface="Helvetica Neue"/>
-              </a:rPr>
-              <a:t>↑ push on entry  •  pop + verify on return ↓</a:t>
-            </a:r>
-          </a:p>
-        </p:txBody>
-      </p:sp>
-      <p:sp>
-        <p:nvSpPr>
-          <p:cNvPr id="28" name="Rounded Rectangle 27"/>
-          <p:cNvSpPr/>
-          <p:nvPr/>
-        </p:nvSpPr>
-        <p:spPr>
-          <a:xfrm>
-            <a:off x="2621280" y="3505200"/>
-            <a:ext cx="2316480" cy="914400"/>
-          </a:xfrm>
-          <a:prstGeom prst="roundRect">
-            <a:avLst/>
-          </a:prstGeom>
-          <a:solidFill>
-            <a:srgbClr val="FFFFFF"/>
-          </a:solidFill>
-          <a:ln w="13970">
-            <a:solidFill>
-              <a:srgbClr val="BFE0BF"/>
-            </a:solidFill>
-          </a:ln>
-          <a:effectLst/>
-        </p:spPr>
-        <p:style>
-          <a:lnRef idx="1">
-            <a:schemeClr val="accent1"/>
-          </a:lnRef>
-          <a:fillRef idx="3">
-            <a:schemeClr val="accent1"/>
-          </a:fillRef>
-          <a:effectRef idx="2">
-            <a:schemeClr val="accent1"/>
-          </a:effectRef>
-          <a:fontRef idx="minor">
-            <a:schemeClr val="lt1"/>
-          </a:fontRef>
-        </p:style>
-        <p:txBody>
-          <a:bodyPr rtlCol="0" anchor="t" wrap="square" lIns="50800" rIns="50800" tIns="25400" bIns="25400"/>
-          <a:lstStyle/>
-          <a:p>
-            <a:pPr algn="ctr"/>
-            <a:r>
-              <a:rPr sz="1200" b="1" i="0">
-                <a:solidFill>
-                  <a:srgbClr val="1A1A1A"/>
-                </a:solidFill>
-                <a:latin typeface="Helvetica Neue"/>
-              </a:rPr>
-              <a:t>Cryptographically bound</a:t>
-            </a:r>
-          </a:p>
-          <a:p>
-            <a:pPr algn="ctr"/>
-            <a:r>
-              <a:rPr sz="1000" b="0" i="0">
-                <a:solidFill>
-                  <a:srgbClr val="1A1A1A"/>
-                </a:solidFill>
-                <a:latin typeface="Helvetica Neue"/>
-              </a:rPr>
-              <a:t>Each state (PA / MAC) is tied to its context identity + transition history: a compromised task or ISR cannot substitute, replay, or reuse another context’s measurement state.</a:t>
-            </a:r>
-          </a:p>
-        </p:txBody>
-      </p:sp>
-      <p:cxnSp>
-        <p:nvCxnSpPr>
-          <p:cNvPr id="29" name="Connector 28"/>
-          <p:cNvCxnSpPr/>
-          <p:nvPr/>
-        </p:nvCxnSpPr>
-        <p:spPr>
-          <a:xfrm flipV="1">
-            <a:off x="5382768" y="243840"/>
-            <a:ext cx="0" cy="4511040"/>
-          </a:xfrm>
-          <a:prstGeom prst="line">
-            <a:avLst/>
-          </a:prstGeom>
-          <a:ln w="22225">
-            <a:solidFill>
-              <a:srgbClr val="A35112"/>
-            </a:solidFill>
-            <a:tailEnd type="triangle"/>
-            <a:prstDash val="dash"/>
-          </a:ln>
-        </p:spPr>
-        <p:style>
-          <a:lnRef idx="2">
-            <a:schemeClr val="accent1"/>
-          </a:lnRef>
-          <a:fillRef idx="0">
-            <a:schemeClr val="accent1"/>
-          </a:fillRef>
-          <a:effectRef idx="1">
-            <a:schemeClr val="accent1"/>
-          </a:effectRef>
-          <a:fontRef idx="minor">
-            <a:schemeClr val="tx1"/>
-          </a:fontRef>
-        </p:style>
-      </p:cxnSp>
-      <p:cxnSp>
-        <p:nvCxnSpPr>
-          <p:cNvPr id="30" name="Connector 29"/>
-          <p:cNvCxnSpPr/>
-          <p:nvPr/>
-        </p:nvCxnSpPr>
-        <p:spPr>
-          <a:xfrm>
-            <a:off x="2743200" y="5010912"/>
-            <a:ext cx="0" cy="195072"/>
-          </a:xfrm>
-          <a:prstGeom prst="line">
-            <a:avLst/>
-          </a:prstGeom>
-          <a:ln w="28575">
-            <a:solidFill>
-              <a:srgbClr val="333333"/>
-            </a:solidFill>
-            <a:tailEnd type="triangle" w="med" len="med"/>
-          </a:ln>
-        </p:spPr>
-        <p:style>
-          <a:lnRef idx="2">
-            <a:schemeClr val="accent1"/>
-          </a:lnRef>
-          <a:fillRef idx="0">
-            <a:schemeClr val="accent1"/>
-          </a:fillRef>
-          <a:effectRef idx="1">
-            <a:schemeClr val="accent1"/>
-          </a:effectRef>
-          <a:fontRef idx="minor">
-            <a:schemeClr val="tx1"/>
-          </a:fontRef>
-        </p:style>
-      </p:cxnSp>
-      <p:sp>
-        <p:nvSpPr>
-          <p:cNvPr id="31" name="TextBox 30"/>
+              </a:defRPr>
+            </a:pPr>
+            <a:r>
+              <a:t>t2</a:t>
+            </a:r>
+          </a:p>
+        </p:txBody>
+      </p:sp>
+      <p:sp>
+        <p:nvSpPr>
+          <p:cNvPr id="62" name="TextBox 61"/>
           <p:cNvSpPr txBox="1"/>
           <p:nvPr/>
         </p:nvSpPr>
         <p:spPr>
           <a:xfrm>
-            <a:off x="2834640" y="5047488"/>
-            <a:ext cx="1341120" cy="121920"/>
+            <a:off x="5669280" y="6217920"/>
+            <a:ext cx="548640" cy="228600"/>
           </a:xfrm>
           <a:prstGeom prst="rect">
             <a:avLst/>
@@ -4386,80 +5638,34 @@
           <a:noFill/>
         </p:spPr>
         <p:txBody>
-          <a:bodyPr wrap="square" anchor="ctr" lIns="0" rIns="0" tIns="0" bIns="0">
+          <a:bodyPr wrap="none">
             <a:spAutoFit/>
           </a:bodyPr>
           <a:lstStyle/>
           <a:p>
-            <a:pPr algn="l"/>
-            <a:r>
-              <a:rPr sz="1000" b="0" i="0">
+            <a:pPr algn="ctr">
+              <a:defRPr sz="1000" b="0">
                 <a:solidFill>
-                  <a:srgbClr val="1A1A1A"/>
+                  <a:srgbClr val="191919"/>
                 </a:solidFill>
-                <a:latin typeface="Helvetica Neue"/>
-              </a:rPr>
-              <a:t>authenticated report</a:t>
-            </a:r>
-          </a:p>
-        </p:txBody>
-      </p:sp>
-      <p:sp>
-        <p:nvSpPr>
-          <p:cNvPr id="32" name="Rounded Rectangle 31"/>
-          <p:cNvSpPr/>
-          <p:nvPr/>
-        </p:nvSpPr>
-        <p:spPr>
-          <a:xfrm>
-            <a:off x="792480" y="5242560"/>
-            <a:ext cx="3901440" cy="731520"/>
-          </a:xfrm>
-          <a:prstGeom prst="roundRect">
-            <a:avLst/>
-          </a:prstGeom>
-          <a:solidFill>
-            <a:srgbClr val="F8F6FC"/>
-          </a:solidFill>
-          <a:ln w="22225">
-            <a:solidFill>
-              <a:srgbClr val="6A4C93"/>
-            </a:solidFill>
-          </a:ln>
-          <a:effectLst/>
-        </p:spPr>
-        <p:style>
-          <a:lnRef idx="1">
-            <a:schemeClr val="accent1"/>
-          </a:lnRef>
-          <a:fillRef idx="3">
-            <a:schemeClr val="accent1"/>
-          </a:fillRef>
-          <a:effectRef idx="2">
-            <a:schemeClr val="accent1"/>
-          </a:effectRef>
-          <a:fontRef idx="minor">
-            <a:schemeClr val="lt1"/>
-          </a:fontRef>
-        </p:style>
-        <p:txBody>
-          <a:bodyPr rtlCol="0" anchor="ctr"/>
-          <a:lstStyle/>
-          <a:p>
-            <a:pPr algn="ctr"/>
-          </a:p>
-        </p:txBody>
-      </p:sp>
-      <p:sp>
-        <p:nvSpPr>
-          <p:cNvPr id="33" name="TextBox 32"/>
+              </a:defRPr>
+            </a:pPr>
+            <a:r>
+              <a:t>t3</a:t>
+            </a:r>
+          </a:p>
+        </p:txBody>
+      </p:sp>
+      <p:sp>
+        <p:nvSpPr>
+          <p:cNvPr id="63" name="TextBox 62"/>
           <p:cNvSpPr txBox="1"/>
           <p:nvPr/>
         </p:nvSpPr>
         <p:spPr>
           <a:xfrm>
-            <a:off x="792480" y="5315712"/>
-            <a:ext cx="3901440" cy="158496"/>
+            <a:off x="8046720" y="6217920"/>
+            <a:ext cx="548640" cy="228600"/>
           </a:xfrm>
           <a:prstGeom prst="rect">
             <a:avLst/>
@@ -4467,34 +5673,34 @@
           <a:noFill/>
         </p:spPr>
         <p:txBody>
-          <a:bodyPr wrap="square" anchor="ctr" lIns="0" rIns="0" tIns="0" bIns="0">
+          <a:bodyPr wrap="none">
             <a:spAutoFit/>
           </a:bodyPr>
           <a:lstStyle/>
           <a:p>
-            <a:pPr algn="ctr"/>
-            <a:r>
-              <a:rPr sz="1500" b="1" i="0">
+            <a:pPr algn="ctr">
+              <a:defRPr sz="1000" b="0">
                 <a:solidFill>
-                  <a:srgbClr val="4A3568"/>
+                  <a:srgbClr val="191919"/>
                 </a:solidFill>
-                <a:latin typeface="Helvetica Neue"/>
-              </a:rPr>
-              <a:t>Verifier</a:t>
-            </a:r>
-          </a:p>
-        </p:txBody>
-      </p:sp>
-      <p:sp>
-        <p:nvSpPr>
-          <p:cNvPr id="34" name="TextBox 33"/>
+              </a:defRPr>
+            </a:pPr>
+            <a:r>
+              <a:t>t4</a:t>
+            </a:r>
+          </a:p>
+        </p:txBody>
+      </p:sp>
+      <p:sp>
+        <p:nvSpPr>
+          <p:cNvPr id="64" name="TextBox 63"/>
           <p:cNvSpPr txBox="1"/>
           <p:nvPr/>
         </p:nvSpPr>
         <p:spPr>
           <a:xfrm>
-            <a:off x="792480" y="5486400"/>
-            <a:ext cx="3901440" cy="121920"/>
+            <a:off x="10058400" y="6217920"/>
+            <a:ext cx="548640" cy="228600"/>
           </a:xfrm>
           <a:prstGeom prst="rect">
             <a:avLst/>
@@ -4502,125 +5708,20 @@
           <a:noFill/>
         </p:spPr>
         <p:txBody>
-          <a:bodyPr wrap="square" anchor="ctr" lIns="0" rIns="0" tIns="0" bIns="0">
+          <a:bodyPr wrap="none">
             <a:spAutoFit/>
           </a:bodyPr>
           <a:lstStyle/>
           <a:p>
-            <a:pPr algn="ctr"/>
-            <a:r>
-              <a:rPr sz="1050" b="0" i="0">
+            <a:pPr algn="ctr">
+              <a:defRPr sz="1000" b="0">
                 <a:solidFill>
-                  <a:srgbClr val="4A3568"/>
+                  <a:srgbClr val="191919"/>
                 </a:solidFill>
-                <a:latin typeface="Helvetica Neue"/>
-              </a:rPr>
-              <a:t>intra-context: each task/ISR path is valid ✓</a:t>
-            </a:r>
-          </a:p>
-        </p:txBody>
-      </p:sp>
-      <p:sp>
-        <p:nvSpPr>
-          <p:cNvPr id="35" name="TextBox 34"/>
-          <p:cNvSpPr txBox="1"/>
-          <p:nvPr/>
-        </p:nvSpPr>
-        <p:spPr>
-          <a:xfrm>
-            <a:off x="792480" y="5632704"/>
-            <a:ext cx="3901440" cy="121920"/>
-          </a:xfrm>
-          <a:prstGeom prst="rect">
-            <a:avLst/>
-          </a:prstGeom>
-          <a:noFill/>
-        </p:spPr>
-        <p:txBody>
-          <a:bodyPr wrap="square" anchor="ctr" lIns="0" rIns="0" tIns="0" bIns="0">
-            <a:spAutoFit/>
-          </a:bodyPr>
-          <a:lstStyle/>
-          <a:p>
-            <a:pPr algn="ctr"/>
-            <a:r>
-              <a:rPr sz="1050" b="0" i="0">
-                <a:solidFill>
-                  <a:srgbClr val="4A3568"/>
-                </a:solidFill>
-                <a:latin typeface="Helvetica Neue"/>
-              </a:rPr>
-              <a:t>inter-context: every dispatch/switch/IRQ transition is authorized ✓</a:t>
-            </a:r>
-          </a:p>
-        </p:txBody>
-      </p:sp>
-      <p:sp>
-        <p:nvSpPr>
-          <p:cNvPr id="36" name="TextBox 35"/>
-          <p:cNvSpPr txBox="1"/>
-          <p:nvPr/>
-        </p:nvSpPr>
-        <p:spPr>
-          <a:xfrm>
-            <a:off x="792480" y="5791200"/>
-            <a:ext cx="3901440" cy="121920"/>
-          </a:xfrm>
-          <a:prstGeom prst="rect">
-            <a:avLst/>
-          </a:prstGeom>
-          <a:noFill/>
-        </p:spPr>
-        <p:txBody>
-          <a:bodyPr wrap="square" anchor="ctr" lIns="0" rIns="0" tIns="0" bIns="0">
-            <a:spAutoFit/>
-          </a:bodyPr>
-          <a:lstStyle/>
-          <a:p>
-            <a:pPr algn="ctr"/>
-            <a:r>
-              <a:rPr sz="1050" b="1" i="0">
-                <a:solidFill>
-                  <a:srgbClr val="4A3568"/>
-                </a:solidFill>
-                <a:latin typeface="Helvetica Neue"/>
-              </a:rPr>
-              <a:t>⇒ authorized interrupt-driven / multitasking execution</a:t>
-            </a:r>
-          </a:p>
-        </p:txBody>
-      </p:sp>
-      <p:sp>
-        <p:nvSpPr>
-          <p:cNvPr id="37" name="TextBox 36"/>
-          <p:cNvSpPr txBox="1"/>
-          <p:nvPr/>
-        </p:nvSpPr>
-        <p:spPr>
-          <a:xfrm>
-            <a:off x="182880" y="6047232"/>
-            <a:ext cx="5120640" cy="219456"/>
-          </a:xfrm>
-          <a:prstGeom prst="rect">
-            <a:avLst/>
-          </a:prstGeom>
-          <a:noFill/>
-        </p:spPr>
-        <p:txBody>
-          <a:bodyPr wrap="square" anchor="ctr" lIns="0" rIns="0" tIns="0" bIns="0">
-            <a:spAutoFit/>
-          </a:bodyPr>
-          <a:lstStyle/>
-          <a:p>
-            <a:pPr algn="l"/>
-            <a:r>
-              <a:rPr sz="950" b="0" i="1">
-                <a:solidFill>
-                  <a:srgbClr val="555555"/>
-                </a:solidFill>
-                <a:latin typeface="Helvetica Neue"/>
-              </a:rPr>
-              <a:t>Dashed line (right margin): the hardware IRQ is intercepted by the secure NVIC before being dispatched up to the ISR context.</a:t>
+              </a:defRPr>
+            </a:pPr>
+            <a:r>
+              <a:t>t5</a:t>
             </a:r>
           </a:p>
         </p:txBody>

--- a/figs/thrust2.2-rtos-attestation.pptx
+++ b/figs/thrust2.2-rtos-attestation.pptx
@@ -4,17 +4,20 @@
   <p:sldMasterIdLst>
     <p:sldMasterId id="2147483648" r:id="rId1"/>
   </p:sldMasterIdLst>
+  <p:notesMasterIdLst>
+    <p:notesMasterId r:id="rId3"/>
+  </p:notesMasterIdLst>
   <p:sldIdLst>
     <p:sldId id="256" r:id="rId2"/>
   </p:sldIdLst>
-  <p:sldSz cx="5486400" cy="6364288"/>
+  <p:sldSz cx="8412163" cy="5486400"/>
   <p:notesSz cx="6858000" cy="9144000"/>
   <p:defaultTextStyle>
     <a:defPPr>
       <a:defRPr lang="en-US"/>
     </a:defPPr>
-    <a:lvl1pPr marL="0" algn="l" defTabSz="457200" rtl="0" eaLnBrk="1" latinLnBrk="0" hangingPunct="1">
-      <a:defRPr sz="1800" kern="1200">
+    <a:lvl1pPr marL="0" algn="l" defTabSz="493808" rtl="0" eaLnBrk="1" latinLnBrk="0" hangingPunct="1">
+      <a:defRPr sz="1944" kern="1200">
         <a:solidFill>
           <a:schemeClr val="tx1"/>
         </a:solidFill>
@@ -23,8 +26,8 @@
         <a:cs typeface="+mn-cs"/>
       </a:defRPr>
     </a:lvl1pPr>
-    <a:lvl2pPr marL="457200" algn="l" defTabSz="457200" rtl="0" eaLnBrk="1" latinLnBrk="0" hangingPunct="1">
-      <a:defRPr sz="1800" kern="1200">
+    <a:lvl2pPr marL="493808" algn="l" defTabSz="493808" rtl="0" eaLnBrk="1" latinLnBrk="0" hangingPunct="1">
+      <a:defRPr sz="1944" kern="1200">
         <a:solidFill>
           <a:schemeClr val="tx1"/>
         </a:solidFill>
@@ -33,8 +36,8 @@
         <a:cs typeface="+mn-cs"/>
       </a:defRPr>
     </a:lvl2pPr>
-    <a:lvl3pPr marL="914400" algn="l" defTabSz="457200" rtl="0" eaLnBrk="1" latinLnBrk="0" hangingPunct="1">
-      <a:defRPr sz="1800" kern="1200">
+    <a:lvl3pPr marL="987616" algn="l" defTabSz="493808" rtl="0" eaLnBrk="1" latinLnBrk="0" hangingPunct="1">
+      <a:defRPr sz="1944" kern="1200">
         <a:solidFill>
           <a:schemeClr val="tx1"/>
         </a:solidFill>
@@ -43,8 +46,8 @@
         <a:cs typeface="+mn-cs"/>
       </a:defRPr>
     </a:lvl3pPr>
-    <a:lvl4pPr marL="1371600" algn="l" defTabSz="457200" rtl="0" eaLnBrk="1" latinLnBrk="0" hangingPunct="1">
-      <a:defRPr sz="1800" kern="1200">
+    <a:lvl4pPr marL="1481424" algn="l" defTabSz="493808" rtl="0" eaLnBrk="1" latinLnBrk="0" hangingPunct="1">
+      <a:defRPr sz="1944" kern="1200">
         <a:solidFill>
           <a:schemeClr val="tx1"/>
         </a:solidFill>
@@ -53,8 +56,8 @@
         <a:cs typeface="+mn-cs"/>
       </a:defRPr>
     </a:lvl4pPr>
-    <a:lvl5pPr marL="1828800" algn="l" defTabSz="457200" rtl="0" eaLnBrk="1" latinLnBrk="0" hangingPunct="1">
-      <a:defRPr sz="1800" kern="1200">
+    <a:lvl5pPr marL="1975231" algn="l" defTabSz="493808" rtl="0" eaLnBrk="1" latinLnBrk="0" hangingPunct="1">
+      <a:defRPr sz="1944" kern="1200">
         <a:solidFill>
           <a:schemeClr val="tx1"/>
         </a:solidFill>
@@ -63,8 +66,8 @@
         <a:cs typeface="+mn-cs"/>
       </a:defRPr>
     </a:lvl5pPr>
-    <a:lvl6pPr marL="2286000" algn="l" defTabSz="457200" rtl="0" eaLnBrk="1" latinLnBrk="0" hangingPunct="1">
-      <a:defRPr sz="1800" kern="1200">
+    <a:lvl6pPr marL="2469040" algn="l" defTabSz="493808" rtl="0" eaLnBrk="1" latinLnBrk="0" hangingPunct="1">
+      <a:defRPr sz="1944" kern="1200">
         <a:solidFill>
           <a:schemeClr val="tx1"/>
         </a:solidFill>
@@ -73,8 +76,8 @@
         <a:cs typeface="+mn-cs"/>
       </a:defRPr>
     </a:lvl6pPr>
-    <a:lvl7pPr marL="2743200" algn="l" defTabSz="457200" rtl="0" eaLnBrk="1" latinLnBrk="0" hangingPunct="1">
-      <a:defRPr sz="1800" kern="1200">
+    <a:lvl7pPr marL="2962847" algn="l" defTabSz="493808" rtl="0" eaLnBrk="1" latinLnBrk="0" hangingPunct="1">
+      <a:defRPr sz="1944" kern="1200">
         <a:solidFill>
           <a:schemeClr val="tx1"/>
         </a:solidFill>
@@ -83,8 +86,8 @@
         <a:cs typeface="+mn-cs"/>
       </a:defRPr>
     </a:lvl7pPr>
-    <a:lvl8pPr marL="3200400" algn="l" defTabSz="457200" rtl="0" eaLnBrk="1" latinLnBrk="0" hangingPunct="1">
-      <a:defRPr sz="1800" kern="1200">
+    <a:lvl8pPr marL="3456656" algn="l" defTabSz="493808" rtl="0" eaLnBrk="1" latinLnBrk="0" hangingPunct="1">
+      <a:defRPr sz="1944" kern="1200">
         <a:solidFill>
           <a:schemeClr val="tx1"/>
         </a:solidFill>
@@ -93,8 +96,8 @@
         <a:cs typeface="+mn-cs"/>
       </a:defRPr>
     </a:lvl8pPr>
-    <a:lvl9pPr marL="3657600" algn="l" defTabSz="457200" rtl="0" eaLnBrk="1" latinLnBrk="0" hangingPunct="1">
-      <a:defRPr sz="1800" kern="1200">
+    <a:lvl9pPr marL="3950463" algn="l" defTabSz="493808" rtl="0" eaLnBrk="1" latinLnBrk="0" hangingPunct="1">
+      <a:defRPr sz="1944" kern="1200">
         <a:solidFill>
           <a:schemeClr val="tx1"/>
         </a:solidFill>
@@ -107,12 +110,12 @@
   <p:extLst>
     <p:ext uri="{EFAFB233-063F-42B5-8137-9DF3F51BA10A}">
       <p15:sldGuideLst xmlns:p15="http://schemas.microsoft.com/office/powerpoint/2012/main">
-        <p15:guide id="1" orient="horz" pos="2160">
+        <p15:guide id="1" orient="horz" pos="1862" userDrawn="1">
           <p15:clr>
             <a:srgbClr val="A4A3A4"/>
           </p15:clr>
         </p15:guide>
-        <p15:guide id="2" pos="2880">
+        <p15:guide id="2" pos="4416" userDrawn="1">
           <p15:clr>
             <a:srgbClr val="A4A3A4"/>
           </p15:clr>
@@ -121,6 +124,444 @@
     </p:ext>
   </p:extLst>
 </p:presentation>
+</file>
+
+<file path=ppt/notesMasters/notesMaster1.xml><?xml version="1.0" encoding="utf-8"?>
+<p:notesMaster xmlns:a="http://schemas.openxmlformats.org/drawingml/2006/main" xmlns:r="http://schemas.openxmlformats.org/officeDocument/2006/relationships" xmlns:p="http://schemas.openxmlformats.org/presentationml/2006/main">
+  <p:cSld>
+    <p:bg>
+      <p:bgRef idx="1001">
+        <a:schemeClr val="bg1"/>
+      </p:bgRef>
+    </p:bg>
+    <p:spTree>
+      <p:nvGrpSpPr>
+        <p:cNvPr id="1" name=""/>
+        <p:cNvGrpSpPr/>
+        <p:nvPr/>
+      </p:nvGrpSpPr>
+      <p:grpSpPr>
+        <a:xfrm>
+          <a:off x="0" y="0"/>
+          <a:ext cx="0" cy="0"/>
+          <a:chOff x="0" y="0"/>
+          <a:chExt cx="0" cy="0"/>
+        </a:xfrm>
+      </p:grpSpPr>
+      <p:sp>
+        <p:nvSpPr>
+          <p:cNvPr id="2" name="Header Placeholder 1"/>
+          <p:cNvSpPr>
+            <a:spLocks noGrp="1"/>
+          </p:cNvSpPr>
+          <p:nvPr>
+            <p:ph type="hdr" sz="quarter"/>
+          </p:nvPr>
+        </p:nvSpPr>
+        <p:spPr>
+          <a:xfrm>
+            <a:off x="0" y="0"/>
+            <a:ext cx="2971800" cy="458788"/>
+          </a:xfrm>
+          <a:prstGeom prst="rect">
+            <a:avLst/>
+          </a:prstGeom>
+        </p:spPr>
+        <p:txBody>
+          <a:bodyPr vert="horz" lIns="91440" tIns="45720" rIns="91440" bIns="45720" rtlCol="0"/>
+          <a:lstStyle>
+            <a:lvl1pPr algn="l">
+              <a:defRPr sz="1200"/>
+            </a:lvl1pPr>
+          </a:lstStyle>
+          <a:p>
+            <a:endParaRPr lang="en-US"/>
+          </a:p>
+        </p:txBody>
+      </p:sp>
+      <p:sp>
+        <p:nvSpPr>
+          <p:cNvPr id="3" name="Date Placeholder 2"/>
+          <p:cNvSpPr>
+            <a:spLocks noGrp="1"/>
+          </p:cNvSpPr>
+          <p:nvPr>
+            <p:ph type="dt" idx="1"/>
+          </p:nvPr>
+        </p:nvSpPr>
+        <p:spPr>
+          <a:xfrm>
+            <a:off x="3884613" y="0"/>
+            <a:ext cx="2971800" cy="458788"/>
+          </a:xfrm>
+          <a:prstGeom prst="rect">
+            <a:avLst/>
+          </a:prstGeom>
+        </p:spPr>
+        <p:txBody>
+          <a:bodyPr vert="horz" lIns="91440" tIns="45720" rIns="91440" bIns="45720" rtlCol="0"/>
+          <a:lstStyle>
+            <a:lvl1pPr algn="r">
+              <a:defRPr sz="1200"/>
+            </a:lvl1pPr>
+          </a:lstStyle>
+          <a:p>
+            <a:fld id="{D5F8EC97-77C3-494D-BB25-0644EDFE268B}" type="datetimeFigureOut">
+              <a:rPr lang="en-US" smtClean="0"/>
+              <a:t>9/1/26</a:t>
+            </a:fld>
+            <a:endParaRPr lang="en-US"/>
+          </a:p>
+        </p:txBody>
+      </p:sp>
+      <p:sp>
+        <p:nvSpPr>
+          <p:cNvPr id="4" name="Slide Image Placeholder 3"/>
+          <p:cNvSpPr>
+            <a:spLocks noGrp="1" noRot="1" noChangeAspect="1"/>
+          </p:cNvSpPr>
+          <p:nvPr>
+            <p:ph type="sldImg" idx="2"/>
+          </p:nvPr>
+        </p:nvSpPr>
+        <p:spPr>
+          <a:xfrm>
+            <a:off x="1063625" y="1143000"/>
+            <a:ext cx="4730750" cy="3086100"/>
+          </a:xfrm>
+          <a:prstGeom prst="rect">
+            <a:avLst/>
+          </a:prstGeom>
+          <a:noFill/>
+          <a:ln w="12700">
+            <a:solidFill>
+              <a:prstClr val="black"/>
+            </a:solidFill>
+          </a:ln>
+        </p:spPr>
+        <p:txBody>
+          <a:bodyPr vert="horz" lIns="91440" tIns="45720" rIns="91440" bIns="45720" rtlCol="0" anchor="ctr"/>
+          <a:lstStyle/>
+          <a:p>
+            <a:endParaRPr lang="en-US"/>
+          </a:p>
+        </p:txBody>
+      </p:sp>
+      <p:sp>
+        <p:nvSpPr>
+          <p:cNvPr id="5" name="Notes Placeholder 4"/>
+          <p:cNvSpPr>
+            <a:spLocks noGrp="1"/>
+          </p:cNvSpPr>
+          <p:nvPr>
+            <p:ph type="body" sz="quarter" idx="3"/>
+          </p:nvPr>
+        </p:nvSpPr>
+        <p:spPr>
+          <a:xfrm>
+            <a:off x="685800" y="4400550"/>
+            <a:ext cx="5486400" cy="3600450"/>
+          </a:xfrm>
+          <a:prstGeom prst="rect">
+            <a:avLst/>
+          </a:prstGeom>
+        </p:spPr>
+        <p:txBody>
+          <a:bodyPr vert="horz" lIns="91440" tIns="45720" rIns="91440" bIns="45720" rtlCol="0"/>
+          <a:lstStyle/>
+          <a:p>
+            <a:pPr lvl="0"/>
+            <a:r>
+              <a:rPr lang="en-US"/>
+              <a:t>Click to edit Master text styles</a:t>
+            </a:r>
+          </a:p>
+          <a:p>
+            <a:pPr lvl="1"/>
+            <a:r>
+              <a:rPr lang="en-US"/>
+              <a:t>Second level</a:t>
+            </a:r>
+          </a:p>
+          <a:p>
+            <a:pPr lvl="2"/>
+            <a:r>
+              <a:rPr lang="en-US"/>
+              <a:t>Third level</a:t>
+            </a:r>
+          </a:p>
+          <a:p>
+            <a:pPr lvl="3"/>
+            <a:r>
+              <a:rPr lang="en-US"/>
+              <a:t>Fourth level</a:t>
+            </a:r>
+          </a:p>
+          <a:p>
+            <a:pPr lvl="4"/>
+            <a:r>
+              <a:rPr lang="en-US"/>
+              <a:t>Fifth level</a:t>
+            </a:r>
+          </a:p>
+        </p:txBody>
+      </p:sp>
+      <p:sp>
+        <p:nvSpPr>
+          <p:cNvPr id="6" name="Footer Placeholder 5"/>
+          <p:cNvSpPr>
+            <a:spLocks noGrp="1"/>
+          </p:cNvSpPr>
+          <p:nvPr>
+            <p:ph type="ftr" sz="quarter" idx="4"/>
+          </p:nvPr>
+        </p:nvSpPr>
+        <p:spPr>
+          <a:xfrm>
+            <a:off x="0" y="8685213"/>
+            <a:ext cx="2971800" cy="458787"/>
+          </a:xfrm>
+          <a:prstGeom prst="rect">
+            <a:avLst/>
+          </a:prstGeom>
+        </p:spPr>
+        <p:txBody>
+          <a:bodyPr vert="horz" lIns="91440" tIns="45720" rIns="91440" bIns="45720" rtlCol="0" anchor="b"/>
+          <a:lstStyle>
+            <a:lvl1pPr algn="l">
+              <a:defRPr sz="1200"/>
+            </a:lvl1pPr>
+          </a:lstStyle>
+          <a:p>
+            <a:endParaRPr lang="en-US"/>
+          </a:p>
+        </p:txBody>
+      </p:sp>
+      <p:sp>
+        <p:nvSpPr>
+          <p:cNvPr id="7" name="Slide Number Placeholder 6"/>
+          <p:cNvSpPr>
+            <a:spLocks noGrp="1"/>
+          </p:cNvSpPr>
+          <p:nvPr>
+            <p:ph type="sldNum" sz="quarter" idx="5"/>
+          </p:nvPr>
+        </p:nvSpPr>
+        <p:spPr>
+          <a:xfrm>
+            <a:off x="3884613" y="8685213"/>
+            <a:ext cx="2971800" cy="458787"/>
+          </a:xfrm>
+          <a:prstGeom prst="rect">
+            <a:avLst/>
+          </a:prstGeom>
+        </p:spPr>
+        <p:txBody>
+          <a:bodyPr vert="horz" lIns="91440" tIns="45720" rIns="91440" bIns="45720" rtlCol="0" anchor="b"/>
+          <a:lstStyle>
+            <a:lvl1pPr algn="r">
+              <a:defRPr sz="1200"/>
+            </a:lvl1pPr>
+          </a:lstStyle>
+          <a:p>
+            <a:fld id="{2A132B03-0D8E-3D4D-89E5-E4A3E950AFBF}" type="slidenum">
+              <a:rPr lang="en-US" smtClean="0"/>
+              <a:t>‹#›</a:t>
+            </a:fld>
+            <a:endParaRPr lang="en-US"/>
+          </a:p>
+        </p:txBody>
+      </p:sp>
+    </p:spTree>
+    <p:extLst>
+      <p:ext uri="{BB962C8B-B14F-4D97-AF65-F5344CB8AC3E}">
+        <p14:creationId xmlns:p14="http://schemas.microsoft.com/office/powerpoint/2010/main" val="3779776542"/>
+      </p:ext>
+    </p:extLst>
+  </p:cSld>
+  <p:clrMap bg1="lt1" tx1="dk1" bg2="lt2" tx2="dk2" accent1="accent1" accent2="accent2" accent3="accent3" accent4="accent4" accent5="accent5" accent6="accent6" hlink="hlink" folHlink="folHlink"/>
+  <p:notesStyle>
+    <a:lvl1pPr marL="0" algn="l" defTabSz="987616" rtl="0" eaLnBrk="1" latinLnBrk="0" hangingPunct="1">
+      <a:defRPr sz="1296" kern="1200">
+        <a:solidFill>
+          <a:schemeClr val="tx1"/>
+        </a:solidFill>
+        <a:latin typeface="+mn-lt"/>
+        <a:ea typeface="+mn-ea"/>
+        <a:cs typeface="+mn-cs"/>
+      </a:defRPr>
+    </a:lvl1pPr>
+    <a:lvl2pPr marL="493808" algn="l" defTabSz="987616" rtl="0" eaLnBrk="1" latinLnBrk="0" hangingPunct="1">
+      <a:defRPr sz="1296" kern="1200">
+        <a:solidFill>
+          <a:schemeClr val="tx1"/>
+        </a:solidFill>
+        <a:latin typeface="+mn-lt"/>
+        <a:ea typeface="+mn-ea"/>
+        <a:cs typeface="+mn-cs"/>
+      </a:defRPr>
+    </a:lvl2pPr>
+    <a:lvl3pPr marL="987616" algn="l" defTabSz="987616" rtl="0" eaLnBrk="1" latinLnBrk="0" hangingPunct="1">
+      <a:defRPr sz="1296" kern="1200">
+        <a:solidFill>
+          <a:schemeClr val="tx1"/>
+        </a:solidFill>
+        <a:latin typeface="+mn-lt"/>
+        <a:ea typeface="+mn-ea"/>
+        <a:cs typeface="+mn-cs"/>
+      </a:defRPr>
+    </a:lvl3pPr>
+    <a:lvl4pPr marL="1481424" algn="l" defTabSz="987616" rtl="0" eaLnBrk="1" latinLnBrk="0" hangingPunct="1">
+      <a:defRPr sz="1296" kern="1200">
+        <a:solidFill>
+          <a:schemeClr val="tx1"/>
+        </a:solidFill>
+        <a:latin typeface="+mn-lt"/>
+        <a:ea typeface="+mn-ea"/>
+        <a:cs typeface="+mn-cs"/>
+      </a:defRPr>
+    </a:lvl4pPr>
+    <a:lvl5pPr marL="1975231" algn="l" defTabSz="987616" rtl="0" eaLnBrk="1" latinLnBrk="0" hangingPunct="1">
+      <a:defRPr sz="1296" kern="1200">
+        <a:solidFill>
+          <a:schemeClr val="tx1"/>
+        </a:solidFill>
+        <a:latin typeface="+mn-lt"/>
+        <a:ea typeface="+mn-ea"/>
+        <a:cs typeface="+mn-cs"/>
+      </a:defRPr>
+    </a:lvl5pPr>
+    <a:lvl6pPr marL="2469040" algn="l" defTabSz="987616" rtl="0" eaLnBrk="1" latinLnBrk="0" hangingPunct="1">
+      <a:defRPr sz="1296" kern="1200">
+        <a:solidFill>
+          <a:schemeClr val="tx1"/>
+        </a:solidFill>
+        <a:latin typeface="+mn-lt"/>
+        <a:ea typeface="+mn-ea"/>
+        <a:cs typeface="+mn-cs"/>
+      </a:defRPr>
+    </a:lvl6pPr>
+    <a:lvl7pPr marL="2962847" algn="l" defTabSz="987616" rtl="0" eaLnBrk="1" latinLnBrk="0" hangingPunct="1">
+      <a:defRPr sz="1296" kern="1200">
+        <a:solidFill>
+          <a:schemeClr val="tx1"/>
+        </a:solidFill>
+        <a:latin typeface="+mn-lt"/>
+        <a:ea typeface="+mn-ea"/>
+        <a:cs typeface="+mn-cs"/>
+      </a:defRPr>
+    </a:lvl7pPr>
+    <a:lvl8pPr marL="3456656" algn="l" defTabSz="987616" rtl="0" eaLnBrk="1" latinLnBrk="0" hangingPunct="1">
+      <a:defRPr sz="1296" kern="1200">
+        <a:solidFill>
+          <a:schemeClr val="tx1"/>
+        </a:solidFill>
+        <a:latin typeface="+mn-lt"/>
+        <a:ea typeface="+mn-ea"/>
+        <a:cs typeface="+mn-cs"/>
+      </a:defRPr>
+    </a:lvl8pPr>
+    <a:lvl9pPr marL="3950463" algn="l" defTabSz="987616" rtl="0" eaLnBrk="1" latinLnBrk="0" hangingPunct="1">
+      <a:defRPr sz="1296" kern="1200">
+        <a:solidFill>
+          <a:schemeClr val="tx1"/>
+        </a:solidFill>
+        <a:latin typeface="+mn-lt"/>
+        <a:ea typeface="+mn-ea"/>
+        <a:cs typeface="+mn-cs"/>
+      </a:defRPr>
+    </a:lvl9pPr>
+  </p:notesStyle>
+</p:notesMaster>
+</file>
+
+<file path=ppt/notesSlides/notesSlide1.xml><?xml version="1.0" encoding="utf-8"?>
+<p:notes xmlns:a="http://schemas.openxmlformats.org/drawingml/2006/main" xmlns:r="http://schemas.openxmlformats.org/officeDocument/2006/relationships" xmlns:p="http://schemas.openxmlformats.org/presentationml/2006/main">
+  <p:cSld>
+    <p:spTree>
+      <p:nvGrpSpPr>
+        <p:cNvPr id="1" name=""/>
+        <p:cNvGrpSpPr/>
+        <p:nvPr/>
+      </p:nvGrpSpPr>
+      <p:grpSpPr>
+        <a:xfrm>
+          <a:off x="0" y="0"/>
+          <a:ext cx="0" cy="0"/>
+          <a:chOff x="0" y="0"/>
+          <a:chExt cx="0" cy="0"/>
+        </a:xfrm>
+      </p:grpSpPr>
+      <p:sp>
+        <p:nvSpPr>
+          <p:cNvPr id="2" name="Slide Image Placeholder 1"/>
+          <p:cNvSpPr>
+            <a:spLocks noGrp="1" noRot="1" noChangeAspect="1"/>
+          </p:cNvSpPr>
+          <p:nvPr>
+            <p:ph type="sldImg"/>
+          </p:nvPr>
+        </p:nvSpPr>
+        <p:spPr>
+          <a:xfrm>
+            <a:off x="1063625" y="1143000"/>
+            <a:ext cx="4730750" cy="3086100"/>
+          </a:xfrm>
+        </p:spPr>
+      </p:sp>
+      <p:sp>
+        <p:nvSpPr>
+          <p:cNvPr id="3" name="Notes Placeholder 2"/>
+          <p:cNvSpPr>
+            <a:spLocks noGrp="1"/>
+          </p:cNvSpPr>
+          <p:nvPr>
+            <p:ph type="body" idx="1"/>
+          </p:nvPr>
+        </p:nvSpPr>
+        <p:spPr/>
+        <p:txBody>
+          <a:bodyPr/>
+          <a:lstStyle/>
+          <a:p>
+            <a:endParaRPr lang="en-US" dirty="0"/>
+          </a:p>
+        </p:txBody>
+      </p:sp>
+      <p:sp>
+        <p:nvSpPr>
+          <p:cNvPr id="4" name="Slide Number Placeholder 3"/>
+          <p:cNvSpPr>
+            <a:spLocks noGrp="1"/>
+          </p:cNvSpPr>
+          <p:nvPr>
+            <p:ph type="sldNum" sz="quarter" idx="5"/>
+          </p:nvPr>
+        </p:nvSpPr>
+        <p:spPr/>
+        <p:txBody>
+          <a:bodyPr/>
+          <a:lstStyle/>
+          <a:p>
+            <a:fld id="{2A132B03-0D8E-3D4D-89E5-E4A3E950AFBF}" type="slidenum">
+              <a:rPr lang="en-US" smtClean="0"/>
+              <a:t>1</a:t>
+            </a:fld>
+            <a:endParaRPr lang="en-US"/>
+          </a:p>
+        </p:txBody>
+      </p:sp>
+    </p:spTree>
+    <p:extLst>
+      <p:ext uri="{BB962C8B-B14F-4D97-AF65-F5344CB8AC3E}">
+        <p14:creationId xmlns:p14="http://schemas.microsoft.com/office/powerpoint/2010/main" val="3279639436"/>
+      </p:ext>
+    </p:extLst>
+  </p:cSld>
+  <p:clrMapOvr>
+    <a:masterClrMapping/>
+  </p:clrMapOvr>
+</p:notes>
 </file>
 
 <file path=ppt/slideLayouts/slideLayout1.xml><?xml version="1.0" encoding="utf-8"?>
@@ -152,8 +593,8 @@
         </p:nvSpPr>
         <p:spPr>
           <a:xfrm>
-            <a:off x="685800" y="2130425"/>
-            <a:ext cx="7772400" cy="1470025"/>
+            <a:off x="1051521" y="1836558"/>
+            <a:ext cx="11917231" cy="1267250"/>
           </a:xfrm>
         </p:spPr>
         <p:txBody>
@@ -179,8 +620,8 @@
         </p:nvSpPr>
         <p:spPr>
           <a:xfrm>
-            <a:off x="1371600" y="3886200"/>
-            <a:ext cx="6400800" cy="1752600"/>
+            <a:off x="2103041" y="3350143"/>
+            <a:ext cx="9814190" cy="1510847"/>
           </a:xfrm>
         </p:spPr>
         <p:txBody>
@@ -302,7 +743,7 @@
           <a:p>
             <a:fld id="{5BCAD085-E8A6-8845-BD4E-CB4CCA059FC4}" type="datetimeFigureOut">
               <a:rPr lang="en-US" smtClean="0"/>
-              <a:t>8/30/26</a:t>
+              <a:t>9/1/26</a:t>
             </a:fld>
             <a:endParaRPr lang="en-US"/>
           </a:p>
@@ -470,7 +911,7 @@
           <a:p>
             <a:fld id="{5BCAD085-E8A6-8845-BD4E-CB4CCA059FC4}" type="datetimeFigureOut">
               <a:rPr lang="en-US" smtClean="0"/>
-              <a:t>8/30/26</a:t>
+              <a:t>9/1/26</a:t>
             </a:fld>
             <a:endParaRPr lang="en-US"/>
           </a:p>
@@ -560,8 +1001,8 @@
         </p:nvSpPr>
         <p:spPr>
           <a:xfrm>
-            <a:off x="6629400" y="274638"/>
-            <a:ext cx="2057400" cy="5851525"/>
+            <a:off x="10164698" y="236757"/>
+            <a:ext cx="3154561" cy="5044367"/>
           </a:xfrm>
         </p:spPr>
         <p:txBody>
@@ -587,8 +1028,8 @@
         </p:nvSpPr>
         <p:spPr>
           <a:xfrm>
-            <a:off x="457200" y="274638"/>
-            <a:ext cx="6019800" cy="5851525"/>
+            <a:off x="701014" y="236757"/>
+            <a:ext cx="9230012" cy="5044367"/>
           </a:xfrm>
         </p:spPr>
         <p:txBody>
@@ -648,7 +1089,7 @@
           <a:p>
             <a:fld id="{5BCAD085-E8A6-8845-BD4E-CB4CCA059FC4}" type="datetimeFigureOut">
               <a:rPr lang="en-US" smtClean="0"/>
-              <a:t>8/30/26</a:t>
+              <a:t>9/1/26</a:t>
             </a:fld>
             <a:endParaRPr lang="en-US"/>
           </a:p>
@@ -816,7 +1257,7 @@
           <a:p>
             <a:fld id="{5BCAD085-E8A6-8845-BD4E-CB4CCA059FC4}" type="datetimeFigureOut">
               <a:rPr lang="en-US" smtClean="0"/>
-              <a:t>8/30/26</a:t>
+              <a:t>9/1/26</a:t>
             </a:fld>
             <a:endParaRPr lang="en-US"/>
           </a:p>
@@ -906,8 +1347,8 @@
         </p:nvSpPr>
         <p:spPr>
           <a:xfrm>
-            <a:off x="722313" y="4406900"/>
-            <a:ext cx="7772400" cy="1362075"/>
+            <a:off x="1107505" y="3799015"/>
+            <a:ext cx="11917231" cy="1174191"/>
           </a:xfrm>
         </p:spPr>
         <p:txBody>
@@ -937,8 +1378,8 @@
         </p:nvSpPr>
         <p:spPr>
           <a:xfrm>
-            <a:off x="722313" y="2906713"/>
-            <a:ext cx="7772400" cy="1500187"/>
+            <a:off x="1107505" y="2505762"/>
+            <a:ext cx="11917231" cy="1293252"/>
           </a:xfrm>
         </p:spPr>
         <p:txBody>
@@ -1061,7 +1502,7 @@
           <a:p>
             <a:fld id="{5BCAD085-E8A6-8845-BD4E-CB4CCA059FC4}" type="datetimeFigureOut">
               <a:rPr lang="en-US" smtClean="0"/>
-              <a:t>8/30/26</a:t>
+              <a:t>9/1/26</a:t>
             </a:fld>
             <a:endParaRPr lang="en-US"/>
           </a:p>
@@ -1173,8 +1614,8 @@
         </p:nvSpPr>
         <p:spPr>
           <a:xfrm>
-            <a:off x="457200" y="1600200"/>
-            <a:ext cx="4038600" cy="4525963"/>
+            <a:off x="701014" y="1379470"/>
+            <a:ext cx="6192287" cy="3901653"/>
           </a:xfrm>
         </p:spPr>
         <p:txBody>
@@ -1257,8 +1698,8 @@
         </p:nvSpPr>
         <p:spPr>
           <a:xfrm>
-            <a:off x="4648200" y="1600200"/>
-            <a:ext cx="4038600" cy="4525963"/>
+            <a:off x="7126972" y="1379470"/>
+            <a:ext cx="6192287" cy="3901653"/>
           </a:xfrm>
         </p:spPr>
         <p:txBody>
@@ -1346,7 +1787,7 @@
           <a:p>
             <a:fld id="{5BCAD085-E8A6-8845-BD4E-CB4CCA059FC4}" type="datetimeFigureOut">
               <a:rPr lang="en-US" smtClean="0"/>
-              <a:t>8/30/26</a:t>
+              <a:t>9/1/26</a:t>
             </a:fld>
             <a:endParaRPr lang="en-US"/>
           </a:p>
@@ -1462,8 +1903,8 @@
         </p:nvSpPr>
         <p:spPr>
           <a:xfrm>
-            <a:off x="457200" y="1535113"/>
-            <a:ext cx="4040188" cy="639762"/>
+            <a:off x="701014" y="1323360"/>
+            <a:ext cx="6194723" cy="551513"/>
           </a:xfrm>
         </p:spPr>
         <p:txBody>
@@ -1527,8 +1968,8 @@
         </p:nvSpPr>
         <p:spPr>
           <a:xfrm>
-            <a:off x="457200" y="2174875"/>
-            <a:ext cx="4040188" cy="3951288"/>
+            <a:off x="701014" y="1874877"/>
+            <a:ext cx="6194723" cy="3406249"/>
           </a:xfrm>
         </p:spPr>
         <p:txBody>
@@ -1611,8 +2052,8 @@
         </p:nvSpPr>
         <p:spPr>
           <a:xfrm>
-            <a:off x="4645025" y="1535113"/>
-            <a:ext cx="4041775" cy="639762"/>
+            <a:off x="7122103" y="1323360"/>
+            <a:ext cx="6197156" cy="551513"/>
           </a:xfrm>
         </p:spPr>
         <p:txBody>
@@ -1676,8 +2117,8 @@
         </p:nvSpPr>
         <p:spPr>
           <a:xfrm>
-            <a:off x="4645025" y="2174875"/>
-            <a:ext cx="4041775" cy="3951288"/>
+            <a:off x="7122103" y="1874877"/>
+            <a:ext cx="6197156" cy="3406249"/>
           </a:xfrm>
         </p:spPr>
         <p:txBody>
@@ -1765,7 +2206,7 @@
           <a:p>
             <a:fld id="{5BCAD085-E8A6-8845-BD4E-CB4CCA059FC4}" type="datetimeFigureOut">
               <a:rPr lang="en-US" smtClean="0"/>
-              <a:t>8/30/26</a:t>
+              <a:t>9/1/26</a:t>
             </a:fld>
             <a:endParaRPr lang="en-US"/>
           </a:p>
@@ -1882,7 +2323,7 @@
           <a:p>
             <a:fld id="{5BCAD085-E8A6-8845-BD4E-CB4CCA059FC4}" type="datetimeFigureOut">
               <a:rPr lang="en-US" smtClean="0"/>
-              <a:t>8/30/26</a:t>
+              <a:t>9/1/26</a:t>
             </a:fld>
             <a:endParaRPr lang="en-US"/>
           </a:p>
@@ -1977,7 +2418,7 @@
           <a:p>
             <a:fld id="{5BCAD085-E8A6-8845-BD4E-CB4CCA059FC4}" type="datetimeFigureOut">
               <a:rPr lang="en-US" smtClean="0"/>
-              <a:t>8/30/26</a:t>
+              <a:t>9/1/26</a:t>
             </a:fld>
             <a:endParaRPr lang="en-US"/>
           </a:p>
@@ -2067,8 +2508,8 @@
         </p:nvSpPr>
         <p:spPr>
           <a:xfrm>
-            <a:off x="457200" y="273050"/>
-            <a:ext cx="3008313" cy="1162050"/>
+            <a:off x="701015" y="235387"/>
+            <a:ext cx="4612573" cy="1001757"/>
           </a:xfrm>
         </p:spPr>
         <p:txBody>
@@ -2098,8 +2539,8 @@
         </p:nvSpPr>
         <p:spPr>
           <a:xfrm>
-            <a:off x="3575050" y="273050"/>
-            <a:ext cx="5111750" cy="5853113"/>
+            <a:off x="5481539" y="235386"/>
+            <a:ext cx="7837721" cy="5045736"/>
           </a:xfrm>
         </p:spPr>
         <p:txBody>
@@ -2182,8 +2623,8 @@
         </p:nvSpPr>
         <p:spPr>
           <a:xfrm>
-            <a:off x="457200" y="1435100"/>
-            <a:ext cx="3008313" cy="4691063"/>
+            <a:off x="701015" y="1237144"/>
+            <a:ext cx="4612573" cy="4043979"/>
           </a:xfrm>
         </p:spPr>
         <p:txBody>
@@ -2252,7 +2693,7 @@
           <a:p>
             <a:fld id="{5BCAD085-E8A6-8845-BD4E-CB4CCA059FC4}" type="datetimeFigureOut">
               <a:rPr lang="en-US" smtClean="0"/>
-              <a:t>8/30/26</a:t>
+              <a:t>9/1/26</a:t>
             </a:fld>
             <a:endParaRPr lang="en-US"/>
           </a:p>
@@ -2342,8 +2783,8 @@
         </p:nvSpPr>
         <p:spPr>
           <a:xfrm>
-            <a:off x="1792288" y="4800600"/>
-            <a:ext cx="5486400" cy="566738"/>
+            <a:off x="2748073" y="4138407"/>
+            <a:ext cx="8412163" cy="488562"/>
           </a:xfrm>
         </p:spPr>
         <p:txBody>
@@ -2373,8 +2814,8 @@
         </p:nvSpPr>
         <p:spPr>
           <a:xfrm>
-            <a:off x="1792288" y="612775"/>
-            <a:ext cx="5486400" cy="4114800"/>
+            <a:off x="2748073" y="528249"/>
+            <a:ext cx="8412163" cy="3547206"/>
           </a:xfrm>
         </p:spPr>
         <p:txBody>
@@ -2434,8 +2875,8 @@
         </p:nvSpPr>
         <p:spPr>
           <a:xfrm>
-            <a:off x="1792288" y="5367338"/>
-            <a:ext cx="5486400" cy="804862"/>
+            <a:off x="2748073" y="4626973"/>
+            <a:ext cx="8412163" cy="693839"/>
           </a:xfrm>
         </p:spPr>
         <p:txBody>
@@ -2504,7 +2945,7 @@
           <a:p>
             <a:fld id="{5BCAD085-E8A6-8845-BD4E-CB4CCA059FC4}" type="datetimeFigureOut">
               <a:rPr lang="en-US" smtClean="0"/>
-              <a:t>8/30/26</a:t>
+              <a:t>9/1/26</a:t>
             </a:fld>
             <a:endParaRPr lang="en-US"/>
           </a:p>
@@ -2599,8 +3040,8 @@
         </p:nvSpPr>
         <p:spPr>
           <a:xfrm>
-            <a:off x="457200" y="274638"/>
-            <a:ext cx="8229600" cy="1143000"/>
+            <a:off x="701014" y="236755"/>
+            <a:ext cx="12618245" cy="985335"/>
           </a:xfrm>
           <a:prstGeom prst="rect">
             <a:avLst/>
@@ -2631,8 +3072,8 @@
         </p:nvSpPr>
         <p:spPr>
           <a:xfrm>
-            <a:off x="457200" y="1600200"/>
-            <a:ext cx="8229600" cy="4525963"/>
+            <a:off x="701014" y="1379470"/>
+            <a:ext cx="12618245" cy="3901653"/>
           </a:xfrm>
           <a:prstGeom prst="rect">
             <a:avLst/>
@@ -2692,8 +3133,8 @@
         </p:nvSpPr>
         <p:spPr>
           <a:xfrm>
-            <a:off x="457200" y="6356350"/>
-            <a:ext cx="2133600" cy="365125"/>
+            <a:off x="701013" y="5479557"/>
+            <a:ext cx="3271397" cy="314760"/>
           </a:xfrm>
           <a:prstGeom prst="rect">
             <a:avLst/>
@@ -2715,7 +3156,7 @@
           <a:p>
             <a:fld id="{5BCAD085-E8A6-8845-BD4E-CB4CCA059FC4}" type="datetimeFigureOut">
               <a:rPr lang="en-US" smtClean="0"/>
-              <a:t>8/30/26</a:t>
+              <a:t>9/1/26</a:t>
             </a:fld>
             <a:endParaRPr lang="en-US"/>
           </a:p>
@@ -2733,8 +3174,8 @@
         </p:nvSpPr>
         <p:spPr>
           <a:xfrm>
-            <a:off x="3124200" y="6356350"/>
-            <a:ext cx="2895600" cy="365125"/>
+            <a:off x="4790260" y="5479557"/>
+            <a:ext cx="4439753" cy="314760"/>
           </a:xfrm>
           <a:prstGeom prst="rect">
             <a:avLst/>
@@ -2770,8 +3211,8 @@
         </p:nvSpPr>
         <p:spPr>
           <a:xfrm>
-            <a:off x="6553200" y="6356350"/>
-            <a:ext cx="2133600" cy="365125"/>
+            <a:off x="10047862" y="5479557"/>
+            <a:ext cx="3271397" cy="314760"/>
           </a:xfrm>
           <a:prstGeom prst="rect">
             <a:avLst/>
@@ -3100,61 +3541,36 @@
       </p:grpSpPr>
       <p:sp>
         <p:nvSpPr>
-          <p:cNvPr id="2" name="TextBox 1"/>
-          <p:cNvSpPr txBox="1"/>
+          <p:cNvPr id="360" name="Rectangle 359">
+            <a:extLst>
+              <a:ext uri="{FF2B5EF4-FFF2-40B4-BE49-F238E27FC236}">
+                <a16:creationId xmlns:a16="http://schemas.microsoft.com/office/drawing/2014/main" id="{13C716C9-DA29-5D2C-CE5B-53A6CA84A83C}"/>
+              </a:ext>
+            </a:extLst>
+          </p:cNvPr>
+          <p:cNvSpPr/>
           <p:nvPr/>
         </p:nvSpPr>
         <p:spPr>
           <a:xfrm>
-            <a:off x="457200" y="228600"/>
-            <a:ext cx="11704320" cy="411480"/>
+            <a:off x="57990" y="42377"/>
+            <a:ext cx="4809328" cy="5108129"/>
           </a:xfrm>
           <a:prstGeom prst="rect">
             <a:avLst/>
           </a:prstGeom>
-          <a:noFill/>
-        </p:spPr>
-        <p:txBody>
-          <a:bodyPr wrap="none">
-            <a:spAutoFit/>
-          </a:bodyPr>
-          <a:lstStyle/>
-          <a:p>
-            <a:pPr algn="l">
-              <a:defRPr sz="2400" b="1">
-                <a:solidFill>
-                  <a:srgbClr val="191919"/>
-                </a:solidFill>
-              </a:defRPr>
-            </a:pPr>
-            <a:r>
-              <a:t>Execution timeline with TrustZone boundary and RTOS privilege flow</a:t>
-            </a:r>
-          </a:p>
-        </p:txBody>
-      </p:sp>
-      <p:sp>
-        <p:nvSpPr>
-          <p:cNvPr id="3" name="Rounded Rectangle 2"/>
-          <p:cNvSpPr/>
-          <p:nvPr/>
-        </p:nvSpPr>
-        <p:spPr>
-          <a:xfrm>
-            <a:off x="548640" y="1280160"/>
-            <a:ext cx="8138160" cy="5669280"/>
-          </a:xfrm>
-          <a:prstGeom prst="roundRect">
-            <a:avLst/>
-          </a:prstGeom>
           <a:solidFill>
-            <a:srgbClr val="F8F8F8"/>
+            <a:schemeClr val="accent2">
+              <a:lumMod val="20000"/>
+              <a:lumOff val="80000"/>
+            </a:schemeClr>
           </a:solidFill>
           <a:ln w="22860">
             <a:solidFill>
               <a:srgbClr val="505050"/>
             </a:solidFill>
           </a:ln>
+          <a:effectLst/>
         </p:spPr>
         <p:style>
           <a:lnRef idx="1">
@@ -3175,19 +3591,26 @@
           <a:lstStyle/>
           <a:p>
             <a:pPr algn="ctr"/>
-          </a:p>
-        </p:txBody>
-      </p:sp>
-      <p:sp>
-        <p:nvSpPr>
-          <p:cNvPr id="4" name="TextBox 3"/>
+            <a:endParaRPr/>
+          </a:p>
+        </p:txBody>
+      </p:sp>
+      <p:sp>
+        <p:nvSpPr>
+          <p:cNvPr id="361" name="TextBox 360">
+            <a:extLst>
+              <a:ext uri="{FF2B5EF4-FFF2-40B4-BE49-F238E27FC236}">
+                <a16:creationId xmlns:a16="http://schemas.microsoft.com/office/drawing/2014/main" id="{C79D7B15-F5B4-A261-C735-0AE45AB182E9}"/>
+              </a:ext>
+            </a:extLst>
+          </p:cNvPr>
           <p:cNvSpPr txBox="1"/>
           <p:nvPr/>
         </p:nvSpPr>
         <p:spPr>
           <a:xfrm>
-            <a:off x="640080" y="1325880"/>
-            <a:ext cx="7955280" cy="320040"/>
+            <a:off x="-33989" y="71481"/>
+            <a:ext cx="5204666" cy="430887"/>
           </a:xfrm>
           <a:prstGeom prst="rect">
             <a:avLst/>
@@ -3195,7 +3618,7 @@
           <a:noFill/>
         </p:spPr>
         <p:txBody>
-          <a:bodyPr wrap="none">
+          <a:bodyPr wrap="square">
             <a:spAutoFit/>
           </a:bodyPr>
           <a:lstStyle/>
@@ -3208,6 +3631,7 @@
               </a:defRPr>
             </a:pPr>
             <a:r>
+              <a:rPr sz="2200" dirty="0"/>
               <a:t>Normal World (user + RTOS kernel)</a:t>
             </a:r>
           </a:p>
@@ -3215,26 +3639,33 @@
       </p:sp>
       <p:sp>
         <p:nvSpPr>
-          <p:cNvPr id="5" name="Rounded Rectangle 4"/>
+          <p:cNvPr id="362" name="Rectangle 361">
+            <a:extLst>
+              <a:ext uri="{FF2B5EF4-FFF2-40B4-BE49-F238E27FC236}">
+                <a16:creationId xmlns:a16="http://schemas.microsoft.com/office/drawing/2014/main" id="{91711A59-54CA-7B7F-5B9C-F220E01F0C1B}"/>
+              </a:ext>
+            </a:extLst>
+          </p:cNvPr>
           <p:cNvSpPr/>
           <p:nvPr/>
         </p:nvSpPr>
         <p:spPr>
           <a:xfrm>
-            <a:off x="8869680" y="1280160"/>
-            <a:ext cx="5943600" cy="5669280"/>
+            <a:off x="286590" y="487465"/>
+            <a:ext cx="2011680" cy="894382"/>
           </a:xfrm>
-          <a:prstGeom prst="roundRect">
+          <a:prstGeom prst="rect">
             <a:avLst/>
           </a:prstGeom>
           <a:solidFill>
-            <a:srgbClr val="E6F5FF"/>
+            <a:srgbClr val="B4DCFF"/>
           </a:solidFill>
           <a:ln w="22860">
             <a:solidFill>
-              <a:srgbClr val="505050"/>
+              <a:srgbClr val="373737"/>
             </a:solidFill>
           </a:ln>
+          <a:effectLst/>
         </p:spPr>
         <p:style>
           <a:lnRef idx="1">
@@ -3251,23 +3682,78 @@
           </a:fontRef>
         </p:style>
         <p:txBody>
-          <a:bodyPr rtlCol="0" anchor="ctr"/>
-          <a:lstStyle/>
-          <a:p>
-            <a:pPr algn="ctr"/>
-          </a:p>
-        </p:txBody>
-      </p:sp>
-      <p:sp>
-        <p:nvSpPr>
-          <p:cNvPr id="6" name="TextBox 5"/>
+          <a:bodyPr wrap="square" lIns="101600" tIns="101600" rIns="101600" bIns="101600" rtlCol="0" anchor="ctr"/>
+          <a:lstStyle/>
+          <a:p>
+            <a:pPr algn="ctr">
+              <a:defRPr sz="1900" b="1"/>
+            </a:pPr>
+            <a:r>
+              <a:rPr lang="en-US" i="1" dirty="0">
+                <a:solidFill>
+                  <a:schemeClr val="tx1"/>
+                </a:solidFill>
+              </a:rPr>
+              <a:t>Schedule</a:t>
+            </a:r>
+            <a:r>
+              <a:rPr lang="en-US" dirty="0">
+                <a:solidFill>
+                  <a:schemeClr val="tx1"/>
+                </a:solidFill>
+              </a:rPr>
+              <a:t>: </a:t>
+            </a:r>
+            <a:r>
+              <a:rPr dirty="0">
+                <a:solidFill>
+                  <a:schemeClr val="tx1"/>
+                </a:solidFill>
+              </a:rPr>
+              <a:t>Task A</a:t>
+            </a:r>
+            <a:br>
+              <a:rPr dirty="0">
+                <a:solidFill>
+                  <a:schemeClr val="tx1"/>
+                </a:solidFill>
+              </a:rPr>
+            </a:br>
+            <a:r>
+              <a:rPr dirty="0">
+                <a:solidFill>
+                  <a:schemeClr val="tx1"/>
+                </a:solidFill>
+              </a:rPr>
+              <a:t>PA key K</a:t>
+            </a:r>
+            <a:r>
+              <a:rPr baseline="-25000" dirty="0">
+                <a:solidFill>
+                  <a:schemeClr val="tx1"/>
+                </a:solidFill>
+              </a:rPr>
+              <a:t>A</a:t>
+            </a:r>
+          </a:p>
+        </p:txBody>
+      </p:sp>
+      <p:sp>
+        <p:nvSpPr>
+          <p:cNvPr id="363" name="TextBox 362">
+            <a:extLst>
+              <a:ext uri="{FF2B5EF4-FFF2-40B4-BE49-F238E27FC236}">
+                <a16:creationId xmlns:a16="http://schemas.microsoft.com/office/drawing/2014/main" id="{AF6E41D8-FD02-C7E8-D401-3F923E542F30}"/>
+              </a:ext>
+            </a:extLst>
+          </p:cNvPr>
           <p:cNvSpPr txBox="1"/>
           <p:nvPr/>
         </p:nvSpPr>
         <p:spPr>
           <a:xfrm>
-            <a:off x="8961119" y="1325880"/>
-            <a:ext cx="5760720" cy="320040"/>
+            <a:off x="57990" y="3801289"/>
+            <a:ext cx="933269" cy="261610"/>
           </a:xfrm>
           <a:prstGeom prst="rect">
             <a:avLst/>
@@ -3281,38 +3767,52 @@
           <a:lstStyle/>
           <a:p>
             <a:pPr algn="ctr">
-              <a:defRPr sz="1800" b="1">
+              <a:defRPr sz="1100" b="1">
                 <a:solidFill>
                   <a:srgbClr val="191919"/>
                 </a:solidFill>
               </a:defRPr>
             </a:pPr>
             <a:r>
-              <a:t>TrustZone Secure World</a:t>
-            </a:r>
-          </a:p>
-        </p:txBody>
-      </p:sp>
-      <p:sp>
-        <p:nvSpPr>
-          <p:cNvPr id="7" name="Rectangle 6"/>
+              <a:rPr lang="en-US" dirty="0"/>
+              <a:t>Unprivileged</a:t>
+            </a:r>
+            <a:endParaRPr dirty="0"/>
+          </a:p>
+        </p:txBody>
+      </p:sp>
+      <p:sp>
+        <p:nvSpPr>
+          <p:cNvPr id="364" name="Rectangle 363">
+            <a:extLst>
+              <a:ext uri="{FF2B5EF4-FFF2-40B4-BE49-F238E27FC236}">
+                <a16:creationId xmlns:a16="http://schemas.microsoft.com/office/drawing/2014/main" id="{0A6FF623-D91B-D363-9135-FA4026EC8009}"/>
+              </a:ext>
+            </a:extLst>
+          </p:cNvPr>
           <p:cNvSpPr/>
           <p:nvPr/>
         </p:nvSpPr>
         <p:spPr>
           <a:xfrm>
-            <a:off x="822960" y="6035040"/>
-            <a:ext cx="13807440" cy="73152"/>
+            <a:off x="2586306" y="1648289"/>
+            <a:ext cx="2011680" cy="894382"/>
           </a:xfrm>
           <a:prstGeom prst="rect">
             <a:avLst/>
           </a:prstGeom>
           <a:solidFill>
-            <a:srgbClr val="373737"/>
+            <a:schemeClr val="accent5">
+              <a:lumMod val="20000"/>
+              <a:lumOff val="80000"/>
+            </a:schemeClr>
           </a:solidFill>
-          <a:ln>
-            <a:noFill/>
+          <a:ln w="22860">
+            <a:solidFill>
+              <a:srgbClr val="373737"/>
+            </a:solidFill>
           </a:ln>
+          <a:effectLst/>
         </p:spPr>
         <p:style>
           <a:lnRef idx="1">
@@ -3329,33 +3829,73 @@
           </a:fontRef>
         </p:style>
         <p:txBody>
-          <a:bodyPr rtlCol="0" anchor="ctr"/>
-          <a:lstStyle/>
-          <a:p>
-            <a:pPr algn="ctr"/>
-          </a:p>
-        </p:txBody>
-      </p:sp>
-      <p:sp>
-        <p:nvSpPr>
-          <p:cNvPr id="8" name="Rectangle 7"/>
+          <a:bodyPr wrap="square" lIns="101600" tIns="101600" rIns="101600" bIns="101600" rtlCol="0" anchor="ctr"/>
+          <a:lstStyle/>
+          <a:p>
+            <a:pPr algn="ctr">
+              <a:defRPr sz="1900" b="1"/>
+            </a:pPr>
+            <a:r>
+              <a:rPr lang="en-US" sz="1900" dirty="0">
+                <a:solidFill>
+                  <a:schemeClr val="tx1"/>
+                </a:solidFill>
+              </a:rPr>
+              <a:t>ISR </a:t>
+            </a:r>
+          </a:p>
+          <a:p>
+            <a:pPr algn="ctr">
+              <a:defRPr sz="1900" b="1"/>
+            </a:pPr>
+            <a:r>
+              <a:rPr lang="en-US" sz="1900" dirty="0">
+                <a:solidFill>
+                  <a:schemeClr val="tx1"/>
+                </a:solidFill>
+              </a:rPr>
+              <a:t>PA key K</a:t>
+            </a:r>
+            <a:r>
+              <a:rPr lang="en-US" sz="1900" baseline="-25000" dirty="0">
+                <a:solidFill>
+                  <a:schemeClr val="tx1"/>
+                </a:solidFill>
+              </a:rPr>
+              <a:t>ISR</a:t>
+            </a:r>
+          </a:p>
+        </p:txBody>
+      </p:sp>
+      <p:sp>
+        <p:nvSpPr>
+          <p:cNvPr id="365" name="Rectangle 364">
+            <a:extLst>
+              <a:ext uri="{FF2B5EF4-FFF2-40B4-BE49-F238E27FC236}">
+                <a16:creationId xmlns:a16="http://schemas.microsoft.com/office/drawing/2014/main" id="{F455FF77-E692-FC0C-EDFD-210AFFC619E5}"/>
+              </a:ext>
+            </a:extLst>
+          </p:cNvPr>
           <p:cNvSpPr/>
           <p:nvPr/>
         </p:nvSpPr>
         <p:spPr>
           <a:xfrm>
-            <a:off x="868680" y="5925312"/>
-            <a:ext cx="54864" cy="228600"/>
+            <a:off x="286590" y="1648289"/>
+            <a:ext cx="2011680" cy="894382"/>
           </a:xfrm>
           <a:prstGeom prst="rect">
             <a:avLst/>
           </a:prstGeom>
           <a:solidFill>
-            <a:srgbClr val="373737"/>
+            <a:srgbClr val="B4DCFF"/>
           </a:solidFill>
-          <a:ln>
-            <a:noFill/>
+          <a:ln w="22860">
+            <a:solidFill>
+              <a:srgbClr val="373737"/>
+            </a:solidFill>
           </a:ln>
+          <a:effectLst/>
         </p:spPr>
         <p:style>
           <a:lnRef idx="1">
@@ -3372,33 +3912,94 @@
           </a:fontRef>
         </p:style>
         <p:txBody>
-          <a:bodyPr rtlCol="0" anchor="ctr"/>
-          <a:lstStyle/>
-          <a:p>
-            <a:pPr algn="ctr"/>
-          </a:p>
-        </p:txBody>
-      </p:sp>
-      <p:sp>
-        <p:nvSpPr>
-          <p:cNvPr id="9" name="Rectangle 8"/>
+          <a:bodyPr wrap="square" lIns="101600" tIns="101600" rIns="101600" bIns="101600" rtlCol="0" anchor="ctr"/>
+          <a:lstStyle/>
+          <a:p>
+            <a:pPr algn="ctr">
+              <a:defRPr sz="1900" b="1"/>
+            </a:pPr>
+            <a:r>
+              <a:rPr lang="en-US" i="1" dirty="0">
+                <a:solidFill>
+                  <a:schemeClr val="tx1"/>
+                </a:solidFill>
+              </a:rPr>
+              <a:t>Resume</a:t>
+            </a:r>
+            <a:r>
+              <a:rPr lang="en-US" dirty="0">
+                <a:solidFill>
+                  <a:schemeClr val="tx1"/>
+                </a:solidFill>
+              </a:rPr>
+              <a:t>: </a:t>
+            </a:r>
+            <a:r>
+              <a:rPr dirty="0">
+                <a:solidFill>
+                  <a:schemeClr val="tx1"/>
+                </a:solidFill>
+              </a:rPr>
+              <a:t>Task A</a:t>
+            </a:r>
+            <a:br>
+              <a:rPr dirty="0">
+                <a:solidFill>
+                  <a:schemeClr val="tx1"/>
+                </a:solidFill>
+              </a:rPr>
+            </a:br>
+            <a:r>
+              <a:rPr dirty="0">
+                <a:solidFill>
+                  <a:schemeClr val="tx1"/>
+                </a:solidFill>
+              </a:rPr>
+              <a:t>PA key K</a:t>
+            </a:r>
+            <a:r>
+              <a:rPr baseline="-25000" dirty="0">
+                <a:solidFill>
+                  <a:schemeClr val="tx1"/>
+                </a:solidFill>
+              </a:rPr>
+              <a:t>A</a:t>
+            </a:r>
+          </a:p>
+        </p:txBody>
+      </p:sp>
+      <p:sp>
+        <p:nvSpPr>
+          <p:cNvPr id="366" name="Rectangle 365">
+            <a:extLst>
+              <a:ext uri="{FF2B5EF4-FFF2-40B4-BE49-F238E27FC236}">
+                <a16:creationId xmlns:a16="http://schemas.microsoft.com/office/drawing/2014/main" id="{6FDE7D49-57AE-E00E-6034-148C4E3FED7B}"/>
+              </a:ext>
+            </a:extLst>
+          </p:cNvPr>
           <p:cNvSpPr/>
           <p:nvPr/>
         </p:nvSpPr>
         <p:spPr>
           <a:xfrm>
-            <a:off x="1737360" y="5925312"/>
-            <a:ext cx="54864" cy="228600"/>
+            <a:off x="286590" y="2809113"/>
+            <a:ext cx="2011680" cy="894382"/>
           </a:xfrm>
           <a:prstGeom prst="rect">
             <a:avLst/>
           </a:prstGeom>
           <a:solidFill>
-            <a:srgbClr val="373737"/>
+            <a:schemeClr val="accent6">
+              <a:lumMod val="20000"/>
+              <a:lumOff val="80000"/>
+            </a:schemeClr>
           </a:solidFill>
-          <a:ln>
-            <a:noFill/>
+          <a:ln w="22860">
+            <a:solidFill>
+              <a:srgbClr val="373737"/>
+            </a:solidFill>
           </a:ln>
+          <a:effectLst/>
         </p:spPr>
         <p:style>
           <a:lnRef idx="1">
@@ -3415,1547 +4016,104 @@
           </a:fontRef>
         </p:style>
         <p:txBody>
-          <a:bodyPr rtlCol="0" anchor="ctr"/>
-          <a:lstStyle/>
-          <a:p>
-            <a:pPr algn="ctr"/>
-          </a:p>
-        </p:txBody>
-      </p:sp>
-      <p:sp>
-        <p:nvSpPr>
-          <p:cNvPr id="10" name="Rectangle 9"/>
-          <p:cNvSpPr/>
-          <p:nvPr/>
-        </p:nvSpPr>
-        <p:spPr>
-          <a:xfrm>
-            <a:off x="2606039" y="5925312"/>
-            <a:ext cx="54864" cy="228600"/>
-          </a:xfrm>
-          <a:prstGeom prst="rect">
-            <a:avLst/>
-          </a:prstGeom>
-          <a:solidFill>
-            <a:srgbClr val="373737"/>
-          </a:solidFill>
-          <a:ln>
-            <a:noFill/>
-          </a:ln>
-        </p:spPr>
-        <p:style>
-          <a:lnRef idx="1">
-            <a:schemeClr val="accent1"/>
-          </a:lnRef>
-          <a:fillRef idx="3">
-            <a:schemeClr val="accent1"/>
-          </a:fillRef>
-          <a:effectRef idx="2">
-            <a:schemeClr val="accent1"/>
-          </a:effectRef>
-          <a:fontRef idx="minor">
-            <a:schemeClr val="lt1"/>
-          </a:fontRef>
-        </p:style>
-        <p:txBody>
-          <a:bodyPr rtlCol="0" anchor="ctr"/>
-          <a:lstStyle/>
-          <a:p>
-            <a:pPr algn="ctr"/>
-          </a:p>
-        </p:txBody>
-      </p:sp>
-      <p:sp>
-        <p:nvSpPr>
-          <p:cNvPr id="11" name="Rectangle 10"/>
-          <p:cNvSpPr/>
-          <p:nvPr/>
-        </p:nvSpPr>
-        <p:spPr>
-          <a:xfrm>
-            <a:off x="3474720" y="5925312"/>
-            <a:ext cx="54864" cy="228600"/>
-          </a:xfrm>
-          <a:prstGeom prst="rect">
-            <a:avLst/>
-          </a:prstGeom>
-          <a:solidFill>
-            <a:srgbClr val="373737"/>
-          </a:solidFill>
-          <a:ln>
-            <a:noFill/>
-          </a:ln>
-        </p:spPr>
-        <p:style>
-          <a:lnRef idx="1">
-            <a:schemeClr val="accent1"/>
-          </a:lnRef>
-          <a:fillRef idx="3">
-            <a:schemeClr val="accent1"/>
-          </a:fillRef>
-          <a:effectRef idx="2">
-            <a:schemeClr val="accent1"/>
-          </a:effectRef>
-          <a:fontRef idx="minor">
-            <a:schemeClr val="lt1"/>
-          </a:fontRef>
-        </p:style>
-        <p:txBody>
-          <a:bodyPr rtlCol="0" anchor="ctr"/>
-          <a:lstStyle/>
-          <a:p>
-            <a:pPr algn="ctr"/>
-          </a:p>
-        </p:txBody>
-      </p:sp>
-      <p:sp>
-        <p:nvSpPr>
-          <p:cNvPr id="12" name="Rectangle 11"/>
-          <p:cNvSpPr/>
-          <p:nvPr/>
-        </p:nvSpPr>
-        <p:spPr>
-          <a:xfrm>
-            <a:off x="4343400" y="5925312"/>
-            <a:ext cx="54864" cy="228600"/>
-          </a:xfrm>
-          <a:prstGeom prst="rect">
-            <a:avLst/>
-          </a:prstGeom>
-          <a:solidFill>
-            <a:srgbClr val="373737"/>
-          </a:solidFill>
-          <a:ln>
-            <a:noFill/>
-          </a:ln>
-        </p:spPr>
-        <p:style>
-          <a:lnRef idx="1">
-            <a:schemeClr val="accent1"/>
-          </a:lnRef>
-          <a:fillRef idx="3">
-            <a:schemeClr val="accent1"/>
-          </a:fillRef>
-          <a:effectRef idx="2">
-            <a:schemeClr val="accent1"/>
-          </a:effectRef>
-          <a:fontRef idx="minor">
-            <a:schemeClr val="lt1"/>
-          </a:fontRef>
-        </p:style>
-        <p:txBody>
-          <a:bodyPr rtlCol="0" anchor="ctr"/>
-          <a:lstStyle/>
-          <a:p>
-            <a:pPr algn="ctr"/>
-          </a:p>
-        </p:txBody>
-      </p:sp>
-      <p:sp>
-        <p:nvSpPr>
-          <p:cNvPr id="13" name="Rectangle 12"/>
-          <p:cNvSpPr/>
-          <p:nvPr/>
-        </p:nvSpPr>
-        <p:spPr>
-          <a:xfrm>
-            <a:off x="5212079" y="5925312"/>
-            <a:ext cx="54864" cy="228600"/>
-          </a:xfrm>
-          <a:prstGeom prst="rect">
-            <a:avLst/>
-          </a:prstGeom>
-          <a:solidFill>
-            <a:srgbClr val="373737"/>
-          </a:solidFill>
-          <a:ln>
-            <a:noFill/>
-          </a:ln>
-        </p:spPr>
-        <p:style>
-          <a:lnRef idx="1">
-            <a:schemeClr val="accent1"/>
-          </a:lnRef>
-          <a:fillRef idx="3">
-            <a:schemeClr val="accent1"/>
-          </a:fillRef>
-          <a:effectRef idx="2">
-            <a:schemeClr val="accent1"/>
-          </a:effectRef>
-          <a:fontRef idx="minor">
-            <a:schemeClr val="lt1"/>
-          </a:fontRef>
-        </p:style>
-        <p:txBody>
-          <a:bodyPr rtlCol="0" anchor="ctr"/>
-          <a:lstStyle/>
-          <a:p>
-            <a:pPr algn="ctr"/>
-          </a:p>
-        </p:txBody>
-      </p:sp>
-      <p:sp>
-        <p:nvSpPr>
-          <p:cNvPr id="14" name="Rectangle 13"/>
-          <p:cNvSpPr/>
-          <p:nvPr/>
-        </p:nvSpPr>
-        <p:spPr>
-          <a:xfrm>
-            <a:off x="6080759" y="5925312"/>
-            <a:ext cx="54864" cy="228600"/>
-          </a:xfrm>
-          <a:prstGeom prst="rect">
-            <a:avLst/>
-          </a:prstGeom>
-          <a:solidFill>
-            <a:srgbClr val="373737"/>
-          </a:solidFill>
-          <a:ln>
-            <a:noFill/>
-          </a:ln>
-        </p:spPr>
-        <p:style>
-          <a:lnRef idx="1">
-            <a:schemeClr val="accent1"/>
-          </a:lnRef>
-          <a:fillRef idx="3">
-            <a:schemeClr val="accent1"/>
-          </a:fillRef>
-          <a:effectRef idx="2">
-            <a:schemeClr val="accent1"/>
-          </a:effectRef>
-          <a:fontRef idx="minor">
-            <a:schemeClr val="lt1"/>
-          </a:fontRef>
-        </p:style>
-        <p:txBody>
-          <a:bodyPr rtlCol="0" anchor="ctr"/>
-          <a:lstStyle/>
-          <a:p>
-            <a:pPr algn="ctr"/>
-          </a:p>
-        </p:txBody>
-      </p:sp>
-      <p:sp>
-        <p:nvSpPr>
-          <p:cNvPr id="15" name="Rectangle 14"/>
-          <p:cNvSpPr/>
-          <p:nvPr/>
-        </p:nvSpPr>
-        <p:spPr>
-          <a:xfrm>
-            <a:off x="6949440" y="5925312"/>
-            <a:ext cx="54864" cy="228600"/>
-          </a:xfrm>
-          <a:prstGeom prst="rect">
-            <a:avLst/>
-          </a:prstGeom>
-          <a:solidFill>
-            <a:srgbClr val="373737"/>
-          </a:solidFill>
-          <a:ln>
-            <a:noFill/>
-          </a:ln>
-        </p:spPr>
-        <p:style>
-          <a:lnRef idx="1">
-            <a:schemeClr val="accent1"/>
-          </a:lnRef>
-          <a:fillRef idx="3">
-            <a:schemeClr val="accent1"/>
-          </a:fillRef>
-          <a:effectRef idx="2">
-            <a:schemeClr val="accent1"/>
-          </a:effectRef>
-          <a:fontRef idx="minor">
-            <a:schemeClr val="lt1"/>
-          </a:fontRef>
-        </p:style>
-        <p:txBody>
-          <a:bodyPr rtlCol="0" anchor="ctr"/>
-          <a:lstStyle/>
-          <a:p>
-            <a:pPr algn="ctr"/>
-          </a:p>
-        </p:txBody>
-      </p:sp>
-      <p:sp>
-        <p:nvSpPr>
-          <p:cNvPr id="16" name="Rectangle 15"/>
-          <p:cNvSpPr/>
-          <p:nvPr/>
-        </p:nvSpPr>
-        <p:spPr>
-          <a:xfrm>
-            <a:off x="7818119" y="5925312"/>
-            <a:ext cx="54864" cy="228600"/>
-          </a:xfrm>
-          <a:prstGeom prst="rect">
-            <a:avLst/>
-          </a:prstGeom>
-          <a:solidFill>
-            <a:srgbClr val="373737"/>
-          </a:solidFill>
-          <a:ln>
-            <a:noFill/>
-          </a:ln>
-        </p:spPr>
-        <p:style>
-          <a:lnRef idx="1">
-            <a:schemeClr val="accent1"/>
-          </a:lnRef>
-          <a:fillRef idx="3">
-            <a:schemeClr val="accent1"/>
-          </a:fillRef>
-          <a:effectRef idx="2">
-            <a:schemeClr val="accent1"/>
-          </a:effectRef>
-          <a:fontRef idx="minor">
-            <a:schemeClr val="lt1"/>
-          </a:fontRef>
-        </p:style>
-        <p:txBody>
-          <a:bodyPr rtlCol="0" anchor="ctr"/>
-          <a:lstStyle/>
-          <a:p>
-            <a:pPr algn="ctr"/>
-          </a:p>
-        </p:txBody>
-      </p:sp>
-      <p:sp>
-        <p:nvSpPr>
-          <p:cNvPr id="17" name="Rectangle 16"/>
-          <p:cNvSpPr/>
-          <p:nvPr/>
-        </p:nvSpPr>
-        <p:spPr>
-          <a:xfrm>
-            <a:off x="8686800" y="5925312"/>
-            <a:ext cx="54864" cy="228600"/>
-          </a:xfrm>
-          <a:prstGeom prst="rect">
-            <a:avLst/>
-          </a:prstGeom>
-          <a:solidFill>
-            <a:srgbClr val="373737"/>
-          </a:solidFill>
-          <a:ln>
-            <a:noFill/>
-          </a:ln>
-        </p:spPr>
-        <p:style>
-          <a:lnRef idx="1">
-            <a:schemeClr val="accent1"/>
-          </a:lnRef>
-          <a:fillRef idx="3">
-            <a:schemeClr val="accent1"/>
-          </a:fillRef>
-          <a:effectRef idx="2">
-            <a:schemeClr val="accent1"/>
-          </a:effectRef>
-          <a:fontRef idx="minor">
-            <a:schemeClr val="lt1"/>
-          </a:fontRef>
-        </p:style>
-        <p:txBody>
-          <a:bodyPr rtlCol="0" anchor="ctr"/>
-          <a:lstStyle/>
-          <a:p>
-            <a:pPr algn="ctr"/>
-          </a:p>
-        </p:txBody>
-      </p:sp>
-      <p:sp>
-        <p:nvSpPr>
-          <p:cNvPr id="18" name="Rectangle 17"/>
-          <p:cNvSpPr/>
-          <p:nvPr/>
-        </p:nvSpPr>
-        <p:spPr>
-          <a:xfrm>
-            <a:off x="9555480" y="5925312"/>
-            <a:ext cx="54864" cy="228600"/>
-          </a:xfrm>
-          <a:prstGeom prst="rect">
-            <a:avLst/>
-          </a:prstGeom>
-          <a:solidFill>
-            <a:srgbClr val="373737"/>
-          </a:solidFill>
-          <a:ln>
-            <a:noFill/>
-          </a:ln>
-        </p:spPr>
-        <p:style>
-          <a:lnRef idx="1">
-            <a:schemeClr val="accent1"/>
-          </a:lnRef>
-          <a:fillRef idx="3">
-            <a:schemeClr val="accent1"/>
-          </a:fillRef>
-          <a:effectRef idx="2">
-            <a:schemeClr val="accent1"/>
-          </a:effectRef>
-          <a:fontRef idx="minor">
-            <a:schemeClr val="lt1"/>
-          </a:fontRef>
-        </p:style>
-        <p:txBody>
-          <a:bodyPr rtlCol="0" anchor="ctr"/>
-          <a:lstStyle/>
-          <a:p>
-            <a:pPr algn="ctr"/>
-          </a:p>
-        </p:txBody>
-      </p:sp>
-      <p:sp>
-        <p:nvSpPr>
-          <p:cNvPr id="19" name="Rectangle 18"/>
-          <p:cNvSpPr/>
-          <p:nvPr/>
-        </p:nvSpPr>
-        <p:spPr>
-          <a:xfrm>
-            <a:off x="10424159" y="5925312"/>
-            <a:ext cx="54864" cy="228600"/>
-          </a:xfrm>
-          <a:prstGeom prst="rect">
-            <a:avLst/>
-          </a:prstGeom>
-          <a:solidFill>
-            <a:srgbClr val="373737"/>
-          </a:solidFill>
-          <a:ln>
-            <a:noFill/>
-          </a:ln>
-        </p:spPr>
-        <p:style>
-          <a:lnRef idx="1">
-            <a:schemeClr val="accent1"/>
-          </a:lnRef>
-          <a:fillRef idx="3">
-            <a:schemeClr val="accent1"/>
-          </a:fillRef>
-          <a:effectRef idx="2">
-            <a:schemeClr val="accent1"/>
-          </a:effectRef>
-          <a:fontRef idx="minor">
-            <a:schemeClr val="lt1"/>
-          </a:fontRef>
-        </p:style>
-        <p:txBody>
-          <a:bodyPr rtlCol="0" anchor="ctr"/>
-          <a:lstStyle/>
-          <a:p>
-            <a:pPr algn="ctr"/>
-          </a:p>
-        </p:txBody>
-      </p:sp>
-      <p:sp>
-        <p:nvSpPr>
-          <p:cNvPr id="20" name="Rectangle 19"/>
-          <p:cNvSpPr/>
-          <p:nvPr/>
-        </p:nvSpPr>
-        <p:spPr>
-          <a:xfrm>
-            <a:off x="11292840" y="5925312"/>
-            <a:ext cx="54864" cy="228600"/>
-          </a:xfrm>
-          <a:prstGeom prst="rect">
-            <a:avLst/>
-          </a:prstGeom>
-          <a:solidFill>
-            <a:srgbClr val="373737"/>
-          </a:solidFill>
-          <a:ln>
-            <a:noFill/>
-          </a:ln>
-        </p:spPr>
-        <p:style>
-          <a:lnRef idx="1">
-            <a:schemeClr val="accent1"/>
-          </a:lnRef>
-          <a:fillRef idx="3">
-            <a:schemeClr val="accent1"/>
-          </a:fillRef>
-          <a:effectRef idx="2">
-            <a:schemeClr val="accent1"/>
-          </a:effectRef>
-          <a:fontRef idx="minor">
-            <a:schemeClr val="lt1"/>
-          </a:fontRef>
-        </p:style>
-        <p:txBody>
-          <a:bodyPr rtlCol="0" anchor="ctr"/>
-          <a:lstStyle/>
-          <a:p>
-            <a:pPr algn="ctr"/>
-          </a:p>
-        </p:txBody>
-      </p:sp>
-      <p:sp>
-        <p:nvSpPr>
-          <p:cNvPr id="21" name="Rectangle 20"/>
-          <p:cNvSpPr/>
-          <p:nvPr/>
-        </p:nvSpPr>
-        <p:spPr>
-          <a:xfrm>
-            <a:off x="12161519" y="5925312"/>
-            <a:ext cx="54864" cy="228600"/>
-          </a:xfrm>
-          <a:prstGeom prst="rect">
-            <a:avLst/>
-          </a:prstGeom>
-          <a:solidFill>
-            <a:srgbClr val="373737"/>
-          </a:solidFill>
-          <a:ln>
-            <a:noFill/>
-          </a:ln>
-        </p:spPr>
-        <p:style>
-          <a:lnRef idx="1">
-            <a:schemeClr val="accent1"/>
-          </a:lnRef>
-          <a:fillRef idx="3">
-            <a:schemeClr val="accent1"/>
-          </a:fillRef>
-          <a:effectRef idx="2">
-            <a:schemeClr val="accent1"/>
-          </a:effectRef>
-          <a:fontRef idx="minor">
-            <a:schemeClr val="lt1"/>
-          </a:fontRef>
-        </p:style>
-        <p:txBody>
-          <a:bodyPr rtlCol="0" anchor="ctr"/>
-          <a:lstStyle/>
-          <a:p>
-            <a:pPr algn="ctr"/>
-          </a:p>
-        </p:txBody>
-      </p:sp>
-      <p:sp>
-        <p:nvSpPr>
-          <p:cNvPr id="22" name="Rectangle 21"/>
-          <p:cNvSpPr/>
-          <p:nvPr/>
-        </p:nvSpPr>
-        <p:spPr>
-          <a:xfrm>
-            <a:off x="13030200" y="5925312"/>
-            <a:ext cx="54864" cy="228600"/>
-          </a:xfrm>
-          <a:prstGeom prst="rect">
-            <a:avLst/>
-          </a:prstGeom>
-          <a:solidFill>
-            <a:srgbClr val="373737"/>
-          </a:solidFill>
-          <a:ln>
-            <a:noFill/>
-          </a:ln>
-        </p:spPr>
-        <p:style>
-          <a:lnRef idx="1">
-            <a:schemeClr val="accent1"/>
-          </a:lnRef>
-          <a:fillRef idx="3">
-            <a:schemeClr val="accent1"/>
-          </a:fillRef>
-          <a:effectRef idx="2">
-            <a:schemeClr val="accent1"/>
-          </a:effectRef>
-          <a:fontRef idx="minor">
-            <a:schemeClr val="lt1"/>
-          </a:fontRef>
-        </p:style>
-        <p:txBody>
-          <a:bodyPr rtlCol="0" anchor="ctr"/>
-          <a:lstStyle/>
-          <a:p>
-            <a:pPr algn="ctr"/>
-          </a:p>
-        </p:txBody>
-      </p:sp>
-      <p:sp>
-        <p:nvSpPr>
-          <p:cNvPr id="23" name="Rounded Rectangle 22"/>
-          <p:cNvSpPr/>
-          <p:nvPr/>
-        </p:nvSpPr>
-        <p:spPr>
-          <a:xfrm>
-            <a:off x="822960" y="4114800"/>
-            <a:ext cx="2011680" cy="1097280"/>
-          </a:xfrm>
-          <a:prstGeom prst="roundRect">
-            <a:avLst/>
-          </a:prstGeom>
-          <a:solidFill>
-            <a:srgbClr val="B4DCFF"/>
-          </a:solidFill>
-          <a:ln w="22860">
-            <a:solidFill>
-              <a:srgbClr val="373737"/>
-            </a:solidFill>
-          </a:ln>
-        </p:spPr>
-        <p:style>
-          <a:lnRef idx="1">
-            <a:schemeClr val="accent1"/>
-          </a:lnRef>
-          <a:fillRef idx="3">
-            <a:schemeClr val="accent1"/>
-          </a:fillRef>
-          <a:effectRef idx="2">
-            <a:schemeClr val="accent1"/>
-          </a:effectRef>
-          <a:fontRef idx="minor">
-            <a:schemeClr val="lt1"/>
-          </a:fontRef>
-        </p:style>
-        <p:txBody>
-          <a:bodyPr rtlCol="0" anchor="ctr" wrap="square" lIns="101600" rIns="101600" tIns="101600" bIns="101600"/>
+          <a:bodyPr wrap="square" lIns="101600" tIns="101600" rIns="101600" bIns="101600" rtlCol="0" anchor="ctr"/>
           <a:lstStyle/>
           <a:p>
             <a:pPr algn="ctr">
-              <a:defRPr b="1" sz="1900"/>
+              <a:defRPr sz="1900" b="1"/>
             </a:pPr>
             <a:r>
-              <a:t>Task A</a:t>
-            </a:r>
-          </a:p>
-          <a:p>
-            <a:pPr algn="ctr">
-              <a:defRPr sz="1200"/>
-            </a:pPr>
-            <a:r>
-              <a:t>User mode</a:t>
-            </a:r>
-            <a:br/>
-            <a:r>
-              <a:t>PA key KA</a:t>
-            </a:r>
-          </a:p>
-        </p:txBody>
-      </p:sp>
-      <p:sp>
-        <p:nvSpPr>
-          <p:cNvPr id="24" name="Rounded Rectangle 23"/>
-          <p:cNvSpPr/>
-          <p:nvPr/>
-        </p:nvSpPr>
-        <p:spPr>
-          <a:xfrm>
-            <a:off x="2926080" y="4114800"/>
-            <a:ext cx="1920240" cy="1097280"/>
-          </a:xfrm>
-          <a:prstGeom prst="roundRect">
-            <a:avLst/>
-          </a:prstGeom>
-          <a:solidFill>
-            <a:srgbClr val="FFE4B8"/>
-          </a:solidFill>
-          <a:ln w="22860">
-            <a:solidFill>
-              <a:srgbClr val="373737"/>
-            </a:solidFill>
-          </a:ln>
-        </p:spPr>
-        <p:style>
-          <a:lnRef idx="1">
-            <a:schemeClr val="accent1"/>
-          </a:lnRef>
-          <a:fillRef idx="3">
-            <a:schemeClr val="accent1"/>
-          </a:fillRef>
-          <a:effectRef idx="2">
-            <a:schemeClr val="accent1"/>
-          </a:effectRef>
-          <a:fontRef idx="minor">
-            <a:schemeClr val="lt1"/>
-          </a:fontRef>
-        </p:style>
-        <p:txBody>
-          <a:bodyPr rtlCol="0" anchor="ctr" wrap="square" lIns="101600" rIns="101600" tIns="101600" bIns="101600"/>
-          <a:lstStyle/>
-          <a:p>
-            <a:pPr algn="ctr">
-              <a:defRPr b="1" sz="1900"/>
-            </a:pPr>
-            <a:r>
-              <a:t>Kernel</a:t>
-            </a:r>
-          </a:p>
-          <a:p>
-            <a:pPr algn="ctr">
-              <a:defRPr sz="1200"/>
-            </a:pPr>
-            <a:r>
-              <a:t>dispatch / schedule</a:t>
-            </a:r>
-          </a:p>
-        </p:txBody>
-      </p:sp>
-      <p:sp>
-        <p:nvSpPr>
-          <p:cNvPr id="25" name="Rounded Rectangle 24"/>
-          <p:cNvSpPr/>
-          <p:nvPr/>
-        </p:nvSpPr>
-        <p:spPr>
-          <a:xfrm>
-            <a:off x="5303520" y="4114800"/>
-            <a:ext cx="1920240" cy="1097280"/>
-          </a:xfrm>
-          <a:prstGeom prst="roundRect">
-            <a:avLst/>
-          </a:prstGeom>
-          <a:solidFill>
-            <a:srgbClr val="C8B4FF"/>
-          </a:solidFill>
-          <a:ln w="22860">
-            <a:solidFill>
-              <a:srgbClr val="373737"/>
-            </a:solidFill>
-          </a:ln>
-        </p:spPr>
-        <p:style>
-          <a:lnRef idx="1">
-            <a:schemeClr val="accent1"/>
-          </a:lnRef>
-          <a:fillRef idx="3">
-            <a:schemeClr val="accent1"/>
-          </a:fillRef>
-          <a:effectRef idx="2">
-            <a:schemeClr val="accent1"/>
-          </a:effectRef>
-          <a:fontRef idx="minor">
-            <a:schemeClr val="lt1"/>
-          </a:fontRef>
-        </p:style>
-        <p:txBody>
-          <a:bodyPr rtlCol="0" anchor="ctr" wrap="square" lIns="101600" rIns="101600" tIns="101600" bIns="101600"/>
-          <a:lstStyle/>
-          <a:p>
-            <a:pPr algn="ctr">
-              <a:defRPr b="1" sz="1900"/>
-            </a:pPr>
-            <a:r>
-              <a:t>ISR</a:t>
-            </a:r>
-          </a:p>
-          <a:p>
-            <a:pPr algn="ctr">
-              <a:defRPr sz="1200"/>
-            </a:pPr>
-            <a:r>
-              <a:t>IRQ context</a:t>
-            </a:r>
-            <a:br/>
-            <a:r>
-              <a:t>PA key K_ISR</a:t>
-            </a:r>
-          </a:p>
-        </p:txBody>
-      </p:sp>
-      <p:sp>
-        <p:nvSpPr>
-          <p:cNvPr id="26" name="Rounded Rectangle 25"/>
-          <p:cNvSpPr/>
-          <p:nvPr/>
-        </p:nvSpPr>
-        <p:spPr>
-          <a:xfrm>
-            <a:off x="7406640" y="4114800"/>
-            <a:ext cx="2011680" cy="1097280"/>
-          </a:xfrm>
-          <a:prstGeom prst="roundRect">
-            <a:avLst/>
-          </a:prstGeom>
-          <a:solidFill>
-            <a:srgbClr val="B4DCFF"/>
-          </a:solidFill>
-          <a:ln w="22860">
-            <a:solidFill>
-              <a:srgbClr val="373737"/>
-            </a:solidFill>
-          </a:ln>
-        </p:spPr>
-        <p:style>
-          <a:lnRef idx="1">
-            <a:schemeClr val="accent1"/>
-          </a:lnRef>
-          <a:fillRef idx="3">
-            <a:schemeClr val="accent1"/>
-          </a:fillRef>
-          <a:effectRef idx="2">
-            <a:schemeClr val="accent1"/>
-          </a:effectRef>
-          <a:fontRef idx="minor">
-            <a:schemeClr val="lt1"/>
-          </a:fontRef>
-        </p:style>
-        <p:txBody>
-          <a:bodyPr rtlCol="0" anchor="ctr" wrap="square" lIns="101600" rIns="101600" tIns="101600" bIns="101600"/>
-          <a:lstStyle/>
-          <a:p>
-            <a:pPr algn="ctr">
-              <a:defRPr b="1" sz="1900"/>
-            </a:pPr>
-            <a:r>
-              <a:t>Task A</a:t>
-            </a:r>
-          </a:p>
-          <a:p>
-            <a:pPr algn="ctr">
-              <a:defRPr sz="1200"/>
-            </a:pPr>
-            <a:r>
-              <a:t>resume</a:t>
-            </a:r>
-            <a:br/>
-            <a:r>
-              <a:t>PA key KA</a:t>
-            </a:r>
-          </a:p>
-        </p:txBody>
-      </p:sp>
-      <p:sp>
-        <p:nvSpPr>
-          <p:cNvPr id="27" name="Rounded Rectangle 26"/>
-          <p:cNvSpPr/>
-          <p:nvPr/>
-        </p:nvSpPr>
-        <p:spPr>
-          <a:xfrm>
-            <a:off x="9601200" y="4114800"/>
-            <a:ext cx="1920240" cy="1097280"/>
-          </a:xfrm>
-          <a:prstGeom prst="roundRect">
-            <a:avLst/>
-          </a:prstGeom>
-          <a:solidFill>
-            <a:srgbClr val="A0D2F5"/>
-          </a:solidFill>
-          <a:ln w="22860">
-            <a:solidFill>
-              <a:srgbClr val="373737"/>
-            </a:solidFill>
-          </a:ln>
-        </p:spPr>
-        <p:style>
-          <a:lnRef idx="1">
-            <a:schemeClr val="accent1"/>
-          </a:lnRef>
-          <a:fillRef idx="3">
-            <a:schemeClr val="accent1"/>
-          </a:fillRef>
-          <a:effectRef idx="2">
-            <a:schemeClr val="accent1"/>
-          </a:effectRef>
-          <a:fontRef idx="minor">
-            <a:schemeClr val="lt1"/>
-          </a:fontRef>
-        </p:style>
-        <p:txBody>
-          <a:bodyPr rtlCol="0" anchor="ctr" wrap="square" lIns="101600" rIns="101600" tIns="101600" bIns="101600"/>
-          <a:lstStyle/>
-          <a:p>
-            <a:pPr algn="ctr">
-              <a:defRPr b="1" sz="1900"/>
-            </a:pPr>
-            <a:r>
-              <a:t>Task B</a:t>
-            </a:r>
-          </a:p>
-          <a:p>
-            <a:pPr algn="ctr">
-              <a:defRPr sz="1200"/>
-            </a:pPr>
-            <a:r>
-              <a:t>User mode</a:t>
-            </a:r>
-            <a:br/>
-            <a:r>
-              <a:t>PA key KB</a:t>
-            </a:r>
-          </a:p>
-        </p:txBody>
-      </p:sp>
-      <p:sp>
-        <p:nvSpPr>
-          <p:cNvPr id="28" name="Rounded Rectangle 27"/>
-          <p:cNvSpPr/>
-          <p:nvPr/>
-        </p:nvSpPr>
-        <p:spPr>
-          <a:xfrm>
-            <a:off x="9052560" y="2286000"/>
-            <a:ext cx="1188720" cy="1005840"/>
-          </a:xfrm>
-          <a:prstGeom prst="roundRect">
-            <a:avLst/>
-          </a:prstGeom>
-          <a:solidFill>
-            <a:srgbClr val="C8F0CD"/>
-          </a:solidFill>
-          <a:ln w="22860">
-            <a:solidFill>
-              <a:srgbClr val="373737"/>
-            </a:solidFill>
-          </a:ln>
-        </p:spPr>
-        <p:style>
-          <a:lnRef idx="1">
-            <a:schemeClr val="accent1"/>
-          </a:lnRef>
-          <a:fillRef idx="3">
-            <a:schemeClr val="accent1"/>
-          </a:fillRef>
-          <a:effectRef idx="2">
-            <a:schemeClr val="accent1"/>
-          </a:effectRef>
-          <a:fontRef idx="minor">
-            <a:schemeClr val="lt1"/>
-          </a:fontRef>
-        </p:style>
-        <p:txBody>
-          <a:bodyPr rtlCol="0" anchor="ctr" wrap="square" lIns="101600" rIns="101600" tIns="101600" bIns="101600"/>
-          <a:lstStyle/>
-          <a:p>
-            <a:pPr algn="ctr">
-              <a:defRPr b="1" sz="1900"/>
-            </a:pPr>
-            <a:r>
-              <a:t>save Task A</a:t>
-            </a:r>
-            <a:br/>
-            <a:r>
-              <a:t>state</a:t>
-            </a:r>
-          </a:p>
-          <a:p>
-            <a:pPr algn="ctr">
-              <a:defRPr sz="1200"/>
-            </a:pPr>
-          </a:p>
-        </p:txBody>
-      </p:sp>
-      <p:sp>
-        <p:nvSpPr>
-          <p:cNvPr id="29" name="Rounded Rectangle 28"/>
-          <p:cNvSpPr/>
-          <p:nvPr/>
-        </p:nvSpPr>
-        <p:spPr>
-          <a:xfrm>
-            <a:off x="10515600" y="2286000"/>
-            <a:ext cx="1280160" cy="1005840"/>
-          </a:xfrm>
-          <a:prstGeom prst="roundRect">
-            <a:avLst/>
-          </a:prstGeom>
-          <a:solidFill>
-            <a:srgbClr val="DCF5DC"/>
-          </a:solidFill>
-          <a:ln w="22860">
-            <a:solidFill>
-              <a:srgbClr val="373737"/>
-            </a:solidFill>
-          </a:ln>
-        </p:spPr>
-        <p:style>
-          <a:lnRef idx="1">
-            <a:schemeClr val="accent1"/>
-          </a:lnRef>
-          <a:fillRef idx="3">
-            <a:schemeClr val="accent1"/>
-          </a:fillRef>
-          <a:effectRef idx="2">
-            <a:schemeClr val="accent1"/>
-          </a:effectRef>
-          <a:fontRef idx="minor">
-            <a:schemeClr val="lt1"/>
-          </a:fontRef>
-        </p:style>
-        <p:txBody>
-          <a:bodyPr rtlCol="0" anchor="ctr" wrap="square" lIns="101600" rIns="101600" tIns="101600" bIns="101600"/>
-          <a:lstStyle/>
-          <a:p>
-            <a:pPr algn="ctr">
-              <a:defRPr b="1" sz="1900"/>
-            </a:pPr>
-            <a:r>
-              <a:t>route IRQ</a:t>
-            </a:r>
-            <a:br/>
-            <a:r>
-              <a:t>secure NVIC</a:t>
-            </a:r>
-          </a:p>
-          <a:p>
-            <a:pPr algn="ctr">
-              <a:defRPr sz="1200"/>
-            </a:pPr>
-          </a:p>
-        </p:txBody>
-      </p:sp>
-      <p:sp>
-        <p:nvSpPr>
-          <p:cNvPr id="30" name="Rounded Rectangle 29"/>
-          <p:cNvSpPr/>
-          <p:nvPr/>
-        </p:nvSpPr>
-        <p:spPr>
-          <a:xfrm>
-            <a:off x="12161520" y="2286000"/>
-            <a:ext cx="1188720" cy="1005840"/>
-          </a:xfrm>
-          <a:prstGeom prst="roundRect">
-            <a:avLst/>
-          </a:prstGeom>
-          <a:solidFill>
-            <a:srgbClr val="C8F0CD"/>
-          </a:solidFill>
-          <a:ln w="22860">
-            <a:solidFill>
-              <a:srgbClr val="373737"/>
-            </a:solidFill>
-          </a:ln>
-        </p:spPr>
-        <p:style>
-          <a:lnRef idx="1">
-            <a:schemeClr val="accent1"/>
-          </a:lnRef>
-          <a:fillRef idx="3">
-            <a:schemeClr val="accent1"/>
-          </a:fillRef>
-          <a:effectRef idx="2">
-            <a:schemeClr val="accent1"/>
-          </a:effectRef>
-          <a:fontRef idx="minor">
-            <a:schemeClr val="lt1"/>
-          </a:fontRef>
-        </p:style>
-        <p:txBody>
-          <a:bodyPr rtlCol="0" anchor="ctr" wrap="square" lIns="101600" rIns="101600" tIns="101600" bIns="101600"/>
-          <a:lstStyle/>
-          <a:p>
-            <a:pPr algn="ctr">
-              <a:defRPr b="1" sz="1900"/>
-            </a:pPr>
-            <a:r>
-              <a:t>verify resume</a:t>
-            </a:r>
-            <a:br/>
-            <a:r>
-              <a:t>state</a:t>
-            </a:r>
-          </a:p>
-          <a:p>
-            <a:pPr algn="ctr">
-              <a:defRPr sz="1200"/>
-            </a:pPr>
-          </a:p>
-        </p:txBody>
-      </p:sp>
-      <p:sp>
-        <p:nvSpPr>
-          <p:cNvPr id="31" name="Rectangle 30"/>
-          <p:cNvSpPr/>
-          <p:nvPr/>
-        </p:nvSpPr>
-        <p:spPr>
-          <a:xfrm>
-            <a:off x="8001000" y="1645920"/>
-            <a:ext cx="73152" cy="228600"/>
-          </a:xfrm>
-          <a:prstGeom prst="rect">
-            <a:avLst/>
-          </a:prstGeom>
-          <a:solidFill>
-            <a:srgbClr val="787878"/>
-          </a:solidFill>
-          <a:ln>
-            <a:noFill/>
-          </a:ln>
-        </p:spPr>
-        <p:style>
-          <a:lnRef idx="1">
-            <a:schemeClr val="accent1"/>
-          </a:lnRef>
-          <a:fillRef idx="3">
-            <a:schemeClr val="accent1"/>
-          </a:fillRef>
-          <a:effectRef idx="2">
-            <a:schemeClr val="accent1"/>
-          </a:effectRef>
-          <a:fontRef idx="minor">
-            <a:schemeClr val="lt1"/>
-          </a:fontRef>
-        </p:style>
-        <p:txBody>
-          <a:bodyPr rtlCol="0" anchor="ctr"/>
-          <a:lstStyle/>
-          <a:p>
-            <a:pPr algn="ctr"/>
-          </a:p>
-        </p:txBody>
-      </p:sp>
-      <p:sp>
-        <p:nvSpPr>
-          <p:cNvPr id="32" name="Rectangle 31"/>
-          <p:cNvSpPr/>
-          <p:nvPr/>
-        </p:nvSpPr>
-        <p:spPr>
-          <a:xfrm>
-            <a:off x="8001000" y="2011680"/>
-            <a:ext cx="73152" cy="228600"/>
-          </a:xfrm>
-          <a:prstGeom prst="rect">
-            <a:avLst/>
-          </a:prstGeom>
-          <a:solidFill>
-            <a:srgbClr val="787878"/>
-          </a:solidFill>
-          <a:ln>
-            <a:noFill/>
-          </a:ln>
-        </p:spPr>
-        <p:style>
-          <a:lnRef idx="1">
-            <a:schemeClr val="accent1"/>
-          </a:lnRef>
-          <a:fillRef idx="3">
-            <a:schemeClr val="accent1"/>
-          </a:fillRef>
-          <a:effectRef idx="2">
-            <a:schemeClr val="accent1"/>
-          </a:effectRef>
-          <a:fontRef idx="minor">
-            <a:schemeClr val="lt1"/>
-          </a:fontRef>
-        </p:style>
-        <p:txBody>
-          <a:bodyPr rtlCol="0" anchor="ctr"/>
-          <a:lstStyle/>
-          <a:p>
-            <a:pPr algn="ctr"/>
-          </a:p>
-        </p:txBody>
-      </p:sp>
-      <p:sp>
-        <p:nvSpPr>
-          <p:cNvPr id="33" name="Rectangle 32"/>
-          <p:cNvSpPr/>
-          <p:nvPr/>
-        </p:nvSpPr>
-        <p:spPr>
-          <a:xfrm>
-            <a:off x="8001000" y="2377440"/>
-            <a:ext cx="73152" cy="228600"/>
-          </a:xfrm>
-          <a:prstGeom prst="rect">
-            <a:avLst/>
-          </a:prstGeom>
-          <a:solidFill>
-            <a:srgbClr val="787878"/>
-          </a:solidFill>
-          <a:ln>
-            <a:noFill/>
-          </a:ln>
-        </p:spPr>
-        <p:style>
-          <a:lnRef idx="1">
-            <a:schemeClr val="accent1"/>
-          </a:lnRef>
-          <a:fillRef idx="3">
-            <a:schemeClr val="accent1"/>
-          </a:fillRef>
-          <a:effectRef idx="2">
-            <a:schemeClr val="accent1"/>
-          </a:effectRef>
-          <a:fontRef idx="minor">
-            <a:schemeClr val="lt1"/>
-          </a:fontRef>
-        </p:style>
-        <p:txBody>
-          <a:bodyPr rtlCol="0" anchor="ctr"/>
-          <a:lstStyle/>
-          <a:p>
-            <a:pPr algn="ctr"/>
-          </a:p>
-        </p:txBody>
-      </p:sp>
-      <p:sp>
-        <p:nvSpPr>
-          <p:cNvPr id="34" name="Rectangle 33"/>
-          <p:cNvSpPr/>
-          <p:nvPr/>
-        </p:nvSpPr>
-        <p:spPr>
-          <a:xfrm>
-            <a:off x="8001000" y="2743200"/>
-            <a:ext cx="73152" cy="228600"/>
-          </a:xfrm>
-          <a:prstGeom prst="rect">
-            <a:avLst/>
-          </a:prstGeom>
-          <a:solidFill>
-            <a:srgbClr val="787878"/>
-          </a:solidFill>
-          <a:ln>
-            <a:noFill/>
-          </a:ln>
-        </p:spPr>
-        <p:style>
-          <a:lnRef idx="1">
-            <a:schemeClr val="accent1"/>
-          </a:lnRef>
-          <a:fillRef idx="3">
-            <a:schemeClr val="accent1"/>
-          </a:fillRef>
-          <a:effectRef idx="2">
-            <a:schemeClr val="accent1"/>
-          </a:effectRef>
-          <a:fontRef idx="minor">
-            <a:schemeClr val="lt1"/>
-          </a:fontRef>
-        </p:style>
-        <p:txBody>
-          <a:bodyPr rtlCol="0" anchor="ctr"/>
-          <a:lstStyle/>
-          <a:p>
-            <a:pPr algn="ctr"/>
-          </a:p>
-        </p:txBody>
-      </p:sp>
-      <p:sp>
-        <p:nvSpPr>
-          <p:cNvPr id="35" name="Rectangle 34"/>
-          <p:cNvSpPr/>
-          <p:nvPr/>
-        </p:nvSpPr>
-        <p:spPr>
-          <a:xfrm>
-            <a:off x="8001000" y="3108960"/>
-            <a:ext cx="73152" cy="228600"/>
-          </a:xfrm>
-          <a:prstGeom prst="rect">
-            <a:avLst/>
-          </a:prstGeom>
-          <a:solidFill>
-            <a:srgbClr val="787878"/>
-          </a:solidFill>
-          <a:ln>
-            <a:noFill/>
-          </a:ln>
-        </p:spPr>
-        <p:style>
-          <a:lnRef idx="1">
-            <a:schemeClr val="accent1"/>
-          </a:lnRef>
-          <a:fillRef idx="3">
-            <a:schemeClr val="accent1"/>
-          </a:fillRef>
-          <a:effectRef idx="2">
-            <a:schemeClr val="accent1"/>
-          </a:effectRef>
-          <a:fontRef idx="minor">
-            <a:schemeClr val="lt1"/>
-          </a:fontRef>
-        </p:style>
-        <p:txBody>
-          <a:bodyPr rtlCol="0" anchor="ctr"/>
-          <a:lstStyle/>
-          <a:p>
-            <a:pPr algn="ctr"/>
-          </a:p>
-        </p:txBody>
-      </p:sp>
-      <p:sp>
-        <p:nvSpPr>
-          <p:cNvPr id="36" name="Rectangle 35"/>
-          <p:cNvSpPr/>
-          <p:nvPr/>
-        </p:nvSpPr>
-        <p:spPr>
-          <a:xfrm>
-            <a:off x="8001000" y="3474720"/>
-            <a:ext cx="73152" cy="228600"/>
-          </a:xfrm>
-          <a:prstGeom prst="rect">
-            <a:avLst/>
-          </a:prstGeom>
-          <a:solidFill>
-            <a:srgbClr val="787878"/>
-          </a:solidFill>
-          <a:ln>
-            <a:noFill/>
-          </a:ln>
-        </p:spPr>
-        <p:style>
-          <a:lnRef idx="1">
-            <a:schemeClr val="accent1"/>
-          </a:lnRef>
-          <a:fillRef idx="3">
-            <a:schemeClr val="accent1"/>
-          </a:fillRef>
-          <a:effectRef idx="2">
-            <a:schemeClr val="accent1"/>
-          </a:effectRef>
-          <a:fontRef idx="minor">
-            <a:schemeClr val="lt1"/>
-          </a:fontRef>
-        </p:style>
-        <p:txBody>
-          <a:bodyPr rtlCol="0" anchor="ctr"/>
-          <a:lstStyle/>
-          <a:p>
-            <a:pPr algn="ctr"/>
-          </a:p>
-        </p:txBody>
-      </p:sp>
-      <p:sp>
-        <p:nvSpPr>
-          <p:cNvPr id="37" name="Rectangle 36"/>
-          <p:cNvSpPr/>
-          <p:nvPr/>
-        </p:nvSpPr>
-        <p:spPr>
-          <a:xfrm>
-            <a:off x="8001000" y="3840480"/>
-            <a:ext cx="73152" cy="228600"/>
-          </a:xfrm>
-          <a:prstGeom prst="rect">
-            <a:avLst/>
-          </a:prstGeom>
-          <a:solidFill>
-            <a:srgbClr val="787878"/>
-          </a:solidFill>
-          <a:ln>
-            <a:noFill/>
-          </a:ln>
-        </p:spPr>
-        <p:style>
-          <a:lnRef idx="1">
-            <a:schemeClr val="accent1"/>
-          </a:lnRef>
-          <a:fillRef idx="3">
-            <a:schemeClr val="accent1"/>
-          </a:fillRef>
-          <a:effectRef idx="2">
-            <a:schemeClr val="accent1"/>
-          </a:effectRef>
-          <a:fontRef idx="minor">
-            <a:schemeClr val="lt1"/>
-          </a:fontRef>
-        </p:style>
-        <p:txBody>
-          <a:bodyPr rtlCol="0" anchor="ctr"/>
-          <a:lstStyle/>
-          <a:p>
-            <a:pPr algn="ctr"/>
-          </a:p>
-        </p:txBody>
-      </p:sp>
-      <p:sp>
-        <p:nvSpPr>
-          <p:cNvPr id="38" name="Rectangle 37"/>
-          <p:cNvSpPr/>
-          <p:nvPr/>
-        </p:nvSpPr>
-        <p:spPr>
-          <a:xfrm>
-            <a:off x="8001000" y="4206240"/>
-            <a:ext cx="73152" cy="228600"/>
-          </a:xfrm>
-          <a:prstGeom prst="rect">
-            <a:avLst/>
-          </a:prstGeom>
-          <a:solidFill>
-            <a:srgbClr val="787878"/>
-          </a:solidFill>
-          <a:ln>
-            <a:noFill/>
-          </a:ln>
-        </p:spPr>
-        <p:style>
-          <a:lnRef idx="1">
-            <a:schemeClr val="accent1"/>
-          </a:lnRef>
-          <a:fillRef idx="3">
-            <a:schemeClr val="accent1"/>
-          </a:fillRef>
-          <a:effectRef idx="2">
-            <a:schemeClr val="accent1"/>
-          </a:effectRef>
-          <a:fontRef idx="minor">
-            <a:schemeClr val="lt1"/>
-          </a:fontRef>
-        </p:style>
-        <p:txBody>
-          <a:bodyPr rtlCol="0" anchor="ctr"/>
-          <a:lstStyle/>
-          <a:p>
-            <a:pPr algn="ctr"/>
-          </a:p>
-        </p:txBody>
-      </p:sp>
-      <p:sp>
-        <p:nvSpPr>
-          <p:cNvPr id="39" name="Rectangle 38"/>
-          <p:cNvSpPr/>
-          <p:nvPr/>
-        </p:nvSpPr>
-        <p:spPr>
-          <a:xfrm>
-            <a:off x="8001000" y="4572000"/>
-            <a:ext cx="73152" cy="228600"/>
-          </a:xfrm>
-          <a:prstGeom prst="rect">
-            <a:avLst/>
-          </a:prstGeom>
-          <a:solidFill>
-            <a:srgbClr val="787878"/>
-          </a:solidFill>
-          <a:ln>
-            <a:noFill/>
-          </a:ln>
-        </p:spPr>
-        <p:style>
-          <a:lnRef idx="1">
-            <a:schemeClr val="accent1"/>
-          </a:lnRef>
-          <a:fillRef idx="3">
-            <a:schemeClr val="accent1"/>
-          </a:fillRef>
-          <a:effectRef idx="2">
-            <a:schemeClr val="accent1"/>
-          </a:effectRef>
-          <a:fontRef idx="minor">
-            <a:schemeClr val="lt1"/>
-          </a:fontRef>
-        </p:style>
-        <p:txBody>
-          <a:bodyPr rtlCol="0" anchor="ctr"/>
-          <a:lstStyle/>
-          <a:p>
-            <a:pPr algn="ctr"/>
-          </a:p>
-        </p:txBody>
-      </p:sp>
-      <p:sp>
-        <p:nvSpPr>
-          <p:cNvPr id="40" name="Rectangle 39"/>
-          <p:cNvSpPr/>
-          <p:nvPr/>
-        </p:nvSpPr>
-        <p:spPr>
-          <a:xfrm>
-            <a:off x="8001000" y="4937760"/>
-            <a:ext cx="73152" cy="228600"/>
-          </a:xfrm>
-          <a:prstGeom prst="rect">
-            <a:avLst/>
-          </a:prstGeom>
-          <a:solidFill>
-            <a:srgbClr val="787878"/>
-          </a:solidFill>
-          <a:ln>
-            <a:noFill/>
-          </a:ln>
-        </p:spPr>
-        <p:style>
-          <a:lnRef idx="1">
-            <a:schemeClr val="accent1"/>
-          </a:lnRef>
-          <a:fillRef idx="3">
-            <a:schemeClr val="accent1"/>
-          </a:fillRef>
-          <a:effectRef idx="2">
-            <a:schemeClr val="accent1"/>
-          </a:effectRef>
-          <a:fontRef idx="minor">
-            <a:schemeClr val="lt1"/>
-          </a:fontRef>
-        </p:style>
-        <p:txBody>
-          <a:bodyPr rtlCol="0" anchor="ctr"/>
-          <a:lstStyle/>
-          <a:p>
-            <a:pPr algn="ctr"/>
-          </a:p>
-        </p:txBody>
-      </p:sp>
-      <p:sp>
-        <p:nvSpPr>
-          <p:cNvPr id="41" name="Rectangle 40"/>
-          <p:cNvSpPr/>
-          <p:nvPr/>
-        </p:nvSpPr>
-        <p:spPr>
-          <a:xfrm>
-            <a:off x="8001000" y="5303520"/>
-            <a:ext cx="73152" cy="228600"/>
-          </a:xfrm>
-          <a:prstGeom prst="rect">
-            <a:avLst/>
-          </a:prstGeom>
-          <a:solidFill>
-            <a:srgbClr val="787878"/>
-          </a:solidFill>
-          <a:ln>
-            <a:noFill/>
-          </a:ln>
-        </p:spPr>
-        <p:style>
-          <a:lnRef idx="1">
-            <a:schemeClr val="accent1"/>
-          </a:lnRef>
-          <a:fillRef idx="3">
-            <a:schemeClr val="accent1"/>
-          </a:fillRef>
-          <a:effectRef idx="2">
-            <a:schemeClr val="accent1"/>
-          </a:effectRef>
-          <a:fontRef idx="minor">
-            <a:schemeClr val="lt1"/>
-          </a:fontRef>
-        </p:style>
-        <p:txBody>
-          <a:bodyPr rtlCol="0" anchor="ctr"/>
-          <a:lstStyle/>
-          <a:p>
-            <a:pPr algn="ctr"/>
+              <a:rPr lang="en-US" i="1" dirty="0">
+                <a:solidFill>
+                  <a:schemeClr val="tx1"/>
+                </a:solidFill>
+              </a:rPr>
+              <a:t>Schedule</a:t>
+            </a:r>
+            <a:r>
+              <a:rPr lang="en-US" dirty="0">
+                <a:solidFill>
+                  <a:schemeClr val="tx1"/>
+                </a:solidFill>
+              </a:rPr>
+              <a:t>: </a:t>
+            </a:r>
+            <a:r>
+              <a:rPr dirty="0">
+                <a:solidFill>
+                  <a:schemeClr val="tx1"/>
+                </a:solidFill>
+              </a:rPr>
+              <a:t>Task </a:t>
+            </a:r>
+            <a:r>
+              <a:rPr lang="en-US" dirty="0">
+                <a:solidFill>
+                  <a:schemeClr val="tx1"/>
+                </a:solidFill>
+              </a:rPr>
+              <a:t>B</a:t>
+            </a:r>
+            <a:br>
+              <a:rPr dirty="0">
+                <a:solidFill>
+                  <a:schemeClr val="tx1"/>
+                </a:solidFill>
+              </a:rPr>
+            </a:br>
+            <a:r>
+              <a:rPr dirty="0">
+                <a:solidFill>
+                  <a:schemeClr val="tx1"/>
+                </a:solidFill>
+              </a:rPr>
+              <a:t>PA key K</a:t>
+            </a:r>
+            <a:r>
+              <a:rPr lang="en-US" baseline="-25000" dirty="0">
+                <a:solidFill>
+                  <a:schemeClr val="tx1"/>
+                </a:solidFill>
+              </a:rPr>
+              <a:t>B</a:t>
+            </a:r>
+            <a:endParaRPr baseline="-25000" dirty="0">
+              <a:solidFill>
+                <a:schemeClr val="tx1"/>
+              </a:solidFill>
+            </a:endParaRPr>
           </a:p>
         </p:txBody>
       </p:sp>
       <p:cxnSp>
         <p:nvCxnSpPr>
-          <p:cNvPr id="42" name="Connector 41"/>
-          <p:cNvCxnSpPr/>
+          <p:cNvPr id="367" name="Straight Connector 366">
+            <a:extLst>
+              <a:ext uri="{FF2B5EF4-FFF2-40B4-BE49-F238E27FC236}">
+                <a16:creationId xmlns:a16="http://schemas.microsoft.com/office/drawing/2014/main" id="{33F18850-48A4-A6B7-26D7-97C14E6027AD}"/>
+              </a:ext>
+            </a:extLst>
+          </p:cNvPr>
+          <p:cNvCxnSpPr>
+            <a:cxnSpLocks/>
+          </p:cNvCxnSpPr>
           <p:nvPr/>
         </p:nvCxnSpPr>
         <p:spPr>
           <a:xfrm>
-            <a:off x="2651760" y="5029200"/>
-            <a:ext cx="274320" cy="0"/>
+            <a:off x="57990" y="4065737"/>
+            <a:ext cx="4809328" cy="0"/>
           </a:xfrm>
           <a:prstGeom prst="line">
             <a:avLst/>
           </a:prstGeom>
-          <a:ln w="25400">
+          <a:ln>
             <a:solidFill>
-              <a:srgbClr val="373737"/>
+              <a:schemeClr val="tx1"/>
             </a:solidFill>
+            <a:prstDash val="dash"/>
           </a:ln>
+          <a:effectLst/>
         </p:spPr>
         <p:style>
           <a:lnRef idx="2">
@@ -4974,14 +4132,90 @@
       </p:cxnSp>
       <p:sp>
         <p:nvSpPr>
-          <p:cNvPr id="43" name="TextBox 42"/>
+          <p:cNvPr id="368" name="Rectangle 367">
+            <a:extLst>
+              <a:ext uri="{FF2B5EF4-FFF2-40B4-BE49-F238E27FC236}">
+                <a16:creationId xmlns:a16="http://schemas.microsoft.com/office/drawing/2014/main" id="{63C54FA1-D07B-1F97-83BF-D7EFE3144EE7}"/>
+              </a:ext>
+            </a:extLst>
+          </p:cNvPr>
+          <p:cNvSpPr/>
+          <p:nvPr/>
+        </p:nvSpPr>
+        <p:spPr>
+          <a:xfrm>
+            <a:off x="286590" y="4283186"/>
+            <a:ext cx="4311396" cy="755863"/>
+          </a:xfrm>
+          <a:prstGeom prst="rect">
+            <a:avLst/>
+          </a:prstGeom>
+          <a:solidFill>
+            <a:schemeClr val="accent4">
+              <a:lumMod val="60000"/>
+              <a:lumOff val="40000"/>
+            </a:schemeClr>
+          </a:solidFill>
+          <a:ln w="22860">
+            <a:solidFill>
+              <a:srgbClr val="373737"/>
+            </a:solidFill>
+          </a:ln>
+          <a:effectLst/>
+        </p:spPr>
+        <p:style>
+          <a:lnRef idx="1">
+            <a:schemeClr val="accent1"/>
+          </a:lnRef>
+          <a:fillRef idx="3">
+            <a:schemeClr val="accent1"/>
+          </a:fillRef>
+          <a:effectRef idx="2">
+            <a:schemeClr val="accent1"/>
+          </a:effectRef>
+          <a:fontRef idx="minor">
+            <a:schemeClr val="lt1"/>
+          </a:fontRef>
+        </p:style>
+        <p:txBody>
+          <a:bodyPr wrap="square" lIns="101600" tIns="101600" rIns="101600" bIns="101600" rtlCol="0" anchor="ctr"/>
+          <a:lstStyle/>
+          <a:p>
+            <a:pPr algn="ctr">
+              <a:defRPr sz="1900" b="1"/>
+            </a:pPr>
+            <a:r>
+              <a:rPr lang="en-US" sz="1900" dirty="0">
+                <a:solidFill>
+                  <a:schemeClr val="tx1"/>
+                </a:solidFill>
+              </a:rPr>
+              <a:t>RTOS Task scheduler</a:t>
+            </a:r>
+            <a:endParaRPr lang="en-US" sz="1900" baseline="-25000" dirty="0">
+              <a:solidFill>
+                <a:schemeClr val="tx1"/>
+              </a:solidFill>
+            </a:endParaRPr>
+          </a:p>
+        </p:txBody>
+      </p:sp>
+      <p:sp>
+        <p:nvSpPr>
+          <p:cNvPr id="369" name="TextBox 368">
+            <a:extLst>
+              <a:ext uri="{FF2B5EF4-FFF2-40B4-BE49-F238E27FC236}">
+                <a16:creationId xmlns:a16="http://schemas.microsoft.com/office/drawing/2014/main" id="{EE41DB5F-18C0-CB4A-5E4B-CC57E7B4FD7D}"/>
+              </a:ext>
+            </a:extLst>
+          </p:cNvPr>
           <p:cNvSpPr txBox="1"/>
           <p:nvPr/>
         </p:nvSpPr>
         <p:spPr>
           <a:xfrm>
-            <a:off x="2560320" y="4846320"/>
-            <a:ext cx="822960" cy="256032"/>
+            <a:off x="2691167" y="509778"/>
+            <a:ext cx="2486722" cy="477054"/>
           </a:xfrm>
           <a:prstGeom prst="rect">
             <a:avLst/>
@@ -4989,39 +4223,133 @@
           <a:noFill/>
         </p:spPr>
         <p:txBody>
+          <a:bodyPr wrap="square" rtlCol="0">
+            <a:spAutoFit/>
+          </a:bodyPr>
+          <a:lstStyle/>
+          <a:p>
+            <a:pPr algn="ctr"/>
+            <a:r>
+              <a:rPr lang="en-US" dirty="0"/>
+              <a:t>HW/SW IRQs</a:t>
+            </a:r>
+          </a:p>
+        </p:txBody>
+      </p:sp>
+      <p:sp>
+        <p:nvSpPr>
+          <p:cNvPr id="371" name="TextBox 370">
+            <a:extLst>
+              <a:ext uri="{FF2B5EF4-FFF2-40B4-BE49-F238E27FC236}">
+                <a16:creationId xmlns:a16="http://schemas.microsoft.com/office/drawing/2014/main" id="{8F8F0DCD-6F7F-D2CE-9F4F-6FCFD1A5BE46}"/>
+              </a:ext>
+            </a:extLst>
+          </p:cNvPr>
+          <p:cNvSpPr txBox="1"/>
+          <p:nvPr/>
+        </p:nvSpPr>
+        <p:spPr>
+          <a:xfrm>
+            <a:off x="2298270" y="2644308"/>
+            <a:ext cx="2486722" cy="384721"/>
+          </a:xfrm>
+          <a:prstGeom prst="rect">
+            <a:avLst/>
+          </a:prstGeom>
+          <a:noFill/>
+        </p:spPr>
+        <p:txBody>
+          <a:bodyPr wrap="square" rtlCol="0">
+            <a:spAutoFit/>
+          </a:bodyPr>
+          <a:lstStyle/>
+          <a:p>
+            <a:pPr algn="ctr">
+              <a:defRPr sz="1900" b="1"/>
+            </a:pPr>
+            <a:r>
+              <a:rPr lang="en-US" dirty="0"/>
+              <a:t>Scheduler IRQ</a:t>
+            </a:r>
+            <a:endParaRPr lang="en-US" baseline="-25000" dirty="0"/>
+          </a:p>
+        </p:txBody>
+      </p:sp>
+      <p:sp>
+        <p:nvSpPr>
+          <p:cNvPr id="372" name="TextBox 371">
+            <a:extLst>
+              <a:ext uri="{FF2B5EF4-FFF2-40B4-BE49-F238E27FC236}">
+                <a16:creationId xmlns:a16="http://schemas.microsoft.com/office/drawing/2014/main" id="{041E5155-B4C4-E2D5-5CF9-6559A078BFF1}"/>
+              </a:ext>
+            </a:extLst>
+          </p:cNvPr>
+          <p:cNvSpPr txBox="1"/>
+          <p:nvPr/>
+        </p:nvSpPr>
+        <p:spPr>
+          <a:xfrm>
+            <a:off x="57990" y="4029888"/>
+            <a:ext cx="766557" cy="261610"/>
+          </a:xfrm>
+          <a:prstGeom prst="rect">
+            <a:avLst/>
+          </a:prstGeom>
+          <a:noFill/>
+        </p:spPr>
+        <p:txBody>
           <a:bodyPr wrap="none">
             <a:spAutoFit/>
           </a:bodyPr>
           <a:lstStyle/>
           <a:p>
             <a:pPr algn="ctr">
-              <a:defRPr sz="1000"/>
+              <a:defRPr sz="1100" b="1">
+                <a:solidFill>
+                  <a:srgbClr val="191919"/>
+                </a:solidFill>
+              </a:defRPr>
             </a:pPr>
             <a:r>
-              <a:t>dispatch</a:t>
-            </a:r>
+              <a:rPr lang="en-US" dirty="0"/>
+              <a:t>Privileged</a:t>
+            </a:r>
+            <a:endParaRPr dirty="0"/>
           </a:p>
         </p:txBody>
       </p:sp>
       <p:cxnSp>
         <p:nvCxnSpPr>
-          <p:cNvPr id="44" name="Connector 43"/>
-          <p:cNvCxnSpPr/>
+          <p:cNvPr id="373" name="Straight Connector 372">
+            <a:extLst>
+              <a:ext uri="{FF2B5EF4-FFF2-40B4-BE49-F238E27FC236}">
+                <a16:creationId xmlns:a16="http://schemas.microsoft.com/office/drawing/2014/main" id="{94AEA157-0261-E9AD-E8EA-80C8695EA9FE}"/>
+              </a:ext>
+            </a:extLst>
+          </p:cNvPr>
+          <p:cNvCxnSpPr>
+            <a:stCxn id="366" idx="2"/>
+          </p:cNvCxnSpPr>
           <p:nvPr/>
         </p:nvCxnSpPr>
         <p:spPr>
-          <a:xfrm>
-            <a:off x="4846320" y="5029200"/>
-            <a:ext cx="457200" cy="0"/>
+          <a:xfrm flipH="1">
+            <a:off x="1292429" y="3703495"/>
+            <a:ext cx="1" cy="588003"/>
           </a:xfrm>
           <a:prstGeom prst="line">
             <a:avLst/>
           </a:prstGeom>
-          <a:ln w="25400">
+          <a:ln>
             <a:solidFill>
-              <a:srgbClr val="373737"/>
+              <a:schemeClr val="accent6">
+                <a:lumMod val="75000"/>
+              </a:schemeClr>
             </a:solidFill>
+            <a:headEnd type="triangle" w="med" len="med"/>
+            <a:tailEnd type="none" w="med" len="med"/>
           </a:ln>
+          <a:effectLst/>
         </p:spPr>
         <p:style>
           <a:lnRef idx="2">
@@ -5040,14 +4368,76 @@
       </p:cxnSp>
       <p:sp>
         <p:nvSpPr>
-          <p:cNvPr id="45" name="TextBox 44"/>
+          <p:cNvPr id="374" name="Rectangle 373">
+            <a:extLst>
+              <a:ext uri="{FF2B5EF4-FFF2-40B4-BE49-F238E27FC236}">
+                <a16:creationId xmlns:a16="http://schemas.microsoft.com/office/drawing/2014/main" id="{81149021-E471-4B8C-6008-CC0F9C5D635B}"/>
+              </a:ext>
+            </a:extLst>
+          </p:cNvPr>
+          <p:cNvSpPr/>
+          <p:nvPr/>
+        </p:nvSpPr>
+        <p:spPr>
+          <a:xfrm>
+            <a:off x="5101688" y="42377"/>
+            <a:ext cx="3231292" cy="5108123"/>
+          </a:xfrm>
+          <a:prstGeom prst="rect">
+            <a:avLst/>
+          </a:prstGeom>
+          <a:solidFill>
+            <a:schemeClr val="accent3">
+              <a:lumMod val="20000"/>
+              <a:lumOff val="80000"/>
+            </a:schemeClr>
+          </a:solidFill>
+          <a:ln w="22860">
+            <a:solidFill>
+              <a:srgbClr val="505050"/>
+            </a:solidFill>
+          </a:ln>
+          <a:effectLst/>
+        </p:spPr>
+        <p:style>
+          <a:lnRef idx="1">
+            <a:schemeClr val="accent1"/>
+          </a:lnRef>
+          <a:fillRef idx="3">
+            <a:schemeClr val="accent1"/>
+          </a:fillRef>
+          <a:effectRef idx="2">
+            <a:schemeClr val="accent1"/>
+          </a:effectRef>
+          <a:fontRef idx="minor">
+            <a:schemeClr val="lt1"/>
+          </a:fontRef>
+        </p:style>
+        <p:txBody>
+          <a:bodyPr rtlCol="0" anchor="ctr"/>
+          <a:lstStyle/>
+          <a:p>
+            <a:pPr algn="ctr"/>
+            <a:endParaRPr dirty="0"/>
+          </a:p>
+        </p:txBody>
+      </p:sp>
+      <p:sp>
+        <p:nvSpPr>
+          <p:cNvPr id="375" name="TextBox 374">
+            <a:extLst>
+              <a:ext uri="{FF2B5EF4-FFF2-40B4-BE49-F238E27FC236}">
+                <a16:creationId xmlns:a16="http://schemas.microsoft.com/office/drawing/2014/main" id="{EF57A18E-875C-98C6-1EDC-B6449A8E1AB8}"/>
+              </a:ext>
+            </a:extLst>
+          </p:cNvPr>
           <p:cNvSpPr txBox="1"/>
           <p:nvPr/>
         </p:nvSpPr>
         <p:spPr>
           <a:xfrm>
-            <a:off x="4846320" y="4846320"/>
-            <a:ext cx="822960" cy="256032"/>
+            <a:off x="5315789" y="71481"/>
+            <a:ext cx="2870263" cy="430887"/>
           </a:xfrm>
           <a:prstGeom prst="rect">
             <a:avLst/>
@@ -5055,171 +4445,459 @@
           <a:noFill/>
         </p:spPr>
         <p:txBody>
-          <a:bodyPr wrap="none">
+          <a:bodyPr wrap="square">
             <a:spAutoFit/>
           </a:bodyPr>
           <a:lstStyle/>
           <a:p>
             <a:pPr algn="ctr">
-              <a:defRPr sz="1000"/>
+              <a:defRPr sz="1800" b="1">
+                <a:solidFill>
+                  <a:srgbClr val="191919"/>
+                </a:solidFill>
+              </a:defRPr>
             </a:pPr>
             <a:r>
-              <a:t>IRQ</a:t>
-            </a:r>
-          </a:p>
-        </p:txBody>
-      </p:sp>
-      <p:cxnSp>
-        <p:nvCxnSpPr>
-          <p:cNvPr id="46" name="Connector 45"/>
-          <p:cNvCxnSpPr/>
+              <a:rPr sz="2200" dirty="0"/>
+              <a:t>Secure World</a:t>
+            </a:r>
+          </a:p>
+        </p:txBody>
+      </p:sp>
+      <p:sp>
+        <p:nvSpPr>
+          <p:cNvPr id="376" name="Rectangle 375">
+            <a:extLst>
+              <a:ext uri="{FF2B5EF4-FFF2-40B4-BE49-F238E27FC236}">
+                <a16:creationId xmlns:a16="http://schemas.microsoft.com/office/drawing/2014/main" id="{71356930-4BD1-AC1D-6DA0-7CDD3B557CF4}"/>
+              </a:ext>
+            </a:extLst>
+          </p:cNvPr>
+          <p:cNvSpPr/>
           <p:nvPr/>
-        </p:nvCxnSpPr>
+        </p:nvSpPr>
         <p:spPr>
           <a:xfrm>
-            <a:off x="7223760" y="5029200"/>
-            <a:ext cx="182880" cy="0"/>
-          </a:xfrm>
-          <a:prstGeom prst="line">
-            <a:avLst/>
-          </a:prstGeom>
-          <a:ln w="25400">
-            <a:solidFill>
-              <a:srgbClr val="373737"/>
-            </a:solidFill>
-          </a:ln>
-        </p:spPr>
-        <p:style>
-          <a:lnRef idx="2">
-            <a:schemeClr val="accent1"/>
-          </a:lnRef>
-          <a:fillRef idx="0">
-            <a:schemeClr val="accent1"/>
-          </a:fillRef>
-          <a:effectRef idx="1">
-            <a:schemeClr val="accent1"/>
-          </a:effectRef>
-          <a:fontRef idx="minor">
-            <a:schemeClr val="tx1"/>
-          </a:fontRef>
-        </p:style>
-      </p:cxnSp>
-      <p:sp>
-        <p:nvSpPr>
-          <p:cNvPr id="47" name="TextBox 46"/>
-          <p:cNvSpPr txBox="1"/>
-          <p:nvPr/>
-        </p:nvSpPr>
-        <p:spPr>
-          <a:xfrm>
-            <a:off x="7086600" y="4846320"/>
-            <a:ext cx="822960" cy="256032"/>
+            <a:off x="5813575" y="775432"/>
+            <a:ext cx="2372477" cy="894382"/>
           </a:xfrm>
           <a:prstGeom prst="rect">
             <a:avLst/>
           </a:prstGeom>
           <a:noFill/>
-        </p:spPr>
-        <p:txBody>
-          <a:bodyPr wrap="none">
-            <a:spAutoFit/>
-          </a:bodyPr>
-          <a:lstStyle/>
-          <a:p>
-            <a:pPr algn="ctr">
-              <a:defRPr sz="1000"/>
-            </a:pPr>
-            <a:r>
-              <a:t>resume</a:t>
-            </a:r>
-          </a:p>
-        </p:txBody>
-      </p:sp>
-      <p:cxnSp>
-        <p:nvCxnSpPr>
-          <p:cNvPr id="48" name="Connector 47"/>
-          <p:cNvCxnSpPr/>
-          <p:nvPr/>
-        </p:nvCxnSpPr>
-        <p:spPr>
-          <a:xfrm>
-            <a:off x="9418320" y="5029200"/>
-            <a:ext cx="182880" cy="0"/>
-          </a:xfrm>
-          <a:prstGeom prst="line">
-            <a:avLst/>
-          </a:prstGeom>
-          <a:ln w="25400">
+          <a:ln w="22860">
             <a:solidFill>
               <a:srgbClr val="373737"/>
             </a:solidFill>
           </a:ln>
+          <a:effectLst/>
         </p:spPr>
         <p:style>
-          <a:lnRef idx="2">
+          <a:lnRef idx="1">
             <a:schemeClr val="accent1"/>
           </a:lnRef>
-          <a:fillRef idx="0">
+          <a:fillRef idx="3">
             <a:schemeClr val="accent1"/>
           </a:fillRef>
-          <a:effectRef idx="1">
+          <a:effectRef idx="2">
             <a:schemeClr val="accent1"/>
           </a:effectRef>
           <a:fontRef idx="minor">
-            <a:schemeClr val="tx1"/>
+            <a:schemeClr val="lt1"/>
           </a:fontRef>
         </p:style>
-      </p:cxnSp>
-      <p:sp>
-        <p:nvSpPr>
-          <p:cNvPr id="49" name="TextBox 48"/>
-          <p:cNvSpPr txBox="1"/>
+        <p:txBody>
+          <a:bodyPr wrap="square" lIns="101600" tIns="101600" rIns="101600" bIns="101600" rtlCol="0" anchor="ctr"/>
+          <a:lstStyle/>
+          <a:p>
+            <a:pPr algn="ctr">
+              <a:defRPr sz="1900" b="1"/>
+            </a:pPr>
+            <a:r>
+              <a:rPr lang="en-US" dirty="0">
+                <a:solidFill>
+                  <a:schemeClr val="tx1"/>
+                </a:solidFill>
+              </a:rPr>
+              <a:t>IRQ routing </a:t>
+            </a:r>
+            <a:r>
+              <a:rPr lang="en-US" dirty="0" err="1">
+                <a:solidFill>
+                  <a:schemeClr val="tx1"/>
+                </a:solidFill>
+              </a:rPr>
+              <a:t>TrustZone</a:t>
+            </a:r>
+            <a:r>
+              <a:rPr lang="en-US" dirty="0">
+                <a:solidFill>
+                  <a:schemeClr val="tx1"/>
+                </a:solidFill>
+              </a:rPr>
+              <a:t>-Protected VNIC</a:t>
+            </a:r>
+            <a:endParaRPr lang="en-US" baseline="-25000" dirty="0">
+              <a:solidFill>
+                <a:schemeClr val="tx1"/>
+              </a:solidFill>
+            </a:endParaRPr>
+          </a:p>
+        </p:txBody>
+      </p:sp>
+      <p:sp>
+        <p:nvSpPr>
+          <p:cNvPr id="377" name="Rectangle 376">
+            <a:extLst>
+              <a:ext uri="{FF2B5EF4-FFF2-40B4-BE49-F238E27FC236}">
+                <a16:creationId xmlns:a16="http://schemas.microsoft.com/office/drawing/2014/main" id="{06AEE3F2-73AE-D97C-9ABD-9B0A1A133387}"/>
+              </a:ext>
+            </a:extLst>
+          </p:cNvPr>
+          <p:cNvSpPr/>
           <p:nvPr/>
         </p:nvSpPr>
         <p:spPr>
           <a:xfrm>
-            <a:off x="9281160" y="4846320"/>
-            <a:ext cx="822960" cy="256032"/>
+            <a:off x="5817497" y="1669814"/>
+            <a:ext cx="2368556" cy="558724"/>
           </a:xfrm>
           <a:prstGeom prst="rect">
             <a:avLst/>
           </a:prstGeom>
           <a:noFill/>
-        </p:spPr>
-        <p:txBody>
-          <a:bodyPr wrap="none">
-            <a:spAutoFit/>
-          </a:bodyPr>
-          <a:lstStyle/>
-          <a:p>
-            <a:pPr algn="ctr">
-              <a:defRPr sz="1000"/>
-            </a:pPr>
-            <a:r>
-              <a:t>switch</a:t>
-            </a:r>
-          </a:p>
-        </p:txBody>
-      </p:sp>
-      <p:cxnSp>
-        <p:nvCxnSpPr>
-          <p:cNvPr id="50" name="Connector 49"/>
-          <p:cNvCxnSpPr/>
-          <p:nvPr/>
-        </p:nvCxnSpPr>
-        <p:spPr>
-          <a:xfrm>
-            <a:off x="9372600" y="3291840"/>
-            <a:ext cx="0" cy="822960"/>
-          </a:xfrm>
-          <a:prstGeom prst="line">
-            <a:avLst/>
-          </a:prstGeom>
-          <a:ln w="25400">
+          <a:ln w="22860">
             <a:solidFill>
               <a:srgbClr val="373737"/>
             </a:solidFill>
           </a:ln>
+          <a:effectLst/>
+        </p:spPr>
+        <p:style>
+          <a:lnRef idx="1">
+            <a:schemeClr val="accent1"/>
+          </a:lnRef>
+          <a:fillRef idx="3">
+            <a:schemeClr val="accent1"/>
+          </a:fillRef>
+          <a:effectRef idx="2">
+            <a:schemeClr val="accent1"/>
+          </a:effectRef>
+          <a:fontRef idx="minor">
+            <a:schemeClr val="lt1"/>
+          </a:fontRef>
+        </p:style>
+        <p:txBody>
+          <a:bodyPr wrap="square" lIns="101600" tIns="101600" rIns="101600" bIns="101600" rtlCol="0" anchor="ctr"/>
+          <a:lstStyle/>
+          <a:p>
+            <a:pPr algn="ctr">
+              <a:defRPr sz="1900" b="1"/>
+            </a:pPr>
+            <a:r>
+              <a:rPr lang="en-US" dirty="0">
+                <a:solidFill>
+                  <a:schemeClr val="tx1"/>
+                </a:solidFill>
+              </a:rPr>
+              <a:t>Task Context Switch</a:t>
+            </a:r>
+            <a:endParaRPr lang="en-US" baseline="-25000" dirty="0">
+              <a:solidFill>
+                <a:schemeClr val="tx1"/>
+              </a:solidFill>
+            </a:endParaRPr>
+          </a:p>
+        </p:txBody>
+      </p:sp>
+      <p:sp>
+        <p:nvSpPr>
+          <p:cNvPr id="378" name="Rectangle 377">
+            <a:extLst>
+              <a:ext uri="{FF2B5EF4-FFF2-40B4-BE49-F238E27FC236}">
+                <a16:creationId xmlns:a16="http://schemas.microsoft.com/office/drawing/2014/main" id="{A9DCE8DC-361D-9C46-748A-DC502C507001}"/>
+              </a:ext>
+            </a:extLst>
+          </p:cNvPr>
+          <p:cNvSpPr/>
+          <p:nvPr/>
+        </p:nvSpPr>
+        <p:spPr>
+          <a:xfrm>
+            <a:off x="5813575" y="2228538"/>
+            <a:ext cx="2365602" cy="558724"/>
+          </a:xfrm>
+          <a:prstGeom prst="rect">
+            <a:avLst/>
+          </a:prstGeom>
+          <a:noFill/>
+          <a:ln w="22860">
+            <a:solidFill>
+              <a:srgbClr val="373737"/>
+            </a:solidFill>
+          </a:ln>
+          <a:effectLst/>
+        </p:spPr>
+        <p:style>
+          <a:lnRef idx="1">
+            <a:schemeClr val="accent1"/>
+          </a:lnRef>
+          <a:fillRef idx="3">
+            <a:schemeClr val="accent1"/>
+          </a:fillRef>
+          <a:effectRef idx="2">
+            <a:schemeClr val="accent1"/>
+          </a:effectRef>
+          <a:fontRef idx="minor">
+            <a:schemeClr val="lt1"/>
+          </a:fontRef>
+        </p:style>
+        <p:txBody>
+          <a:bodyPr wrap="square" lIns="101600" tIns="101600" rIns="101600" bIns="101600" rtlCol="0" anchor="ctr"/>
+          <a:lstStyle/>
+          <a:p>
+            <a:pPr algn="ctr">
+              <a:defRPr sz="1900" b="1"/>
+            </a:pPr>
+            <a:r>
+              <a:rPr lang="en-US" dirty="0">
+                <a:solidFill>
+                  <a:schemeClr val="tx1"/>
+                </a:solidFill>
+              </a:rPr>
+              <a:t>Load PA Keys</a:t>
+            </a:r>
+            <a:endParaRPr lang="en-US" baseline="-25000" dirty="0">
+              <a:solidFill>
+                <a:schemeClr val="tx1"/>
+              </a:solidFill>
+            </a:endParaRPr>
+          </a:p>
+        </p:txBody>
+      </p:sp>
+      <p:sp>
+        <p:nvSpPr>
+          <p:cNvPr id="379" name="Rectangle 378">
+            <a:extLst>
+              <a:ext uri="{FF2B5EF4-FFF2-40B4-BE49-F238E27FC236}">
+                <a16:creationId xmlns:a16="http://schemas.microsoft.com/office/drawing/2014/main" id="{3412531B-726F-FD73-9ACB-711985F51179}"/>
+              </a:ext>
+            </a:extLst>
+          </p:cNvPr>
+          <p:cNvSpPr/>
+          <p:nvPr/>
+        </p:nvSpPr>
+        <p:spPr>
+          <a:xfrm>
+            <a:off x="5817498" y="2782802"/>
+            <a:ext cx="2365601" cy="558724"/>
+          </a:xfrm>
+          <a:prstGeom prst="rect">
+            <a:avLst/>
+          </a:prstGeom>
+          <a:noFill/>
+          <a:ln w="22860">
+            <a:solidFill>
+              <a:srgbClr val="373737"/>
+            </a:solidFill>
+          </a:ln>
+          <a:effectLst/>
+        </p:spPr>
+        <p:style>
+          <a:lnRef idx="1">
+            <a:schemeClr val="accent1"/>
+          </a:lnRef>
+          <a:fillRef idx="3">
+            <a:schemeClr val="accent1"/>
+          </a:fillRef>
+          <a:effectRef idx="2">
+            <a:schemeClr val="accent1"/>
+          </a:effectRef>
+          <a:fontRef idx="minor">
+            <a:schemeClr val="lt1"/>
+          </a:fontRef>
+        </p:style>
+        <p:txBody>
+          <a:bodyPr wrap="square" lIns="101600" tIns="101600" rIns="101600" bIns="101600" rtlCol="0" anchor="ctr"/>
+          <a:lstStyle/>
+          <a:p>
+            <a:pPr algn="ctr">
+              <a:defRPr sz="1900" b="1"/>
+            </a:pPr>
+            <a:r>
+              <a:rPr lang="en-US" dirty="0">
+                <a:solidFill>
+                  <a:schemeClr val="tx1"/>
+                </a:solidFill>
+              </a:rPr>
+              <a:t>ITL</a:t>
+            </a:r>
+            <a:endParaRPr lang="en-US" baseline="-25000" dirty="0">
+              <a:solidFill>
+                <a:schemeClr val="tx1"/>
+              </a:solidFill>
+            </a:endParaRPr>
+          </a:p>
+        </p:txBody>
+      </p:sp>
+      <p:sp>
+        <p:nvSpPr>
+          <p:cNvPr id="380" name="Rectangle 379">
+            <a:extLst>
+              <a:ext uri="{FF2B5EF4-FFF2-40B4-BE49-F238E27FC236}">
+                <a16:creationId xmlns:a16="http://schemas.microsoft.com/office/drawing/2014/main" id="{C5DF5238-F067-69E3-5671-5590D7ADF7F6}"/>
+              </a:ext>
+            </a:extLst>
+          </p:cNvPr>
+          <p:cNvSpPr/>
+          <p:nvPr/>
+        </p:nvSpPr>
+        <p:spPr>
+          <a:xfrm>
+            <a:off x="5817498" y="3339639"/>
+            <a:ext cx="2365601" cy="558724"/>
+          </a:xfrm>
+          <a:prstGeom prst="rect">
+            <a:avLst/>
+          </a:prstGeom>
+          <a:noFill/>
+          <a:ln w="22860">
+            <a:solidFill>
+              <a:srgbClr val="373737"/>
+            </a:solidFill>
+          </a:ln>
+          <a:effectLst/>
+        </p:spPr>
+        <p:style>
+          <a:lnRef idx="1">
+            <a:schemeClr val="accent1"/>
+          </a:lnRef>
+          <a:fillRef idx="3">
+            <a:schemeClr val="accent1"/>
+          </a:fillRef>
+          <a:effectRef idx="2">
+            <a:schemeClr val="accent1"/>
+          </a:effectRef>
+          <a:fontRef idx="minor">
+            <a:schemeClr val="lt1"/>
+          </a:fontRef>
+        </p:style>
+        <p:txBody>
+          <a:bodyPr wrap="square" lIns="101600" tIns="101600" rIns="101600" bIns="101600" rtlCol="0" anchor="ctr"/>
+          <a:lstStyle/>
+          <a:p>
+            <a:pPr algn="ctr">
+              <a:defRPr sz="1900" b="1"/>
+            </a:pPr>
+            <a:r>
+              <a:rPr lang="en-US" dirty="0">
+                <a:solidFill>
+                  <a:schemeClr val="tx1"/>
+                </a:solidFill>
+              </a:rPr>
+              <a:t>Trace record</a:t>
+            </a:r>
+            <a:endParaRPr lang="en-US" baseline="-25000" dirty="0">
+              <a:solidFill>
+                <a:schemeClr val="tx1"/>
+              </a:solidFill>
+            </a:endParaRPr>
+          </a:p>
+        </p:txBody>
+      </p:sp>
+      <p:sp>
+        <p:nvSpPr>
+          <p:cNvPr id="381" name="Rectangle 380">
+            <a:extLst>
+              <a:ext uri="{FF2B5EF4-FFF2-40B4-BE49-F238E27FC236}">
+                <a16:creationId xmlns:a16="http://schemas.microsoft.com/office/drawing/2014/main" id="{CBDFA0A6-BEF0-358D-953B-5A000449C051}"/>
+              </a:ext>
+            </a:extLst>
+          </p:cNvPr>
+          <p:cNvSpPr/>
+          <p:nvPr/>
+        </p:nvSpPr>
+        <p:spPr>
+          <a:xfrm rot="16200000">
+            <a:off x="3973100" y="2053964"/>
+            <a:ext cx="3130074" cy="558724"/>
+          </a:xfrm>
+          <a:prstGeom prst="rect">
+            <a:avLst/>
+          </a:prstGeom>
+          <a:noFill/>
+          <a:ln w="22860">
+            <a:solidFill>
+              <a:srgbClr val="373737"/>
+            </a:solidFill>
+          </a:ln>
+          <a:effectLst/>
+        </p:spPr>
+        <p:style>
+          <a:lnRef idx="1">
+            <a:schemeClr val="accent1"/>
+          </a:lnRef>
+          <a:fillRef idx="3">
+            <a:schemeClr val="accent1"/>
+          </a:fillRef>
+          <a:effectRef idx="2">
+            <a:schemeClr val="accent1"/>
+          </a:effectRef>
+          <a:fontRef idx="minor">
+            <a:schemeClr val="lt1"/>
+          </a:fontRef>
+        </p:style>
+        <p:txBody>
+          <a:bodyPr wrap="square" lIns="101600" tIns="101600" rIns="101600" bIns="101600" rtlCol="0" anchor="ctr"/>
+          <a:lstStyle/>
+          <a:p>
+            <a:pPr algn="ctr">
+              <a:defRPr sz="1900" b="1"/>
+            </a:pPr>
+            <a:r>
+              <a:rPr lang="en-US" dirty="0">
+                <a:solidFill>
+                  <a:schemeClr val="tx1"/>
+                </a:solidFill>
+              </a:rPr>
+              <a:t>Attestation Engine</a:t>
+            </a:r>
+            <a:endParaRPr lang="en-US" baseline="-25000" dirty="0">
+              <a:solidFill>
+                <a:schemeClr val="tx1"/>
+              </a:solidFill>
+            </a:endParaRPr>
+          </a:p>
+        </p:txBody>
+      </p:sp>
+      <p:cxnSp>
+        <p:nvCxnSpPr>
+          <p:cNvPr id="382" name="Elbow Connector 381">
+            <a:extLst>
+              <a:ext uri="{FF2B5EF4-FFF2-40B4-BE49-F238E27FC236}">
+                <a16:creationId xmlns:a16="http://schemas.microsoft.com/office/drawing/2014/main" id="{C150AF71-31A4-E4AC-1B5D-4F6368F5F6AB}"/>
+              </a:ext>
+            </a:extLst>
+          </p:cNvPr>
+          <p:cNvCxnSpPr>
+            <a:cxnSpLocks/>
+          </p:cNvCxnSpPr>
+          <p:nvPr/>
+        </p:nvCxnSpPr>
+        <p:spPr>
+          <a:xfrm flipV="1">
+            <a:off x="3592145" y="1403687"/>
+            <a:ext cx="1673591" cy="244602"/>
+          </a:xfrm>
+          <a:prstGeom prst="bentConnector3">
+            <a:avLst>
+              <a:gd name="adj1" fmla="val 1360"/>
+            </a:avLst>
+          </a:prstGeom>
+          <a:ln>
+            <a:tailEnd type="triangle"/>
+          </a:ln>
+          <a:effectLst/>
         </p:spPr>
         <p:style>
           <a:lnRef idx="2">
@@ -5238,23 +4916,32 @@
       </p:cxnSp>
       <p:cxnSp>
         <p:nvCxnSpPr>
-          <p:cNvPr id="51" name="Connector 50"/>
-          <p:cNvCxnSpPr/>
+          <p:cNvPr id="383" name="Elbow Connector 382">
+            <a:extLst>
+              <a:ext uri="{FF2B5EF4-FFF2-40B4-BE49-F238E27FC236}">
+                <a16:creationId xmlns:a16="http://schemas.microsoft.com/office/drawing/2014/main" id="{E2B26B3C-759A-226C-19A8-CAB878BAB7E6}"/>
+              </a:ext>
+            </a:extLst>
+          </p:cNvPr>
+          <p:cNvCxnSpPr>
+            <a:cxnSpLocks/>
+          </p:cNvCxnSpPr>
           <p:nvPr/>
         </p:nvCxnSpPr>
         <p:spPr>
-          <a:xfrm>
-            <a:off x="11064240" y="3291840"/>
-            <a:ext cx="0" cy="822960"/>
+          <a:xfrm rot="10800000" flipV="1">
+            <a:off x="4597989" y="1755796"/>
+            <a:ext cx="660787" cy="339682"/>
           </a:xfrm>
-          <a:prstGeom prst="line">
-            <a:avLst/>
+          <a:prstGeom prst="bentConnector3">
+            <a:avLst>
+              <a:gd name="adj1" fmla="val 50000"/>
+            </a:avLst>
           </a:prstGeom>
-          <a:ln w="25400">
-            <a:solidFill>
-              <a:srgbClr val="373737"/>
-            </a:solidFill>
+          <a:ln>
+            <a:tailEnd type="triangle"/>
           </a:ln>
+          <a:effectLst/>
         </p:spPr>
         <p:style>
           <a:lnRef idx="2">
@@ -5273,23 +4960,37 @@
       </p:cxnSp>
       <p:cxnSp>
         <p:nvCxnSpPr>
-          <p:cNvPr id="52" name="Connector 51"/>
-          <p:cNvCxnSpPr/>
+          <p:cNvPr id="384" name="Elbow Connector 383">
+            <a:extLst>
+              <a:ext uri="{FF2B5EF4-FFF2-40B4-BE49-F238E27FC236}">
+                <a16:creationId xmlns:a16="http://schemas.microsoft.com/office/drawing/2014/main" id="{CEE6E1C1-EC95-FFCF-086C-907E8401C2F1}"/>
+              </a:ext>
+            </a:extLst>
+          </p:cNvPr>
+          <p:cNvCxnSpPr>
+            <a:cxnSpLocks/>
+          </p:cNvCxnSpPr>
           <p:nvPr/>
         </p:nvCxnSpPr>
         <p:spPr>
           <a:xfrm>
-            <a:off x="12710159" y="3291840"/>
-            <a:ext cx="0" cy="822960"/>
+            <a:off x="1292430" y="2542670"/>
+            <a:ext cx="3803490" cy="93521"/>
           </a:xfrm>
-          <a:prstGeom prst="line">
-            <a:avLst/>
+          <a:prstGeom prst="bentConnector3">
+            <a:avLst>
+              <a:gd name="adj1" fmla="val 452"/>
+            </a:avLst>
           </a:prstGeom>
-          <a:ln w="25400">
+          <a:ln>
             <a:solidFill>
-              <a:srgbClr val="373737"/>
+              <a:schemeClr val="accent6">
+                <a:lumMod val="75000"/>
+              </a:schemeClr>
             </a:solidFill>
+            <a:tailEnd type="triangle"/>
           </a:ln>
+          <a:effectLst/>
         </p:spPr>
         <p:style>
           <a:lnRef idx="2">
@@ -5306,16 +5007,65 @@
           </a:fontRef>
         </p:style>
       </p:cxnSp>
-      <p:sp>
-        <p:nvSpPr>
-          <p:cNvPr id="53" name="TextBox 52"/>
+      <p:cxnSp>
+        <p:nvCxnSpPr>
+          <p:cNvPr id="385" name="Straight Connector 384">
+            <a:extLst>
+              <a:ext uri="{FF2B5EF4-FFF2-40B4-BE49-F238E27FC236}">
+                <a16:creationId xmlns:a16="http://schemas.microsoft.com/office/drawing/2014/main" id="{DE552347-B917-7AFB-127E-BEC95F0DA383}"/>
+              </a:ext>
+            </a:extLst>
+          </p:cNvPr>
+          <p:cNvCxnSpPr>
+            <a:cxnSpLocks/>
+          </p:cNvCxnSpPr>
+          <p:nvPr/>
+        </p:nvCxnSpPr>
+        <p:spPr>
+          <a:xfrm>
+            <a:off x="2298270" y="934656"/>
+            <a:ext cx="2967466" cy="0"/>
+          </a:xfrm>
+          <a:prstGeom prst="line">
+            <a:avLst/>
+          </a:prstGeom>
+          <a:ln>
+            <a:headEnd type="none" w="med" len="med"/>
+            <a:tailEnd type="triangle" w="med" len="med"/>
+          </a:ln>
+          <a:effectLst/>
+        </p:spPr>
+        <p:style>
+          <a:lnRef idx="2">
+            <a:schemeClr val="accent1"/>
+          </a:lnRef>
+          <a:fillRef idx="0">
+            <a:schemeClr val="accent1"/>
+          </a:fillRef>
+          <a:effectRef idx="1">
+            <a:schemeClr val="accent1"/>
+          </a:effectRef>
+          <a:fontRef idx="minor">
+            <a:schemeClr val="tx1"/>
+          </a:fontRef>
+        </p:style>
+      </p:cxnSp>
+      <p:sp>
+        <p:nvSpPr>
+          <p:cNvPr id="386" name="TextBox 385">
+            <a:extLst>
+              <a:ext uri="{FF2B5EF4-FFF2-40B4-BE49-F238E27FC236}">
+                <a16:creationId xmlns:a16="http://schemas.microsoft.com/office/drawing/2014/main" id="{30D2AFD7-1D46-338F-8253-E6801B4CEECE}"/>
+              </a:ext>
+            </a:extLst>
+          </p:cNvPr>
           <p:cNvSpPr txBox="1"/>
           <p:nvPr/>
         </p:nvSpPr>
         <p:spPr>
           <a:xfrm>
-            <a:off x="1097280" y="3794760"/>
-            <a:ext cx="1097280" cy="274320"/>
+            <a:off x="3313930" y="971698"/>
+            <a:ext cx="1649482" cy="477054"/>
           </a:xfrm>
           <a:prstGeom prst="rect">
             <a:avLst/>
@@ -5323,405 +5073,15 @@
           <a:noFill/>
         </p:spPr>
         <p:txBody>
-          <a:bodyPr wrap="none">
+          <a:bodyPr wrap="square" rtlCol="0">
             <a:spAutoFit/>
           </a:bodyPr>
           <a:lstStyle/>
           <a:p>
-            <a:pPr algn="ctr">
-              <a:defRPr sz="1100" b="1">
-                <a:solidFill>
-                  <a:srgbClr val="191919"/>
-                </a:solidFill>
-              </a:defRPr>
-            </a:pPr>
-            <a:r>
-              <a:t>User</a:t>
-            </a:r>
-          </a:p>
-        </p:txBody>
-      </p:sp>
-      <p:sp>
-        <p:nvSpPr>
-          <p:cNvPr id="54" name="TextBox 53"/>
-          <p:cNvSpPr txBox="1"/>
-          <p:nvPr/>
-        </p:nvSpPr>
-        <p:spPr>
-          <a:xfrm>
-            <a:off x="3566160" y="3794760"/>
-            <a:ext cx="1097280" cy="274320"/>
-          </a:xfrm>
-          <a:prstGeom prst="rect">
-            <a:avLst/>
-          </a:prstGeom>
-          <a:noFill/>
-        </p:spPr>
-        <p:txBody>
-          <a:bodyPr wrap="none">
-            <a:spAutoFit/>
-          </a:bodyPr>
-          <a:lstStyle/>
-          <a:p>
-            <a:pPr algn="ctr">
-              <a:defRPr sz="1100" b="1">
-                <a:solidFill>
-                  <a:srgbClr val="191919"/>
-                </a:solidFill>
-              </a:defRPr>
-            </a:pPr>
-            <a:r>
-              <a:t>RTOS</a:t>
-            </a:r>
-          </a:p>
-        </p:txBody>
-      </p:sp>
-      <p:sp>
-        <p:nvSpPr>
-          <p:cNvPr id="55" name="TextBox 54"/>
-          <p:cNvSpPr txBox="1"/>
-          <p:nvPr/>
-        </p:nvSpPr>
-        <p:spPr>
-          <a:xfrm>
-            <a:off x="5943600" y="3794760"/>
-            <a:ext cx="1097280" cy="274320"/>
-          </a:xfrm>
-          <a:prstGeom prst="rect">
-            <a:avLst/>
-          </a:prstGeom>
-          <a:noFill/>
-        </p:spPr>
-        <p:txBody>
-          <a:bodyPr wrap="none">
-            <a:spAutoFit/>
-          </a:bodyPr>
-          <a:lstStyle/>
-          <a:p>
-            <a:pPr algn="ctr">
-              <a:defRPr sz="1100" b="1">
-                <a:solidFill>
-                  <a:srgbClr val="191919"/>
-                </a:solidFill>
-              </a:defRPr>
-            </a:pPr>
-            <a:r>
-              <a:t>IRQ</a:t>
-            </a:r>
-          </a:p>
-        </p:txBody>
-      </p:sp>
-      <p:sp>
-        <p:nvSpPr>
-          <p:cNvPr id="56" name="TextBox 55"/>
-          <p:cNvSpPr txBox="1"/>
-          <p:nvPr/>
-        </p:nvSpPr>
-        <p:spPr>
-          <a:xfrm>
-            <a:off x="8046720" y="3794760"/>
-            <a:ext cx="1097280" cy="274320"/>
-          </a:xfrm>
-          <a:prstGeom prst="rect">
-            <a:avLst/>
-          </a:prstGeom>
-          <a:noFill/>
-        </p:spPr>
-        <p:txBody>
-          <a:bodyPr wrap="none">
-            <a:spAutoFit/>
-          </a:bodyPr>
-          <a:lstStyle/>
-          <a:p>
-            <a:pPr algn="ctr">
-              <a:defRPr sz="1100" b="1">
-                <a:solidFill>
-                  <a:srgbClr val="191919"/>
-                </a:solidFill>
-              </a:defRPr>
-            </a:pPr>
-            <a:r>
-              <a:t>Context switch</a:t>
-            </a:r>
-          </a:p>
-        </p:txBody>
-      </p:sp>
-      <p:sp>
-        <p:nvSpPr>
-          <p:cNvPr id="57" name="TextBox 56"/>
-          <p:cNvSpPr txBox="1"/>
-          <p:nvPr/>
-        </p:nvSpPr>
-        <p:spPr>
-          <a:xfrm>
-            <a:off x="11064240" y="3794760"/>
-            <a:ext cx="1097280" cy="274320"/>
-          </a:xfrm>
-          <a:prstGeom prst="rect">
-            <a:avLst/>
-          </a:prstGeom>
-          <a:noFill/>
-        </p:spPr>
-        <p:txBody>
-          <a:bodyPr wrap="none">
-            <a:spAutoFit/>
-          </a:bodyPr>
-          <a:lstStyle/>
-          <a:p>
-            <a:pPr algn="ctr">
-              <a:defRPr sz="1100" b="1">
-                <a:solidFill>
-                  <a:srgbClr val="191919"/>
-                </a:solidFill>
-              </a:defRPr>
-            </a:pPr>
-            <a:r>
-              <a:t>Secure monitor/engine</a:t>
-            </a:r>
-          </a:p>
-        </p:txBody>
-      </p:sp>
-      <p:sp>
-        <p:nvSpPr>
-          <p:cNvPr id="58" name="TextBox 57"/>
-          <p:cNvSpPr txBox="1"/>
-          <p:nvPr/>
-        </p:nvSpPr>
-        <p:spPr>
-          <a:xfrm>
-            <a:off x="731520" y="6492240"/>
-            <a:ext cx="13533120" cy="365760"/>
-          </a:xfrm>
-          <a:prstGeom prst="rect">
-            <a:avLst/>
-          </a:prstGeom>
-          <a:noFill/>
-        </p:spPr>
-        <p:txBody>
-          <a:bodyPr wrap="none">
-            <a:spAutoFit/>
-          </a:bodyPr>
-          <a:lstStyle/>
-          <a:p>
-            <a:pPr algn="ctr">
-              <a:defRPr sz="1100" b="1">
-                <a:solidFill>
-                  <a:srgbClr val="191919"/>
-                </a:solidFill>
-              </a:defRPr>
-            </a:pPr>
-            <a:r>
-              <a:t>Normal-world execution includes the RTOS kernel; the TrustZone secure world authenticates each interleaving and binds the PA state to the active task/ISR context.</a:t>
-            </a:r>
-          </a:p>
-        </p:txBody>
-      </p:sp>
-      <p:sp>
-        <p:nvSpPr>
-          <p:cNvPr id="59" name="TextBox 58"/>
-          <p:cNvSpPr txBox="1"/>
-          <p:nvPr/>
-        </p:nvSpPr>
-        <p:spPr>
-          <a:xfrm>
-            <a:off x="822960" y="6217920"/>
-            <a:ext cx="548640" cy="228600"/>
-          </a:xfrm>
-          <a:prstGeom prst="rect">
-            <a:avLst/>
-          </a:prstGeom>
-          <a:noFill/>
-        </p:spPr>
-        <p:txBody>
-          <a:bodyPr wrap="none">
-            <a:spAutoFit/>
-          </a:bodyPr>
-          <a:lstStyle/>
-          <a:p>
-            <a:pPr algn="ctr">
-              <a:defRPr sz="1000" b="0">
-                <a:solidFill>
-                  <a:srgbClr val="191919"/>
-                </a:solidFill>
-              </a:defRPr>
-            </a:pPr>
-            <a:r>
-              <a:t>t0</a:t>
-            </a:r>
-          </a:p>
-        </p:txBody>
-      </p:sp>
-      <p:sp>
-        <p:nvSpPr>
-          <p:cNvPr id="60" name="TextBox 59"/>
-          <p:cNvSpPr txBox="1"/>
-          <p:nvPr/>
-        </p:nvSpPr>
-        <p:spPr>
-          <a:xfrm>
-            <a:off x="1920240" y="6217920"/>
-            <a:ext cx="548640" cy="228600"/>
-          </a:xfrm>
-          <a:prstGeom prst="rect">
-            <a:avLst/>
-          </a:prstGeom>
-          <a:noFill/>
-        </p:spPr>
-        <p:txBody>
-          <a:bodyPr wrap="none">
-            <a:spAutoFit/>
-          </a:bodyPr>
-          <a:lstStyle/>
-          <a:p>
-            <a:pPr algn="ctr">
-              <a:defRPr sz="1000" b="0">
-                <a:solidFill>
-                  <a:srgbClr val="191919"/>
-                </a:solidFill>
-              </a:defRPr>
-            </a:pPr>
-            <a:r>
-              <a:t>t1</a:t>
-            </a:r>
-          </a:p>
-        </p:txBody>
-      </p:sp>
-      <p:sp>
-        <p:nvSpPr>
-          <p:cNvPr id="61" name="TextBox 60"/>
-          <p:cNvSpPr txBox="1"/>
-          <p:nvPr/>
-        </p:nvSpPr>
-        <p:spPr>
-          <a:xfrm>
-            <a:off x="3657600" y="6217920"/>
-            <a:ext cx="548640" cy="228600"/>
-          </a:xfrm>
-          <a:prstGeom prst="rect">
-            <a:avLst/>
-          </a:prstGeom>
-          <a:noFill/>
-        </p:spPr>
-        <p:txBody>
-          <a:bodyPr wrap="none">
-            <a:spAutoFit/>
-          </a:bodyPr>
-          <a:lstStyle/>
-          <a:p>
-            <a:pPr algn="ctr">
-              <a:defRPr sz="1000" b="0">
-                <a:solidFill>
-                  <a:srgbClr val="191919"/>
-                </a:solidFill>
-              </a:defRPr>
-            </a:pPr>
-            <a:r>
-              <a:t>t2</a:t>
-            </a:r>
-          </a:p>
-        </p:txBody>
-      </p:sp>
-      <p:sp>
-        <p:nvSpPr>
-          <p:cNvPr id="62" name="TextBox 61"/>
-          <p:cNvSpPr txBox="1"/>
-          <p:nvPr/>
-        </p:nvSpPr>
-        <p:spPr>
-          <a:xfrm>
-            <a:off x="5669280" y="6217920"/>
-            <a:ext cx="548640" cy="228600"/>
-          </a:xfrm>
-          <a:prstGeom prst="rect">
-            <a:avLst/>
-          </a:prstGeom>
-          <a:noFill/>
-        </p:spPr>
-        <p:txBody>
-          <a:bodyPr wrap="none">
-            <a:spAutoFit/>
-          </a:bodyPr>
-          <a:lstStyle/>
-          <a:p>
-            <a:pPr algn="ctr">
-              <a:defRPr sz="1000" b="0">
-                <a:solidFill>
-                  <a:srgbClr val="191919"/>
-                </a:solidFill>
-              </a:defRPr>
-            </a:pPr>
-            <a:r>
-              <a:t>t3</a:t>
-            </a:r>
-          </a:p>
-        </p:txBody>
-      </p:sp>
-      <p:sp>
-        <p:nvSpPr>
-          <p:cNvPr id="63" name="TextBox 62"/>
-          <p:cNvSpPr txBox="1"/>
-          <p:nvPr/>
-        </p:nvSpPr>
-        <p:spPr>
-          <a:xfrm>
-            <a:off x="8046720" y="6217920"/>
-            <a:ext cx="548640" cy="228600"/>
-          </a:xfrm>
-          <a:prstGeom prst="rect">
-            <a:avLst/>
-          </a:prstGeom>
-          <a:noFill/>
-        </p:spPr>
-        <p:txBody>
-          <a:bodyPr wrap="none">
-            <a:spAutoFit/>
-          </a:bodyPr>
-          <a:lstStyle/>
-          <a:p>
-            <a:pPr algn="ctr">
-              <a:defRPr sz="1000" b="0">
-                <a:solidFill>
-                  <a:srgbClr val="191919"/>
-                </a:solidFill>
-              </a:defRPr>
-            </a:pPr>
-            <a:r>
-              <a:t>t4</a:t>
-            </a:r>
-          </a:p>
-        </p:txBody>
-      </p:sp>
-      <p:sp>
-        <p:nvSpPr>
-          <p:cNvPr id="64" name="TextBox 63"/>
-          <p:cNvSpPr txBox="1"/>
-          <p:nvPr/>
-        </p:nvSpPr>
-        <p:spPr>
-          <a:xfrm>
-            <a:off x="10058400" y="6217920"/>
-            <a:ext cx="548640" cy="228600"/>
-          </a:xfrm>
-          <a:prstGeom prst="rect">
-            <a:avLst/>
-          </a:prstGeom>
-          <a:noFill/>
-        </p:spPr>
-        <p:txBody>
-          <a:bodyPr wrap="none">
-            <a:spAutoFit/>
-          </a:bodyPr>
-          <a:lstStyle/>
-          <a:p>
-            <a:pPr algn="ctr">
-              <a:defRPr sz="1000" b="0">
-                <a:solidFill>
-                  <a:srgbClr val="191919"/>
-                </a:solidFill>
-              </a:defRPr>
-            </a:pPr>
-            <a:r>
-              <a:t>t5</a:t>
+            <a:pPr algn="ctr"/>
+            <a:r>
+              <a:rPr lang="en-US" dirty="0"/>
+              <a:t>ISR returns</a:t>
             </a:r>
           </a:p>
         </p:txBody>
@@ -6052,4 +5412,319 @@
   </a:objectDefaults>
   <a:extraClrSchemeLst/>
 </a:theme>
+</file>
+
+<file path=ppt/theme/theme2.xml><?xml version="1.0" encoding="utf-8"?>
+<a:theme xmlns:a="http://schemas.openxmlformats.org/drawingml/2006/main" name="Office Theme">
+  <a:themeElements>
+    <a:clrScheme name="Office">
+      <a:dk1>
+        <a:sysClr val="windowText" lastClr="000000"/>
+      </a:dk1>
+      <a:lt1>
+        <a:sysClr val="window" lastClr="FFFFFF"/>
+      </a:lt1>
+      <a:dk2>
+        <a:srgbClr val="0E2841"/>
+      </a:dk2>
+      <a:lt2>
+        <a:srgbClr val="E8E8E8"/>
+      </a:lt2>
+      <a:accent1>
+        <a:srgbClr val="156082"/>
+      </a:accent1>
+      <a:accent2>
+        <a:srgbClr val="E97132"/>
+      </a:accent2>
+      <a:accent3>
+        <a:srgbClr val="196B24"/>
+      </a:accent3>
+      <a:accent4>
+        <a:srgbClr val="0F9ED5"/>
+      </a:accent4>
+      <a:accent5>
+        <a:srgbClr val="A02B93"/>
+      </a:accent5>
+      <a:accent6>
+        <a:srgbClr val="4EA72E"/>
+      </a:accent6>
+      <a:hlink>
+        <a:srgbClr val="467886"/>
+      </a:hlink>
+      <a:folHlink>
+        <a:srgbClr val="96607D"/>
+      </a:folHlink>
+    </a:clrScheme>
+    <a:fontScheme name="Office">
+      <a:majorFont>
+        <a:latin typeface="Aptos Display" panose="02110004020202020204"/>
+        <a:ea typeface=""/>
+        <a:cs typeface=""/>
+        <a:font script="Jpan" typeface="游ゴシック Light"/>
+        <a:font script="Hang" typeface="맑은 고딕"/>
+        <a:font script="Hans" typeface="等线 Light"/>
+        <a:font script="Hant" typeface="新細明體"/>
+        <a:font script="Arab" typeface="Times New Roman"/>
+        <a:font script="Hebr" typeface="Times New Roman"/>
+        <a:font script="Thai" typeface="Angsana New"/>
+        <a:font script="Ethi" typeface="Nyala"/>
+        <a:font script="Beng" typeface="Vrinda"/>
+        <a:font script="Gujr" typeface="Shruti"/>
+        <a:font script="Khmr" typeface="MoolBoran"/>
+        <a:font script="Knda" typeface="Tunga"/>
+        <a:font script="Guru" typeface="Raavi"/>
+        <a:font script="Cans" typeface="Euphemia"/>
+        <a:font script="Cher" typeface="Plantagenet Cherokee"/>
+        <a:font script="Yiii" typeface="Microsoft Yi Baiti"/>
+        <a:font script="Tibt" typeface="Microsoft Himalaya"/>
+        <a:font script="Thaa" typeface="MV Boli"/>
+        <a:font script="Deva" typeface="Mangal"/>
+        <a:font script="Telu" typeface="Gautami"/>
+        <a:font script="Taml" typeface="Latha"/>
+        <a:font script="Syrc" typeface="Estrangelo Edessa"/>
+        <a:font script="Orya" typeface="Kalinga"/>
+        <a:font script="Mlym" typeface="Kartika"/>
+        <a:font script="Laoo" typeface="DokChampa"/>
+        <a:font script="Sinh" typeface="Iskoola Pota"/>
+        <a:font script="Mong" typeface="Mongolian Baiti"/>
+        <a:font script="Viet" typeface="Times New Roman"/>
+        <a:font script="Uigh" typeface="Microsoft Uighur"/>
+        <a:font script="Geor" typeface="Sylfaen"/>
+        <a:font script="Armn" typeface="Arial"/>
+        <a:font script="Bugi" typeface="Leelawadee UI"/>
+        <a:font script="Bopo" typeface="Microsoft JhengHei"/>
+        <a:font script="Java" typeface="Javanese Text"/>
+        <a:font script="Lisu" typeface="Segoe UI"/>
+        <a:font script="Mymr" typeface="Myanmar Text"/>
+        <a:font script="Nkoo" typeface="Ebrima"/>
+        <a:font script="Olck" typeface="Nirmala UI"/>
+        <a:font script="Osma" typeface="Ebrima"/>
+        <a:font script="Phag" typeface="Phagspa"/>
+        <a:font script="Syrn" typeface="Estrangelo Edessa"/>
+        <a:font script="Syrj" typeface="Estrangelo Edessa"/>
+        <a:font script="Syre" typeface="Estrangelo Edessa"/>
+        <a:font script="Sora" typeface="Nirmala UI"/>
+        <a:font script="Tale" typeface="Microsoft Tai Le"/>
+        <a:font script="Talu" typeface="Microsoft New Tai Lue"/>
+        <a:font script="Tfng" typeface="Ebrima"/>
+      </a:majorFont>
+      <a:minorFont>
+        <a:latin typeface="Aptos" panose="02110004020202020204"/>
+        <a:ea typeface=""/>
+        <a:cs typeface=""/>
+        <a:font script="Jpan" typeface="游ゴシック"/>
+        <a:font script="Hang" typeface="맑은 고딕"/>
+        <a:font script="Hans" typeface="等线"/>
+        <a:font script="Hant" typeface="新細明體"/>
+        <a:font script="Arab" typeface="Arial"/>
+        <a:font script="Hebr" typeface="Arial"/>
+        <a:font script="Thai" typeface="Cordia New"/>
+        <a:font script="Ethi" typeface="Nyala"/>
+        <a:font script="Beng" typeface="Vrinda"/>
+        <a:font script="Gujr" typeface="Shruti"/>
+        <a:font script="Khmr" typeface="DaunPenh"/>
+        <a:font script="Knda" typeface="Tunga"/>
+        <a:font script="Guru" typeface="Raavi"/>
+        <a:font script="Cans" typeface="Euphemia"/>
+        <a:font script="Cher" typeface="Plantagenet Cherokee"/>
+        <a:font script="Yiii" typeface="Microsoft Yi Baiti"/>
+        <a:font script="Tibt" typeface="Microsoft Himalaya"/>
+        <a:font script="Thaa" typeface="MV Boli"/>
+        <a:font script="Deva" typeface="Mangal"/>
+        <a:font script="Telu" typeface="Gautami"/>
+        <a:font script="Taml" typeface="Latha"/>
+        <a:font script="Syrc" typeface="Estrangelo Edessa"/>
+        <a:font script="Orya" typeface="Kalinga"/>
+        <a:font script="Mlym" typeface="Kartika"/>
+        <a:font script="Laoo" typeface="DokChampa"/>
+        <a:font script="Sinh" typeface="Iskoola Pota"/>
+        <a:font script="Mong" typeface="Mongolian Baiti"/>
+        <a:font script="Viet" typeface="Arial"/>
+        <a:font script="Uigh" typeface="Microsoft Uighur"/>
+        <a:font script="Geor" typeface="Sylfaen"/>
+        <a:font script="Armn" typeface="Arial"/>
+        <a:font script="Bugi" typeface="Leelawadee UI"/>
+        <a:font script="Bopo" typeface="Microsoft JhengHei"/>
+        <a:font script="Java" typeface="Javanese Text"/>
+        <a:font script="Lisu" typeface="Segoe UI"/>
+        <a:font script="Mymr" typeface="Myanmar Text"/>
+        <a:font script="Nkoo" typeface="Ebrima"/>
+        <a:font script="Olck" typeface="Nirmala UI"/>
+        <a:font script="Osma" typeface="Ebrima"/>
+        <a:font script="Phag" typeface="Phagspa"/>
+        <a:font script="Syrn" typeface="Estrangelo Edessa"/>
+        <a:font script="Syrj" typeface="Estrangelo Edessa"/>
+        <a:font script="Syre" typeface="Estrangelo Edessa"/>
+        <a:font script="Sora" typeface="Nirmala UI"/>
+        <a:font script="Tale" typeface="Microsoft Tai Le"/>
+        <a:font script="Talu" typeface="Microsoft New Tai Lue"/>
+        <a:font script="Tfng" typeface="Ebrima"/>
+      </a:minorFont>
+    </a:fontScheme>
+    <a:fmtScheme name="Office">
+      <a:fillStyleLst>
+        <a:solidFill>
+          <a:schemeClr val="phClr"/>
+        </a:solidFill>
+        <a:gradFill rotWithShape="1">
+          <a:gsLst>
+            <a:gs pos="0">
+              <a:schemeClr val="phClr">
+                <a:lumMod val="110000"/>
+                <a:satMod val="105000"/>
+                <a:tint val="67000"/>
+              </a:schemeClr>
+            </a:gs>
+            <a:gs pos="50000">
+              <a:schemeClr val="phClr">
+                <a:lumMod val="105000"/>
+                <a:satMod val="103000"/>
+                <a:tint val="73000"/>
+              </a:schemeClr>
+            </a:gs>
+            <a:gs pos="100000">
+              <a:schemeClr val="phClr">
+                <a:lumMod val="105000"/>
+                <a:satMod val="109000"/>
+                <a:tint val="81000"/>
+              </a:schemeClr>
+            </a:gs>
+          </a:gsLst>
+          <a:lin ang="5400000" scaled="0"/>
+        </a:gradFill>
+        <a:gradFill rotWithShape="1">
+          <a:gsLst>
+            <a:gs pos="0">
+              <a:schemeClr val="phClr">
+                <a:satMod val="103000"/>
+                <a:lumMod val="102000"/>
+                <a:tint val="94000"/>
+              </a:schemeClr>
+            </a:gs>
+            <a:gs pos="50000">
+              <a:schemeClr val="phClr">
+                <a:satMod val="110000"/>
+                <a:lumMod val="100000"/>
+                <a:shade val="100000"/>
+              </a:schemeClr>
+            </a:gs>
+            <a:gs pos="100000">
+              <a:schemeClr val="phClr">
+                <a:lumMod val="99000"/>
+                <a:satMod val="120000"/>
+                <a:shade val="78000"/>
+              </a:schemeClr>
+            </a:gs>
+          </a:gsLst>
+          <a:lin ang="5400000" scaled="0"/>
+        </a:gradFill>
+      </a:fillStyleLst>
+      <a:lnStyleLst>
+        <a:ln w="12700" cap="flat" cmpd="sng" algn="ctr">
+          <a:solidFill>
+            <a:schemeClr val="phClr"/>
+          </a:solidFill>
+          <a:prstDash val="solid"/>
+          <a:miter lim="800000"/>
+        </a:ln>
+        <a:ln w="19050" cap="flat" cmpd="sng" algn="ctr">
+          <a:solidFill>
+            <a:schemeClr val="phClr"/>
+          </a:solidFill>
+          <a:prstDash val="solid"/>
+          <a:miter lim="800000"/>
+        </a:ln>
+        <a:ln w="25400" cap="flat" cmpd="sng" algn="ctr">
+          <a:solidFill>
+            <a:schemeClr val="phClr"/>
+          </a:solidFill>
+          <a:prstDash val="solid"/>
+          <a:miter lim="800000"/>
+        </a:ln>
+      </a:lnStyleLst>
+      <a:effectStyleLst>
+        <a:effectStyle>
+          <a:effectLst/>
+        </a:effectStyle>
+        <a:effectStyle>
+          <a:effectLst/>
+        </a:effectStyle>
+        <a:effectStyle>
+          <a:effectLst>
+            <a:outerShdw blurRad="57150" dist="19050" dir="5400000" algn="ctr" rotWithShape="0">
+              <a:srgbClr val="000000">
+                <a:alpha val="63000"/>
+              </a:srgbClr>
+            </a:outerShdw>
+          </a:effectLst>
+        </a:effectStyle>
+      </a:effectStyleLst>
+      <a:bgFillStyleLst>
+        <a:solidFill>
+          <a:schemeClr val="phClr"/>
+        </a:solidFill>
+        <a:solidFill>
+          <a:schemeClr val="phClr">
+            <a:tint val="95000"/>
+            <a:satMod val="170000"/>
+          </a:schemeClr>
+        </a:solidFill>
+        <a:gradFill rotWithShape="1">
+          <a:gsLst>
+            <a:gs pos="0">
+              <a:schemeClr val="phClr">
+                <a:tint val="93000"/>
+                <a:satMod val="150000"/>
+                <a:shade val="98000"/>
+                <a:lumMod val="102000"/>
+              </a:schemeClr>
+            </a:gs>
+            <a:gs pos="50000">
+              <a:schemeClr val="phClr">
+                <a:tint val="98000"/>
+                <a:satMod val="130000"/>
+                <a:shade val="90000"/>
+                <a:lumMod val="103000"/>
+              </a:schemeClr>
+            </a:gs>
+            <a:gs pos="100000">
+              <a:schemeClr val="phClr">
+                <a:shade val="63000"/>
+                <a:satMod val="120000"/>
+              </a:schemeClr>
+            </a:gs>
+          </a:gsLst>
+          <a:lin ang="5400000" scaled="0"/>
+        </a:gradFill>
+      </a:bgFillStyleLst>
+    </a:fmtScheme>
+  </a:themeElements>
+  <a:objectDefaults>
+    <a:lnDef>
+      <a:spPr/>
+      <a:bodyPr/>
+      <a:lstStyle/>
+      <a:style>
+        <a:lnRef idx="2">
+          <a:schemeClr val="accent1"/>
+        </a:lnRef>
+        <a:fillRef idx="0">
+          <a:schemeClr val="accent1"/>
+        </a:fillRef>
+        <a:effectRef idx="1">
+          <a:schemeClr val="accent1"/>
+        </a:effectRef>
+        <a:fontRef idx="minor">
+          <a:schemeClr val="tx1"/>
+        </a:fontRef>
+      </a:style>
+    </a:lnDef>
+  </a:objectDefaults>
+  <a:extraClrSchemeLst/>
+  <a:extLst>
+    <a:ext uri="{05A4C25C-085E-4340-85A3-A5531E510DB2}">
+      <thm15:themeFamily xmlns:thm15="http://schemas.microsoft.com/office/thememl/2012/main" name="Office Theme" id="{2E142A2C-CD16-42D6-873A-C26D2A0506FA}" vid="{1BDDFF52-6CD6-40A5-AB3C-68EB2F1E4D0A}"/>
+    </a:ext>
+  </a:extLst>
+</a:theme>
 </file>
--- a/figs/thrust2.2-rtos-attestation.pptx
+++ b/figs/thrust2.2-rtos-attestation.pptx
@@ -10,14 +10,14 @@
   <p:sldIdLst>
     <p:sldId id="256" r:id="rId2"/>
   </p:sldIdLst>
-  <p:sldSz cx="8412163" cy="5486400"/>
+  <p:sldSz cx="8321675" cy="4435475"/>
   <p:notesSz cx="6858000" cy="9144000"/>
   <p:defaultTextStyle>
     <a:defPPr>
       <a:defRPr lang="en-US"/>
     </a:defPPr>
-    <a:lvl1pPr marL="0" algn="l" defTabSz="493808" rtl="0" eaLnBrk="1" latinLnBrk="0" hangingPunct="1">
-      <a:defRPr sz="1944" kern="1200">
+    <a:lvl1pPr marL="0" algn="l" defTabSz="458056" rtl="0" eaLnBrk="1" latinLnBrk="0" hangingPunct="1">
+      <a:defRPr sz="1803" kern="1200">
         <a:solidFill>
           <a:schemeClr val="tx1"/>
         </a:solidFill>
@@ -26,8 +26,8 @@
         <a:cs typeface="+mn-cs"/>
       </a:defRPr>
     </a:lvl1pPr>
-    <a:lvl2pPr marL="493808" algn="l" defTabSz="493808" rtl="0" eaLnBrk="1" latinLnBrk="0" hangingPunct="1">
-      <a:defRPr sz="1944" kern="1200">
+    <a:lvl2pPr marL="458056" algn="l" defTabSz="458056" rtl="0" eaLnBrk="1" latinLnBrk="0" hangingPunct="1">
+      <a:defRPr sz="1803" kern="1200">
         <a:solidFill>
           <a:schemeClr val="tx1"/>
         </a:solidFill>
@@ -36,8 +36,8 @@
         <a:cs typeface="+mn-cs"/>
       </a:defRPr>
     </a:lvl2pPr>
-    <a:lvl3pPr marL="987616" algn="l" defTabSz="493808" rtl="0" eaLnBrk="1" latinLnBrk="0" hangingPunct="1">
-      <a:defRPr sz="1944" kern="1200">
+    <a:lvl3pPr marL="916113" algn="l" defTabSz="458056" rtl="0" eaLnBrk="1" latinLnBrk="0" hangingPunct="1">
+      <a:defRPr sz="1803" kern="1200">
         <a:solidFill>
           <a:schemeClr val="tx1"/>
         </a:solidFill>
@@ -46,8 +46,8 @@
         <a:cs typeface="+mn-cs"/>
       </a:defRPr>
     </a:lvl3pPr>
-    <a:lvl4pPr marL="1481424" algn="l" defTabSz="493808" rtl="0" eaLnBrk="1" latinLnBrk="0" hangingPunct="1">
-      <a:defRPr sz="1944" kern="1200">
+    <a:lvl4pPr marL="1374169" algn="l" defTabSz="458056" rtl="0" eaLnBrk="1" latinLnBrk="0" hangingPunct="1">
+      <a:defRPr sz="1803" kern="1200">
         <a:solidFill>
           <a:schemeClr val="tx1"/>
         </a:solidFill>
@@ -56,8 +56,8 @@
         <a:cs typeface="+mn-cs"/>
       </a:defRPr>
     </a:lvl4pPr>
-    <a:lvl5pPr marL="1975231" algn="l" defTabSz="493808" rtl="0" eaLnBrk="1" latinLnBrk="0" hangingPunct="1">
-      <a:defRPr sz="1944" kern="1200">
+    <a:lvl5pPr marL="1832224" algn="l" defTabSz="458056" rtl="0" eaLnBrk="1" latinLnBrk="0" hangingPunct="1">
+      <a:defRPr sz="1803" kern="1200">
         <a:solidFill>
           <a:schemeClr val="tx1"/>
         </a:solidFill>
@@ -66,8 +66,8 @@
         <a:cs typeface="+mn-cs"/>
       </a:defRPr>
     </a:lvl5pPr>
-    <a:lvl6pPr marL="2469040" algn="l" defTabSz="493808" rtl="0" eaLnBrk="1" latinLnBrk="0" hangingPunct="1">
-      <a:defRPr sz="1944" kern="1200">
+    <a:lvl6pPr marL="2290282" algn="l" defTabSz="458056" rtl="0" eaLnBrk="1" latinLnBrk="0" hangingPunct="1">
+      <a:defRPr sz="1803" kern="1200">
         <a:solidFill>
           <a:schemeClr val="tx1"/>
         </a:solidFill>
@@ -76,8 +76,8 @@
         <a:cs typeface="+mn-cs"/>
       </a:defRPr>
     </a:lvl6pPr>
-    <a:lvl7pPr marL="2962847" algn="l" defTabSz="493808" rtl="0" eaLnBrk="1" latinLnBrk="0" hangingPunct="1">
-      <a:defRPr sz="1944" kern="1200">
+    <a:lvl7pPr marL="2748337" algn="l" defTabSz="458056" rtl="0" eaLnBrk="1" latinLnBrk="0" hangingPunct="1">
+      <a:defRPr sz="1803" kern="1200">
         <a:solidFill>
           <a:schemeClr val="tx1"/>
         </a:solidFill>
@@ -86,8 +86,8 @@
         <a:cs typeface="+mn-cs"/>
       </a:defRPr>
     </a:lvl7pPr>
-    <a:lvl8pPr marL="3456656" algn="l" defTabSz="493808" rtl="0" eaLnBrk="1" latinLnBrk="0" hangingPunct="1">
-      <a:defRPr sz="1944" kern="1200">
+    <a:lvl8pPr marL="3206394" algn="l" defTabSz="458056" rtl="0" eaLnBrk="1" latinLnBrk="0" hangingPunct="1">
+      <a:defRPr sz="1803" kern="1200">
         <a:solidFill>
           <a:schemeClr val="tx1"/>
         </a:solidFill>
@@ -96,8 +96,8 @@
         <a:cs typeface="+mn-cs"/>
       </a:defRPr>
     </a:lvl8pPr>
-    <a:lvl9pPr marL="3950463" algn="l" defTabSz="493808" rtl="0" eaLnBrk="1" latinLnBrk="0" hangingPunct="1">
-      <a:defRPr sz="1944" kern="1200">
+    <a:lvl9pPr marL="3664449" algn="l" defTabSz="458056" rtl="0" eaLnBrk="1" latinLnBrk="0" hangingPunct="1">
+      <a:defRPr sz="1803" kern="1200">
         <a:solidFill>
           <a:schemeClr val="tx1"/>
         </a:solidFill>
@@ -110,12 +110,12 @@
   <p:extLst>
     <p:ext uri="{EFAFB233-063F-42B5-8137-9DF3F51BA10A}">
       <p15:sldGuideLst xmlns:p15="http://schemas.microsoft.com/office/powerpoint/2012/main">
-        <p15:guide id="1" orient="horz" pos="1862" userDrawn="1">
+        <p15:guide id="1" orient="horz" pos="1506" userDrawn="1">
           <p15:clr>
             <a:srgbClr val="A4A3A4"/>
           </p15:clr>
         </p15:guide>
-        <p15:guide id="2" pos="4416" userDrawn="1">
+        <p15:guide id="2" pos="4368" userDrawn="1">
           <p15:clr>
             <a:srgbClr val="A4A3A4"/>
           </p15:clr>
@@ -226,8 +226,8 @@
         </p:nvSpPr>
         <p:spPr>
           <a:xfrm>
-            <a:off x="1063625" y="1143000"/>
-            <a:ext cx="4730750" cy="3086100"/>
+            <a:off x="533400" y="1143000"/>
+            <a:ext cx="5791200" cy="3086100"/>
           </a:xfrm>
           <a:prstGeom prst="rect">
             <a:avLst/>
@@ -381,8 +381,8 @@
   </p:cSld>
   <p:clrMap bg1="lt1" tx1="dk1" bg2="lt2" tx2="dk2" accent1="accent1" accent2="accent2" accent3="accent3" accent4="accent4" accent5="accent5" accent6="accent6" hlink="hlink" folHlink="folHlink"/>
   <p:notesStyle>
-    <a:lvl1pPr marL="0" algn="l" defTabSz="987616" rtl="0" eaLnBrk="1" latinLnBrk="0" hangingPunct="1">
-      <a:defRPr sz="1296" kern="1200">
+    <a:lvl1pPr marL="0" algn="l" defTabSz="916113" rtl="0" eaLnBrk="1" latinLnBrk="0" hangingPunct="1">
+      <a:defRPr sz="1202" kern="1200">
         <a:solidFill>
           <a:schemeClr val="tx1"/>
         </a:solidFill>
@@ -391,8 +391,8 @@
         <a:cs typeface="+mn-cs"/>
       </a:defRPr>
     </a:lvl1pPr>
-    <a:lvl2pPr marL="493808" algn="l" defTabSz="987616" rtl="0" eaLnBrk="1" latinLnBrk="0" hangingPunct="1">
-      <a:defRPr sz="1296" kern="1200">
+    <a:lvl2pPr marL="458056" algn="l" defTabSz="916113" rtl="0" eaLnBrk="1" latinLnBrk="0" hangingPunct="1">
+      <a:defRPr sz="1202" kern="1200">
         <a:solidFill>
           <a:schemeClr val="tx1"/>
         </a:solidFill>
@@ -401,8 +401,8 @@
         <a:cs typeface="+mn-cs"/>
       </a:defRPr>
     </a:lvl2pPr>
-    <a:lvl3pPr marL="987616" algn="l" defTabSz="987616" rtl="0" eaLnBrk="1" latinLnBrk="0" hangingPunct="1">
-      <a:defRPr sz="1296" kern="1200">
+    <a:lvl3pPr marL="916113" algn="l" defTabSz="916113" rtl="0" eaLnBrk="1" latinLnBrk="0" hangingPunct="1">
+      <a:defRPr sz="1202" kern="1200">
         <a:solidFill>
           <a:schemeClr val="tx1"/>
         </a:solidFill>
@@ -411,8 +411,8 @@
         <a:cs typeface="+mn-cs"/>
       </a:defRPr>
     </a:lvl3pPr>
-    <a:lvl4pPr marL="1481424" algn="l" defTabSz="987616" rtl="0" eaLnBrk="1" latinLnBrk="0" hangingPunct="1">
-      <a:defRPr sz="1296" kern="1200">
+    <a:lvl4pPr marL="1374169" algn="l" defTabSz="916113" rtl="0" eaLnBrk="1" latinLnBrk="0" hangingPunct="1">
+      <a:defRPr sz="1202" kern="1200">
         <a:solidFill>
           <a:schemeClr val="tx1"/>
         </a:solidFill>
@@ -421,8 +421,8 @@
         <a:cs typeface="+mn-cs"/>
       </a:defRPr>
     </a:lvl4pPr>
-    <a:lvl5pPr marL="1975231" algn="l" defTabSz="987616" rtl="0" eaLnBrk="1" latinLnBrk="0" hangingPunct="1">
-      <a:defRPr sz="1296" kern="1200">
+    <a:lvl5pPr marL="1832224" algn="l" defTabSz="916113" rtl="0" eaLnBrk="1" latinLnBrk="0" hangingPunct="1">
+      <a:defRPr sz="1202" kern="1200">
         <a:solidFill>
           <a:schemeClr val="tx1"/>
         </a:solidFill>
@@ -431,8 +431,8 @@
         <a:cs typeface="+mn-cs"/>
       </a:defRPr>
     </a:lvl5pPr>
-    <a:lvl6pPr marL="2469040" algn="l" defTabSz="987616" rtl="0" eaLnBrk="1" latinLnBrk="0" hangingPunct="1">
-      <a:defRPr sz="1296" kern="1200">
+    <a:lvl6pPr marL="2290282" algn="l" defTabSz="916113" rtl="0" eaLnBrk="1" latinLnBrk="0" hangingPunct="1">
+      <a:defRPr sz="1202" kern="1200">
         <a:solidFill>
           <a:schemeClr val="tx1"/>
         </a:solidFill>
@@ -441,8 +441,8 @@
         <a:cs typeface="+mn-cs"/>
       </a:defRPr>
     </a:lvl6pPr>
-    <a:lvl7pPr marL="2962847" algn="l" defTabSz="987616" rtl="0" eaLnBrk="1" latinLnBrk="0" hangingPunct="1">
-      <a:defRPr sz="1296" kern="1200">
+    <a:lvl7pPr marL="2748337" algn="l" defTabSz="916113" rtl="0" eaLnBrk="1" latinLnBrk="0" hangingPunct="1">
+      <a:defRPr sz="1202" kern="1200">
         <a:solidFill>
           <a:schemeClr val="tx1"/>
         </a:solidFill>
@@ -451,8 +451,8 @@
         <a:cs typeface="+mn-cs"/>
       </a:defRPr>
     </a:lvl7pPr>
-    <a:lvl8pPr marL="3456656" algn="l" defTabSz="987616" rtl="0" eaLnBrk="1" latinLnBrk="0" hangingPunct="1">
-      <a:defRPr sz="1296" kern="1200">
+    <a:lvl8pPr marL="3206394" algn="l" defTabSz="916113" rtl="0" eaLnBrk="1" latinLnBrk="0" hangingPunct="1">
+      <a:defRPr sz="1202" kern="1200">
         <a:solidFill>
           <a:schemeClr val="tx1"/>
         </a:solidFill>
@@ -461,8 +461,8 @@
         <a:cs typeface="+mn-cs"/>
       </a:defRPr>
     </a:lvl8pPr>
-    <a:lvl9pPr marL="3950463" algn="l" defTabSz="987616" rtl="0" eaLnBrk="1" latinLnBrk="0" hangingPunct="1">
-      <a:defRPr sz="1296" kern="1200">
+    <a:lvl9pPr marL="3664449" algn="l" defTabSz="916113" rtl="0" eaLnBrk="1" latinLnBrk="0" hangingPunct="1">
+      <a:defRPr sz="1202" kern="1200">
         <a:solidFill>
           <a:schemeClr val="tx1"/>
         </a:solidFill>
@@ -504,8 +504,8 @@
         </p:nvSpPr>
         <p:spPr>
           <a:xfrm>
-            <a:off x="1063625" y="1143000"/>
-            <a:ext cx="4730750" cy="3086100"/>
+            <a:off x="533400" y="1143000"/>
+            <a:ext cx="5791200" cy="3086100"/>
           </a:xfrm>
         </p:spPr>
       </p:sp>
@@ -593,8 +593,8 @@
         </p:nvSpPr>
         <p:spPr>
           <a:xfrm>
-            <a:off x="1051521" y="1836558"/>
-            <a:ext cx="11917231" cy="1267250"/>
+            <a:off x="1040210" y="1484764"/>
+            <a:ext cx="11789040" cy="1024508"/>
           </a:xfrm>
         </p:spPr>
         <p:txBody>
@@ -620,8 +620,8 @@
         </p:nvSpPr>
         <p:spPr>
           <a:xfrm>
-            <a:off x="2103041" y="3350143"/>
-            <a:ext cx="9814190" cy="1510847"/>
+            <a:off x="2080420" y="2708421"/>
+            <a:ext cx="9708621" cy="1221443"/>
           </a:xfrm>
         </p:spPr>
         <p:txBody>
@@ -1001,8 +1001,8 @@
         </p:nvSpPr>
         <p:spPr>
           <a:xfrm>
-            <a:off x="10164698" y="236757"/>
-            <a:ext cx="3154561" cy="5044367"/>
+            <a:off x="10055359" y="191407"/>
+            <a:ext cx="3120628" cy="4078114"/>
           </a:xfrm>
         </p:spPr>
         <p:txBody>
@@ -1028,8 +1028,8 @@
         </p:nvSpPr>
         <p:spPr>
           <a:xfrm>
-            <a:off x="701014" y="236757"/>
-            <a:ext cx="9230012" cy="5044367"/>
+            <a:off x="693474" y="191407"/>
+            <a:ext cx="9130727" cy="4078114"/>
           </a:xfrm>
         </p:spPr>
         <p:txBody>
@@ -1347,8 +1347,8 @@
         </p:nvSpPr>
         <p:spPr>
           <a:xfrm>
-            <a:off x="1107505" y="3799015"/>
-            <a:ext cx="11917231" cy="1174191"/>
+            <a:off x="1095592" y="3071311"/>
+            <a:ext cx="11789040" cy="949274"/>
           </a:xfrm>
         </p:spPr>
         <p:txBody>
@@ -1378,8 +1378,8 @@
         </p:nvSpPr>
         <p:spPr>
           <a:xfrm>
-            <a:off x="1107505" y="2505762"/>
-            <a:ext cx="11917231" cy="1293252"/>
+            <a:off x="1095592" y="2025782"/>
+            <a:ext cx="11789040" cy="1045529"/>
           </a:xfrm>
         </p:spPr>
         <p:txBody>
@@ -1614,8 +1614,8 @@
         </p:nvSpPr>
         <p:spPr>
           <a:xfrm>
-            <a:off x="701014" y="1379470"/>
-            <a:ext cx="6192287" cy="3901653"/>
+            <a:off x="693474" y="1115232"/>
+            <a:ext cx="6125678" cy="3154288"/>
           </a:xfrm>
         </p:spPr>
         <p:txBody>
@@ -1698,8 +1698,8 @@
         </p:nvSpPr>
         <p:spPr>
           <a:xfrm>
-            <a:off x="7126972" y="1379470"/>
-            <a:ext cx="6192287" cy="3901653"/>
+            <a:off x="7050309" y="1115232"/>
+            <a:ext cx="6125678" cy="3154288"/>
           </a:xfrm>
         </p:spPr>
         <p:txBody>
@@ -1903,8 +1903,8 @@
         </p:nvSpPr>
         <p:spPr>
           <a:xfrm>
-            <a:off x="701014" y="1323360"/>
-            <a:ext cx="6194723" cy="551513"/>
+            <a:off x="693474" y="1069869"/>
+            <a:ext cx="6128088" cy="445870"/>
           </a:xfrm>
         </p:spPr>
         <p:txBody>
@@ -1968,8 +1968,8 @@
         </p:nvSpPr>
         <p:spPr>
           <a:xfrm>
-            <a:off x="701014" y="1874877"/>
-            <a:ext cx="6194723" cy="3406249"/>
+            <a:off x="693474" y="1515744"/>
+            <a:ext cx="6128088" cy="2753779"/>
           </a:xfrm>
         </p:spPr>
         <p:txBody>
@@ -2052,8 +2052,8 @@
         </p:nvSpPr>
         <p:spPr>
           <a:xfrm>
-            <a:off x="7122103" y="1323360"/>
-            <a:ext cx="6197156" cy="551513"/>
+            <a:off x="7045492" y="1069869"/>
+            <a:ext cx="6130494" cy="445870"/>
           </a:xfrm>
         </p:spPr>
         <p:txBody>
@@ -2117,8 +2117,8 @@
         </p:nvSpPr>
         <p:spPr>
           <a:xfrm>
-            <a:off x="7122103" y="1874877"/>
-            <a:ext cx="6197156" cy="3406249"/>
+            <a:off x="7045492" y="1515744"/>
+            <a:ext cx="6130494" cy="2753779"/>
           </a:xfrm>
         </p:spPr>
         <p:txBody>
@@ -2508,8 +2508,8 @@
         </p:nvSpPr>
         <p:spPr>
           <a:xfrm>
-            <a:off x="701015" y="235387"/>
-            <a:ext cx="4612573" cy="1001757"/>
+            <a:off x="693475" y="190298"/>
+            <a:ext cx="4562956" cy="809870"/>
           </a:xfrm>
         </p:spPr>
         <p:txBody>
@@ -2539,8 +2539,8 @@
         </p:nvSpPr>
         <p:spPr>
           <a:xfrm>
-            <a:off x="5481539" y="235386"/>
-            <a:ext cx="7837721" cy="5045736"/>
+            <a:off x="5422576" y="190299"/>
+            <a:ext cx="7753412" cy="4079220"/>
           </a:xfrm>
         </p:spPr>
         <p:txBody>
@@ -2623,8 +2623,8 @@
         </p:nvSpPr>
         <p:spPr>
           <a:xfrm>
-            <a:off x="701015" y="1237144"/>
-            <a:ext cx="4612573" cy="4043979"/>
+            <a:off x="693475" y="1000168"/>
+            <a:ext cx="4562956" cy="3269351"/>
           </a:xfrm>
         </p:spPr>
         <p:txBody>
@@ -2783,8 +2783,8 @@
         </p:nvSpPr>
         <p:spPr>
           <a:xfrm>
-            <a:off x="2748073" y="4138407"/>
-            <a:ext cx="8412163" cy="488562"/>
+            <a:off x="2718515" y="3345691"/>
+            <a:ext cx="8321675" cy="394978"/>
           </a:xfrm>
         </p:spPr>
         <p:txBody>
@@ -2814,8 +2814,8 @@
         </p:nvSpPr>
         <p:spPr>
           <a:xfrm>
-            <a:off x="2748073" y="528249"/>
-            <a:ext cx="8412163" cy="3547206"/>
+            <a:off x="2718515" y="427063"/>
+            <a:ext cx="8321675" cy="2867735"/>
           </a:xfrm>
         </p:spPr>
         <p:txBody>
@@ -2875,8 +2875,8 @@
         </p:nvSpPr>
         <p:spPr>
           <a:xfrm>
-            <a:off x="2748073" y="4626973"/>
-            <a:ext cx="8412163" cy="693839"/>
+            <a:off x="2718515" y="3740673"/>
+            <a:ext cx="8321675" cy="560933"/>
           </a:xfrm>
         </p:spPr>
         <p:txBody>
@@ -3040,8 +3040,8 @@
         </p:nvSpPr>
         <p:spPr>
           <a:xfrm>
-            <a:off x="701014" y="236755"/>
-            <a:ext cx="12618245" cy="985335"/>
+            <a:off x="693474" y="191405"/>
+            <a:ext cx="12482513" cy="796594"/>
           </a:xfrm>
           <a:prstGeom prst="rect">
             <a:avLst/>
@@ -3072,8 +3072,8 @@
         </p:nvSpPr>
         <p:spPr>
           <a:xfrm>
-            <a:off x="701014" y="1379470"/>
-            <a:ext cx="12618245" cy="3901653"/>
+            <a:off x="693474" y="1115232"/>
+            <a:ext cx="12482513" cy="3154288"/>
           </a:xfrm>
           <a:prstGeom prst="rect">
             <a:avLst/>
@@ -3133,8 +3133,8 @@
         </p:nvSpPr>
         <p:spPr>
           <a:xfrm>
-            <a:off x="701013" y="5479557"/>
-            <a:ext cx="3271397" cy="314760"/>
+            <a:off x="693475" y="4429944"/>
+            <a:ext cx="3236207" cy="254467"/>
           </a:xfrm>
           <a:prstGeom prst="rect">
             <a:avLst/>
@@ -3174,8 +3174,8 @@
         </p:nvSpPr>
         <p:spPr>
           <a:xfrm>
-            <a:off x="4790260" y="5479557"/>
-            <a:ext cx="4439753" cy="314760"/>
+            <a:off x="4738735" y="4429944"/>
+            <a:ext cx="4391995" cy="254467"/>
           </a:xfrm>
           <a:prstGeom prst="rect">
             <a:avLst/>
@@ -3211,8 +3211,8 @@
         </p:nvSpPr>
         <p:spPr>
           <a:xfrm>
-            <a:off x="10047862" y="5479557"/>
-            <a:ext cx="3271397" cy="314760"/>
+            <a:off x="9939782" y="4429944"/>
+            <a:ext cx="3236207" cy="254467"/>
           </a:xfrm>
           <a:prstGeom prst="rect">
             <a:avLst/>
@@ -3541,10 +3541,10 @@
       </p:grpSpPr>
       <p:sp>
         <p:nvSpPr>
-          <p:cNvPr id="360" name="Rectangle 359">
+          <p:cNvPr id="738" name="Rectangle 737">
             <a:extLst>
               <a:ext uri="{FF2B5EF4-FFF2-40B4-BE49-F238E27FC236}">
-                <a16:creationId xmlns:a16="http://schemas.microsoft.com/office/drawing/2014/main" id="{13C716C9-DA29-5D2C-CE5B-53A6CA84A83C}"/>
+                <a16:creationId xmlns:a16="http://schemas.microsoft.com/office/drawing/2014/main" id="{5E74D7D2-0E70-D5E0-134F-0355E74E9418}"/>
               </a:ext>
             </a:extLst>
           </p:cNvPr>
@@ -3553,18 +3553,118 @@
         </p:nvSpPr>
         <p:spPr>
           <a:xfrm>
-            <a:off x="57990" y="42377"/>
-            <a:ext cx="4809328" cy="5108129"/>
+            <a:off x="33336" y="37378"/>
+            <a:ext cx="4782312" cy="2071111"/>
           </a:xfrm>
           <a:prstGeom prst="rect">
             <a:avLst/>
           </a:prstGeom>
           <a:solidFill>
-            <a:schemeClr val="accent2">
+            <a:srgbClr val="A1DBC9"/>
+          </a:solidFill>
+          <a:ln>
+            <a:noFill/>
+          </a:ln>
+          <a:effectLst/>
+        </p:spPr>
+        <p:style>
+          <a:lnRef idx="1">
+            <a:schemeClr val="accent1"/>
+          </a:lnRef>
+          <a:fillRef idx="3">
+            <a:schemeClr val="accent1"/>
+          </a:fillRef>
+          <a:effectRef idx="2">
+            <a:schemeClr val="accent1"/>
+          </a:effectRef>
+          <a:fontRef idx="minor">
+            <a:schemeClr val="lt1"/>
+          </a:fontRef>
+        </p:style>
+        <p:txBody>
+          <a:bodyPr rtlCol="0" anchor="ctr"/>
+          <a:lstStyle/>
+          <a:p>
+            <a:pPr algn="ctr"/>
+            <a:endParaRPr lang="en-US"/>
+          </a:p>
+        </p:txBody>
+      </p:sp>
+      <p:sp>
+        <p:nvSpPr>
+          <p:cNvPr id="739" name="Rectangle 738">
+            <a:extLst>
+              <a:ext uri="{FF2B5EF4-FFF2-40B4-BE49-F238E27FC236}">
+                <a16:creationId xmlns:a16="http://schemas.microsoft.com/office/drawing/2014/main" id="{EDAC19B1-BA9B-9319-E642-3D2FD6B28348}"/>
+              </a:ext>
+            </a:extLst>
+          </p:cNvPr>
+          <p:cNvSpPr/>
+          <p:nvPr/>
+        </p:nvSpPr>
+        <p:spPr>
+          <a:xfrm>
+            <a:off x="33336" y="2102697"/>
+            <a:ext cx="4782312" cy="2302922"/>
+          </a:xfrm>
+          <a:prstGeom prst="rect">
+            <a:avLst/>
+          </a:prstGeom>
+          <a:solidFill>
+            <a:schemeClr val="accent4">
               <a:lumMod val="20000"/>
               <a:lumOff val="80000"/>
             </a:schemeClr>
           </a:solidFill>
+          <a:ln>
+            <a:noFill/>
+          </a:ln>
+          <a:effectLst/>
+        </p:spPr>
+        <p:style>
+          <a:lnRef idx="1">
+            <a:schemeClr val="accent1"/>
+          </a:lnRef>
+          <a:fillRef idx="3">
+            <a:schemeClr val="accent1"/>
+          </a:fillRef>
+          <a:effectRef idx="2">
+            <a:schemeClr val="accent1"/>
+          </a:effectRef>
+          <a:fontRef idx="minor">
+            <a:schemeClr val="lt1"/>
+          </a:fontRef>
+        </p:style>
+        <p:txBody>
+          <a:bodyPr rtlCol="0" anchor="ctr"/>
+          <a:lstStyle/>
+          <a:p>
+            <a:pPr algn="ctr"/>
+            <a:endParaRPr lang="en-US"/>
+          </a:p>
+        </p:txBody>
+      </p:sp>
+      <p:sp>
+        <p:nvSpPr>
+          <p:cNvPr id="740" name="Rectangle 739">
+            <a:extLst>
+              <a:ext uri="{FF2B5EF4-FFF2-40B4-BE49-F238E27FC236}">
+                <a16:creationId xmlns:a16="http://schemas.microsoft.com/office/drawing/2014/main" id="{1D242F72-1FDF-99CE-3154-D058831FCEB5}"/>
+              </a:ext>
+            </a:extLst>
+          </p:cNvPr>
+          <p:cNvSpPr/>
+          <p:nvPr/>
+        </p:nvSpPr>
+        <p:spPr>
+          <a:xfrm>
+            <a:off x="16483" y="26733"/>
+            <a:ext cx="4809328" cy="4378892"/>
+          </a:xfrm>
+          <a:prstGeom prst="rect">
+            <a:avLst/>
+          </a:prstGeom>
+          <a:noFill/>
           <a:ln w="22860">
             <a:solidFill>
               <a:srgbClr val="505050"/>
@@ -3591,16 +3691,16 @@
           <a:lstStyle/>
           <a:p>
             <a:pPr algn="ctr"/>
-            <a:endParaRPr/>
-          </a:p>
-        </p:txBody>
-      </p:sp>
-      <p:sp>
-        <p:nvSpPr>
-          <p:cNvPr id="361" name="TextBox 360">
+            <a:endParaRPr dirty="0"/>
+          </a:p>
+        </p:txBody>
+      </p:sp>
+      <p:sp>
+        <p:nvSpPr>
+          <p:cNvPr id="741" name="TextBox 740">
             <a:extLst>
               <a:ext uri="{FF2B5EF4-FFF2-40B4-BE49-F238E27FC236}">
-                <a16:creationId xmlns:a16="http://schemas.microsoft.com/office/drawing/2014/main" id="{C79D7B15-F5B4-A261-C735-0AE45AB182E9}"/>
+                <a16:creationId xmlns:a16="http://schemas.microsoft.com/office/drawing/2014/main" id="{2400F4A5-9ADD-92C9-E8D3-9806C03A1395}"/>
               </a:ext>
             </a:extLst>
           </p:cNvPr>
@@ -3609,7 +3709,7 @@
         </p:nvSpPr>
         <p:spPr>
           <a:xfrm>
-            <a:off x="-33989" y="71481"/>
+            <a:off x="-75496" y="-8460"/>
             <a:ext cx="5204666" cy="430887"/>
           </a:xfrm>
           <a:prstGeom prst="rect">
@@ -3639,10 +3739,10 @@
       </p:sp>
       <p:sp>
         <p:nvSpPr>
-          <p:cNvPr id="362" name="Rectangle 361">
+          <p:cNvPr id="742" name="Rectangle 741">
             <a:extLst>
               <a:ext uri="{FF2B5EF4-FFF2-40B4-BE49-F238E27FC236}">
-                <a16:creationId xmlns:a16="http://schemas.microsoft.com/office/drawing/2014/main" id="{91711A59-54CA-7B7F-5B9C-F220E01F0C1B}"/>
+                <a16:creationId xmlns:a16="http://schemas.microsoft.com/office/drawing/2014/main" id="{0EDB4402-FD22-0B2E-7356-30361F299D2C}"/>
               </a:ext>
             </a:extLst>
           </p:cNvPr>
@@ -3651,14 +3751,14 @@
         </p:nvSpPr>
         <p:spPr>
           <a:xfrm>
-            <a:off x="286590" y="487465"/>
-            <a:ext cx="2011680" cy="894382"/>
+            <a:off x="245083" y="386092"/>
+            <a:ext cx="1746504" cy="625651"/>
           </a:xfrm>
           <a:prstGeom prst="rect">
             <a:avLst/>
           </a:prstGeom>
           <a:solidFill>
-            <a:srgbClr val="B4DCFF"/>
+            <a:srgbClr val="DCF2E7"/>
           </a:solidFill>
           <a:ln w="22860">
             <a:solidFill>
@@ -3689,28 +3789,20 @@
               <a:defRPr sz="1900" b="1"/>
             </a:pPr>
             <a:r>
-              <a:rPr lang="en-US" i="1" dirty="0">
+              <a:rPr dirty="0" err="1">
                 <a:solidFill>
                   <a:schemeClr val="tx1"/>
                 </a:solidFill>
               </a:rPr>
-              <a:t>Schedule</a:t>
-            </a:r>
-            <a:r>
-              <a:rPr lang="en-US" dirty="0">
+              <a:t>Task</a:t>
+            </a:r>
+            <a:r>
+              <a:rPr baseline="-25000" dirty="0" err="1">
                 <a:solidFill>
                   <a:schemeClr val="tx1"/>
                 </a:solidFill>
               </a:rPr>
-              <a:t>: </a:t>
-            </a:r>
-            <a:r>
-              <a:rPr dirty="0">
-                <a:solidFill>
-                  <a:schemeClr val="tx1"/>
-                </a:solidFill>
-              </a:rPr>
-              <a:t>Task A</a:t>
+              <a:t>A</a:t>
             </a:r>
             <a:br>
               <a:rPr dirty="0">
@@ -3740,10 +3832,10 @@
       </p:sp>
       <p:sp>
         <p:nvSpPr>
-          <p:cNvPr id="363" name="TextBox 362">
+          <p:cNvPr id="743" name="TextBox 742">
             <a:extLst>
               <a:ext uri="{FF2B5EF4-FFF2-40B4-BE49-F238E27FC236}">
-                <a16:creationId xmlns:a16="http://schemas.microsoft.com/office/drawing/2014/main" id="{AF6E41D8-FD02-C7E8-D401-3F923E542F30}"/>
+                <a16:creationId xmlns:a16="http://schemas.microsoft.com/office/drawing/2014/main" id="{EF3F09F6-B833-AFE2-C8B0-F8F662360D6E}"/>
               </a:ext>
             </a:extLst>
           </p:cNvPr>
@@ -3752,7 +3844,7 @@
         </p:nvSpPr>
         <p:spPr>
           <a:xfrm>
-            <a:off x="57990" y="3801289"/>
+            <a:off x="16483" y="3671340"/>
             <a:ext cx="933269" cy="261610"/>
           </a:xfrm>
           <a:prstGeom prst="rect">
@@ -3774,19 +3866,19 @@
               </a:defRPr>
             </a:pPr>
             <a:r>
-              <a:rPr lang="en-US" dirty="0"/>
+              <a:rPr lang="en-US" i="1" dirty="0"/>
               <a:t>Unprivileged</a:t>
             </a:r>
-            <a:endParaRPr dirty="0"/>
-          </a:p>
-        </p:txBody>
-      </p:sp>
-      <p:sp>
-        <p:nvSpPr>
-          <p:cNvPr id="364" name="Rectangle 363">
+            <a:endParaRPr i="1" dirty="0"/>
+          </a:p>
+        </p:txBody>
+      </p:sp>
+      <p:sp>
+        <p:nvSpPr>
+          <p:cNvPr id="744" name="Rectangle 743">
             <a:extLst>
               <a:ext uri="{FF2B5EF4-FFF2-40B4-BE49-F238E27FC236}">
-                <a16:creationId xmlns:a16="http://schemas.microsoft.com/office/drawing/2014/main" id="{0A6FF623-D91B-D363-9135-FA4026EC8009}"/>
+                <a16:creationId xmlns:a16="http://schemas.microsoft.com/office/drawing/2014/main" id="{8BD30FCB-B9E4-273A-7CCA-6162B8D8DCFA}"/>
               </a:ext>
             </a:extLst>
           </p:cNvPr>
@@ -3795,8 +3887,8 @@
         </p:nvSpPr>
         <p:spPr>
           <a:xfrm>
-            <a:off x="2586306" y="1648289"/>
-            <a:ext cx="2011680" cy="894382"/>
+            <a:off x="1579918" y="1362609"/>
+            <a:ext cx="1746504" cy="621792"/>
           </a:xfrm>
           <a:prstGeom prst="rect">
             <a:avLst/>
@@ -3869,10 +3961,10 @@
       </p:sp>
       <p:sp>
         <p:nvSpPr>
-          <p:cNvPr id="365" name="Rectangle 364">
+          <p:cNvPr id="745" name="Rectangle 744">
             <a:extLst>
               <a:ext uri="{FF2B5EF4-FFF2-40B4-BE49-F238E27FC236}">
-                <a16:creationId xmlns:a16="http://schemas.microsoft.com/office/drawing/2014/main" id="{F455FF77-E692-FC0C-EDFD-210AFFC619E5}"/>
+                <a16:creationId xmlns:a16="http://schemas.microsoft.com/office/drawing/2014/main" id="{B2718570-5D2C-49F1-C163-AE8D86480894}"/>
               </a:ext>
             </a:extLst>
           </p:cNvPr>
@@ -3881,109 +3973,8 @@
         </p:nvSpPr>
         <p:spPr>
           <a:xfrm>
-            <a:off x="286590" y="1648289"/>
-            <a:ext cx="2011680" cy="894382"/>
-          </a:xfrm>
-          <a:prstGeom prst="rect">
-            <a:avLst/>
-          </a:prstGeom>
-          <a:solidFill>
-            <a:srgbClr val="B4DCFF"/>
-          </a:solidFill>
-          <a:ln w="22860">
-            <a:solidFill>
-              <a:srgbClr val="373737"/>
-            </a:solidFill>
-          </a:ln>
-          <a:effectLst/>
-        </p:spPr>
-        <p:style>
-          <a:lnRef idx="1">
-            <a:schemeClr val="accent1"/>
-          </a:lnRef>
-          <a:fillRef idx="3">
-            <a:schemeClr val="accent1"/>
-          </a:fillRef>
-          <a:effectRef idx="2">
-            <a:schemeClr val="accent1"/>
-          </a:effectRef>
-          <a:fontRef idx="minor">
-            <a:schemeClr val="lt1"/>
-          </a:fontRef>
-        </p:style>
-        <p:txBody>
-          <a:bodyPr wrap="square" lIns="101600" tIns="101600" rIns="101600" bIns="101600" rtlCol="0" anchor="ctr"/>
-          <a:lstStyle/>
-          <a:p>
-            <a:pPr algn="ctr">
-              <a:defRPr sz="1900" b="1"/>
-            </a:pPr>
-            <a:r>
-              <a:rPr lang="en-US" i="1" dirty="0">
-                <a:solidFill>
-                  <a:schemeClr val="tx1"/>
-                </a:solidFill>
-              </a:rPr>
-              <a:t>Resume</a:t>
-            </a:r>
-            <a:r>
-              <a:rPr lang="en-US" dirty="0">
-                <a:solidFill>
-                  <a:schemeClr val="tx1"/>
-                </a:solidFill>
-              </a:rPr>
-              <a:t>: </a:t>
-            </a:r>
-            <a:r>
-              <a:rPr dirty="0">
-                <a:solidFill>
-                  <a:schemeClr val="tx1"/>
-                </a:solidFill>
-              </a:rPr>
-              <a:t>Task A</a:t>
-            </a:r>
-            <a:br>
-              <a:rPr dirty="0">
-                <a:solidFill>
-                  <a:schemeClr val="tx1"/>
-                </a:solidFill>
-              </a:rPr>
-            </a:br>
-            <a:r>
-              <a:rPr dirty="0">
-                <a:solidFill>
-                  <a:schemeClr val="tx1"/>
-                </a:solidFill>
-              </a:rPr>
-              <a:t>PA key K</a:t>
-            </a:r>
-            <a:r>
-              <a:rPr baseline="-25000" dirty="0">
-                <a:solidFill>
-                  <a:schemeClr val="tx1"/>
-                </a:solidFill>
-              </a:rPr>
-              <a:t>A</a:t>
-            </a:r>
-          </a:p>
-        </p:txBody>
-      </p:sp>
-      <p:sp>
-        <p:nvSpPr>
-          <p:cNvPr id="366" name="Rectangle 365">
-            <a:extLst>
-              <a:ext uri="{FF2B5EF4-FFF2-40B4-BE49-F238E27FC236}">
-                <a16:creationId xmlns:a16="http://schemas.microsoft.com/office/drawing/2014/main" id="{6FDE7D49-57AE-E00E-6034-148C4E3FED7B}"/>
-              </a:ext>
-            </a:extLst>
-          </p:cNvPr>
-          <p:cNvSpPr/>
-          <p:nvPr/>
-        </p:nvSpPr>
-        <p:spPr>
-          <a:xfrm>
-            <a:off x="286590" y="2809113"/>
-            <a:ext cx="2011680" cy="894382"/>
+            <a:off x="1579918" y="3192094"/>
+            <a:ext cx="1746504" cy="621792"/>
           </a:xfrm>
           <a:prstGeom prst="rect">
             <a:avLst/>
@@ -4023,31 +4014,15 @@
               <a:defRPr sz="1900" b="1"/>
             </a:pPr>
             <a:r>
-              <a:rPr lang="en-US" i="1" dirty="0">
-                <a:solidFill>
-                  <a:schemeClr val="tx1"/>
-                </a:solidFill>
-              </a:rPr>
-              <a:t>Schedule</a:t>
-            </a:r>
-            <a:r>
-              <a:rPr lang="en-US" dirty="0">
-                <a:solidFill>
-                  <a:schemeClr val="tx1"/>
-                </a:solidFill>
-              </a:rPr>
-              <a:t>: </a:t>
-            </a:r>
-            <a:r>
               <a:rPr dirty="0">
                 <a:solidFill>
                   <a:schemeClr val="tx1"/>
                 </a:solidFill>
               </a:rPr>
-              <a:t>Task </a:t>
-            </a:r>
-            <a:r>
-              <a:rPr lang="en-US" dirty="0">
+              <a:t>Task</a:t>
+            </a:r>
+            <a:r>
+              <a:rPr lang="en-US" baseline="-25000" dirty="0">
                 <a:solidFill>
                   <a:schemeClr val="tx1"/>
                 </a:solidFill>
@@ -4087,10 +4062,10 @@
       </p:sp>
       <p:cxnSp>
         <p:nvCxnSpPr>
-          <p:cNvPr id="367" name="Straight Connector 366">
+          <p:cNvPr id="746" name="Straight Connector 745">
             <a:extLst>
               <a:ext uri="{FF2B5EF4-FFF2-40B4-BE49-F238E27FC236}">
-                <a16:creationId xmlns:a16="http://schemas.microsoft.com/office/drawing/2014/main" id="{33F18850-48A4-A6B7-26D7-97C14E6027AD}"/>
+                <a16:creationId xmlns:a16="http://schemas.microsoft.com/office/drawing/2014/main" id="{3E03F6D1-836E-89A1-06A1-426E301FB314}"/>
               </a:ext>
             </a:extLst>
           </p:cNvPr>
@@ -4101,7 +4076,7 @@
         </p:nvCxnSpPr>
         <p:spPr>
           <a:xfrm>
-            <a:off x="57990" y="4065737"/>
+            <a:off x="9339" y="3935788"/>
             <a:ext cx="4809328" cy="0"/>
           </a:xfrm>
           <a:prstGeom prst="line">
@@ -4109,7 +4084,10 @@
           </a:prstGeom>
           <a:ln>
             <a:solidFill>
-              <a:schemeClr val="tx1"/>
+              <a:schemeClr val="tx1">
+                <a:lumMod val="50000"/>
+                <a:lumOff val="50000"/>
+              </a:schemeClr>
             </a:solidFill>
             <a:prstDash val="dash"/>
           </a:ln>
@@ -4132,10 +4110,10 @@
       </p:cxnSp>
       <p:sp>
         <p:nvSpPr>
-          <p:cNvPr id="368" name="Rectangle 367">
+          <p:cNvPr id="747" name="Rectangle 746">
             <a:extLst>
               <a:ext uri="{FF2B5EF4-FFF2-40B4-BE49-F238E27FC236}">
-                <a16:creationId xmlns:a16="http://schemas.microsoft.com/office/drawing/2014/main" id="{63C54FA1-D07B-1F97-83BF-D7EFE3144EE7}"/>
+                <a16:creationId xmlns:a16="http://schemas.microsoft.com/office/drawing/2014/main" id="{C17619E3-FA0B-756A-207F-B68D6E70B7D7}"/>
               </a:ext>
             </a:extLst>
           </p:cNvPr>
@@ -4144,8 +4122,8 @@
         </p:nvSpPr>
         <p:spPr>
           <a:xfrm>
-            <a:off x="286590" y="4283186"/>
-            <a:ext cx="4311396" cy="755863"/>
+            <a:off x="1011640" y="4046078"/>
+            <a:ext cx="2883060" cy="304419"/>
           </a:xfrm>
           <a:prstGeom prst="rect">
             <a:avLst/>
@@ -4202,10 +4180,10 @@
       </p:sp>
       <p:sp>
         <p:nvSpPr>
-          <p:cNvPr id="369" name="TextBox 368">
+          <p:cNvPr id="748" name="TextBox 747">
             <a:extLst>
               <a:ext uri="{FF2B5EF4-FFF2-40B4-BE49-F238E27FC236}">
-                <a16:creationId xmlns:a16="http://schemas.microsoft.com/office/drawing/2014/main" id="{EE41DB5F-18C0-CB4A-5E4B-CC57E7B4FD7D}"/>
+                <a16:creationId xmlns:a16="http://schemas.microsoft.com/office/drawing/2014/main" id="{0CE035DF-9667-6CFA-20D5-E5BA8026145A}"/>
               </a:ext>
             </a:extLst>
           </p:cNvPr>
@@ -4214,8 +4192,8 @@
         </p:nvSpPr>
         <p:spPr>
           <a:xfrm>
-            <a:off x="2691167" y="509778"/>
-            <a:ext cx="2486722" cy="477054"/>
+            <a:off x="1804958" y="935605"/>
+            <a:ext cx="1526665" cy="338554"/>
           </a:xfrm>
           <a:prstGeom prst="rect">
             <a:avLst/>
@@ -4230,7 +4208,7 @@
           <a:p>
             <a:pPr algn="ctr"/>
             <a:r>
-              <a:rPr lang="en-US" dirty="0"/>
+              <a:rPr lang="en-US" sz="1600" dirty="0"/>
               <a:t>HW/SW IRQs</a:t>
             </a:r>
           </a:p>
@@ -4238,10 +4216,10 @@
       </p:sp>
       <p:sp>
         <p:nvSpPr>
-          <p:cNvPr id="371" name="TextBox 370">
+          <p:cNvPr id="749" name="TextBox 748">
             <a:extLst>
               <a:ext uri="{FF2B5EF4-FFF2-40B4-BE49-F238E27FC236}">
-                <a16:creationId xmlns:a16="http://schemas.microsoft.com/office/drawing/2014/main" id="{8F8F0DCD-6F7F-D2CE-9F4F-6FCFD1A5BE46}"/>
+                <a16:creationId xmlns:a16="http://schemas.microsoft.com/office/drawing/2014/main" id="{653461D0-DCF4-F418-C75B-9F85AADDC8E8}"/>
               </a:ext>
             </a:extLst>
           </p:cNvPr>
@@ -4250,46 +4228,7 @@
         </p:nvSpPr>
         <p:spPr>
           <a:xfrm>
-            <a:off x="2298270" y="2644308"/>
-            <a:ext cx="2486722" cy="384721"/>
-          </a:xfrm>
-          <a:prstGeom prst="rect">
-            <a:avLst/>
-          </a:prstGeom>
-          <a:noFill/>
-        </p:spPr>
-        <p:txBody>
-          <a:bodyPr wrap="square" rtlCol="0">
-            <a:spAutoFit/>
-          </a:bodyPr>
-          <a:lstStyle/>
-          <a:p>
-            <a:pPr algn="ctr">
-              <a:defRPr sz="1900" b="1"/>
-            </a:pPr>
-            <a:r>
-              <a:rPr lang="en-US" dirty="0"/>
-              <a:t>Scheduler IRQ</a:t>
-            </a:r>
-            <a:endParaRPr lang="en-US" baseline="-25000" dirty="0"/>
-          </a:p>
-        </p:txBody>
-      </p:sp>
-      <p:sp>
-        <p:nvSpPr>
-          <p:cNvPr id="372" name="TextBox 371">
-            <a:extLst>
-              <a:ext uri="{FF2B5EF4-FFF2-40B4-BE49-F238E27FC236}">
-                <a16:creationId xmlns:a16="http://schemas.microsoft.com/office/drawing/2014/main" id="{041E5155-B4C4-E2D5-5CF9-6559A078BFF1}"/>
-              </a:ext>
-            </a:extLst>
-          </p:cNvPr>
-          <p:cNvSpPr txBox="1"/>
-          <p:nvPr/>
-        </p:nvSpPr>
-        <p:spPr>
-          <a:xfrm>
-            <a:off x="57990" y="4029888"/>
+            <a:off x="16483" y="3885651"/>
             <a:ext cx="766557" cy="261610"/>
           </a:xfrm>
           <a:prstGeom prst="rect">
@@ -4311,67 +4250,19 @@
               </a:defRPr>
             </a:pPr>
             <a:r>
-              <a:rPr lang="en-US" dirty="0"/>
+              <a:rPr lang="en-US" i="1" dirty="0"/>
               <a:t>Privileged</a:t>
             </a:r>
-            <a:endParaRPr dirty="0"/>
-          </a:p>
-        </p:txBody>
-      </p:sp>
-      <p:cxnSp>
-        <p:nvCxnSpPr>
-          <p:cNvPr id="373" name="Straight Connector 372">
+            <a:endParaRPr i="1" dirty="0"/>
+          </a:p>
+        </p:txBody>
+      </p:sp>
+      <p:sp>
+        <p:nvSpPr>
+          <p:cNvPr id="750" name="Rectangle 749">
             <a:extLst>
               <a:ext uri="{FF2B5EF4-FFF2-40B4-BE49-F238E27FC236}">
-                <a16:creationId xmlns:a16="http://schemas.microsoft.com/office/drawing/2014/main" id="{94AEA157-0261-E9AD-E8EA-80C8695EA9FE}"/>
-              </a:ext>
-            </a:extLst>
-          </p:cNvPr>
-          <p:cNvCxnSpPr>
-            <a:stCxn id="366" idx="2"/>
-          </p:cNvCxnSpPr>
-          <p:nvPr/>
-        </p:nvCxnSpPr>
-        <p:spPr>
-          <a:xfrm flipH="1">
-            <a:off x="1292429" y="3703495"/>
-            <a:ext cx="1" cy="588003"/>
-          </a:xfrm>
-          <a:prstGeom prst="line">
-            <a:avLst/>
-          </a:prstGeom>
-          <a:ln>
-            <a:solidFill>
-              <a:schemeClr val="accent6">
-                <a:lumMod val="75000"/>
-              </a:schemeClr>
-            </a:solidFill>
-            <a:headEnd type="triangle" w="med" len="med"/>
-            <a:tailEnd type="none" w="med" len="med"/>
-          </a:ln>
-          <a:effectLst/>
-        </p:spPr>
-        <p:style>
-          <a:lnRef idx="2">
-            <a:schemeClr val="accent1"/>
-          </a:lnRef>
-          <a:fillRef idx="0">
-            <a:schemeClr val="accent1"/>
-          </a:fillRef>
-          <a:effectRef idx="1">
-            <a:schemeClr val="accent1"/>
-          </a:effectRef>
-          <a:fontRef idx="minor">
-            <a:schemeClr val="tx1"/>
-          </a:fontRef>
-        </p:style>
-      </p:cxnSp>
-      <p:sp>
-        <p:nvSpPr>
-          <p:cNvPr id="374" name="Rectangle 373">
-            <a:extLst>
-              <a:ext uri="{FF2B5EF4-FFF2-40B4-BE49-F238E27FC236}">
-                <a16:creationId xmlns:a16="http://schemas.microsoft.com/office/drawing/2014/main" id="{81149021-E471-4B8C-6008-CC0F9C5D635B}"/>
+                <a16:creationId xmlns:a16="http://schemas.microsoft.com/office/drawing/2014/main" id="{189AA7CC-C25B-C265-1888-FAD75D89C70E}"/>
               </a:ext>
             </a:extLst>
           </p:cNvPr>
@@ -4380,16 +4271,16 @@
         </p:nvSpPr>
         <p:spPr>
           <a:xfrm>
-            <a:off x="5101688" y="42377"/>
-            <a:ext cx="3231292" cy="5108123"/>
+            <a:off x="5054411" y="37378"/>
+            <a:ext cx="3231292" cy="3393883"/>
           </a:xfrm>
           <a:prstGeom prst="rect">
             <a:avLst/>
           </a:prstGeom>
           <a:solidFill>
             <a:schemeClr val="accent3">
-              <a:lumMod val="20000"/>
-              <a:lumOff val="80000"/>
+              <a:lumMod val="60000"/>
+              <a:lumOff val="40000"/>
             </a:schemeClr>
           </a:solidFill>
           <a:ln w="22860">
@@ -4424,10 +4315,10 @@
       </p:sp>
       <p:sp>
         <p:nvSpPr>
-          <p:cNvPr id="375" name="TextBox 374">
+          <p:cNvPr id="751" name="TextBox 750">
             <a:extLst>
               <a:ext uri="{FF2B5EF4-FFF2-40B4-BE49-F238E27FC236}">
-                <a16:creationId xmlns:a16="http://schemas.microsoft.com/office/drawing/2014/main" id="{EF57A18E-875C-98C6-1EDC-B6449A8E1AB8}"/>
+                <a16:creationId xmlns:a16="http://schemas.microsoft.com/office/drawing/2014/main" id="{55453C51-3665-6EF0-1A83-3FAF02940A0B}"/>
               </a:ext>
             </a:extLst>
           </p:cNvPr>
@@ -4436,7 +4327,7 @@
         </p:nvSpPr>
         <p:spPr>
           <a:xfrm>
-            <a:off x="5315789" y="71481"/>
+            <a:off x="5272540" y="-8460"/>
             <a:ext cx="2870263" cy="430887"/>
           </a:xfrm>
           <a:prstGeom prst="rect">
@@ -4466,10 +4357,10 @@
       </p:sp>
       <p:sp>
         <p:nvSpPr>
-          <p:cNvPr id="376" name="Rectangle 375">
+          <p:cNvPr id="752" name="Rectangle 751">
             <a:extLst>
               <a:ext uri="{FF2B5EF4-FFF2-40B4-BE49-F238E27FC236}">
-                <a16:creationId xmlns:a16="http://schemas.microsoft.com/office/drawing/2014/main" id="{71356930-4BD1-AC1D-6DA0-7CDD3B557CF4}"/>
+                <a16:creationId xmlns:a16="http://schemas.microsoft.com/office/drawing/2014/main" id="{98B1890F-9C4A-D024-AB50-03F0D8F385E1}"/>
               </a:ext>
             </a:extLst>
           </p:cNvPr>
@@ -4477,14 +4368,19 @@
           <p:nvPr/>
         </p:nvSpPr>
         <p:spPr>
-          <a:xfrm>
-            <a:off x="5813575" y="775432"/>
-            <a:ext cx="2372477" cy="894382"/>
+          <a:xfrm rot="16200000">
+            <a:off x="4239228" y="1602092"/>
+            <a:ext cx="2514804" cy="558724"/>
           </a:xfrm>
           <a:prstGeom prst="rect">
             <a:avLst/>
           </a:prstGeom>
-          <a:noFill/>
+          <a:solidFill>
+            <a:schemeClr val="tx2">
+              <a:lumMod val="40000"/>
+              <a:lumOff val="60000"/>
+            </a:schemeClr>
+          </a:solidFill>
           <a:ln w="22860">
             <a:solidFill>
               <a:srgbClr val="373737"/>
@@ -4519,23 +4415,7 @@
                   <a:schemeClr val="tx1"/>
                 </a:solidFill>
               </a:rPr>
-              <a:t>IRQ routing </a:t>
-            </a:r>
-            <a:r>
-              <a:rPr lang="en-US" dirty="0" err="1">
-                <a:solidFill>
-                  <a:schemeClr val="tx1"/>
-                </a:solidFill>
-              </a:rPr>
-              <a:t>TrustZone</a:t>
-            </a:r>
-            <a:r>
-              <a:rPr lang="en-US" dirty="0">
-                <a:solidFill>
-                  <a:schemeClr val="tx1"/>
-                </a:solidFill>
-              </a:rPr>
-              <a:t>-Protected VNIC</a:t>
+              <a:t>Attestation Engine</a:t>
             </a:r>
             <a:endParaRPr lang="en-US" baseline="-25000" dirty="0">
               <a:solidFill>
@@ -4547,10 +4427,10 @@
       </p:sp>
       <p:sp>
         <p:nvSpPr>
-          <p:cNvPr id="377" name="Rectangle 376">
+          <p:cNvPr id="753" name="Rectangle 752">
             <a:extLst>
               <a:ext uri="{FF2B5EF4-FFF2-40B4-BE49-F238E27FC236}">
-                <a16:creationId xmlns:a16="http://schemas.microsoft.com/office/drawing/2014/main" id="{06AEE3F2-73AE-D97C-9ABD-9B0A1A133387}"/>
+                <a16:creationId xmlns:a16="http://schemas.microsoft.com/office/drawing/2014/main" id="{2A6BE63A-5F4C-E6C5-02D3-0E5455D505BB}"/>
               </a:ext>
             </a:extLst>
           </p:cNvPr>
@@ -4559,13 +4439,15 @@
         </p:nvSpPr>
         <p:spPr>
           <a:xfrm>
-            <a:off x="5817497" y="1669814"/>
-            <a:ext cx="2368556" cy="558724"/>
+            <a:off x="2914685" y="386092"/>
+            <a:ext cx="1746504" cy="621792"/>
           </a:xfrm>
           <a:prstGeom prst="rect">
             <a:avLst/>
           </a:prstGeom>
-          <a:noFill/>
+          <a:solidFill>
+            <a:srgbClr val="DCF2E7"/>
+          </a:solidFill>
           <a:ln w="22860">
             <a:solidFill>
               <a:srgbClr val="373737"/>
@@ -4595,27 +4477,69 @@
               <a:defRPr sz="1900" b="1"/>
             </a:pPr>
             <a:r>
+              <a:rPr lang="en-US" i="1" dirty="0">
+                <a:solidFill>
+                  <a:schemeClr val="tx1"/>
+                </a:solidFill>
+              </a:rPr>
+              <a:t>Resume</a:t>
+            </a:r>
+            <a:r>
               <a:rPr lang="en-US" dirty="0">
                 <a:solidFill>
                   <a:schemeClr val="tx1"/>
                 </a:solidFill>
               </a:rPr>
-              <a:t>Task Context Switch</a:t>
-            </a:r>
-            <a:endParaRPr lang="en-US" baseline="-25000" dirty="0">
-              <a:solidFill>
-                <a:schemeClr val="tx1"/>
-              </a:solidFill>
-            </a:endParaRPr>
-          </a:p>
-        </p:txBody>
-      </p:sp>
-      <p:sp>
-        <p:nvSpPr>
-          <p:cNvPr id="378" name="Rectangle 377">
+              <a:t>: </a:t>
+            </a:r>
+            <a:r>
+              <a:rPr dirty="0" err="1">
+                <a:solidFill>
+                  <a:schemeClr val="tx1"/>
+                </a:solidFill>
+              </a:rPr>
+              <a:t>Task</a:t>
+            </a:r>
+            <a:r>
+              <a:rPr baseline="-25000" dirty="0" err="1">
+                <a:solidFill>
+                  <a:schemeClr val="tx1"/>
+                </a:solidFill>
+              </a:rPr>
+              <a:t>A</a:t>
+            </a:r>
+            <a:br>
+              <a:rPr dirty="0">
+                <a:solidFill>
+                  <a:schemeClr val="tx1"/>
+                </a:solidFill>
+              </a:rPr>
+            </a:br>
+            <a:r>
+              <a:rPr dirty="0">
+                <a:solidFill>
+                  <a:schemeClr val="tx1"/>
+                </a:solidFill>
+              </a:rPr>
+              <a:t>PA key K</a:t>
+            </a:r>
+            <a:r>
+              <a:rPr baseline="-25000" dirty="0">
+                <a:solidFill>
+                  <a:schemeClr val="tx1"/>
+                </a:solidFill>
+              </a:rPr>
+              <a:t>A</a:t>
+            </a:r>
+          </a:p>
+        </p:txBody>
+      </p:sp>
+      <p:sp>
+        <p:nvSpPr>
+          <p:cNvPr id="754" name="Rectangle 753">
             <a:extLst>
               <a:ext uri="{FF2B5EF4-FFF2-40B4-BE49-F238E27FC236}">
-                <a16:creationId xmlns:a16="http://schemas.microsoft.com/office/drawing/2014/main" id="{A9DCE8DC-361D-9C46-748A-DC502C507001}"/>
+                <a16:creationId xmlns:a16="http://schemas.microsoft.com/office/drawing/2014/main" id="{43F6BAE8-3CA6-CD7B-C8A5-948CC124AC2E}"/>
               </a:ext>
             </a:extLst>
           </p:cNvPr>
@@ -4624,13 +4548,15 @@
         </p:nvSpPr>
         <p:spPr>
           <a:xfrm>
-            <a:off x="5813575" y="2228538"/>
-            <a:ext cx="2365602" cy="558724"/>
+            <a:off x="245083" y="2433024"/>
+            <a:ext cx="1746504" cy="625651"/>
           </a:xfrm>
           <a:prstGeom prst="rect">
             <a:avLst/>
           </a:prstGeom>
-          <a:noFill/>
+          <a:solidFill>
+            <a:srgbClr val="DCF2E7"/>
+          </a:solidFill>
           <a:ln w="22860">
             <a:solidFill>
               <a:srgbClr val="373737"/>
@@ -4660,27 +4586,53 @@
               <a:defRPr sz="1900" b="1"/>
             </a:pPr>
             <a:r>
-              <a:rPr lang="en-US" dirty="0">
+              <a:rPr dirty="0" err="1">
                 <a:solidFill>
                   <a:schemeClr val="tx1"/>
                 </a:solidFill>
               </a:rPr>
-              <a:t>Load PA Keys</a:t>
-            </a:r>
-            <a:endParaRPr lang="en-US" baseline="-25000" dirty="0">
-              <a:solidFill>
-                <a:schemeClr val="tx1"/>
-              </a:solidFill>
-            </a:endParaRPr>
-          </a:p>
-        </p:txBody>
-      </p:sp>
-      <p:sp>
-        <p:nvSpPr>
-          <p:cNvPr id="379" name="Rectangle 378">
+              <a:t>Task</a:t>
+            </a:r>
+            <a:r>
+              <a:rPr baseline="-25000" dirty="0" err="1">
+                <a:solidFill>
+                  <a:schemeClr val="tx1"/>
+                </a:solidFill>
+              </a:rPr>
+              <a:t>A</a:t>
+            </a:r>
+            <a:br>
+              <a:rPr dirty="0">
+                <a:solidFill>
+                  <a:schemeClr val="tx1"/>
+                </a:solidFill>
+              </a:rPr>
+            </a:br>
+            <a:r>
+              <a:rPr dirty="0">
+                <a:solidFill>
+                  <a:schemeClr val="tx1"/>
+                </a:solidFill>
+              </a:rPr>
+              <a:t>PA key K</a:t>
+            </a:r>
+            <a:r>
+              <a:rPr baseline="-25000" dirty="0">
+                <a:solidFill>
+                  <a:schemeClr val="tx1"/>
+                </a:solidFill>
+              </a:rPr>
+              <a:t>A</a:t>
+            </a:r>
+          </a:p>
+        </p:txBody>
+      </p:sp>
+      <p:sp>
+        <p:nvSpPr>
+          <p:cNvPr id="755" name="Rectangle 754">
             <a:extLst>
               <a:ext uri="{FF2B5EF4-FFF2-40B4-BE49-F238E27FC236}">
-                <a16:creationId xmlns:a16="http://schemas.microsoft.com/office/drawing/2014/main" id="{3412531B-726F-FD73-9ACB-711985F51179}"/>
+                <a16:creationId xmlns:a16="http://schemas.microsoft.com/office/drawing/2014/main" id="{6805C91C-3491-3218-3022-907F7DD5EDEC}"/>
               </a:ext>
             </a:extLst>
           </p:cNvPr>
@@ -4689,13 +4641,15 @@
         </p:nvSpPr>
         <p:spPr>
           <a:xfrm>
-            <a:off x="5817498" y="2782802"/>
-            <a:ext cx="2365601" cy="558724"/>
+            <a:off x="2914685" y="2433024"/>
+            <a:ext cx="1746504" cy="621792"/>
           </a:xfrm>
           <a:prstGeom prst="rect">
             <a:avLst/>
           </a:prstGeom>
-          <a:noFill/>
+          <a:solidFill>
+            <a:srgbClr val="DCF2E7"/>
+          </a:solidFill>
           <a:ln w="22860">
             <a:solidFill>
               <a:srgbClr val="373737"/>
@@ -4725,27 +4679,142 @@
               <a:defRPr sz="1900" b="1"/>
             </a:pPr>
             <a:r>
+              <a:rPr lang="en-US" i="1" dirty="0">
+                <a:solidFill>
+                  <a:schemeClr val="tx1"/>
+                </a:solidFill>
+              </a:rPr>
+              <a:t>Resume</a:t>
+            </a:r>
+            <a:r>
               <a:rPr lang="en-US" dirty="0">
                 <a:solidFill>
                   <a:schemeClr val="tx1"/>
                 </a:solidFill>
               </a:rPr>
-              <a:t>ITL</a:t>
-            </a:r>
-            <a:endParaRPr lang="en-US" baseline="-25000" dirty="0">
-              <a:solidFill>
-                <a:schemeClr val="tx1"/>
-              </a:solidFill>
-            </a:endParaRPr>
-          </a:p>
-        </p:txBody>
-      </p:sp>
-      <p:sp>
-        <p:nvSpPr>
-          <p:cNvPr id="380" name="Rectangle 379">
+              <a:t>: </a:t>
+            </a:r>
+            <a:r>
+              <a:rPr dirty="0" err="1">
+                <a:solidFill>
+                  <a:schemeClr val="tx1"/>
+                </a:solidFill>
+              </a:rPr>
+              <a:t>Task</a:t>
+            </a:r>
+            <a:r>
+              <a:rPr baseline="-25000" dirty="0" err="1">
+                <a:solidFill>
+                  <a:schemeClr val="tx1"/>
+                </a:solidFill>
+              </a:rPr>
+              <a:t>A</a:t>
+            </a:r>
+            <a:r>
+              <a:rPr lang="en-US" dirty="0">
+                <a:solidFill>
+                  <a:schemeClr val="tx1"/>
+                </a:solidFill>
+              </a:rPr>
+              <a:t> </a:t>
+            </a:r>
+            <a:r>
+              <a:rPr dirty="0">
+                <a:solidFill>
+                  <a:schemeClr val="tx1"/>
+                </a:solidFill>
+              </a:rPr>
+              <a:t>PA key K</a:t>
+            </a:r>
+            <a:r>
+              <a:rPr baseline="-25000" dirty="0">
+                <a:solidFill>
+                  <a:schemeClr val="tx1"/>
+                </a:solidFill>
+              </a:rPr>
+              <a:t>A</a:t>
+            </a:r>
+          </a:p>
+        </p:txBody>
+      </p:sp>
+      <p:sp>
+        <p:nvSpPr>
+          <p:cNvPr id="756" name="TextBox 755">
             <a:extLst>
               <a:ext uri="{FF2B5EF4-FFF2-40B4-BE49-F238E27FC236}">
-                <a16:creationId xmlns:a16="http://schemas.microsoft.com/office/drawing/2014/main" id="{C5DF5238-F067-69E3-5671-5590D7ADF7F6}"/>
+                <a16:creationId xmlns:a16="http://schemas.microsoft.com/office/drawing/2014/main" id="{5D986CF5-4D40-6A7E-9AFB-E0391C2B8B3E}"/>
+              </a:ext>
+            </a:extLst>
+          </p:cNvPr>
+          <p:cNvSpPr txBox="1"/>
+          <p:nvPr/>
+        </p:nvSpPr>
+        <p:spPr>
+          <a:xfrm>
+            <a:off x="2072402" y="2036547"/>
+            <a:ext cx="1526665" cy="338554"/>
+          </a:xfrm>
+          <a:prstGeom prst="rect">
+            <a:avLst/>
+          </a:prstGeom>
+          <a:noFill/>
+        </p:spPr>
+        <p:txBody>
+          <a:bodyPr wrap="square" rtlCol="0">
+            <a:spAutoFit/>
+          </a:bodyPr>
+          <a:lstStyle/>
+          <a:p>
+            <a:pPr algn="ctr"/>
+            <a:r>
+              <a:rPr lang="en-US" sz="1600" dirty="0"/>
+              <a:t>Scheduler IRQ</a:t>
+            </a:r>
+          </a:p>
+        </p:txBody>
+      </p:sp>
+      <p:sp>
+        <p:nvSpPr>
+          <p:cNvPr id="757" name="TextBox 756">
+            <a:extLst>
+              <a:ext uri="{FF2B5EF4-FFF2-40B4-BE49-F238E27FC236}">
+                <a16:creationId xmlns:a16="http://schemas.microsoft.com/office/drawing/2014/main" id="{92CD49E5-E9D1-5164-907E-5180E7124A99}"/>
+              </a:ext>
+            </a:extLst>
+          </p:cNvPr>
+          <p:cNvSpPr txBox="1"/>
+          <p:nvPr/>
+        </p:nvSpPr>
+        <p:spPr>
+          <a:xfrm>
+            <a:off x="3372693" y="1588913"/>
+            <a:ext cx="1526665" cy="338554"/>
+          </a:xfrm>
+          <a:prstGeom prst="rect">
+            <a:avLst/>
+          </a:prstGeom>
+          <a:noFill/>
+        </p:spPr>
+        <p:txBody>
+          <a:bodyPr wrap="square" rtlCol="0">
+            <a:spAutoFit/>
+          </a:bodyPr>
+          <a:lstStyle/>
+          <a:p>
+            <a:pPr algn="ctr"/>
+            <a:r>
+              <a:rPr lang="en-US" sz="1600" dirty="0"/>
+              <a:t>ISR returns</a:t>
+            </a:r>
+          </a:p>
+        </p:txBody>
+      </p:sp>
+      <p:sp>
+        <p:nvSpPr>
+          <p:cNvPr id="758" name="Rectangle 757">
+            <a:extLst>
+              <a:ext uri="{FF2B5EF4-FFF2-40B4-BE49-F238E27FC236}">
+                <a16:creationId xmlns:a16="http://schemas.microsoft.com/office/drawing/2014/main" id="{0FC427A1-55B9-305C-10C4-289B62F2F02C}"/>
               </a:ext>
             </a:extLst>
           </p:cNvPr>
@@ -4754,16 +4823,21 @@
         </p:nvSpPr>
         <p:spPr>
           <a:xfrm>
-            <a:off x="5817498" y="3339639"/>
-            <a:ext cx="2365601" cy="558724"/>
+            <a:off x="5771800" y="624051"/>
+            <a:ext cx="2365601" cy="640080"/>
           </a:xfrm>
           <a:prstGeom prst="rect">
             <a:avLst/>
           </a:prstGeom>
-          <a:noFill/>
-          <a:ln w="22860">
+          <a:solidFill>
+            <a:schemeClr val="tx2">
+              <a:lumMod val="40000"/>
+              <a:lumOff val="60000"/>
+            </a:schemeClr>
+          </a:solidFill>
+          <a:ln w="19050">
             <a:solidFill>
-              <a:srgbClr val="373737"/>
+              <a:schemeClr val="tx1"/>
             </a:solidFill>
           </a:ln>
           <a:effectLst/>
@@ -4783,34 +4857,27 @@
           </a:fontRef>
         </p:style>
         <p:txBody>
-          <a:bodyPr wrap="square" lIns="101600" tIns="101600" rIns="101600" bIns="101600" rtlCol="0" anchor="ctr"/>
-          <a:lstStyle/>
-          <a:p>
-            <a:pPr algn="ctr">
-              <a:defRPr sz="1900" b="1"/>
-            </a:pPr>
-            <a:r>
-              <a:rPr lang="en-US" dirty="0">
+          <a:bodyPr rtlCol="0" anchor="ctr"/>
+          <a:lstStyle/>
+          <a:p>
+            <a:pPr algn="ctr"/>
+            <a:r>
+              <a:rPr lang="en-US" sz="1900" dirty="0">
                 <a:solidFill>
                   <a:schemeClr val="tx1"/>
                 </a:solidFill>
               </a:rPr>
-              <a:t>Trace record</a:t>
-            </a:r>
-            <a:endParaRPr lang="en-US" baseline="-25000" dirty="0">
-              <a:solidFill>
-                <a:schemeClr val="tx1"/>
-              </a:solidFill>
-            </a:endParaRPr>
-          </a:p>
-        </p:txBody>
-      </p:sp>
-      <p:sp>
-        <p:nvSpPr>
-          <p:cNvPr id="381" name="Rectangle 380">
+              <a:t>IRQ routing TZ-protected NVIC</a:t>
+            </a:r>
+          </a:p>
+        </p:txBody>
+      </p:sp>
+      <p:sp>
+        <p:nvSpPr>
+          <p:cNvPr id="759" name="Rectangle 758">
             <a:extLst>
               <a:ext uri="{FF2B5EF4-FFF2-40B4-BE49-F238E27FC236}">
-                <a16:creationId xmlns:a16="http://schemas.microsoft.com/office/drawing/2014/main" id="{CBDFA0A6-BEF0-358D-953B-5A000449C051}"/>
+                <a16:creationId xmlns:a16="http://schemas.microsoft.com/office/drawing/2014/main" id="{35351F51-4C07-BF60-9E7C-322C0256A322}"/>
               </a:ext>
             </a:extLst>
           </p:cNvPr>
@@ -4818,17 +4885,22 @@
           <p:nvPr/>
         </p:nvSpPr>
         <p:spPr>
-          <a:xfrm rot="16200000">
-            <a:off x="3973100" y="2053964"/>
-            <a:ext cx="3130074" cy="558724"/>
+          <a:xfrm>
+            <a:off x="5771800" y="1262951"/>
+            <a:ext cx="2365601" cy="539496"/>
           </a:xfrm>
           <a:prstGeom prst="rect">
             <a:avLst/>
           </a:prstGeom>
-          <a:noFill/>
-          <a:ln w="22860">
+          <a:solidFill>
+            <a:schemeClr val="tx2">
+              <a:lumMod val="40000"/>
+              <a:lumOff val="60000"/>
+            </a:schemeClr>
+          </a:solidFill>
+          <a:ln w="19050">
             <a:solidFill>
-              <a:srgbClr val="373737"/>
+              <a:schemeClr val="tx1"/>
             </a:solidFill>
           </a:ln>
           <a:effectLst/>
@@ -4848,122 +4920,216 @@
           </a:fontRef>
         </p:style>
         <p:txBody>
-          <a:bodyPr wrap="square" lIns="101600" tIns="101600" rIns="101600" bIns="101600" rtlCol="0" anchor="ctr"/>
-          <a:lstStyle/>
-          <a:p>
-            <a:pPr algn="ctr">
-              <a:defRPr sz="1900" b="1"/>
-            </a:pPr>
-            <a:r>
-              <a:rPr lang="en-US" dirty="0">
+          <a:bodyPr rtlCol="0" anchor="ctr"/>
+          <a:lstStyle/>
+          <a:p>
+            <a:pPr algn="ctr"/>
+            <a:r>
+              <a:rPr lang="en-US" sz="1900" dirty="0">
                 <a:solidFill>
                   <a:schemeClr val="tx1"/>
                 </a:solidFill>
               </a:rPr>
-              <a:t>Attestation Engine</a:t>
-            </a:r>
-            <a:endParaRPr lang="en-US" baseline="-25000" dirty="0">
-              <a:solidFill>
-                <a:schemeClr val="tx1"/>
-              </a:solidFill>
-            </a:endParaRPr>
-          </a:p>
-        </p:txBody>
-      </p:sp>
-      <p:cxnSp>
-        <p:nvCxnSpPr>
-          <p:cNvPr id="382" name="Elbow Connector 381">
+              <a:t>Task Context &amp; Trace switch</a:t>
+            </a:r>
+          </a:p>
+        </p:txBody>
+      </p:sp>
+      <p:sp>
+        <p:nvSpPr>
+          <p:cNvPr id="760" name="Rectangle 759">
             <a:extLst>
               <a:ext uri="{FF2B5EF4-FFF2-40B4-BE49-F238E27FC236}">
-                <a16:creationId xmlns:a16="http://schemas.microsoft.com/office/drawing/2014/main" id="{C150AF71-31A4-E4AC-1B5D-4F6368F5F6AB}"/>
+                <a16:creationId xmlns:a16="http://schemas.microsoft.com/office/drawing/2014/main" id="{69F0F591-8526-5F62-7A03-7F73B5B9B859}"/>
               </a:ext>
             </a:extLst>
           </p:cNvPr>
-          <p:cNvCxnSpPr>
-            <a:cxnSpLocks/>
-          </p:cNvCxnSpPr>
+          <p:cNvSpPr/>
           <p:nvPr/>
-        </p:nvCxnSpPr>
+        </p:nvSpPr>
         <p:spPr>
-          <a:xfrm flipV="1">
-            <a:off x="3592145" y="1403687"/>
-            <a:ext cx="1673591" cy="244602"/>
-          </a:xfrm>
-          <a:prstGeom prst="bentConnector3">
-            <a:avLst>
-              <a:gd name="adj1" fmla="val 1360"/>
-            </a:avLst>
+          <a:xfrm>
+            <a:off x="5771114" y="1802327"/>
+            <a:ext cx="2365601" cy="457200"/>
+          </a:xfrm>
+          <a:prstGeom prst="rect">
+            <a:avLst/>
           </a:prstGeom>
-          <a:ln>
-            <a:tailEnd type="triangle"/>
+          <a:solidFill>
+            <a:schemeClr val="tx2">
+              <a:lumMod val="40000"/>
+              <a:lumOff val="60000"/>
+            </a:schemeClr>
+          </a:solidFill>
+          <a:ln w="19050">
+            <a:solidFill>
+              <a:schemeClr val="tx1"/>
+            </a:solidFill>
           </a:ln>
           <a:effectLst/>
         </p:spPr>
         <p:style>
-          <a:lnRef idx="2">
+          <a:lnRef idx="1">
             <a:schemeClr val="accent1"/>
           </a:lnRef>
-          <a:fillRef idx="0">
+          <a:fillRef idx="3">
             <a:schemeClr val="accent1"/>
           </a:fillRef>
-          <a:effectRef idx="1">
+          <a:effectRef idx="2">
             <a:schemeClr val="accent1"/>
           </a:effectRef>
           <a:fontRef idx="minor">
-            <a:schemeClr val="tx1"/>
+            <a:schemeClr val="lt1"/>
           </a:fontRef>
         </p:style>
-      </p:cxnSp>
-      <p:cxnSp>
-        <p:nvCxnSpPr>
-          <p:cNvPr id="383" name="Elbow Connector 382">
+        <p:txBody>
+          <a:bodyPr rtlCol="0" anchor="ctr"/>
+          <a:lstStyle/>
+          <a:p>
+            <a:pPr algn="ctr"/>
+            <a:r>
+              <a:rPr lang="en-US" sz="1900" dirty="0">
+                <a:solidFill>
+                  <a:schemeClr val="tx1"/>
+                </a:solidFill>
+              </a:rPr>
+              <a:t>Load PA keys</a:t>
+            </a:r>
+          </a:p>
+        </p:txBody>
+      </p:sp>
+      <p:sp>
+        <p:nvSpPr>
+          <p:cNvPr id="761" name="Rectangle 760">
             <a:extLst>
               <a:ext uri="{FF2B5EF4-FFF2-40B4-BE49-F238E27FC236}">
-                <a16:creationId xmlns:a16="http://schemas.microsoft.com/office/drawing/2014/main" id="{E2B26B3C-759A-226C-19A8-CAB878BAB7E6}"/>
+                <a16:creationId xmlns:a16="http://schemas.microsoft.com/office/drawing/2014/main" id="{947F0127-5887-9F3A-DA33-79358611A80D}"/>
               </a:ext>
             </a:extLst>
           </p:cNvPr>
-          <p:cNvCxnSpPr>
-            <a:cxnSpLocks/>
-          </p:cNvCxnSpPr>
+          <p:cNvSpPr/>
           <p:nvPr/>
-        </p:nvCxnSpPr>
+        </p:nvSpPr>
         <p:spPr>
-          <a:xfrm rot="10800000" flipV="1">
-            <a:off x="4597989" y="1755796"/>
-            <a:ext cx="660787" cy="339682"/>
-          </a:xfrm>
-          <a:prstGeom prst="bentConnector3">
-            <a:avLst>
-              <a:gd name="adj1" fmla="val 50000"/>
-            </a:avLst>
+          <a:xfrm>
+            <a:off x="5770428" y="2255588"/>
+            <a:ext cx="2365601" cy="438912"/>
+          </a:xfrm>
+          <a:prstGeom prst="rect">
+            <a:avLst/>
           </a:prstGeom>
-          <a:ln>
-            <a:tailEnd type="triangle"/>
+          <a:solidFill>
+            <a:schemeClr val="tx2">
+              <a:lumMod val="40000"/>
+              <a:lumOff val="60000"/>
+            </a:schemeClr>
+          </a:solidFill>
+          <a:ln w="19050">
+            <a:solidFill>
+              <a:schemeClr val="tx1"/>
+            </a:solidFill>
           </a:ln>
           <a:effectLst/>
         </p:spPr>
         <p:style>
-          <a:lnRef idx="2">
+          <a:lnRef idx="1">
             <a:schemeClr val="accent1"/>
           </a:lnRef>
-          <a:fillRef idx="0">
+          <a:fillRef idx="3">
             <a:schemeClr val="accent1"/>
           </a:fillRef>
-          <a:effectRef idx="1">
+          <a:effectRef idx="2">
             <a:schemeClr val="accent1"/>
           </a:effectRef>
           <a:fontRef idx="minor">
-            <a:schemeClr val="tx1"/>
+            <a:schemeClr val="lt1"/>
           </a:fontRef>
         </p:style>
-      </p:cxnSp>
+        <p:txBody>
+          <a:bodyPr rtlCol="0" anchor="ctr"/>
+          <a:lstStyle/>
+          <a:p>
+            <a:pPr algn="ctr"/>
+            <a:r>
+              <a:rPr lang="en-US" sz="1900" dirty="0">
+                <a:solidFill>
+                  <a:schemeClr val="tx1"/>
+                </a:solidFill>
+              </a:rPr>
+              <a:t>ITL</a:t>
+            </a:r>
+          </a:p>
+        </p:txBody>
+      </p:sp>
+      <p:sp>
+        <p:nvSpPr>
+          <p:cNvPr id="762" name="Rectangle 761">
+            <a:extLst>
+              <a:ext uri="{FF2B5EF4-FFF2-40B4-BE49-F238E27FC236}">
+                <a16:creationId xmlns:a16="http://schemas.microsoft.com/office/drawing/2014/main" id="{7A88D360-8A78-0CC7-3512-71E3F9FC581D}"/>
+              </a:ext>
+            </a:extLst>
+          </p:cNvPr>
+          <p:cNvSpPr/>
+          <p:nvPr/>
+        </p:nvSpPr>
+        <p:spPr>
+          <a:xfrm>
+            <a:off x="5770427" y="2696719"/>
+            <a:ext cx="2365601" cy="442138"/>
+          </a:xfrm>
+          <a:prstGeom prst="rect">
+            <a:avLst/>
+          </a:prstGeom>
+          <a:solidFill>
+            <a:schemeClr val="tx2">
+              <a:lumMod val="40000"/>
+              <a:lumOff val="60000"/>
+            </a:schemeClr>
+          </a:solidFill>
+          <a:ln w="19050">
+            <a:solidFill>
+              <a:schemeClr val="tx1"/>
+            </a:solidFill>
+          </a:ln>
+          <a:effectLst/>
+        </p:spPr>
+        <p:style>
+          <a:lnRef idx="1">
+            <a:schemeClr val="accent1"/>
+          </a:lnRef>
+          <a:fillRef idx="3">
+            <a:schemeClr val="accent1"/>
+          </a:fillRef>
+          <a:effectRef idx="2">
+            <a:schemeClr val="accent1"/>
+          </a:effectRef>
+          <a:fontRef idx="minor">
+            <a:schemeClr val="lt1"/>
+          </a:fontRef>
+        </p:style>
+        <p:txBody>
+          <a:bodyPr rtlCol="0" anchor="ctr"/>
+          <a:lstStyle/>
+          <a:p>
+            <a:pPr algn="ctr"/>
+            <a:r>
+              <a:rPr lang="en-US" sz="1900" dirty="0">
+                <a:solidFill>
+                  <a:schemeClr val="tx1"/>
+                </a:solidFill>
+              </a:rPr>
+              <a:t>Occurrence Trace</a:t>
+            </a:r>
+          </a:p>
+        </p:txBody>
+      </p:sp>
       <p:cxnSp>
         <p:nvCxnSpPr>
-          <p:cNvPr id="384" name="Elbow Connector 383">
+          <p:cNvPr id="763" name="Straight Arrow Connector 762">
             <a:extLst>
               <a:ext uri="{FF2B5EF4-FFF2-40B4-BE49-F238E27FC236}">
-                <a16:creationId xmlns:a16="http://schemas.microsoft.com/office/drawing/2014/main" id="{CEE6E1C1-EC95-FFCF-086C-907E8401C2F1}"/>
+                <a16:creationId xmlns:a16="http://schemas.microsoft.com/office/drawing/2014/main" id="{2D68269C-5B3B-6456-EA53-2665A5F5FF9B}"/>
               </a:ext>
             </a:extLst>
           </p:cNvPr>
@@ -4974,19 +5140,15 @@
         </p:nvCxnSpPr>
         <p:spPr>
           <a:xfrm>
-            <a:off x="1292430" y="2542670"/>
-            <a:ext cx="3803490" cy="93521"/>
-          </a:xfrm>
-          <a:prstGeom prst="bentConnector3">
-            <a:avLst>
-              <a:gd name="adj1" fmla="val 452"/>
-            </a:avLst>
+            <a:off x="3326422" y="1853779"/>
+            <a:ext cx="1890846" cy="0"/>
+          </a:xfrm>
+          <a:prstGeom prst="straightConnector1">
+            <a:avLst/>
           </a:prstGeom>
           <a:ln>
             <a:solidFill>
-              <a:schemeClr val="accent6">
-                <a:lumMod val="75000"/>
-              </a:schemeClr>
+              <a:schemeClr val="tx1"/>
             </a:solidFill>
             <a:tailEnd type="triangle"/>
           </a:ln>
@@ -5009,10 +5171,816 @@
       </p:cxnSp>
       <p:cxnSp>
         <p:nvCxnSpPr>
-          <p:cNvPr id="385" name="Straight Connector 384">
+          <p:cNvPr id="764" name="Straight Arrow Connector 763">
             <a:extLst>
               <a:ext uri="{FF2B5EF4-FFF2-40B4-BE49-F238E27FC236}">
-                <a16:creationId xmlns:a16="http://schemas.microsoft.com/office/drawing/2014/main" id="{DE552347-B917-7AFB-127E-BEC95F0DA383}"/>
+                <a16:creationId xmlns:a16="http://schemas.microsoft.com/office/drawing/2014/main" id="{C11FC4F3-EDE0-0392-5109-188C7773786B}"/>
+              </a:ext>
+            </a:extLst>
+          </p:cNvPr>
+          <p:cNvCxnSpPr>
+            <a:cxnSpLocks/>
+          </p:cNvCxnSpPr>
+          <p:nvPr/>
+        </p:nvCxnSpPr>
+        <p:spPr>
+          <a:xfrm flipH="1">
+            <a:off x="3326422" y="1527542"/>
+            <a:ext cx="1907510" cy="0"/>
+          </a:xfrm>
+          <a:prstGeom prst="straightConnector1">
+            <a:avLst/>
+          </a:prstGeom>
+          <a:ln>
+            <a:solidFill>
+              <a:schemeClr val="tx1"/>
+            </a:solidFill>
+            <a:tailEnd type="triangle"/>
+          </a:ln>
+          <a:effectLst/>
+        </p:spPr>
+        <p:style>
+          <a:lnRef idx="2">
+            <a:schemeClr val="accent1"/>
+          </a:lnRef>
+          <a:fillRef idx="0">
+            <a:schemeClr val="accent1"/>
+          </a:fillRef>
+          <a:effectRef idx="1">
+            <a:schemeClr val="accent1"/>
+          </a:effectRef>
+          <a:fontRef idx="minor">
+            <a:schemeClr val="tx1"/>
+          </a:fontRef>
+        </p:style>
+      </p:cxnSp>
+      <p:sp>
+        <p:nvSpPr>
+          <p:cNvPr id="765" name="TextBox 764">
+            <a:extLst>
+              <a:ext uri="{FF2B5EF4-FFF2-40B4-BE49-F238E27FC236}">
+                <a16:creationId xmlns:a16="http://schemas.microsoft.com/office/drawing/2014/main" id="{566E515C-5523-7D54-2739-C59DA21DB032}"/>
+              </a:ext>
+            </a:extLst>
+          </p:cNvPr>
+          <p:cNvSpPr txBox="1"/>
+          <p:nvPr/>
+        </p:nvSpPr>
+        <p:spPr>
+          <a:xfrm>
+            <a:off x="3372692" y="1227786"/>
+            <a:ext cx="1526665" cy="338554"/>
+          </a:xfrm>
+          <a:prstGeom prst="rect">
+            <a:avLst/>
+          </a:prstGeom>
+          <a:noFill/>
+        </p:spPr>
+        <p:txBody>
+          <a:bodyPr wrap="square" rtlCol="0">
+            <a:spAutoFit/>
+          </a:bodyPr>
+          <a:lstStyle/>
+          <a:p>
+            <a:pPr algn="ctr"/>
+            <a:r>
+              <a:rPr lang="en-US" sz="1600" dirty="0"/>
+              <a:t>Invoke ISR</a:t>
+            </a:r>
+          </a:p>
+        </p:txBody>
+      </p:sp>
+      <p:cxnSp>
+        <p:nvCxnSpPr>
+          <p:cNvPr id="766" name="Elbow Connector 765">
+            <a:extLst>
+              <a:ext uri="{FF2B5EF4-FFF2-40B4-BE49-F238E27FC236}">
+                <a16:creationId xmlns:a16="http://schemas.microsoft.com/office/drawing/2014/main" id="{427F6A7D-D4DF-A0E3-B9B0-5378C3408B5A}"/>
+              </a:ext>
+            </a:extLst>
+          </p:cNvPr>
+          <p:cNvCxnSpPr>
+            <a:cxnSpLocks/>
+            <a:stCxn id="742" idx="2"/>
+          </p:cNvCxnSpPr>
+          <p:nvPr/>
+        </p:nvCxnSpPr>
+        <p:spPr>
+          <a:xfrm rot="16200000" flipH="1">
+            <a:off x="3059437" y="-929360"/>
+            <a:ext cx="216043" cy="4098247"/>
+          </a:xfrm>
+          <a:prstGeom prst="bentConnector2">
+            <a:avLst/>
+          </a:prstGeom>
+          <a:ln>
+            <a:solidFill>
+              <a:schemeClr val="tx1"/>
+            </a:solidFill>
+          </a:ln>
+          <a:effectLst/>
+        </p:spPr>
+        <p:style>
+          <a:lnRef idx="2">
+            <a:schemeClr val="accent1"/>
+          </a:lnRef>
+          <a:fillRef idx="0">
+            <a:schemeClr val="accent1"/>
+          </a:fillRef>
+          <a:effectRef idx="1">
+            <a:schemeClr val="accent1"/>
+          </a:effectRef>
+          <a:fontRef idx="minor">
+            <a:schemeClr val="tx1"/>
+          </a:fontRef>
+        </p:style>
+      </p:cxnSp>
+      <p:cxnSp>
+        <p:nvCxnSpPr>
+          <p:cNvPr id="767" name="Elbow Connector 766">
+            <a:extLst>
+              <a:ext uri="{FF2B5EF4-FFF2-40B4-BE49-F238E27FC236}">
+                <a16:creationId xmlns:a16="http://schemas.microsoft.com/office/drawing/2014/main" id="{BBBEF7DA-3E66-C052-5BB2-C45FC90745BB}"/>
+              </a:ext>
+            </a:extLst>
+          </p:cNvPr>
+          <p:cNvCxnSpPr>
+            <a:cxnSpLocks/>
+            <a:endCxn id="753" idx="3"/>
+          </p:cNvCxnSpPr>
+          <p:nvPr/>
+        </p:nvCxnSpPr>
+        <p:spPr>
+          <a:xfrm rot="10800000">
+            <a:off x="4661190" y="696988"/>
+            <a:ext cx="555393" cy="310896"/>
+          </a:xfrm>
+          <a:prstGeom prst="bentConnector3">
+            <a:avLst/>
+          </a:prstGeom>
+          <a:ln>
+            <a:solidFill>
+              <a:schemeClr val="tx1"/>
+            </a:solidFill>
+            <a:tailEnd type="triangle"/>
+          </a:ln>
+          <a:effectLst/>
+        </p:spPr>
+        <p:style>
+          <a:lnRef idx="2">
+            <a:schemeClr val="accent1"/>
+          </a:lnRef>
+          <a:fillRef idx="0">
+            <a:schemeClr val="accent1"/>
+          </a:fillRef>
+          <a:effectRef idx="1">
+            <a:schemeClr val="accent1"/>
+          </a:effectRef>
+          <a:fontRef idx="minor">
+            <a:schemeClr val="tx1"/>
+          </a:fontRef>
+        </p:style>
+      </p:cxnSp>
+      <p:grpSp>
+        <p:nvGrpSpPr>
+          <p:cNvPr id="768" name="Group 767">
+            <a:extLst>
+              <a:ext uri="{FF2B5EF4-FFF2-40B4-BE49-F238E27FC236}">
+                <a16:creationId xmlns:a16="http://schemas.microsoft.com/office/drawing/2014/main" id="{997C4E3D-BF66-8D79-4904-4ECE271D5AC2}"/>
+              </a:ext>
+            </a:extLst>
+          </p:cNvPr>
+          <p:cNvGrpSpPr/>
+          <p:nvPr/>
+        </p:nvGrpSpPr>
+        <p:grpSpPr>
+          <a:xfrm>
+            <a:off x="1779086" y="978366"/>
+            <a:ext cx="193363" cy="276999"/>
+            <a:chOff x="4666818" y="5181094"/>
+            <a:chExt cx="193363" cy="276999"/>
+          </a:xfrm>
+        </p:grpSpPr>
+        <p:sp>
+          <p:nvSpPr>
+            <p:cNvPr id="769" name="Oval 768">
+              <a:extLst>
+                <a:ext uri="{FF2B5EF4-FFF2-40B4-BE49-F238E27FC236}">
+                  <a16:creationId xmlns:a16="http://schemas.microsoft.com/office/drawing/2014/main" id="{8E8EF12D-457B-2961-6198-851C4D97EE18}"/>
+                </a:ext>
+              </a:extLst>
+            </p:cNvPr>
+            <p:cNvSpPr/>
+            <p:nvPr/>
+          </p:nvSpPr>
+          <p:spPr>
+            <a:xfrm>
+              <a:off x="4702696" y="5252214"/>
+              <a:ext cx="157485" cy="141214"/>
+            </a:xfrm>
+            <a:prstGeom prst="ellipse">
+              <a:avLst/>
+            </a:prstGeom>
+            <a:solidFill>
+              <a:schemeClr val="tx1"/>
+            </a:solidFill>
+            <a:ln w="19050">
+              <a:solidFill>
+                <a:schemeClr val="tx1"/>
+              </a:solidFill>
+            </a:ln>
+            <a:effectLst/>
+          </p:spPr>
+          <p:style>
+            <a:lnRef idx="1">
+              <a:schemeClr val="accent1"/>
+            </a:lnRef>
+            <a:fillRef idx="3">
+              <a:schemeClr val="accent1"/>
+            </a:fillRef>
+            <a:effectRef idx="2">
+              <a:schemeClr val="accent1"/>
+            </a:effectRef>
+            <a:fontRef idx="minor">
+              <a:schemeClr val="lt1"/>
+            </a:fontRef>
+          </p:style>
+          <p:txBody>
+            <a:bodyPr rtlCol="0" anchor="ctr"/>
+            <a:lstStyle/>
+            <a:p>
+              <a:pPr algn="ctr"/>
+              <a:endParaRPr lang="en-US"/>
+            </a:p>
+          </p:txBody>
+        </p:sp>
+        <p:sp>
+          <p:nvSpPr>
+            <p:cNvPr id="770" name="TextBox 769">
+              <a:extLst>
+                <a:ext uri="{FF2B5EF4-FFF2-40B4-BE49-F238E27FC236}">
+                  <a16:creationId xmlns:a16="http://schemas.microsoft.com/office/drawing/2014/main" id="{DCEE141F-5F44-71CE-342F-0207EB4C3543}"/>
+                </a:ext>
+              </a:extLst>
+            </p:cNvPr>
+            <p:cNvSpPr txBox="1"/>
+            <p:nvPr/>
+          </p:nvSpPr>
+          <p:spPr>
+            <a:xfrm>
+              <a:off x="4666818" y="5181094"/>
+              <a:ext cx="157485" cy="276999"/>
+            </a:xfrm>
+            <a:prstGeom prst="rect">
+              <a:avLst/>
+            </a:prstGeom>
+            <a:noFill/>
+          </p:spPr>
+          <p:txBody>
+            <a:bodyPr wrap="square" rtlCol="0">
+              <a:spAutoFit/>
+            </a:bodyPr>
+            <a:lstStyle/>
+            <a:p>
+              <a:r>
+                <a:rPr lang="en-US" sz="1200" dirty="0">
+                  <a:solidFill>
+                    <a:schemeClr val="bg1"/>
+                  </a:solidFill>
+                </a:rPr>
+                <a:t>1</a:t>
+              </a:r>
+            </a:p>
+          </p:txBody>
+        </p:sp>
+      </p:grpSp>
+      <p:grpSp>
+        <p:nvGrpSpPr>
+          <p:cNvPr id="771" name="Group 770">
+            <a:extLst>
+              <a:ext uri="{FF2B5EF4-FFF2-40B4-BE49-F238E27FC236}">
+                <a16:creationId xmlns:a16="http://schemas.microsoft.com/office/drawing/2014/main" id="{F6135344-70FB-6A37-4677-F70862F3394E}"/>
+              </a:ext>
+            </a:extLst>
+          </p:cNvPr>
+          <p:cNvGrpSpPr/>
+          <p:nvPr/>
+        </p:nvGrpSpPr>
+        <p:grpSpPr>
+          <a:xfrm>
+            <a:off x="3441542" y="1259651"/>
+            <a:ext cx="193363" cy="276999"/>
+            <a:chOff x="4666818" y="5181094"/>
+            <a:chExt cx="193363" cy="276999"/>
+          </a:xfrm>
+        </p:grpSpPr>
+        <p:sp>
+          <p:nvSpPr>
+            <p:cNvPr id="772" name="Oval 771">
+              <a:extLst>
+                <a:ext uri="{FF2B5EF4-FFF2-40B4-BE49-F238E27FC236}">
+                  <a16:creationId xmlns:a16="http://schemas.microsoft.com/office/drawing/2014/main" id="{0CFCCC5D-B7EB-6C25-3045-3E9FD47315E7}"/>
+                </a:ext>
+              </a:extLst>
+            </p:cNvPr>
+            <p:cNvSpPr/>
+            <p:nvPr/>
+          </p:nvSpPr>
+          <p:spPr>
+            <a:xfrm>
+              <a:off x="4702696" y="5252214"/>
+              <a:ext cx="157485" cy="141214"/>
+            </a:xfrm>
+            <a:prstGeom prst="ellipse">
+              <a:avLst/>
+            </a:prstGeom>
+            <a:solidFill>
+              <a:schemeClr val="tx1"/>
+            </a:solidFill>
+            <a:ln w="19050">
+              <a:solidFill>
+                <a:schemeClr val="tx1"/>
+              </a:solidFill>
+            </a:ln>
+            <a:effectLst/>
+          </p:spPr>
+          <p:style>
+            <a:lnRef idx="1">
+              <a:schemeClr val="accent1"/>
+            </a:lnRef>
+            <a:fillRef idx="3">
+              <a:schemeClr val="accent1"/>
+            </a:fillRef>
+            <a:effectRef idx="2">
+              <a:schemeClr val="accent1"/>
+            </a:effectRef>
+            <a:fontRef idx="minor">
+              <a:schemeClr val="lt1"/>
+            </a:fontRef>
+          </p:style>
+          <p:txBody>
+            <a:bodyPr rtlCol="0" anchor="ctr"/>
+            <a:lstStyle/>
+            <a:p>
+              <a:pPr algn="ctr"/>
+              <a:endParaRPr lang="en-US"/>
+            </a:p>
+          </p:txBody>
+        </p:sp>
+        <p:sp>
+          <p:nvSpPr>
+            <p:cNvPr id="773" name="TextBox 772">
+              <a:extLst>
+                <a:ext uri="{FF2B5EF4-FFF2-40B4-BE49-F238E27FC236}">
+                  <a16:creationId xmlns:a16="http://schemas.microsoft.com/office/drawing/2014/main" id="{8401B739-EE8C-8948-16E9-7B34AA558C2F}"/>
+                </a:ext>
+              </a:extLst>
+            </p:cNvPr>
+            <p:cNvSpPr txBox="1"/>
+            <p:nvPr/>
+          </p:nvSpPr>
+          <p:spPr>
+            <a:xfrm>
+              <a:off x="4666818" y="5181094"/>
+              <a:ext cx="157485" cy="276999"/>
+            </a:xfrm>
+            <a:prstGeom prst="rect">
+              <a:avLst/>
+            </a:prstGeom>
+            <a:noFill/>
+          </p:spPr>
+          <p:txBody>
+            <a:bodyPr wrap="square" rtlCol="0">
+              <a:spAutoFit/>
+            </a:bodyPr>
+            <a:lstStyle/>
+            <a:p>
+              <a:r>
+                <a:rPr lang="en-US" sz="1200" dirty="0">
+                  <a:solidFill>
+                    <a:schemeClr val="bg1"/>
+                  </a:solidFill>
+                </a:rPr>
+                <a:t>2</a:t>
+              </a:r>
+            </a:p>
+          </p:txBody>
+        </p:sp>
+      </p:grpSp>
+      <p:grpSp>
+        <p:nvGrpSpPr>
+          <p:cNvPr id="774" name="Group 773">
+            <a:extLst>
+              <a:ext uri="{FF2B5EF4-FFF2-40B4-BE49-F238E27FC236}">
+                <a16:creationId xmlns:a16="http://schemas.microsoft.com/office/drawing/2014/main" id="{85ECC521-7171-2F34-0AF2-D632F06361DE}"/>
+              </a:ext>
+            </a:extLst>
+          </p:cNvPr>
+          <p:cNvGrpSpPr/>
+          <p:nvPr/>
+        </p:nvGrpSpPr>
+        <p:grpSpPr>
+          <a:xfrm>
+            <a:off x="3441542" y="1604863"/>
+            <a:ext cx="193363" cy="276999"/>
+            <a:chOff x="4666818" y="5181094"/>
+            <a:chExt cx="193363" cy="276999"/>
+          </a:xfrm>
+        </p:grpSpPr>
+        <p:sp>
+          <p:nvSpPr>
+            <p:cNvPr id="775" name="Oval 774">
+              <a:extLst>
+                <a:ext uri="{FF2B5EF4-FFF2-40B4-BE49-F238E27FC236}">
+                  <a16:creationId xmlns:a16="http://schemas.microsoft.com/office/drawing/2014/main" id="{5F5827D4-FDEF-47E1-B4DA-8843AE57876D}"/>
+                </a:ext>
+              </a:extLst>
+            </p:cNvPr>
+            <p:cNvSpPr/>
+            <p:nvPr/>
+          </p:nvSpPr>
+          <p:spPr>
+            <a:xfrm>
+              <a:off x="4702696" y="5252214"/>
+              <a:ext cx="157485" cy="141214"/>
+            </a:xfrm>
+            <a:prstGeom prst="ellipse">
+              <a:avLst/>
+            </a:prstGeom>
+            <a:solidFill>
+              <a:schemeClr val="tx1"/>
+            </a:solidFill>
+            <a:ln w="19050">
+              <a:solidFill>
+                <a:schemeClr val="tx1"/>
+              </a:solidFill>
+            </a:ln>
+            <a:effectLst/>
+          </p:spPr>
+          <p:style>
+            <a:lnRef idx="1">
+              <a:schemeClr val="accent1"/>
+            </a:lnRef>
+            <a:fillRef idx="3">
+              <a:schemeClr val="accent1"/>
+            </a:fillRef>
+            <a:effectRef idx="2">
+              <a:schemeClr val="accent1"/>
+            </a:effectRef>
+            <a:fontRef idx="minor">
+              <a:schemeClr val="lt1"/>
+            </a:fontRef>
+          </p:style>
+          <p:txBody>
+            <a:bodyPr rtlCol="0" anchor="ctr"/>
+            <a:lstStyle/>
+            <a:p>
+              <a:pPr algn="ctr"/>
+              <a:endParaRPr lang="en-US"/>
+            </a:p>
+          </p:txBody>
+        </p:sp>
+        <p:sp>
+          <p:nvSpPr>
+            <p:cNvPr id="776" name="TextBox 775">
+              <a:extLst>
+                <a:ext uri="{FF2B5EF4-FFF2-40B4-BE49-F238E27FC236}">
+                  <a16:creationId xmlns:a16="http://schemas.microsoft.com/office/drawing/2014/main" id="{55522F2E-FFEF-F3E6-192B-8A17DD23685A}"/>
+                </a:ext>
+              </a:extLst>
+            </p:cNvPr>
+            <p:cNvSpPr txBox="1"/>
+            <p:nvPr/>
+          </p:nvSpPr>
+          <p:spPr>
+            <a:xfrm>
+              <a:off x="4666818" y="5181094"/>
+              <a:ext cx="157485" cy="276999"/>
+            </a:xfrm>
+            <a:prstGeom prst="rect">
+              <a:avLst/>
+            </a:prstGeom>
+            <a:noFill/>
+          </p:spPr>
+          <p:txBody>
+            <a:bodyPr wrap="square" rtlCol="0">
+              <a:spAutoFit/>
+            </a:bodyPr>
+            <a:lstStyle/>
+            <a:p>
+              <a:r>
+                <a:rPr lang="en-US" sz="1200" dirty="0">
+                  <a:solidFill>
+                    <a:schemeClr val="bg1"/>
+                  </a:solidFill>
+                </a:rPr>
+                <a:t>3</a:t>
+              </a:r>
+            </a:p>
+          </p:txBody>
+        </p:sp>
+      </p:grpSp>
+      <p:grpSp>
+        <p:nvGrpSpPr>
+          <p:cNvPr id="777" name="Group 776">
+            <a:extLst>
+              <a:ext uri="{FF2B5EF4-FFF2-40B4-BE49-F238E27FC236}">
+                <a16:creationId xmlns:a16="http://schemas.microsoft.com/office/drawing/2014/main" id="{6CA21F73-E3F6-EE85-6618-291BDB643E9F}"/>
+              </a:ext>
+            </a:extLst>
+          </p:cNvPr>
+          <p:cNvGrpSpPr/>
+          <p:nvPr/>
+        </p:nvGrpSpPr>
+        <p:grpSpPr>
+          <a:xfrm>
+            <a:off x="4957729" y="705237"/>
+            <a:ext cx="193363" cy="276999"/>
+            <a:chOff x="4666818" y="5181094"/>
+            <a:chExt cx="193363" cy="276999"/>
+          </a:xfrm>
+        </p:grpSpPr>
+        <p:sp>
+          <p:nvSpPr>
+            <p:cNvPr id="778" name="Oval 777">
+              <a:extLst>
+                <a:ext uri="{FF2B5EF4-FFF2-40B4-BE49-F238E27FC236}">
+                  <a16:creationId xmlns:a16="http://schemas.microsoft.com/office/drawing/2014/main" id="{B0131F90-4DEC-8E4B-F14A-603371C53810}"/>
+                </a:ext>
+              </a:extLst>
+            </p:cNvPr>
+            <p:cNvSpPr/>
+            <p:nvPr/>
+          </p:nvSpPr>
+          <p:spPr>
+            <a:xfrm>
+              <a:off x="4702696" y="5252214"/>
+              <a:ext cx="157485" cy="141214"/>
+            </a:xfrm>
+            <a:prstGeom prst="ellipse">
+              <a:avLst/>
+            </a:prstGeom>
+            <a:solidFill>
+              <a:schemeClr val="tx1"/>
+            </a:solidFill>
+            <a:ln w="19050">
+              <a:solidFill>
+                <a:schemeClr val="tx1"/>
+              </a:solidFill>
+            </a:ln>
+            <a:effectLst/>
+          </p:spPr>
+          <p:style>
+            <a:lnRef idx="1">
+              <a:schemeClr val="accent1"/>
+            </a:lnRef>
+            <a:fillRef idx="3">
+              <a:schemeClr val="accent1"/>
+            </a:fillRef>
+            <a:effectRef idx="2">
+              <a:schemeClr val="accent1"/>
+            </a:effectRef>
+            <a:fontRef idx="minor">
+              <a:schemeClr val="lt1"/>
+            </a:fontRef>
+          </p:style>
+          <p:txBody>
+            <a:bodyPr rtlCol="0" anchor="ctr"/>
+            <a:lstStyle/>
+            <a:p>
+              <a:pPr algn="ctr"/>
+              <a:endParaRPr lang="en-US"/>
+            </a:p>
+          </p:txBody>
+        </p:sp>
+        <p:sp>
+          <p:nvSpPr>
+            <p:cNvPr id="779" name="TextBox 778">
+              <a:extLst>
+                <a:ext uri="{FF2B5EF4-FFF2-40B4-BE49-F238E27FC236}">
+                  <a16:creationId xmlns:a16="http://schemas.microsoft.com/office/drawing/2014/main" id="{40AAC57A-BC11-8CBA-6D1F-51A36BD778B7}"/>
+                </a:ext>
+              </a:extLst>
+            </p:cNvPr>
+            <p:cNvSpPr txBox="1"/>
+            <p:nvPr/>
+          </p:nvSpPr>
+          <p:spPr>
+            <a:xfrm>
+              <a:off x="4666818" y="5181094"/>
+              <a:ext cx="157485" cy="276999"/>
+            </a:xfrm>
+            <a:prstGeom prst="rect">
+              <a:avLst/>
+            </a:prstGeom>
+            <a:noFill/>
+          </p:spPr>
+          <p:txBody>
+            <a:bodyPr wrap="square" rtlCol="0">
+              <a:spAutoFit/>
+            </a:bodyPr>
+            <a:lstStyle/>
+            <a:p>
+              <a:r>
+                <a:rPr lang="en-US" sz="1200" dirty="0">
+                  <a:solidFill>
+                    <a:schemeClr val="bg1"/>
+                  </a:solidFill>
+                </a:rPr>
+                <a:t>4</a:t>
+              </a:r>
+            </a:p>
+          </p:txBody>
+        </p:sp>
+      </p:grpSp>
+      <p:cxnSp>
+        <p:nvCxnSpPr>
+          <p:cNvPr id="780" name="Elbow Connector 779">
+            <a:extLst>
+              <a:ext uri="{FF2B5EF4-FFF2-40B4-BE49-F238E27FC236}">
+                <a16:creationId xmlns:a16="http://schemas.microsoft.com/office/drawing/2014/main" id="{94751B94-7F5F-7129-7388-94A4642181ED}"/>
+              </a:ext>
+            </a:extLst>
+          </p:cNvPr>
+          <p:cNvCxnSpPr>
+            <a:cxnSpLocks/>
+            <a:stCxn id="754" idx="0"/>
+          </p:cNvCxnSpPr>
+          <p:nvPr/>
+        </p:nvCxnSpPr>
+        <p:spPr>
+          <a:xfrm rot="5400000" flipH="1" flipV="1">
+            <a:off x="3108859" y="325302"/>
+            <a:ext cx="117198" cy="4098246"/>
+          </a:xfrm>
+          <a:prstGeom prst="bentConnector2">
+            <a:avLst/>
+          </a:prstGeom>
+          <a:ln>
+            <a:solidFill>
+              <a:schemeClr val="tx1"/>
+            </a:solidFill>
+            <a:tailEnd type="triangle"/>
+          </a:ln>
+          <a:effectLst/>
+        </p:spPr>
+        <p:style>
+          <a:lnRef idx="2">
+            <a:schemeClr val="accent1"/>
+          </a:lnRef>
+          <a:fillRef idx="0">
+            <a:schemeClr val="accent1"/>
+          </a:fillRef>
+          <a:effectRef idx="1">
+            <a:schemeClr val="accent1"/>
+          </a:effectRef>
+          <a:fontRef idx="minor">
+            <a:schemeClr val="tx1"/>
+          </a:fontRef>
+        </p:style>
+      </p:cxnSp>
+      <p:cxnSp>
+        <p:nvCxnSpPr>
+          <p:cNvPr id="781" name="Elbow Connector 780">
+            <a:extLst>
+              <a:ext uri="{FF2B5EF4-FFF2-40B4-BE49-F238E27FC236}">
+                <a16:creationId xmlns:a16="http://schemas.microsoft.com/office/drawing/2014/main" id="{DECDA775-B5F8-FBDE-1A6B-AD77009EC5B6}"/>
+              </a:ext>
+            </a:extLst>
+          </p:cNvPr>
+          <p:cNvCxnSpPr>
+            <a:cxnSpLocks/>
+            <a:endCxn id="747" idx="3"/>
+          </p:cNvCxnSpPr>
+          <p:nvPr/>
+        </p:nvCxnSpPr>
+        <p:spPr>
+          <a:xfrm rot="5400000">
+            <a:off x="3773011" y="3013542"/>
+            <a:ext cx="1306435" cy="1063056"/>
+          </a:xfrm>
+          <a:prstGeom prst="bentConnector2">
+            <a:avLst/>
+          </a:prstGeom>
+          <a:ln>
+            <a:solidFill>
+              <a:schemeClr val="tx1"/>
+            </a:solidFill>
+            <a:tailEnd type="triangle"/>
+          </a:ln>
+          <a:effectLst/>
+        </p:spPr>
+        <p:style>
+          <a:lnRef idx="2">
+            <a:schemeClr val="accent1"/>
+          </a:lnRef>
+          <a:fillRef idx="0">
+            <a:schemeClr val="accent1"/>
+          </a:fillRef>
+          <a:effectRef idx="1">
+            <a:schemeClr val="accent1"/>
+          </a:effectRef>
+          <a:fontRef idx="minor">
+            <a:schemeClr val="tx1"/>
+          </a:fontRef>
+        </p:style>
+      </p:cxnSp>
+      <p:cxnSp>
+        <p:nvCxnSpPr>
+          <p:cNvPr id="782" name="Straight Connector 781">
+            <a:extLst>
+              <a:ext uri="{FF2B5EF4-FFF2-40B4-BE49-F238E27FC236}">
+                <a16:creationId xmlns:a16="http://schemas.microsoft.com/office/drawing/2014/main" id="{873E1FF1-CF4F-F6D1-3004-A01B6F32FA76}"/>
+              </a:ext>
+            </a:extLst>
+          </p:cNvPr>
+          <p:cNvCxnSpPr/>
+          <p:nvPr/>
+        </p:nvCxnSpPr>
+        <p:spPr>
+          <a:xfrm>
+            <a:off x="4943441" y="2891852"/>
+            <a:ext cx="258852" cy="0"/>
+          </a:xfrm>
+          <a:prstGeom prst="line">
+            <a:avLst/>
+          </a:prstGeom>
+          <a:ln>
+            <a:solidFill>
+              <a:schemeClr val="tx1"/>
+            </a:solidFill>
+            <a:tailEnd type="triangle"/>
+          </a:ln>
+          <a:effectLst/>
+        </p:spPr>
+        <p:style>
+          <a:lnRef idx="2">
+            <a:schemeClr val="accent1"/>
+          </a:lnRef>
+          <a:fillRef idx="0">
+            <a:schemeClr val="accent1"/>
+          </a:fillRef>
+          <a:effectRef idx="1">
+            <a:schemeClr val="accent1"/>
+          </a:effectRef>
+          <a:fontRef idx="minor">
+            <a:schemeClr val="tx1"/>
+          </a:fontRef>
+        </p:style>
+      </p:cxnSp>
+      <p:cxnSp>
+        <p:nvCxnSpPr>
+          <p:cNvPr id="783" name="Straight Arrow Connector 782">
+            <a:extLst>
+              <a:ext uri="{FF2B5EF4-FFF2-40B4-BE49-F238E27FC236}">
+                <a16:creationId xmlns:a16="http://schemas.microsoft.com/office/drawing/2014/main" id="{CDB138F8-99E0-496A-37BB-2DF7758FAB02}"/>
+              </a:ext>
+            </a:extLst>
+          </p:cNvPr>
+          <p:cNvCxnSpPr>
+            <a:cxnSpLocks/>
+            <a:stCxn id="747" idx="0"/>
+            <a:endCxn id="745" idx="2"/>
+          </p:cNvCxnSpPr>
+          <p:nvPr/>
+        </p:nvCxnSpPr>
+        <p:spPr>
+          <a:xfrm flipV="1">
+            <a:off x="2453170" y="3813886"/>
+            <a:ext cx="0" cy="232192"/>
+          </a:xfrm>
+          <a:prstGeom prst="straightConnector1">
+            <a:avLst/>
+          </a:prstGeom>
+          <a:ln>
+            <a:solidFill>
+              <a:schemeClr val="tx1"/>
+            </a:solidFill>
+            <a:tailEnd type="triangle"/>
+          </a:ln>
+          <a:effectLst/>
+        </p:spPr>
+        <p:style>
+          <a:lnRef idx="2">
+            <a:schemeClr val="accent1"/>
+          </a:lnRef>
+          <a:fillRef idx="0">
+            <a:schemeClr val="accent1"/>
+          </a:fillRef>
+          <a:effectRef idx="1">
+            <a:schemeClr val="accent1"/>
+          </a:effectRef>
+          <a:fontRef idx="minor">
+            <a:schemeClr val="tx1"/>
+          </a:fontRef>
+        </p:style>
+      </p:cxnSp>
+      <p:cxnSp>
+        <p:nvCxnSpPr>
+          <p:cNvPr id="784" name="Straight Arrow Connector 783">
+            <a:extLst>
+              <a:ext uri="{FF2B5EF4-FFF2-40B4-BE49-F238E27FC236}">
+                <a16:creationId xmlns:a16="http://schemas.microsoft.com/office/drawing/2014/main" id="{CA0289B9-6C86-6BDF-CB4E-32171DDD1920}"/>
               </a:ext>
             </a:extLst>
           </p:cNvPr>
@@ -5023,15 +5991,17 @@
         </p:nvCxnSpPr>
         <p:spPr>
           <a:xfrm>
-            <a:off x="2298270" y="934656"/>
-            <a:ext cx="2967466" cy="0"/>
-          </a:xfrm>
-          <a:prstGeom prst="line">
+            <a:off x="4661189" y="2727555"/>
+            <a:ext cx="572743" cy="0"/>
+          </a:xfrm>
+          <a:prstGeom prst="straightConnector1">
             <a:avLst/>
           </a:prstGeom>
           <a:ln>
-            <a:headEnd type="none" w="med" len="med"/>
-            <a:tailEnd type="triangle" w="med" len="med"/>
+            <a:solidFill>
+              <a:schemeClr val="tx1"/>
+            </a:solidFill>
+            <a:tailEnd type="triangle"/>
           </a:ln>
           <a:effectLst/>
         </p:spPr>
@@ -5050,12 +6020,464 @@
           </a:fontRef>
         </p:style>
       </p:cxnSp>
-      <p:sp>
-        <p:nvSpPr>
-          <p:cNvPr id="386" name="TextBox 385">
+      <p:grpSp>
+        <p:nvGrpSpPr>
+          <p:cNvPr id="785" name="Group 784">
             <a:extLst>
               <a:ext uri="{FF2B5EF4-FFF2-40B4-BE49-F238E27FC236}">
-                <a16:creationId xmlns:a16="http://schemas.microsoft.com/office/drawing/2014/main" id="{30D2AFD7-1D46-338F-8253-E6801B4CEECE}"/>
+                <a16:creationId xmlns:a16="http://schemas.microsoft.com/office/drawing/2014/main" id="{81D9F841-8C2F-ED1C-19C3-E2ECB802A74C}"/>
+              </a:ext>
+            </a:extLst>
+          </p:cNvPr>
+          <p:cNvGrpSpPr/>
+          <p:nvPr/>
+        </p:nvGrpSpPr>
+        <p:grpSpPr>
+          <a:xfrm>
+            <a:off x="1998855" y="2060754"/>
+            <a:ext cx="193363" cy="276999"/>
+            <a:chOff x="4666818" y="5181094"/>
+            <a:chExt cx="193363" cy="276999"/>
+          </a:xfrm>
+        </p:grpSpPr>
+        <p:sp>
+          <p:nvSpPr>
+            <p:cNvPr id="786" name="Oval 785">
+              <a:extLst>
+                <a:ext uri="{FF2B5EF4-FFF2-40B4-BE49-F238E27FC236}">
+                  <a16:creationId xmlns:a16="http://schemas.microsoft.com/office/drawing/2014/main" id="{28A093BF-21E4-9B02-8470-8ECC6895CA75}"/>
+                </a:ext>
+              </a:extLst>
+            </p:cNvPr>
+            <p:cNvSpPr/>
+            <p:nvPr/>
+          </p:nvSpPr>
+          <p:spPr>
+            <a:xfrm>
+              <a:off x="4702696" y="5252214"/>
+              <a:ext cx="157485" cy="141214"/>
+            </a:xfrm>
+            <a:prstGeom prst="ellipse">
+              <a:avLst/>
+            </a:prstGeom>
+            <a:solidFill>
+              <a:schemeClr val="tx1"/>
+            </a:solidFill>
+            <a:ln w="19050">
+              <a:solidFill>
+                <a:schemeClr val="tx1"/>
+              </a:solidFill>
+            </a:ln>
+            <a:effectLst/>
+          </p:spPr>
+          <p:style>
+            <a:lnRef idx="1">
+              <a:schemeClr val="accent1"/>
+            </a:lnRef>
+            <a:fillRef idx="3">
+              <a:schemeClr val="accent1"/>
+            </a:fillRef>
+            <a:effectRef idx="2">
+              <a:schemeClr val="accent1"/>
+            </a:effectRef>
+            <a:fontRef idx="minor">
+              <a:schemeClr val="lt1"/>
+            </a:fontRef>
+          </p:style>
+          <p:txBody>
+            <a:bodyPr rtlCol="0" anchor="ctr"/>
+            <a:lstStyle/>
+            <a:p>
+              <a:pPr algn="ctr"/>
+              <a:endParaRPr lang="en-US"/>
+            </a:p>
+          </p:txBody>
+        </p:sp>
+        <p:sp>
+          <p:nvSpPr>
+            <p:cNvPr id="787" name="TextBox 786">
+              <a:extLst>
+                <a:ext uri="{FF2B5EF4-FFF2-40B4-BE49-F238E27FC236}">
+                  <a16:creationId xmlns:a16="http://schemas.microsoft.com/office/drawing/2014/main" id="{4F51FDC1-5E81-2FA3-D4C5-D70AF98E591E}"/>
+                </a:ext>
+              </a:extLst>
+            </p:cNvPr>
+            <p:cNvSpPr txBox="1"/>
+            <p:nvPr/>
+          </p:nvSpPr>
+          <p:spPr>
+            <a:xfrm>
+              <a:off x="4666818" y="5181094"/>
+              <a:ext cx="157485" cy="276999"/>
+            </a:xfrm>
+            <a:prstGeom prst="rect">
+              <a:avLst/>
+            </a:prstGeom>
+            <a:noFill/>
+          </p:spPr>
+          <p:txBody>
+            <a:bodyPr wrap="square" rtlCol="0">
+              <a:spAutoFit/>
+            </a:bodyPr>
+            <a:lstStyle/>
+            <a:p>
+              <a:r>
+                <a:rPr lang="en-US" sz="1200" dirty="0">
+                  <a:solidFill>
+                    <a:schemeClr val="bg1"/>
+                  </a:solidFill>
+                </a:rPr>
+                <a:t>1</a:t>
+              </a:r>
+            </a:p>
+          </p:txBody>
+        </p:sp>
+      </p:grpSp>
+      <p:grpSp>
+        <p:nvGrpSpPr>
+          <p:cNvPr id="788" name="Group 787">
+            <a:extLst>
+              <a:ext uri="{FF2B5EF4-FFF2-40B4-BE49-F238E27FC236}">
+                <a16:creationId xmlns:a16="http://schemas.microsoft.com/office/drawing/2014/main" id="{2F8C412F-2D84-753D-9468-9C0EB8510F10}"/>
+              </a:ext>
+            </a:extLst>
+          </p:cNvPr>
+          <p:cNvGrpSpPr/>
+          <p:nvPr/>
+        </p:nvGrpSpPr>
+        <p:grpSpPr>
+          <a:xfrm>
+            <a:off x="3971211" y="3918073"/>
+            <a:ext cx="193363" cy="276999"/>
+            <a:chOff x="4666818" y="5181094"/>
+            <a:chExt cx="193363" cy="276999"/>
+          </a:xfrm>
+        </p:grpSpPr>
+        <p:sp>
+          <p:nvSpPr>
+            <p:cNvPr id="789" name="Oval 788">
+              <a:extLst>
+                <a:ext uri="{FF2B5EF4-FFF2-40B4-BE49-F238E27FC236}">
+                  <a16:creationId xmlns:a16="http://schemas.microsoft.com/office/drawing/2014/main" id="{D19248C3-AF8C-482C-40C9-69917E87E5AE}"/>
+                </a:ext>
+              </a:extLst>
+            </p:cNvPr>
+            <p:cNvSpPr/>
+            <p:nvPr/>
+          </p:nvSpPr>
+          <p:spPr>
+            <a:xfrm>
+              <a:off x="4702696" y="5252214"/>
+              <a:ext cx="157485" cy="141214"/>
+            </a:xfrm>
+            <a:prstGeom prst="ellipse">
+              <a:avLst/>
+            </a:prstGeom>
+            <a:solidFill>
+              <a:schemeClr val="tx1"/>
+            </a:solidFill>
+            <a:ln w="19050">
+              <a:solidFill>
+                <a:schemeClr val="tx1"/>
+              </a:solidFill>
+            </a:ln>
+            <a:effectLst/>
+          </p:spPr>
+          <p:style>
+            <a:lnRef idx="1">
+              <a:schemeClr val="accent1"/>
+            </a:lnRef>
+            <a:fillRef idx="3">
+              <a:schemeClr val="accent1"/>
+            </a:fillRef>
+            <a:effectRef idx="2">
+              <a:schemeClr val="accent1"/>
+            </a:effectRef>
+            <a:fontRef idx="minor">
+              <a:schemeClr val="lt1"/>
+            </a:fontRef>
+          </p:style>
+          <p:txBody>
+            <a:bodyPr rtlCol="0" anchor="ctr"/>
+            <a:lstStyle/>
+            <a:p>
+              <a:pPr algn="ctr"/>
+              <a:endParaRPr lang="en-US"/>
+            </a:p>
+          </p:txBody>
+        </p:sp>
+        <p:sp>
+          <p:nvSpPr>
+            <p:cNvPr id="790" name="TextBox 789">
+              <a:extLst>
+                <a:ext uri="{FF2B5EF4-FFF2-40B4-BE49-F238E27FC236}">
+                  <a16:creationId xmlns:a16="http://schemas.microsoft.com/office/drawing/2014/main" id="{594894FA-5619-2A76-3F0D-346EA6909F08}"/>
+                </a:ext>
+              </a:extLst>
+            </p:cNvPr>
+            <p:cNvSpPr txBox="1"/>
+            <p:nvPr/>
+          </p:nvSpPr>
+          <p:spPr>
+            <a:xfrm>
+              <a:off x="4666818" y="5181094"/>
+              <a:ext cx="157485" cy="276999"/>
+            </a:xfrm>
+            <a:prstGeom prst="rect">
+              <a:avLst/>
+            </a:prstGeom>
+            <a:noFill/>
+          </p:spPr>
+          <p:txBody>
+            <a:bodyPr wrap="square" rtlCol="0">
+              <a:spAutoFit/>
+            </a:bodyPr>
+            <a:lstStyle/>
+            <a:p>
+              <a:r>
+                <a:rPr lang="en-US" sz="1200" dirty="0">
+                  <a:solidFill>
+                    <a:schemeClr val="bg1"/>
+                  </a:solidFill>
+                </a:rPr>
+                <a:t>2</a:t>
+              </a:r>
+            </a:p>
+          </p:txBody>
+        </p:sp>
+      </p:grpSp>
+      <p:grpSp>
+        <p:nvGrpSpPr>
+          <p:cNvPr id="791" name="Group 790">
+            <a:extLst>
+              <a:ext uri="{FF2B5EF4-FFF2-40B4-BE49-F238E27FC236}">
+                <a16:creationId xmlns:a16="http://schemas.microsoft.com/office/drawing/2014/main" id="{2C06E656-0A69-A406-DE1B-F822BF8BA114}"/>
+              </a:ext>
+            </a:extLst>
+          </p:cNvPr>
+          <p:cNvGrpSpPr/>
+          <p:nvPr/>
+        </p:nvGrpSpPr>
+        <p:grpSpPr>
+          <a:xfrm>
+            <a:off x="2166699" y="3784188"/>
+            <a:ext cx="193363" cy="276999"/>
+            <a:chOff x="4666818" y="5181094"/>
+            <a:chExt cx="193363" cy="276999"/>
+          </a:xfrm>
+        </p:grpSpPr>
+        <p:sp>
+          <p:nvSpPr>
+            <p:cNvPr id="792" name="Oval 791">
+              <a:extLst>
+                <a:ext uri="{FF2B5EF4-FFF2-40B4-BE49-F238E27FC236}">
+                  <a16:creationId xmlns:a16="http://schemas.microsoft.com/office/drawing/2014/main" id="{2290E74C-42A1-5B5E-3754-AD9C03666018}"/>
+                </a:ext>
+              </a:extLst>
+            </p:cNvPr>
+            <p:cNvSpPr/>
+            <p:nvPr/>
+          </p:nvSpPr>
+          <p:spPr>
+            <a:xfrm>
+              <a:off x="4702696" y="5252214"/>
+              <a:ext cx="157485" cy="141214"/>
+            </a:xfrm>
+            <a:prstGeom prst="ellipse">
+              <a:avLst/>
+            </a:prstGeom>
+            <a:solidFill>
+              <a:schemeClr val="tx1"/>
+            </a:solidFill>
+            <a:ln w="19050">
+              <a:solidFill>
+                <a:schemeClr val="tx1"/>
+              </a:solidFill>
+            </a:ln>
+            <a:effectLst/>
+          </p:spPr>
+          <p:style>
+            <a:lnRef idx="1">
+              <a:schemeClr val="accent1"/>
+            </a:lnRef>
+            <a:fillRef idx="3">
+              <a:schemeClr val="accent1"/>
+            </a:fillRef>
+            <a:effectRef idx="2">
+              <a:schemeClr val="accent1"/>
+            </a:effectRef>
+            <a:fontRef idx="minor">
+              <a:schemeClr val="lt1"/>
+            </a:fontRef>
+          </p:style>
+          <p:txBody>
+            <a:bodyPr rtlCol="0" anchor="ctr"/>
+            <a:lstStyle/>
+            <a:p>
+              <a:pPr algn="ctr"/>
+              <a:endParaRPr lang="en-US"/>
+            </a:p>
+          </p:txBody>
+        </p:sp>
+        <p:sp>
+          <p:nvSpPr>
+            <p:cNvPr id="793" name="TextBox 792">
+              <a:extLst>
+                <a:ext uri="{FF2B5EF4-FFF2-40B4-BE49-F238E27FC236}">
+                  <a16:creationId xmlns:a16="http://schemas.microsoft.com/office/drawing/2014/main" id="{D7353181-FBE0-6731-76FE-3483C15B9838}"/>
+                </a:ext>
+              </a:extLst>
+            </p:cNvPr>
+            <p:cNvSpPr txBox="1"/>
+            <p:nvPr/>
+          </p:nvSpPr>
+          <p:spPr>
+            <a:xfrm>
+              <a:off x="4666818" y="5181094"/>
+              <a:ext cx="157485" cy="276999"/>
+            </a:xfrm>
+            <a:prstGeom prst="rect">
+              <a:avLst/>
+            </a:prstGeom>
+            <a:noFill/>
+          </p:spPr>
+          <p:txBody>
+            <a:bodyPr wrap="square" rtlCol="0">
+              <a:spAutoFit/>
+            </a:bodyPr>
+            <a:lstStyle/>
+            <a:p>
+              <a:r>
+                <a:rPr lang="en-US" sz="1200" dirty="0">
+                  <a:solidFill>
+                    <a:schemeClr val="bg1"/>
+                  </a:solidFill>
+                </a:rPr>
+                <a:t>3</a:t>
+              </a:r>
+            </a:p>
+          </p:txBody>
+        </p:sp>
+      </p:grpSp>
+      <p:grpSp>
+        <p:nvGrpSpPr>
+          <p:cNvPr id="794" name="Group 793">
+            <a:extLst>
+              <a:ext uri="{FF2B5EF4-FFF2-40B4-BE49-F238E27FC236}">
+                <a16:creationId xmlns:a16="http://schemas.microsoft.com/office/drawing/2014/main" id="{7219E4EC-10FA-95C2-DEEB-16907452A1EA}"/>
+              </a:ext>
+            </a:extLst>
+          </p:cNvPr>
+          <p:cNvGrpSpPr/>
+          <p:nvPr/>
+        </p:nvGrpSpPr>
+        <p:grpSpPr>
+          <a:xfrm>
+            <a:off x="4939789" y="2463218"/>
+            <a:ext cx="193363" cy="276999"/>
+            <a:chOff x="4666818" y="5181094"/>
+            <a:chExt cx="193363" cy="276999"/>
+          </a:xfrm>
+        </p:grpSpPr>
+        <p:sp>
+          <p:nvSpPr>
+            <p:cNvPr id="795" name="Oval 794">
+              <a:extLst>
+                <a:ext uri="{FF2B5EF4-FFF2-40B4-BE49-F238E27FC236}">
+                  <a16:creationId xmlns:a16="http://schemas.microsoft.com/office/drawing/2014/main" id="{2C0B089B-1647-327E-F8C4-D690371127F8}"/>
+                </a:ext>
+              </a:extLst>
+            </p:cNvPr>
+            <p:cNvSpPr/>
+            <p:nvPr/>
+          </p:nvSpPr>
+          <p:spPr>
+            <a:xfrm>
+              <a:off x="4702696" y="5252214"/>
+              <a:ext cx="157485" cy="141214"/>
+            </a:xfrm>
+            <a:prstGeom prst="ellipse">
+              <a:avLst/>
+            </a:prstGeom>
+            <a:solidFill>
+              <a:schemeClr val="tx1"/>
+            </a:solidFill>
+            <a:ln w="19050">
+              <a:solidFill>
+                <a:schemeClr val="tx1"/>
+              </a:solidFill>
+            </a:ln>
+            <a:effectLst/>
+          </p:spPr>
+          <p:style>
+            <a:lnRef idx="1">
+              <a:schemeClr val="accent1"/>
+            </a:lnRef>
+            <a:fillRef idx="3">
+              <a:schemeClr val="accent1"/>
+            </a:fillRef>
+            <a:effectRef idx="2">
+              <a:schemeClr val="accent1"/>
+            </a:effectRef>
+            <a:fontRef idx="minor">
+              <a:schemeClr val="lt1"/>
+            </a:fontRef>
+          </p:style>
+          <p:txBody>
+            <a:bodyPr rtlCol="0" anchor="ctr"/>
+            <a:lstStyle/>
+            <a:p>
+              <a:pPr algn="ctr"/>
+              <a:endParaRPr lang="en-US"/>
+            </a:p>
+          </p:txBody>
+        </p:sp>
+        <p:sp>
+          <p:nvSpPr>
+            <p:cNvPr id="796" name="TextBox 795">
+              <a:extLst>
+                <a:ext uri="{FF2B5EF4-FFF2-40B4-BE49-F238E27FC236}">
+                  <a16:creationId xmlns:a16="http://schemas.microsoft.com/office/drawing/2014/main" id="{87553589-5826-19DE-BD5A-65C493BD139D}"/>
+                </a:ext>
+              </a:extLst>
+            </p:cNvPr>
+            <p:cNvSpPr txBox="1"/>
+            <p:nvPr/>
+          </p:nvSpPr>
+          <p:spPr>
+            <a:xfrm>
+              <a:off x="4666818" y="5181094"/>
+              <a:ext cx="157485" cy="276999"/>
+            </a:xfrm>
+            <a:prstGeom prst="rect">
+              <a:avLst/>
+            </a:prstGeom>
+            <a:noFill/>
+          </p:spPr>
+          <p:txBody>
+            <a:bodyPr wrap="square" rtlCol="0">
+              <a:spAutoFit/>
+            </a:bodyPr>
+            <a:lstStyle/>
+            <a:p>
+              <a:r>
+                <a:rPr lang="en-US" sz="1200" dirty="0">
+                  <a:solidFill>
+                    <a:schemeClr val="bg1"/>
+                  </a:solidFill>
+                </a:rPr>
+                <a:t>4</a:t>
+              </a:r>
+            </a:p>
+          </p:txBody>
+        </p:sp>
+      </p:grpSp>
+      <p:sp>
+        <p:nvSpPr>
+          <p:cNvPr id="797" name="TextBox 796">
+            <a:extLst>
+              <a:ext uri="{FF2B5EF4-FFF2-40B4-BE49-F238E27FC236}">
+                <a16:creationId xmlns:a16="http://schemas.microsoft.com/office/drawing/2014/main" id="{829E6DCD-98DB-00E0-6861-A4CAB08877FC}"/>
               </a:ext>
             </a:extLst>
           </p:cNvPr>
@@ -5064,8 +6486,8 @@
         </p:nvSpPr>
         <p:spPr>
           <a:xfrm>
-            <a:off x="3313930" y="971698"/>
-            <a:ext cx="1649482" cy="477054"/>
+            <a:off x="3625626" y="4123428"/>
+            <a:ext cx="1526665" cy="338554"/>
           </a:xfrm>
           <a:prstGeom prst="rect">
             <a:avLst/>
@@ -5080,9 +6502,277 @@
           <a:p>
             <a:pPr algn="ctr"/>
             <a:r>
-              <a:rPr lang="en-US" dirty="0"/>
-              <a:t>ISR returns</a:t>
-            </a:r>
+              <a:rPr lang="en-US" sz="1600" dirty="0"/>
+              <a:t>Scheduler</a:t>
+            </a:r>
+          </a:p>
+        </p:txBody>
+      </p:sp>
+      <p:sp>
+        <p:nvSpPr>
+          <p:cNvPr id="798" name="TextBox 797">
+            <a:extLst>
+              <a:ext uri="{FF2B5EF4-FFF2-40B4-BE49-F238E27FC236}">
+                <a16:creationId xmlns:a16="http://schemas.microsoft.com/office/drawing/2014/main" id="{D18A6382-8DFC-D15C-1463-FADCE7074D6D}"/>
+              </a:ext>
+            </a:extLst>
+          </p:cNvPr>
+          <p:cNvSpPr txBox="1"/>
+          <p:nvPr/>
+        </p:nvSpPr>
+        <p:spPr>
+          <a:xfrm>
+            <a:off x="3747617" y="3887295"/>
+            <a:ext cx="1526665" cy="338554"/>
+          </a:xfrm>
+          <a:prstGeom prst="rect">
+            <a:avLst/>
+          </a:prstGeom>
+          <a:noFill/>
+        </p:spPr>
+        <p:txBody>
+          <a:bodyPr wrap="square" rtlCol="0">
+            <a:spAutoFit/>
+          </a:bodyPr>
+          <a:lstStyle/>
+          <a:p>
+            <a:pPr algn="ctr"/>
+            <a:r>
+              <a:rPr lang="en-US" sz="1600" dirty="0"/>
+              <a:t>Invoke</a:t>
+            </a:r>
+          </a:p>
+        </p:txBody>
+      </p:sp>
+      <p:sp>
+        <p:nvSpPr>
+          <p:cNvPr id="799" name="Rectangle 798">
+            <a:extLst>
+              <a:ext uri="{FF2B5EF4-FFF2-40B4-BE49-F238E27FC236}">
+                <a16:creationId xmlns:a16="http://schemas.microsoft.com/office/drawing/2014/main" id="{86534BA4-17EB-6805-69AF-D27B85F7F771}"/>
+              </a:ext>
+            </a:extLst>
+          </p:cNvPr>
+          <p:cNvSpPr/>
+          <p:nvPr/>
+        </p:nvSpPr>
+        <p:spPr>
+          <a:xfrm>
+            <a:off x="5272540" y="3718776"/>
+            <a:ext cx="476621" cy="192529"/>
+          </a:xfrm>
+          <a:prstGeom prst="rect">
+            <a:avLst/>
+          </a:prstGeom>
+          <a:solidFill>
+            <a:srgbClr val="A1DBC9"/>
+          </a:solidFill>
+          <a:ln>
+            <a:noFill/>
+          </a:ln>
+          <a:effectLst/>
+        </p:spPr>
+        <p:style>
+          <a:lnRef idx="1">
+            <a:schemeClr val="accent1"/>
+          </a:lnRef>
+          <a:fillRef idx="3">
+            <a:schemeClr val="accent1"/>
+          </a:fillRef>
+          <a:effectRef idx="2">
+            <a:schemeClr val="accent1"/>
+          </a:effectRef>
+          <a:fontRef idx="minor">
+            <a:schemeClr val="lt1"/>
+          </a:fontRef>
+        </p:style>
+        <p:txBody>
+          <a:bodyPr rtlCol="0" anchor="ctr"/>
+          <a:lstStyle/>
+          <a:p>
+            <a:pPr algn="ctr"/>
+            <a:endParaRPr lang="en-US"/>
+          </a:p>
+        </p:txBody>
+      </p:sp>
+      <p:sp>
+        <p:nvSpPr>
+          <p:cNvPr id="800" name="TextBox 799">
+            <a:extLst>
+              <a:ext uri="{FF2B5EF4-FFF2-40B4-BE49-F238E27FC236}">
+                <a16:creationId xmlns:a16="http://schemas.microsoft.com/office/drawing/2014/main" id="{6C8B3389-EBFC-130B-5A40-F2AFA4BC4282}"/>
+              </a:ext>
+            </a:extLst>
+          </p:cNvPr>
+          <p:cNvSpPr txBox="1"/>
+          <p:nvPr/>
+        </p:nvSpPr>
+        <p:spPr>
+          <a:xfrm>
+            <a:off x="5543261" y="3629497"/>
+            <a:ext cx="2167959" cy="338554"/>
+          </a:xfrm>
+          <a:prstGeom prst="rect">
+            <a:avLst/>
+          </a:prstGeom>
+          <a:noFill/>
+        </p:spPr>
+        <p:txBody>
+          <a:bodyPr wrap="square" rtlCol="0">
+            <a:spAutoFit/>
+          </a:bodyPr>
+          <a:lstStyle/>
+          <a:p>
+            <a:pPr algn="ctr"/>
+            <a:r>
+              <a:rPr lang="en-US" sz="1600" dirty="0"/>
+              <a:t>ISR attestation steps</a:t>
+            </a:r>
+          </a:p>
+        </p:txBody>
+      </p:sp>
+      <p:sp>
+        <p:nvSpPr>
+          <p:cNvPr id="801" name="Rectangle 800">
+            <a:extLst>
+              <a:ext uri="{FF2B5EF4-FFF2-40B4-BE49-F238E27FC236}">
+                <a16:creationId xmlns:a16="http://schemas.microsoft.com/office/drawing/2014/main" id="{B2B72E21-2F6F-60B6-7A76-A986B801797F}"/>
+              </a:ext>
+            </a:extLst>
+          </p:cNvPr>
+          <p:cNvSpPr/>
+          <p:nvPr/>
+        </p:nvSpPr>
+        <p:spPr>
+          <a:xfrm>
+            <a:off x="5277793" y="4021439"/>
+            <a:ext cx="475488" cy="192024"/>
+          </a:xfrm>
+          <a:prstGeom prst="rect">
+            <a:avLst/>
+          </a:prstGeom>
+          <a:solidFill>
+            <a:schemeClr val="accent4">
+              <a:lumMod val="20000"/>
+              <a:lumOff val="80000"/>
+            </a:schemeClr>
+          </a:solidFill>
+          <a:ln>
+            <a:noFill/>
+          </a:ln>
+          <a:effectLst/>
+        </p:spPr>
+        <p:style>
+          <a:lnRef idx="1">
+            <a:schemeClr val="accent1"/>
+          </a:lnRef>
+          <a:fillRef idx="3">
+            <a:schemeClr val="accent1"/>
+          </a:fillRef>
+          <a:effectRef idx="2">
+            <a:schemeClr val="accent1"/>
+          </a:effectRef>
+          <a:fontRef idx="minor">
+            <a:schemeClr val="lt1"/>
+          </a:fontRef>
+        </p:style>
+        <p:txBody>
+          <a:bodyPr rtlCol="0" anchor="ctr"/>
+          <a:lstStyle/>
+          <a:p>
+            <a:pPr algn="ctr"/>
+            <a:endParaRPr lang="en-US"/>
+          </a:p>
+        </p:txBody>
+      </p:sp>
+      <p:sp>
+        <p:nvSpPr>
+          <p:cNvPr id="802" name="TextBox 801">
+            <a:extLst>
+              <a:ext uri="{FF2B5EF4-FFF2-40B4-BE49-F238E27FC236}">
+                <a16:creationId xmlns:a16="http://schemas.microsoft.com/office/drawing/2014/main" id="{8394A348-5780-67ED-7761-1F252A7E8340}"/>
+              </a:ext>
+            </a:extLst>
+          </p:cNvPr>
+          <p:cNvSpPr txBox="1"/>
+          <p:nvPr/>
+        </p:nvSpPr>
+        <p:spPr>
+          <a:xfrm>
+            <a:off x="5676369" y="3917895"/>
+            <a:ext cx="2455337" cy="338554"/>
+          </a:xfrm>
+          <a:prstGeom prst="rect">
+            <a:avLst/>
+          </a:prstGeom>
+          <a:noFill/>
+        </p:spPr>
+        <p:txBody>
+          <a:bodyPr wrap="square" rtlCol="0">
+            <a:spAutoFit/>
+          </a:bodyPr>
+          <a:lstStyle/>
+          <a:p>
+            <a:pPr algn="ctr"/>
+            <a:r>
+              <a:rPr lang="en-US" sz="1600" dirty="0"/>
+              <a:t>Multi-task attestation steps</a:t>
+            </a:r>
+          </a:p>
+        </p:txBody>
+      </p:sp>
+      <p:sp>
+        <p:nvSpPr>
+          <p:cNvPr id="803" name="Rectangle 802">
+            <a:extLst>
+              <a:ext uri="{FF2B5EF4-FFF2-40B4-BE49-F238E27FC236}">
+                <a16:creationId xmlns:a16="http://schemas.microsoft.com/office/drawing/2014/main" id="{53549860-0158-2796-5C28-93F6691865A6}"/>
+              </a:ext>
+            </a:extLst>
+          </p:cNvPr>
+          <p:cNvSpPr/>
+          <p:nvPr/>
+        </p:nvSpPr>
+        <p:spPr>
+          <a:xfrm>
+            <a:off x="5067157" y="3549327"/>
+            <a:ext cx="3218546" cy="856292"/>
+          </a:xfrm>
+          <a:prstGeom prst="rect">
+            <a:avLst/>
+          </a:prstGeom>
+          <a:noFill/>
+          <a:ln w="22225">
+            <a:solidFill>
+              <a:schemeClr val="tx1">
+                <a:lumMod val="65000"/>
+                <a:lumOff val="35000"/>
+              </a:schemeClr>
+            </a:solidFill>
+            <a:prstDash val="sysDot"/>
+          </a:ln>
+          <a:effectLst/>
+        </p:spPr>
+        <p:style>
+          <a:lnRef idx="1">
+            <a:schemeClr val="accent1"/>
+          </a:lnRef>
+          <a:fillRef idx="3">
+            <a:schemeClr val="accent1"/>
+          </a:fillRef>
+          <a:effectRef idx="2">
+            <a:schemeClr val="accent1"/>
+          </a:effectRef>
+          <a:fontRef idx="minor">
+            <a:schemeClr val="lt1"/>
+          </a:fontRef>
+        </p:style>
+        <p:txBody>
+          <a:bodyPr rtlCol="0" anchor="ctr"/>
+          <a:lstStyle/>
+          <a:p>
+            <a:pPr algn="ctr"/>
+            <a:endParaRPr lang="en-US"/>
           </a:p>
         </p:txBody>
       </p:sp>

--- a/figs/thrust2.2-rtos-attestation.pptx
+++ b/figs/thrust2.2-rtos-attestation.pptx
@@ -208,7 +208,7 @@
           <a:p>
             <a:fld id="{D5F8EC97-77C3-494D-BB25-0644EDFE268B}" type="datetimeFigureOut">
               <a:rPr lang="en-US" smtClean="0"/>
-              <a:t>9/1/26</a:t>
+              <a:t>9/4/26</a:t>
             </a:fld>
             <a:endParaRPr lang="en-US"/>
           </a:p>
@@ -743,7 +743,7 @@
           <a:p>
             <a:fld id="{5BCAD085-E8A6-8845-BD4E-CB4CCA059FC4}" type="datetimeFigureOut">
               <a:rPr lang="en-US" smtClean="0"/>
-              <a:t>9/1/26</a:t>
+              <a:t>9/4/26</a:t>
             </a:fld>
             <a:endParaRPr lang="en-US"/>
           </a:p>
@@ -911,7 +911,7 @@
           <a:p>
             <a:fld id="{5BCAD085-E8A6-8845-BD4E-CB4CCA059FC4}" type="datetimeFigureOut">
               <a:rPr lang="en-US" smtClean="0"/>
-              <a:t>9/1/26</a:t>
+              <a:t>9/4/26</a:t>
             </a:fld>
             <a:endParaRPr lang="en-US"/>
           </a:p>
@@ -1089,7 +1089,7 @@
           <a:p>
             <a:fld id="{5BCAD085-E8A6-8845-BD4E-CB4CCA059FC4}" type="datetimeFigureOut">
               <a:rPr lang="en-US" smtClean="0"/>
-              <a:t>9/1/26</a:t>
+              <a:t>9/4/26</a:t>
             </a:fld>
             <a:endParaRPr lang="en-US"/>
           </a:p>
@@ -1257,7 +1257,7 @@
           <a:p>
             <a:fld id="{5BCAD085-E8A6-8845-BD4E-CB4CCA059FC4}" type="datetimeFigureOut">
               <a:rPr lang="en-US" smtClean="0"/>
-              <a:t>9/1/26</a:t>
+              <a:t>9/4/26</a:t>
             </a:fld>
             <a:endParaRPr lang="en-US"/>
           </a:p>
@@ -1502,7 +1502,7 @@
           <a:p>
             <a:fld id="{5BCAD085-E8A6-8845-BD4E-CB4CCA059FC4}" type="datetimeFigureOut">
               <a:rPr lang="en-US" smtClean="0"/>
-              <a:t>9/1/26</a:t>
+              <a:t>9/4/26</a:t>
             </a:fld>
             <a:endParaRPr lang="en-US"/>
           </a:p>
@@ -1787,7 +1787,7 @@
           <a:p>
             <a:fld id="{5BCAD085-E8A6-8845-BD4E-CB4CCA059FC4}" type="datetimeFigureOut">
               <a:rPr lang="en-US" smtClean="0"/>
-              <a:t>9/1/26</a:t>
+              <a:t>9/4/26</a:t>
             </a:fld>
             <a:endParaRPr lang="en-US"/>
           </a:p>
@@ -2206,7 +2206,7 @@
           <a:p>
             <a:fld id="{5BCAD085-E8A6-8845-BD4E-CB4CCA059FC4}" type="datetimeFigureOut">
               <a:rPr lang="en-US" smtClean="0"/>
-              <a:t>9/1/26</a:t>
+              <a:t>9/4/26</a:t>
             </a:fld>
             <a:endParaRPr lang="en-US"/>
           </a:p>
@@ -2323,7 +2323,7 @@
           <a:p>
             <a:fld id="{5BCAD085-E8A6-8845-BD4E-CB4CCA059FC4}" type="datetimeFigureOut">
               <a:rPr lang="en-US" smtClean="0"/>
-              <a:t>9/1/26</a:t>
+              <a:t>9/4/26</a:t>
             </a:fld>
             <a:endParaRPr lang="en-US"/>
           </a:p>
@@ -2418,7 +2418,7 @@
           <a:p>
             <a:fld id="{5BCAD085-E8A6-8845-BD4E-CB4CCA059FC4}" type="datetimeFigureOut">
               <a:rPr lang="en-US" smtClean="0"/>
-              <a:t>9/1/26</a:t>
+              <a:t>9/4/26</a:t>
             </a:fld>
             <a:endParaRPr lang="en-US"/>
           </a:p>
@@ -2693,7 +2693,7 @@
           <a:p>
             <a:fld id="{5BCAD085-E8A6-8845-BD4E-CB4CCA059FC4}" type="datetimeFigureOut">
               <a:rPr lang="en-US" smtClean="0"/>
-              <a:t>9/1/26</a:t>
+              <a:t>9/4/26</a:t>
             </a:fld>
             <a:endParaRPr lang="en-US"/>
           </a:p>
@@ -2945,7 +2945,7 @@
           <a:p>
             <a:fld id="{5BCAD085-E8A6-8845-BD4E-CB4CCA059FC4}" type="datetimeFigureOut">
               <a:rPr lang="en-US" smtClean="0"/>
-              <a:t>9/1/26</a:t>
+              <a:t>9/4/26</a:t>
             </a:fld>
             <a:endParaRPr lang="en-US"/>
           </a:p>
@@ -3156,7 +3156,7 @@
           <a:p>
             <a:fld id="{5BCAD085-E8A6-8845-BD4E-CB4CCA059FC4}" type="datetimeFigureOut">
               <a:rPr lang="en-US" smtClean="0"/>
-              <a:t>9/1/26</a:t>
+              <a:t>9/4/26</a:t>
             </a:fld>
             <a:endParaRPr lang="en-US"/>
           </a:p>
@@ -4271,7 +4271,7 @@
         </p:nvSpPr>
         <p:spPr>
           <a:xfrm>
-            <a:off x="5054411" y="37378"/>
+            <a:off x="5054411" y="43458"/>
             <a:ext cx="3231292" cy="3393883"/>
           </a:xfrm>
           <a:prstGeom prst="rect">
@@ -5186,7 +5186,7 @@
         <p:spPr>
           <a:xfrm flipH="1">
             <a:off x="3326422" y="1527542"/>
-            <a:ext cx="1907510" cy="0"/>
+            <a:ext cx="1875871" cy="0"/>
           </a:xfrm>
           <a:prstGeom prst="straightConnector1">
             <a:avLst/>
@@ -5277,6 +5277,8 @@
             <a:solidFill>
               <a:schemeClr val="tx1"/>
             </a:solidFill>
+            <a:headEnd type="none" w="med" len="med"/>
+            <a:tailEnd type="triangle" w="med" len="med"/>
           </a:ln>
           <a:effectLst/>
         </p:spPr>
@@ -5856,8 +5858,8 @@
         </p:nvCxnSpPr>
         <p:spPr>
           <a:xfrm rot="5400000">
-            <a:off x="3773011" y="3013542"/>
-            <a:ext cx="1306435" cy="1063056"/>
+            <a:off x="3854480" y="3095039"/>
+            <a:ext cx="1143470" cy="1063029"/>
           </a:xfrm>
           <a:prstGeom prst="bentConnector2">
             <a:avLst/>
@@ -5899,7 +5901,7 @@
         </p:nvCxnSpPr>
         <p:spPr>
           <a:xfrm>
-            <a:off x="4943441" y="2891852"/>
+            <a:off x="4943441" y="3044249"/>
             <a:ext cx="258852" cy="0"/>
           </a:xfrm>
           <a:prstGeom prst="line">
@@ -5992,7 +5994,7 @@
         <p:spPr>
           <a:xfrm>
             <a:off x="4661189" y="2727555"/>
-            <a:ext cx="572743" cy="0"/>
+            <a:ext cx="541104" cy="0"/>
           </a:xfrm>
           <a:prstGeom prst="straightConnector1">
             <a:avLst/>
@@ -6001,7 +6003,8 @@
             <a:solidFill>
               <a:schemeClr val="tx1"/>
             </a:solidFill>
-            <a:tailEnd type="triangle"/>
+            <a:headEnd type="triangle" w="med" len="med"/>
+            <a:tailEnd type="none" w="med" len="med"/>
           </a:ln>
           <a:effectLst/>
         </p:spPr>
@@ -6466,7 +6469,7 @@
                     <a:schemeClr val="bg1"/>
                   </a:solidFill>
                 </a:rPr>
-                <a:t>4</a:t>
+                <a:t>5</a:t>
               </a:r>
             </a:p>
           </p:txBody>
@@ -6773,6 +6776,202 @@
           <a:p>
             <a:pPr algn="ctr"/>
             <a:endParaRPr lang="en-US"/>
+          </a:p>
+        </p:txBody>
+      </p:sp>
+      <p:cxnSp>
+        <p:nvCxnSpPr>
+          <p:cNvPr id="6" name="Elbow Connector 5">
+            <a:extLst>
+              <a:ext uri="{FF2B5EF4-FFF2-40B4-BE49-F238E27FC236}">
+                <a16:creationId xmlns:a16="http://schemas.microsoft.com/office/drawing/2014/main" id="{7F4FC86B-3C4A-0FA6-67C1-BEC7DC936568}"/>
+              </a:ext>
+            </a:extLst>
+          </p:cNvPr>
+          <p:cNvCxnSpPr>
+            <a:stCxn id="745" idx="3"/>
+          </p:cNvCxnSpPr>
+          <p:nvPr/>
+        </p:nvCxnSpPr>
+        <p:spPr>
+          <a:xfrm flipV="1">
+            <a:off x="3326422" y="2910114"/>
+            <a:ext cx="1890159" cy="592876"/>
+          </a:xfrm>
+          <a:prstGeom prst="bentConnector3">
+            <a:avLst>
+              <a:gd name="adj1" fmla="val 74188"/>
+            </a:avLst>
+          </a:prstGeom>
+          <a:ln>
+            <a:solidFill>
+              <a:schemeClr val="tx1"/>
+            </a:solidFill>
+            <a:tailEnd type="triangle"/>
+          </a:ln>
+          <a:effectLst/>
+        </p:spPr>
+        <p:style>
+          <a:lnRef idx="2">
+            <a:schemeClr val="accent1"/>
+          </a:lnRef>
+          <a:fillRef idx="0">
+            <a:schemeClr val="accent1"/>
+          </a:fillRef>
+          <a:effectRef idx="1">
+            <a:schemeClr val="accent1"/>
+          </a:effectRef>
+          <a:fontRef idx="minor">
+            <a:schemeClr val="tx1"/>
+          </a:fontRef>
+        </p:style>
+      </p:cxnSp>
+      <p:grpSp>
+        <p:nvGrpSpPr>
+          <p:cNvPr id="8" name="Group 7">
+            <a:extLst>
+              <a:ext uri="{FF2B5EF4-FFF2-40B4-BE49-F238E27FC236}">
+                <a16:creationId xmlns:a16="http://schemas.microsoft.com/office/drawing/2014/main" id="{AA4AD833-375A-342A-4754-B8EBE9F083E6}"/>
+              </a:ext>
+            </a:extLst>
+          </p:cNvPr>
+          <p:cNvGrpSpPr/>
+          <p:nvPr/>
+        </p:nvGrpSpPr>
+        <p:grpSpPr>
+          <a:xfrm>
+            <a:off x="3384793" y="3246610"/>
+            <a:ext cx="193363" cy="276999"/>
+            <a:chOff x="4666818" y="5181094"/>
+            <a:chExt cx="193363" cy="276999"/>
+          </a:xfrm>
+        </p:grpSpPr>
+        <p:sp>
+          <p:nvSpPr>
+            <p:cNvPr id="9" name="Oval 8">
+              <a:extLst>
+                <a:ext uri="{FF2B5EF4-FFF2-40B4-BE49-F238E27FC236}">
+                  <a16:creationId xmlns:a16="http://schemas.microsoft.com/office/drawing/2014/main" id="{5A796439-3088-F992-9654-773158BD4DCA}"/>
+                </a:ext>
+              </a:extLst>
+            </p:cNvPr>
+            <p:cNvSpPr/>
+            <p:nvPr/>
+          </p:nvSpPr>
+          <p:spPr>
+            <a:xfrm>
+              <a:off x="4702696" y="5252214"/>
+              <a:ext cx="157485" cy="141214"/>
+            </a:xfrm>
+            <a:prstGeom prst="ellipse">
+              <a:avLst/>
+            </a:prstGeom>
+            <a:solidFill>
+              <a:schemeClr val="tx1"/>
+            </a:solidFill>
+            <a:ln w="19050">
+              <a:solidFill>
+                <a:schemeClr val="tx1"/>
+              </a:solidFill>
+            </a:ln>
+            <a:effectLst/>
+          </p:spPr>
+          <p:style>
+            <a:lnRef idx="1">
+              <a:schemeClr val="accent1"/>
+            </a:lnRef>
+            <a:fillRef idx="3">
+              <a:schemeClr val="accent1"/>
+            </a:fillRef>
+            <a:effectRef idx="2">
+              <a:schemeClr val="accent1"/>
+            </a:effectRef>
+            <a:fontRef idx="minor">
+              <a:schemeClr val="lt1"/>
+            </a:fontRef>
+          </p:style>
+          <p:txBody>
+            <a:bodyPr rtlCol="0" anchor="ctr"/>
+            <a:lstStyle/>
+            <a:p>
+              <a:pPr algn="ctr"/>
+              <a:endParaRPr lang="en-US"/>
+            </a:p>
+          </p:txBody>
+        </p:sp>
+        <p:sp>
+          <p:nvSpPr>
+            <p:cNvPr id="10" name="TextBox 9">
+              <a:extLst>
+                <a:ext uri="{FF2B5EF4-FFF2-40B4-BE49-F238E27FC236}">
+                  <a16:creationId xmlns:a16="http://schemas.microsoft.com/office/drawing/2014/main" id="{0781BF90-C181-C436-5C68-E22CF89F2000}"/>
+                </a:ext>
+              </a:extLst>
+            </p:cNvPr>
+            <p:cNvSpPr txBox="1"/>
+            <p:nvPr/>
+          </p:nvSpPr>
+          <p:spPr>
+            <a:xfrm>
+              <a:off x="4666818" y="5181094"/>
+              <a:ext cx="157485" cy="276999"/>
+            </a:xfrm>
+            <a:prstGeom prst="rect">
+              <a:avLst/>
+            </a:prstGeom>
+            <a:noFill/>
+          </p:spPr>
+          <p:txBody>
+            <a:bodyPr wrap="square" rtlCol="0">
+              <a:spAutoFit/>
+            </a:bodyPr>
+            <a:lstStyle/>
+            <a:p>
+              <a:r>
+                <a:rPr lang="en-US" sz="1200" dirty="0">
+                  <a:solidFill>
+                    <a:schemeClr val="bg1"/>
+                  </a:solidFill>
+                </a:rPr>
+                <a:t>4</a:t>
+              </a:r>
+            </a:p>
+          </p:txBody>
+        </p:sp>
+      </p:grpSp>
+      <p:sp>
+        <p:nvSpPr>
+          <p:cNvPr id="11" name="TextBox 10">
+            <a:extLst>
+              <a:ext uri="{FF2B5EF4-FFF2-40B4-BE49-F238E27FC236}">
+                <a16:creationId xmlns:a16="http://schemas.microsoft.com/office/drawing/2014/main" id="{A0A04AB0-C799-D9BB-C178-BC0FCD4C5098}"/>
+              </a:ext>
+            </a:extLst>
+          </p:cNvPr>
+          <p:cNvSpPr txBox="1"/>
+          <p:nvPr/>
+        </p:nvSpPr>
+        <p:spPr>
+          <a:xfrm>
+            <a:off x="3158563" y="3191170"/>
+            <a:ext cx="1526665" cy="584775"/>
+          </a:xfrm>
+          <a:prstGeom prst="rect">
+            <a:avLst/>
+          </a:prstGeom>
+          <a:noFill/>
+        </p:spPr>
+        <p:txBody>
+          <a:bodyPr wrap="square" rtlCol="0">
+            <a:spAutoFit/>
+          </a:bodyPr>
+          <a:lstStyle/>
+          <a:p>
+            <a:pPr algn="ctr"/>
+            <a:r>
+              <a:rPr lang="en-US" sz="1600" dirty="0"/>
+              <a:t>Task Completion</a:t>
+            </a:r>
           </a:p>
         </p:txBody>
       </p:sp>
